--- a/簡報/現場簡報_3分鐘.pptx
+++ b/簡報/現場簡報_3分鐘.pptx
@@ -1072,7 +1072,7 @@
           <a:lstStyle/>
           <a:p>
             <a:r>
-              <a:t>（20 秒）這不是概念簡報。原型已經實機上線：Pi 5 加控制器雙板，真實感測資料每一秒進雲端機隊面板；全案有 29 條自動化設計規則，每次改設計就全部重跑；我們把數據分成三級誠實標示——實測、模擬、設計目標，絕不混用。這頁的一切都可以當場驗證。</a:t>
+              <a:t>（20 秒）這不是概念簡報。原型已經實機上線：Pi 5 加控制器雙板，真實感測資料每一秒進雲端機隊面板；全案有 29 條自動化設計規則，每次改設計就全部重跑；程式碼與資料集全數開放，結論可重現——這頁的一切都可以當場驗證。</a:t>
             </a:r>
           </a:p>
         </p:txBody>
@@ -4233,7 +4233,7 @@
             <a:avLst/>
           </a:prstGeom>
           <a:solidFill>
-            <a:srgbClr val="2C2E33"/>
+            <a:srgbClr val="2E2A26"/>
           </a:solidFill>
           <a:ln>
             <a:noFill/>
@@ -4301,7 +4301,7 @@
             <a:avLst/>
           </a:prstGeom>
           <a:solidFill>
-            <a:srgbClr val="2C2E33"/>
+            <a:srgbClr val="2E2A26"/>
           </a:solidFill>
           <a:ln>
             <a:noFill/>
@@ -4474,7 +4474,7 @@
             <a:avLst/>
           </a:prstGeom>
           <a:solidFill>
-            <a:srgbClr val="A93226"/>
+            <a:srgbClr val="9E3B2F"/>
           </a:solidFill>
           <a:ln>
             <a:noFill/>
@@ -4529,7 +4529,7 @@
             <a:r>
               <a:rPr sz="1500" b="1">
                 <a:solidFill>
-                  <a:srgbClr val="B7950B"/>
+                  <a:srgbClr val="C9A227"/>
                 </a:solidFill>
                 <a:latin typeface="微軟正黑體"/>
                 <a:ea typeface="微軟正黑體"/>
@@ -4566,7 +4566,7 @@
             <a:r>
               <a:rPr sz="3300" b="1">
                 <a:solidFill>
-                  <a:srgbClr val="2C2E33"/>
+                  <a:srgbClr val="33302B"/>
                 </a:solidFill>
                 <a:latin typeface="微軟正黑體"/>
                 <a:ea typeface="微軟正黑體"/>
@@ -4616,7 +4616,7 @@
             <a:avLst/>
           </a:prstGeom>
           <a:solidFill>
-            <a:srgbClr val="F5F1E8"/>
+            <a:srgbClr val="F8F4EC"/>
           </a:solidFill>
           <a:ln>
             <a:noFill/>
@@ -4671,7 +4671,7 @@
             <a:r>
               <a:rPr sz="3000" b="1">
                 <a:solidFill>
-                  <a:srgbClr val="B7950B"/>
+                  <a:srgbClr val="C9A227"/>
                 </a:solidFill>
                 <a:latin typeface="微軟正黑體"/>
                 <a:ea typeface="微軟正黑體"/>
@@ -4708,7 +4708,7 @@
             <a:r>
               <a:rPr sz="2000" b="1">
                 <a:solidFill>
-                  <a:srgbClr val="2C2E33"/>
+                  <a:srgbClr val="33302B"/>
                 </a:solidFill>
                 <a:latin typeface="微軟正黑體"/>
                 <a:ea typeface="微軟正黑體"/>
@@ -4745,7 +4745,7 @@
             <a:r>
               <a:rPr sz="1400" b="0">
                 <a:solidFill>
-                  <a:srgbClr val="8A8A8A"/>
+                  <a:srgbClr val="8A8377"/>
                 </a:solidFill>
                 <a:latin typeface="微軟正黑體"/>
                 <a:ea typeface="微軟正黑體"/>
@@ -4772,7 +4772,7 @@
             <a:avLst/>
           </a:prstGeom>
           <a:solidFill>
-            <a:srgbClr val="F5F1E8"/>
+            <a:srgbClr val="F8F4EC"/>
           </a:solidFill>
           <a:ln>
             <a:noFill/>
@@ -4827,7 +4827,7 @@
             <a:r>
               <a:rPr sz="3000" b="1">
                 <a:solidFill>
-                  <a:srgbClr val="B7950B"/>
+                  <a:srgbClr val="C9A227"/>
                 </a:solidFill>
                 <a:latin typeface="微軟正黑體"/>
                 <a:ea typeface="微軟正黑體"/>
@@ -4864,7 +4864,7 @@
             <a:r>
               <a:rPr sz="2000" b="1">
                 <a:solidFill>
-                  <a:srgbClr val="2C2E33"/>
+                  <a:srgbClr val="33302B"/>
                 </a:solidFill>
                 <a:latin typeface="微軟正黑體"/>
                 <a:ea typeface="微軟正黑體"/>
@@ -4901,7 +4901,7 @@
             <a:r>
               <a:rPr sz="1400" b="0">
                 <a:solidFill>
-                  <a:srgbClr val="8A8A8A"/>
+                  <a:srgbClr val="8A8377"/>
                 </a:solidFill>
                 <a:latin typeface="微軟正黑體"/>
                 <a:ea typeface="微軟正黑體"/>
@@ -4928,7 +4928,7 @@
             <a:avLst/>
           </a:prstGeom>
           <a:solidFill>
-            <a:srgbClr val="F5F1E8"/>
+            <a:srgbClr val="F8F4EC"/>
           </a:solidFill>
           <a:ln>
             <a:noFill/>
@@ -4983,7 +4983,7 @@
             <a:r>
               <a:rPr sz="3000" b="1">
                 <a:solidFill>
-                  <a:srgbClr val="B7950B"/>
+                  <a:srgbClr val="C9A227"/>
                 </a:solidFill>
                 <a:latin typeface="微軟正黑體"/>
                 <a:ea typeface="微軟正黑體"/>
@@ -5020,7 +5020,7 @@
             <a:r>
               <a:rPr sz="2000" b="1">
                 <a:solidFill>
-                  <a:srgbClr val="2C2E33"/>
+                  <a:srgbClr val="33302B"/>
                 </a:solidFill>
                 <a:latin typeface="微軟正黑體"/>
                 <a:ea typeface="微軟正黑體"/>
@@ -5057,7 +5057,7 @@
             <a:r>
               <a:rPr sz="1400" b="0">
                 <a:solidFill>
-                  <a:srgbClr val="8A8A8A"/>
+                  <a:srgbClr val="8A8377"/>
                 </a:solidFill>
                 <a:latin typeface="微軟正黑體"/>
                 <a:ea typeface="微軟正黑體"/>
@@ -5102,7 +5102,7 @@
             <a:avLst/>
           </a:prstGeom>
           <a:solidFill>
-            <a:srgbClr val="2C2E33"/>
+            <a:srgbClr val="2E2A26"/>
           </a:solidFill>
           <a:ln>
             <a:noFill/>
@@ -5275,7 +5275,7 @@
             <a:avLst/>
           </a:prstGeom>
           <a:solidFill>
-            <a:srgbClr val="A93226"/>
+            <a:srgbClr val="9E3B2F"/>
           </a:solidFill>
           <a:ln>
             <a:noFill/>
@@ -5330,7 +5330,7 @@
             <a:r>
               <a:rPr sz="1500" b="1">
                 <a:solidFill>
-                  <a:srgbClr val="B7950B"/>
+                  <a:srgbClr val="C9A227"/>
                 </a:solidFill>
                 <a:latin typeface="微軟正黑體"/>
                 <a:ea typeface="微軟正黑體"/>
@@ -5367,7 +5367,7 @@
             <a:r>
               <a:rPr sz="3300" b="1">
                 <a:solidFill>
-                  <a:srgbClr val="2C2E33"/>
+                  <a:srgbClr val="33302B"/>
                 </a:solidFill>
                 <a:latin typeface="微軟正黑體"/>
                 <a:ea typeface="微軟正黑體"/>
@@ -5393,7 +5393,7 @@
             <a:avLst/>
           </a:prstGeom>
           <a:solidFill>
-            <a:srgbClr val="F5F1E8"/>
+            <a:srgbClr val="F8F4EC"/>
           </a:solidFill>
           <a:ln>
             <a:noFill/>
@@ -5448,7 +5448,7 @@
             <a:r>
               <a:rPr sz="5400" b="1">
                 <a:solidFill>
-                  <a:srgbClr val="A93226"/>
+                  <a:srgbClr val="9E3B2F"/>
                 </a:solidFill>
                 <a:latin typeface="微軟正黑體"/>
                 <a:ea typeface="微軟正黑體"/>
@@ -5485,7 +5485,7 @@
             <a:r>
               <a:rPr sz="1700" b="0">
                 <a:solidFill>
-                  <a:srgbClr val="2C2E33"/>
+                  <a:srgbClr val="33302B"/>
                 </a:solidFill>
                 <a:latin typeface="微軟正黑體"/>
                 <a:ea typeface="微軟正黑體"/>
@@ -5512,7 +5512,7 @@
             <a:avLst/>
           </a:prstGeom>
           <a:solidFill>
-            <a:srgbClr val="F5F1E8"/>
+            <a:srgbClr val="F8F4EC"/>
           </a:solidFill>
           <a:ln>
             <a:noFill/>
@@ -5567,7 +5567,7 @@
             <a:r>
               <a:rPr sz="5400" b="1">
                 <a:solidFill>
-                  <a:srgbClr val="A93226"/>
+                  <a:srgbClr val="9E3B2F"/>
                 </a:solidFill>
                 <a:latin typeface="微軟正黑體"/>
                 <a:ea typeface="微軟正黑體"/>
@@ -5604,7 +5604,7 @@
             <a:r>
               <a:rPr sz="1700" b="0">
                 <a:solidFill>
-                  <a:srgbClr val="2C2E33"/>
+                  <a:srgbClr val="33302B"/>
                 </a:solidFill>
                 <a:latin typeface="微軟正黑體"/>
                 <a:ea typeface="微軟正黑體"/>
@@ -5631,7 +5631,7 @@
             <a:avLst/>
           </a:prstGeom>
           <a:solidFill>
-            <a:srgbClr val="F5F1E8"/>
+            <a:srgbClr val="F8F4EC"/>
           </a:solidFill>
           <a:ln>
             <a:noFill/>
@@ -5686,7 +5686,7 @@
             <a:r>
               <a:rPr sz="5400" b="1">
                 <a:solidFill>
-                  <a:srgbClr val="A93226"/>
+                  <a:srgbClr val="9E3B2F"/>
                 </a:solidFill>
                 <a:latin typeface="微軟正黑體"/>
                 <a:ea typeface="微軟正黑體"/>
@@ -5723,7 +5723,7 @@
             <a:r>
               <a:rPr sz="1700" b="0">
                 <a:solidFill>
-                  <a:srgbClr val="2C2E33"/>
+                  <a:srgbClr val="33302B"/>
                 </a:solidFill>
                 <a:latin typeface="微軟正黑體"/>
                 <a:ea typeface="微軟正黑體"/>
@@ -5761,7 +5761,7 @@
             <a:r>
               <a:rPr sz="1300" b="0">
                 <a:solidFill>
-                  <a:srgbClr val="8A8A8A"/>
+                  <a:srgbClr val="8A8377"/>
                 </a:solidFill>
                 <a:latin typeface="微軟正黑體"/>
                 <a:ea typeface="微軟正黑體"/>
@@ -5805,7 +5805,7 @@
             <a:avLst/>
           </a:prstGeom>
           <a:solidFill>
-            <a:srgbClr val="A93226"/>
+            <a:srgbClr val="9E3B2F"/>
           </a:solidFill>
           <a:ln>
             <a:noFill/>
@@ -5860,7 +5860,7 @@
             <a:r>
               <a:rPr sz="1500" b="1">
                 <a:solidFill>
-                  <a:srgbClr val="B7950B"/>
+                  <a:srgbClr val="C9A227"/>
                 </a:solidFill>
                 <a:latin typeface="微軟正黑體"/>
                 <a:ea typeface="微軟正黑體"/>
@@ -5897,7 +5897,7 @@
             <a:r>
               <a:rPr sz="3300" b="1">
                 <a:solidFill>
-                  <a:srgbClr val="2C2E33"/>
+                  <a:srgbClr val="33302B"/>
                 </a:solidFill>
                 <a:latin typeface="微軟正黑體"/>
                 <a:ea typeface="微軟正黑體"/>
@@ -5923,7 +5923,7 @@
             <a:avLst/>
           </a:prstGeom>
           <a:solidFill>
-            <a:srgbClr val="F5F1E8"/>
+            <a:srgbClr val="F8F4EC"/>
           </a:solidFill>
           <a:ln>
             <a:noFill/>
@@ -5978,7 +5978,7 @@
             <a:r>
               <a:rPr sz="2100" b="1">
                 <a:solidFill>
-                  <a:srgbClr val="2C2E33"/>
+                  <a:srgbClr val="33302B"/>
                 </a:solidFill>
                 <a:latin typeface="微軟正黑體"/>
                 <a:ea typeface="微軟正黑體"/>
@@ -6015,7 +6015,7 @@
             <a:r>
               <a:rPr sz="1900" b="0">
                 <a:solidFill>
-                  <a:srgbClr val="2C2E33"/>
+                  <a:srgbClr val="33302B"/>
                 </a:solidFill>
                 <a:latin typeface="微軟正黑體"/>
                 <a:ea typeface="微軟正黑體"/>
@@ -6052,7 +6052,7 @@
             <a:r>
               <a:rPr sz="1900" b="1">
                 <a:solidFill>
-                  <a:srgbClr val="A93226"/>
+                  <a:srgbClr val="9E3B2F"/>
                 </a:solidFill>
                 <a:latin typeface="微軟正黑體"/>
                 <a:ea typeface="微軟正黑體"/>
@@ -6078,7 +6078,7 @@
             <a:avLst/>
           </a:prstGeom>
           <a:solidFill>
-            <a:srgbClr val="F5F1E8"/>
+            <a:srgbClr val="F8F4EC"/>
           </a:solidFill>
           <a:ln>
             <a:noFill/>
@@ -6133,7 +6133,7 @@
             <a:r>
               <a:rPr sz="2100" b="1">
                 <a:solidFill>
-                  <a:srgbClr val="2C2E33"/>
+                  <a:srgbClr val="33302B"/>
                 </a:solidFill>
                 <a:latin typeface="微軟正黑體"/>
                 <a:ea typeface="微軟正黑體"/>
@@ -6170,7 +6170,7 @@
             <a:r>
               <a:rPr sz="1900" b="0">
                 <a:solidFill>
-                  <a:srgbClr val="2C2E33"/>
+                  <a:srgbClr val="33302B"/>
                 </a:solidFill>
                 <a:latin typeface="微軟正黑體"/>
                 <a:ea typeface="微軟正黑體"/>
@@ -6207,7 +6207,7 @@
             <a:r>
               <a:rPr sz="1900" b="1">
                 <a:solidFill>
-                  <a:srgbClr val="A93226"/>
+                  <a:srgbClr val="9E3B2F"/>
                 </a:solidFill>
                 <a:latin typeface="微軟正黑體"/>
                 <a:ea typeface="微軟正黑體"/>
@@ -6233,7 +6233,7 @@
             <a:avLst/>
           </a:prstGeom>
           <a:solidFill>
-            <a:srgbClr val="F5F1E8"/>
+            <a:srgbClr val="F8F4EC"/>
           </a:solidFill>
           <a:ln>
             <a:noFill/>
@@ -6288,7 +6288,7 @@
             <a:r>
               <a:rPr sz="2100" b="1">
                 <a:solidFill>
-                  <a:srgbClr val="2C2E33"/>
+                  <a:srgbClr val="33302B"/>
                 </a:solidFill>
                 <a:latin typeface="微軟正黑體"/>
                 <a:ea typeface="微軟正黑體"/>
@@ -6325,7 +6325,7 @@
             <a:r>
               <a:rPr sz="1900" b="0">
                 <a:solidFill>
-                  <a:srgbClr val="2C2E33"/>
+                  <a:srgbClr val="33302B"/>
                 </a:solidFill>
                 <a:latin typeface="微軟正黑體"/>
                 <a:ea typeface="微軟正黑體"/>
@@ -6362,7 +6362,7 @@
             <a:r>
               <a:rPr sz="1900" b="1">
                 <a:solidFill>
-                  <a:srgbClr val="A93226"/>
+                  <a:srgbClr val="9E3B2F"/>
                 </a:solidFill>
                 <a:latin typeface="微軟正黑體"/>
                 <a:ea typeface="微軟正黑體"/>
@@ -6388,7 +6388,7 @@
             <a:avLst/>
           </a:prstGeom>
           <a:solidFill>
-            <a:srgbClr val="A93226"/>
+            <a:srgbClr val="9E3B2F"/>
           </a:solidFill>
           <a:ln>
             <a:noFill/>
@@ -6487,7 +6487,7 @@
             <a:avLst/>
           </a:prstGeom>
           <a:solidFill>
-            <a:srgbClr val="A93226"/>
+            <a:srgbClr val="9E3B2F"/>
           </a:solidFill>
           <a:ln>
             <a:noFill/>
@@ -6542,7 +6542,7 @@
             <a:r>
               <a:rPr sz="1500" b="1">
                 <a:solidFill>
-                  <a:srgbClr val="B7950B"/>
+                  <a:srgbClr val="C9A227"/>
                 </a:solidFill>
                 <a:latin typeface="微軟正黑體"/>
                 <a:ea typeface="微軟正黑體"/>
@@ -6579,7 +6579,7 @@
             <a:r>
               <a:rPr sz="3300" b="1">
                 <a:solidFill>
-                  <a:srgbClr val="2C2E33"/>
+                  <a:srgbClr val="33302B"/>
                 </a:solidFill>
                 <a:latin typeface="微軟正黑體"/>
                 <a:ea typeface="微軟正黑體"/>
@@ -6640,7 +6640,7 @@
             <a:r>
               <a:rPr sz="2100" b="1">
                 <a:solidFill>
-                  <a:srgbClr val="A93226"/>
+                  <a:srgbClr val="9E3B2F"/>
                 </a:solidFill>
                 <a:latin typeface="微軟正黑體"/>
                 <a:ea typeface="微軟正黑體"/>
@@ -6677,7 +6677,7 @@
             <a:r>
               <a:rPr sz="1600" b="0">
                 <a:solidFill>
-                  <a:srgbClr val="2C2E33"/>
+                  <a:srgbClr val="33302B"/>
                 </a:solidFill>
                 <a:latin typeface="微軟正黑體"/>
                 <a:ea typeface="微軟正黑體"/>
@@ -6714,7 +6714,7 @@
             <a:r>
               <a:rPr sz="2100" b="1">
                 <a:solidFill>
-                  <a:srgbClr val="A93226"/>
+                  <a:srgbClr val="9E3B2F"/>
                 </a:solidFill>
                 <a:latin typeface="微軟正黑體"/>
                 <a:ea typeface="微軟正黑體"/>
@@ -6751,7 +6751,7 @@
             <a:r>
               <a:rPr sz="1600" b="0">
                 <a:solidFill>
-                  <a:srgbClr val="2C2E33"/>
+                  <a:srgbClr val="33302B"/>
                 </a:solidFill>
                 <a:latin typeface="微軟正黑體"/>
                 <a:ea typeface="微軟正黑體"/>
@@ -6788,7 +6788,7 @@
             <a:r>
               <a:rPr sz="2100" b="1">
                 <a:solidFill>
-                  <a:srgbClr val="A93226"/>
+                  <a:srgbClr val="9E3B2F"/>
                 </a:solidFill>
                 <a:latin typeface="微軟正黑體"/>
                 <a:ea typeface="微軟正黑體"/>
@@ -6825,7 +6825,7 @@
             <a:r>
               <a:rPr sz="1600" b="0">
                 <a:solidFill>
-                  <a:srgbClr val="2C2E33"/>
+                  <a:srgbClr val="33302B"/>
                 </a:solidFill>
                 <a:latin typeface="微軟正黑體"/>
                 <a:ea typeface="微軟正黑體"/>
@@ -6862,7 +6862,7 @@
             <a:r>
               <a:rPr sz="2100" b="1">
                 <a:solidFill>
-                  <a:srgbClr val="A93226"/>
+                  <a:srgbClr val="9E3B2F"/>
                 </a:solidFill>
                 <a:latin typeface="微軟正黑體"/>
                 <a:ea typeface="微軟正黑體"/>
@@ -6899,7 +6899,7 @@
             <a:r>
               <a:rPr sz="1600" b="0">
                 <a:solidFill>
-                  <a:srgbClr val="2C2E33"/>
+                  <a:srgbClr val="33302B"/>
                 </a:solidFill>
                 <a:latin typeface="微軟正黑體"/>
                 <a:ea typeface="微軟正黑體"/>
@@ -6943,7 +6943,7 @@
             <a:avLst/>
           </a:prstGeom>
           <a:solidFill>
-            <a:srgbClr val="A93226"/>
+            <a:srgbClr val="9E3B2F"/>
           </a:solidFill>
           <a:ln>
             <a:noFill/>
@@ -6998,7 +6998,7 @@
             <a:r>
               <a:rPr sz="1500" b="1">
                 <a:solidFill>
-                  <a:srgbClr val="B7950B"/>
+                  <a:srgbClr val="C9A227"/>
                 </a:solidFill>
                 <a:latin typeface="微軟正黑體"/>
                 <a:ea typeface="微軟正黑體"/>
@@ -7035,7 +7035,7 @@
             <a:r>
               <a:rPr sz="3300" b="1">
                 <a:solidFill>
-                  <a:srgbClr val="2C2E33"/>
+                  <a:srgbClr val="33302B"/>
                 </a:solidFill>
                 <a:latin typeface="微軟正黑體"/>
                 <a:ea typeface="微軟正黑體"/>
@@ -7103,7 +7103,7 @@
             <a:avLst/>
           </a:prstGeom>
           <a:solidFill>
-            <a:srgbClr val="A93226"/>
+            <a:srgbClr val="9E3B2F"/>
           </a:solidFill>
           <a:ln>
             <a:noFill/>
@@ -7158,7 +7158,7 @@
             <a:r>
               <a:rPr sz="1500" b="1">
                 <a:solidFill>
-                  <a:srgbClr val="B7950B"/>
+                  <a:srgbClr val="C9A227"/>
                 </a:solidFill>
                 <a:latin typeface="微軟正黑體"/>
                 <a:ea typeface="微軟正黑體"/>
@@ -7195,7 +7195,7 @@
             <a:r>
               <a:rPr sz="3300" b="1">
                 <a:solidFill>
-                  <a:srgbClr val="2C2E33"/>
+                  <a:srgbClr val="33302B"/>
                 </a:solidFill>
                 <a:latin typeface="微軟正黑體"/>
                 <a:ea typeface="微軟正黑體"/>
@@ -7256,7 +7256,7 @@
             <a:r>
               <a:rPr sz="1600" b="0">
                 <a:solidFill>
-                  <a:srgbClr val="8A8A8A"/>
+                  <a:srgbClr val="8A8377"/>
                 </a:solidFill>
                 <a:latin typeface="微軟正黑體"/>
                 <a:ea typeface="微軟正黑體"/>
@@ -7300,7 +7300,7 @@
             <a:avLst/>
           </a:prstGeom>
           <a:solidFill>
-            <a:srgbClr val="A93226"/>
+            <a:srgbClr val="9E3B2F"/>
           </a:solidFill>
           <a:ln>
             <a:noFill/>
@@ -7355,7 +7355,7 @@
             <a:r>
               <a:rPr sz="1500" b="1">
                 <a:solidFill>
-                  <a:srgbClr val="B7950B"/>
+                  <a:srgbClr val="C9A227"/>
                 </a:solidFill>
                 <a:latin typeface="微軟正黑體"/>
                 <a:ea typeface="微軟正黑體"/>
@@ -7392,7 +7392,7 @@
             <a:r>
               <a:rPr sz="3300" b="1">
                 <a:solidFill>
-                  <a:srgbClr val="2C2E33"/>
+                  <a:srgbClr val="33302B"/>
                 </a:solidFill>
                 <a:latin typeface="微軟正黑體"/>
                 <a:ea typeface="微軟正黑體"/>
@@ -7418,7 +7418,7 @@
             <a:avLst/>
           </a:prstGeom>
           <a:solidFill>
-            <a:srgbClr val="F5F1E8"/>
+            <a:srgbClr val="F8F4EC"/>
           </a:solidFill>
           <a:ln>
             <a:noFill/>
@@ -7473,7 +7473,7 @@
             <a:r>
               <a:rPr sz="4600" b="1">
                 <a:solidFill>
-                  <a:srgbClr val="A93226"/>
+                  <a:srgbClr val="9E3B2F"/>
                 </a:solidFill>
                 <a:latin typeface="微軟正黑體"/>
                 <a:ea typeface="微軟正黑體"/>
@@ -7510,7 +7510,7 @@
             <a:r>
               <a:rPr sz="1700" b="0">
                 <a:solidFill>
-                  <a:srgbClr val="2C2E33"/>
+                  <a:srgbClr val="33302B"/>
                 </a:solidFill>
                 <a:latin typeface="微軟正黑體"/>
                 <a:ea typeface="微軟正黑體"/>
@@ -7537,7 +7537,7 @@
             <a:avLst/>
           </a:prstGeom>
           <a:solidFill>
-            <a:srgbClr val="F5F1E8"/>
+            <a:srgbClr val="F8F4EC"/>
           </a:solidFill>
           <a:ln>
             <a:noFill/>
@@ -7592,7 +7592,7 @@
             <a:r>
               <a:rPr sz="4600" b="1">
                 <a:solidFill>
-                  <a:srgbClr val="A93226"/>
+                  <a:srgbClr val="9E3B2F"/>
                 </a:solidFill>
                 <a:latin typeface="微軟正黑體"/>
                 <a:ea typeface="微軟正黑體"/>
@@ -7629,7 +7629,7 @@
             <a:r>
               <a:rPr sz="1700" b="0">
                 <a:solidFill>
-                  <a:srgbClr val="2C2E33"/>
+                  <a:srgbClr val="33302B"/>
                 </a:solidFill>
                 <a:latin typeface="微軟正黑體"/>
                 <a:ea typeface="微軟正黑體"/>
@@ -7656,7 +7656,7 @@
             <a:avLst/>
           </a:prstGeom>
           <a:solidFill>
-            <a:srgbClr val="F5F1E8"/>
+            <a:srgbClr val="F8F4EC"/>
           </a:solidFill>
           <a:ln>
             <a:noFill/>
@@ -7711,7 +7711,7 @@
             <a:r>
               <a:rPr sz="4600" b="1">
                 <a:solidFill>
-                  <a:srgbClr val="A93226"/>
+                  <a:srgbClr val="9E3B2F"/>
                 </a:solidFill>
                 <a:latin typeface="微軟正黑體"/>
                 <a:ea typeface="微軟正黑體"/>
@@ -7748,7 +7748,7 @@
             <a:r>
               <a:rPr sz="1700" b="0">
                 <a:solidFill>
-                  <a:srgbClr val="2C2E33"/>
+                  <a:srgbClr val="33302B"/>
                 </a:solidFill>
                 <a:latin typeface="微軟正黑體"/>
                 <a:ea typeface="微軟正黑體"/>
@@ -7756,43 +7756,6 @@
               </a:rPr>
               <a:t>誠實資料分級
 實測｜模擬｜設計目標——絕不混用、當場可驗</a:t>
-            </a:r>
-          </a:p>
-        </p:txBody>
-      </p:sp>
-      <p:sp>
-        <p:nvSpPr>
-          <p:cNvPr id="14" name="TextBox 13"/>
-          <p:cNvSpPr txBox="1"/>
-          <p:nvPr/>
-        </p:nvSpPr>
-        <p:spPr>
-          <a:xfrm>
-            <a:off x="685800" y="5943600"/>
-            <a:ext cx="10972800" cy="502920"/>
-          </a:xfrm>
-          <a:prstGeom prst="rect">
-            <a:avLst/>
-          </a:prstGeom>
-          <a:noFill/>
-        </p:spPr>
-        <p:txBody>
-          <a:bodyPr wrap="square" anchor="t">
-            <a:spAutoFit/>
-          </a:bodyPr>
-          <a:lstStyle/>
-          <a:p>
-            <a:pPr algn="ctr"/>
-            <a:r>
-              <a:rPr sz="1500" b="0">
-                <a:solidFill>
-                  <a:srgbClr val="8A8A8A"/>
-                </a:solidFill>
-                <a:latin typeface="微軟正黑體"/>
-                <a:ea typeface="微軟正黑體"/>
-                <a:cs typeface="微軟正黑體"/>
-              </a:rPr>
-              <a:t>抽排降污「成效」仍是設計目標——已在跑的是完整的感測→決策→雲端資料鏈。</a:t>
             </a:r>
           </a:p>
         </p:txBody>
@@ -7830,7 +7793,7 @@
             <a:avLst/>
           </a:prstGeom>
           <a:solidFill>
-            <a:srgbClr val="A93226"/>
+            <a:srgbClr val="9E3B2F"/>
           </a:solidFill>
           <a:ln>
             <a:noFill/>
@@ -7885,7 +7848,7 @@
             <a:r>
               <a:rPr sz="1500" b="1">
                 <a:solidFill>
-                  <a:srgbClr val="B7950B"/>
+                  <a:srgbClr val="C9A227"/>
                 </a:solidFill>
                 <a:latin typeface="微軟正黑體"/>
                 <a:ea typeface="微軟正黑體"/>
@@ -7922,7 +7885,7 @@
             <a:r>
               <a:rPr sz="3300" b="1">
                 <a:solidFill>
-                  <a:srgbClr val="2C2E33"/>
+                  <a:srgbClr val="33302B"/>
                 </a:solidFill>
                 <a:latin typeface="微軟正黑體"/>
                 <a:ea typeface="微軟正黑體"/>
@@ -7948,7 +7911,7 @@
             <a:avLst/>
           </a:prstGeom>
           <a:solidFill>
-            <a:srgbClr val="F5F1E8"/>
+            <a:srgbClr val="F8F4EC"/>
           </a:solidFill>
           <a:ln>
             <a:noFill/>
@@ -8003,7 +7966,7 @@
             <a:r>
               <a:rPr sz="2400" b="1">
                 <a:solidFill>
-                  <a:srgbClr val="A93226"/>
+                  <a:srgbClr val="9E3B2F"/>
                 </a:solidFill>
                 <a:latin typeface="微軟正黑體"/>
                 <a:ea typeface="微軟正黑體"/>
@@ -8017,7 +7980,7 @@
             <a:r>
               <a:rPr sz="800" b="0">
                 <a:solidFill>
-                  <a:srgbClr val="2C2E33"/>
+                  <a:srgbClr val="33302B"/>
                 </a:solidFill>
                 <a:latin typeface="微軟正黑體"/>
                 <a:ea typeface="微軟正黑體"/>
@@ -8031,7 +7994,7 @@
             <a:r>
               <a:rPr sz="1800" b="0">
                 <a:solidFill>
-                  <a:srgbClr val="2C2E33"/>
+                  <a:srgbClr val="33302B"/>
                 </a:solidFill>
                 <a:latin typeface="微軟正黑體"/>
                 <a:ea typeface="微軟正黑體"/>
@@ -8045,7 +8008,7 @@
             <a:r>
               <a:rPr sz="800" b="0">
                 <a:solidFill>
-                  <a:srgbClr val="2C2E33"/>
+                  <a:srgbClr val="33302B"/>
                 </a:solidFill>
                 <a:latin typeface="微軟正黑體"/>
                 <a:ea typeface="微軟正黑體"/>
@@ -8059,7 +8022,7 @@
             <a:r>
               <a:rPr sz="1800" b="1">
                 <a:solidFill>
-                  <a:srgbClr val="2C2E33"/>
+                  <a:srgbClr val="33302B"/>
                 </a:solidFill>
                 <a:latin typeface="微軟正黑體"/>
                 <a:ea typeface="微軟正黑體"/>
@@ -8085,7 +8048,7 @@
             <a:avLst/>
           </a:prstGeom>
           <a:solidFill>
-            <a:srgbClr val="F5F1E8"/>
+            <a:srgbClr val="F8F4EC"/>
           </a:solidFill>
           <a:ln>
             <a:noFill/>
@@ -8140,7 +8103,7 @@
             <a:r>
               <a:rPr sz="2400" b="1">
                 <a:solidFill>
-                  <a:srgbClr val="B7950B"/>
+                  <a:srgbClr val="C9A227"/>
                 </a:solidFill>
                 <a:latin typeface="微軟正黑體"/>
                 <a:ea typeface="微軟正黑體"/>
@@ -8154,7 +8117,7 @@
             <a:r>
               <a:rPr sz="800" b="0">
                 <a:solidFill>
-                  <a:srgbClr val="2C2E33"/>
+                  <a:srgbClr val="33302B"/>
                 </a:solidFill>
                 <a:latin typeface="微軟正黑體"/>
                 <a:ea typeface="微軟正黑體"/>
@@ -8168,7 +8131,7 @@
             <a:r>
               <a:rPr sz="1800" b="0">
                 <a:solidFill>
-                  <a:srgbClr val="2C2E33"/>
+                  <a:srgbClr val="33302B"/>
                 </a:solidFill>
                 <a:latin typeface="微軟正黑體"/>
                 <a:ea typeface="微軟正黑體"/>
@@ -8182,7 +8145,7 @@
             <a:r>
               <a:rPr sz="800" b="0">
                 <a:solidFill>
-                  <a:srgbClr val="2C2E33"/>
+                  <a:srgbClr val="33302B"/>
                 </a:solidFill>
                 <a:latin typeface="微軟正黑體"/>
                 <a:ea typeface="微軟正黑體"/>
@@ -8196,7 +8159,7 @@
             <a:r>
               <a:rPr sz="1800" b="1">
                 <a:solidFill>
-                  <a:srgbClr val="2C2E33"/>
+                  <a:srgbClr val="33302B"/>
                 </a:solidFill>
                 <a:latin typeface="微軟正黑體"/>
                 <a:ea typeface="微軟正黑體"/>
@@ -8233,7 +8196,7 @@
             <a:r>
               <a:rPr sz="1800" b="1">
                 <a:solidFill>
-                  <a:srgbClr val="2C2E33"/>
+                  <a:srgbClr val="33302B"/>
                 </a:solidFill>
                 <a:latin typeface="微軟正黑體"/>
                 <a:ea typeface="微軟正黑體"/>
@@ -8277,7 +8240,7 @@
             <a:avLst/>
           </a:prstGeom>
           <a:solidFill>
-            <a:srgbClr val="A93226"/>
+            <a:srgbClr val="9E3B2F"/>
           </a:solidFill>
           <a:ln>
             <a:noFill/>
@@ -8332,7 +8295,7 @@
             <a:r>
               <a:rPr sz="1500" b="1">
                 <a:solidFill>
-                  <a:srgbClr val="B7950B"/>
+                  <a:srgbClr val="C9A227"/>
                 </a:solidFill>
                 <a:latin typeface="微軟正黑體"/>
                 <a:ea typeface="微軟正黑體"/>
@@ -8369,7 +8332,7 @@
             <a:r>
               <a:rPr sz="3300" b="1">
                 <a:solidFill>
-                  <a:srgbClr val="2C2E33"/>
+                  <a:srgbClr val="33302B"/>
                 </a:solidFill>
                 <a:latin typeface="微軟正黑體"/>
                 <a:ea typeface="微軟正黑體"/>
@@ -8430,7 +8393,7 @@
             <a:r>
               <a:rPr sz="5800" b="1">
                 <a:solidFill>
-                  <a:srgbClr val="A93226"/>
+                  <a:srgbClr val="9E3B2F"/>
                 </a:solidFill>
                 <a:latin typeface="微軟正黑體"/>
                 <a:ea typeface="微軟正黑體"/>
@@ -8444,7 +8407,7 @@
             <a:r>
               <a:rPr sz="1700" b="0">
                 <a:solidFill>
-                  <a:srgbClr val="2C2E33"/>
+                  <a:srgbClr val="33302B"/>
                 </a:solidFill>
                 <a:latin typeface="微軟正黑體"/>
                 <a:ea typeface="微軟正黑體"/>
@@ -8481,7 +8444,7 @@
             <a:r>
               <a:rPr sz="1900" b="1">
                 <a:solidFill>
-                  <a:srgbClr val="2C2E33"/>
+                  <a:srgbClr val="33302B"/>
                 </a:solidFill>
                 <a:latin typeface="微軟正黑體"/>
                 <a:ea typeface="微軟正黑體"/>
@@ -8495,7 +8458,7 @@
             <a:r>
               <a:rPr sz="1600" b="0">
                 <a:solidFill>
-                  <a:srgbClr val="2C2E33"/>
+                  <a:srgbClr val="33302B"/>
                 </a:solidFill>
                 <a:latin typeface="微軟正黑體"/>
                 <a:ea typeface="微軟正黑體"/>
@@ -8509,7 +8472,7 @@
             <a:r>
               <a:rPr sz="600" b="0">
                 <a:solidFill>
-                  <a:srgbClr val="2C2E33"/>
+                  <a:srgbClr val="33302B"/>
                 </a:solidFill>
                 <a:latin typeface="微軟正黑體"/>
                 <a:ea typeface="微軟正黑體"/>
@@ -8523,7 +8486,7 @@
             <a:r>
               <a:rPr sz="1900" b="1">
                 <a:solidFill>
-                  <a:srgbClr val="2C2E33"/>
+                  <a:srgbClr val="33302B"/>
                 </a:solidFill>
                 <a:latin typeface="微軟正黑體"/>
                 <a:ea typeface="微軟正黑體"/>
@@ -8537,7 +8500,7 @@
             <a:r>
               <a:rPr sz="1600" b="0">
                 <a:solidFill>
-                  <a:srgbClr val="2C2E33"/>
+                  <a:srgbClr val="33302B"/>
                 </a:solidFill>
                 <a:latin typeface="微軟正黑體"/>
                 <a:ea typeface="微軟正黑體"/>

--- a/簡報/現場簡報_3分鐘.pptx
+++ b/簡報/現場簡報_3分鐘.pptx
@@ -1072,7 +1072,7 @@
           <a:lstStyle/>
           <a:p>
             <a:r>
-              <a:t>（20 秒）這不是概念簡報。原型已經實機上線：Pi 5 加控制器雙板，真實感測資料每一秒進雲端機隊面板；全案有 29 條自動化設計規則，每次改設計就全部重跑；程式碼與資料集全數開放，結論可重現——這頁的一切都可以當場驗證。</a:t>
+              <a:t>（20 秒）這不是概念簡報。原型已經實機上線：Pi 5 加控制器雙板，真實感測資料每一秒進雲端機隊面板，雲端中心站 12 項驗收全過；比賽現場模式也演練過了——手機熱點自動上雲、斷線自動補傳。全案有 29 條自動化設計規則，每次改設計就全部重跑。各位評審現在就可以掃這個 QR code 看機隊即時面板——這頁的一切都能當場驗證。</a:t>
             </a:r>
           </a:p>
         </p:txBody>
@@ -7238,8 +7238,8 @@
         </p:nvSpPr>
         <p:spPr>
           <a:xfrm>
-            <a:off x="685800" y="6035040"/>
-            <a:ext cx="10972800" cy="548640"/>
+            <a:off x="685800" y="5897880"/>
+            <a:ext cx="10972800" cy="822960"/>
           </a:xfrm>
           <a:prstGeom prst="rect">
             <a:avLst/>
@@ -7255,6 +7255,20 @@
             <a:pPr algn="ctr"/>
             <a:r>
               <a:rPr sz="1600" b="0">
+                <a:solidFill>
+                  <a:srgbClr val="33302B"/>
+                </a:solidFill>
+                <a:latin typeface="微軟正黑體"/>
+                <a:ea typeface="微軟正黑體"/>
+                <a:cs typeface="微軟正黑體"/>
+              </a:rPr>
+              <a:t>門檻與實機韌體同步：進高峰＝基線+300ppm・遲滯退場＝基線+200・前饋 θ=120 ppm/min</a:t>
+            </a:r>
+          </a:p>
+          <a:p>
+            <a:pPr algn="ctr"/>
+            <a:r>
+              <a:rPr sz="1400" b="0">
                 <a:solidFill>
                   <a:srgbClr val="8A8377"/>
                 </a:solidFill>
@@ -7412,7 +7426,7 @@
         <p:spPr>
           <a:xfrm>
             <a:off x="685800" y="2011680"/>
-            <a:ext cx="3383280" cy="3566160"/>
+            <a:ext cx="3383280" cy="2971800"/>
           </a:xfrm>
           <a:prstGeom prst="rect">
             <a:avLst/>
@@ -7455,8 +7469,8 @@
         </p:nvSpPr>
         <p:spPr>
           <a:xfrm>
-            <a:off x="685800" y="2468880"/>
-            <a:ext cx="3383280" cy="1097280"/>
+            <a:off x="685800" y="2331720"/>
+            <a:ext cx="3383280" cy="1005840"/>
           </a:xfrm>
           <a:prstGeom prst="rect">
             <a:avLst/>
@@ -7471,7 +7485,7 @@
           <a:p>
             <a:pPr algn="ctr"/>
             <a:r>
-              <a:rPr sz="4600" b="1">
+              <a:rPr sz="4200" b="1">
                 <a:solidFill>
                   <a:srgbClr val="9E3B2F"/>
                 </a:solidFill>
@@ -7492,8 +7506,8 @@
         </p:nvSpPr>
         <p:spPr>
           <a:xfrm>
-            <a:off x="914400" y="3794760"/>
-            <a:ext cx="2926080" cy="1645920"/>
+            <a:off x="914400" y="3520440"/>
+            <a:ext cx="2926080" cy="1371600"/>
           </a:xfrm>
           <a:prstGeom prst="rect">
             <a:avLst/>
@@ -7508,7 +7522,7 @@
           <a:p>
             <a:pPr algn="ctr"/>
             <a:r>
-              <a:rPr sz="1700" b="0">
+              <a:rPr sz="1600" b="0">
                 <a:solidFill>
                   <a:srgbClr val="33302B"/>
                 </a:solidFill>
@@ -7517,7 +7531,8 @@
                 <a:cs typeface="微軟正黑體"/>
               </a:rPr>
               <a:t>原型實機上線
-Pi 5＋R4 雙板，感測資料每秒入庫雲端面板</a:t>
+熱點自動上雲・斷線補傳
+現場模式演練通過</a:t>
             </a:r>
           </a:p>
         </p:txBody>
@@ -7531,7 +7546,7 @@
         <p:spPr>
           <a:xfrm>
             <a:off x="4526280" y="2011680"/>
-            <a:ext cx="3383280" cy="3566160"/>
+            <a:ext cx="3383280" cy="2971800"/>
           </a:xfrm>
           <a:prstGeom prst="rect">
             <a:avLst/>
@@ -7574,8 +7589,8 @@
         </p:nvSpPr>
         <p:spPr>
           <a:xfrm>
-            <a:off x="4526280" y="2468880"/>
-            <a:ext cx="3383280" cy="1097280"/>
+            <a:off x="4526280" y="2331720"/>
+            <a:ext cx="3383280" cy="1005840"/>
           </a:xfrm>
           <a:prstGeom prst="rect">
             <a:avLst/>
@@ -7590,7 +7605,7 @@
           <a:p>
             <a:pPr algn="ctr"/>
             <a:r>
-              <a:rPr sz="4600" b="1">
+              <a:rPr sz="4200" b="1">
                 <a:solidFill>
                   <a:srgbClr val="9E3B2F"/>
                 </a:solidFill>
@@ -7598,7 +7613,7 @@
                 <a:ea typeface="微軟正黑體"/>
                 <a:cs typeface="微軟正黑體"/>
               </a:rPr>
-              <a:t>29 條</a:t>
+              <a:t>12 項</a:t>
             </a:r>
           </a:p>
         </p:txBody>
@@ -7611,8 +7626,8 @@
         </p:nvSpPr>
         <p:spPr>
           <a:xfrm>
-            <a:off x="4754880" y="3794760"/>
-            <a:ext cx="2926080" cy="1645920"/>
+            <a:off x="4754880" y="3520440"/>
+            <a:ext cx="2926080" cy="1371600"/>
           </a:xfrm>
           <a:prstGeom prst="rect">
             <a:avLst/>
@@ -7627,7 +7642,7 @@
           <a:p>
             <a:pPr algn="ctr"/>
             <a:r>
-              <a:rPr sz="1700" b="0">
+              <a:rPr sz="1600" b="0">
                 <a:solidFill>
                   <a:srgbClr val="33302B"/>
                 </a:solidFill>
@@ -7635,8 +7650,9 @@
                 <a:ea typeface="微軟正黑體"/>
                 <a:cs typeface="微軟正黑體"/>
               </a:rPr>
-              <a:t>自動化設計規則
-機構/電路/韌體/雲端跨層自檢，改一處全鏈重驗</a:t>
+              <a:t>雲端中心站驗收全過
+免帳密公開儀表板 ×3
+評審隨時可看</a:t>
             </a:r>
           </a:p>
         </p:txBody>
@@ -7650,7 +7666,7 @@
         <p:spPr>
           <a:xfrm>
             <a:off x="8366760" y="2011680"/>
-            <a:ext cx="3383280" cy="3566160"/>
+            <a:ext cx="3383280" cy="2971800"/>
           </a:xfrm>
           <a:prstGeom prst="rect">
             <a:avLst/>
@@ -7693,8 +7709,8 @@
         </p:nvSpPr>
         <p:spPr>
           <a:xfrm>
-            <a:off x="8366760" y="2468880"/>
-            <a:ext cx="3383280" cy="1097280"/>
+            <a:off x="8366760" y="2331720"/>
+            <a:ext cx="3383280" cy="1005840"/>
           </a:xfrm>
           <a:prstGeom prst="rect">
             <a:avLst/>
@@ -7709,7 +7725,7 @@
           <a:p>
             <a:pPr algn="ctr"/>
             <a:r>
-              <a:rPr sz="4600" b="1">
+              <a:rPr sz="4200" b="1">
                 <a:solidFill>
                   <a:srgbClr val="9E3B2F"/>
                 </a:solidFill>
@@ -7717,7 +7733,7 @@
                 <a:ea typeface="微軟正黑體"/>
                 <a:cs typeface="微軟正黑體"/>
               </a:rPr>
-              <a:t>3 級標示</a:t>
+              <a:t>29 條</a:t>
             </a:r>
           </a:p>
         </p:txBody>
@@ -7730,8 +7746,8 @@
         </p:nvSpPr>
         <p:spPr>
           <a:xfrm>
-            <a:off x="8595360" y="3794760"/>
-            <a:ext cx="2926080" cy="1645920"/>
+            <a:off x="8595360" y="3520440"/>
+            <a:ext cx="2926080" cy="1371600"/>
           </a:xfrm>
           <a:prstGeom prst="rect">
             <a:avLst/>
@@ -7746,7 +7762,7 @@
           <a:p>
             <a:pPr algn="ctr"/>
             <a:r>
-              <a:rPr sz="1700" b="0">
+              <a:rPr sz="1600" b="0">
                 <a:solidFill>
                   <a:srgbClr val="33302B"/>
                 </a:solidFill>
@@ -7754,8 +7770,84 @@
                 <a:ea typeface="微軟正黑體"/>
                 <a:cs typeface="微軟正黑體"/>
               </a:rPr>
-              <a:t>誠實資料分級
-實測｜模擬｜設計目標——絕不混用、當場可驗</a:t>
+              <a:t>自動化設計規則
+機構/電路/韌體/雲端
+跨層自檢・改一處全鏈重驗</a:t>
+            </a:r>
+          </a:p>
+        </p:txBody>
+      </p:sp>
+      <p:pic>
+        <p:nvPicPr>
+          <p:cNvPr id="14" name="Picture 13" descr="qr_fleet.png"/>
+          <p:cNvPicPr>
+            <a:picLocks noChangeAspect="1"/>
+          </p:cNvPicPr>
+          <p:nvPr/>
+        </p:nvPicPr>
+        <p:blipFill>
+          <a:blip r:embed="rId3"/>
+          <a:stretch>
+            <a:fillRect/>
+          </a:stretch>
+        </p:blipFill>
+        <p:spPr>
+          <a:xfrm>
+            <a:off x="868680" y="5230368"/>
+            <a:ext cx="1371600" cy="1371600"/>
+          </a:xfrm>
+          <a:prstGeom prst="rect">
+            <a:avLst/>
+          </a:prstGeom>
+        </p:spPr>
+      </p:pic>
+      <p:sp>
+        <p:nvSpPr>
+          <p:cNvPr id="15" name="TextBox 14"/>
+          <p:cNvSpPr txBox="1"/>
+          <p:nvPr/>
+        </p:nvSpPr>
+        <p:spPr>
+          <a:xfrm>
+            <a:off x="2468880" y="5468112"/>
+            <a:ext cx="9052560" cy="1005840"/>
+          </a:xfrm>
+          <a:prstGeom prst="rect">
+            <a:avLst/>
+          </a:prstGeom>
+          <a:noFill/>
+        </p:spPr>
+        <p:txBody>
+          <a:bodyPr wrap="square" anchor="t">
+            <a:spAutoFit/>
+          </a:bodyPr>
+          <a:lstStyle/>
+          <a:p>
+            <a:pPr algn="l"/>
+            <a:r>
+              <a:rPr sz="2200" b="1">
+                <a:solidFill>
+                  <a:srgbClr val="33302B"/>
+                </a:solidFill>
+                <a:latin typeface="微軟正黑體"/>
+                <a:ea typeface="微軟正黑體"/>
+                <a:cs typeface="微軟正黑體"/>
+              </a:rPr>
+              <a:t>掃碼即看：機隊即時面板（公開唯讀・免帳密）</a:t>
+            </a:r>
+          </a:p>
+          <a:p>
+            <a:pPr algn="l"/>
+            <a:r>
+              <a:rPr sz="1500" b="0">
+                <a:solidFill>
+                  <a:srgbClr val="8A8377"/>
+                </a:solidFill>
+                <a:latin typeface="微軟正黑體"/>
+                <a:ea typeface="微軟正黑體"/>
+                <a:cs typeface="微軟正黑體"/>
+              </a:rPr>
+              <a:t>程式碼與資料集開放，結論可重現——每一項都能當場驗證</a:t>
             </a:r>
           </a:p>
         </p:txBody>

--- a/簡報/現場簡報_3分鐘.pptx
+++ b/簡報/現場簡報_3分鐘.pptx
@@ -722,7 +722,7 @@
           <a:lstStyle/>
           <a:p>
             <a:r>
-              <a:t>（25 秒）先講結論：我們讓香繼續燒，但煙不再害人。為什麼要做？台大在龍山寺殿內實測，PM2.5 一度到每立方公尺 1,360 微克，是戶外的 50 倍；全球 22 億人的信仰都要燒香；環保署每年收到超過 3 千件宮廟空污陳情。香的煙就是 PM2.5、就是致癌物，而且每天都在廟裡累積。</a:t>
+              <a:t>（25 秒）先講結論：我們讓香繼續燒，但煙不再害人。為什麼要做？台大在龍山寺殿內實測，PM2.5 一度到每立方公尺 1,360 微克，是戶外的 50 倍；印度教加佛教就超過 17 億人的信仰要燒香；環保署每年收到超過 3 千件宮廟空污陳情。香的煙就是 PM2.5、就是致癌物，而且每天都在廟裡累積。</a:t>
             </a:r>
           </a:p>
         </p:txBody>
@@ -5573,7 +5573,7 @@
                 <a:ea typeface="微軟正黑體"/>
                 <a:cs typeface="微軟正黑體"/>
               </a:rPr>
-              <a:t>22 億人</a:t>
+              <a:t>17 億+</a:t>
             </a:r>
           </a:p>
         </p:txBody>
@@ -5610,8 +5610,8 @@
                 <a:ea typeface="微軟正黑體"/>
                 <a:cs typeface="微軟正黑體"/>
               </a:rPr>
-              <a:t>全球佛道印信仰人口
-焚香是共同儀式核心</a:t>
+              <a:t>印度教＋佛教信仰人口
+道教與民間信仰另計</a:t>
             </a:r>
           </a:p>
         </p:txBody>

--- a/簡報/現場簡報_3分鐘.pptx
+++ b/簡報/現場簡報_3分鐘.pptx
@@ -4,20 +4,24 @@
   <p:sldMasterIdLst>
     <p:sldMasterId id="2147483648" r:id="rId1"/>
   </p:sldMasterIdLst>
+  <p:notesMasterIdLst>
+    <p:notesMasterId r:id="rId14"/>
+  </p:notesMasterIdLst>
   <p:sldIdLst>
-    <p:sldId id="256" r:id="rId7"/>
-    <p:sldId id="257" r:id="rId9"/>
-    <p:sldId id="258" r:id="rId10"/>
-    <p:sldId id="259" r:id="rId11"/>
-    <p:sldId id="260" r:id="rId12"/>
-    <p:sldId id="261" r:id="rId13"/>
-    <p:sldId id="262" r:id="rId14"/>
-    <p:sldId id="263" r:id="rId15"/>
-    <p:sldId id="264" r:id="rId16"/>
-    <p:sldId id="265" r:id="rId17"/>
-    <p:sldId id="266" r:id="rId18"/>
+    <p:sldId id="256" r:id="rId2"/>
+    <p:sldId id="257" r:id="rId3"/>
+    <p:sldId id="258" r:id="rId4"/>
+    <p:sldId id="259" r:id="rId5"/>
+    <p:sldId id="260" r:id="rId6"/>
+    <p:sldId id="261" r:id="rId7"/>
+    <p:sldId id="262" r:id="rId8"/>
+    <p:sldId id="263" r:id="rId9"/>
+    <p:sldId id="267" r:id="rId10"/>
+    <p:sldId id="264" r:id="rId11"/>
+    <p:sldId id="265" r:id="rId12"/>
+    <p:sldId id="266" r:id="rId13"/>
   </p:sldIdLst>
-  <p:sldSz cx="12191695" cy="6858000" type="screen4x3"/>
+  <p:sldSz cx="12192000" cy="6858000"/>
   <p:notesSz cx="6858000" cy="9144000"/>
   <p:defaultTextStyle>
     <a:defPPr>
@@ -114,11 +118,27 @@
       </a:defRPr>
     </a:lvl9pPr>
   </p:defaultTextStyle>
+  <p:extLst>
+    <p:ext uri="{EFAFB233-063F-42B5-8137-9DF3F51BA10A}">
+      <p15:sldGuideLst xmlns:p15="http://schemas.microsoft.com/office/powerpoint/2012/main">
+        <p15:guide id="1" orient="horz" pos="2160">
+          <p15:clr>
+            <a:srgbClr val="A4A3A4"/>
+          </p15:clr>
+        </p15:guide>
+        <p15:guide id="2" pos="2880">
+          <p15:clr>
+            <a:srgbClr val="A4A3A4"/>
+          </p15:clr>
+        </p15:guide>
+      </p15:sldGuideLst>
+    </p:ext>
+  </p:extLst>
 </p:presentation>
 </file>
 
 <file path=ppt/notesMasters/notesMaster1.xml><?xml version="1.0" encoding="utf-8"?>
-<p:notesMaster xmlns:a="http://schemas.openxmlformats.org/drawingml/2006/main" xmlns:p="http://schemas.openxmlformats.org/presentationml/2006/main" xmlns:r="http://schemas.openxmlformats.org/officeDocument/2006/relationships">
+<p:notesMaster xmlns:a="http://schemas.openxmlformats.org/drawingml/2006/main" xmlns:r="http://schemas.openxmlformats.org/officeDocument/2006/relationships" xmlns:p="http://schemas.openxmlformats.org/presentationml/2006/main">
   <p:cSld>
     <p:bg>
       <p:bgRef idx="1001">
@@ -139,241 +159,16 @@
           <a:chExt cx="0" cy="0"/>
         </a:xfrm>
       </p:grpSpPr>
-      <p:sp>
-        <p:nvSpPr>
-          <p:cNvPr id="2" name="Header Placeholder 1"/>
-          <p:cNvSpPr>
-            <a:spLocks noGrp="1"/>
-          </p:cNvSpPr>
-          <p:nvPr>
-            <p:ph type="hdr" sz="quarter"/>
-          </p:nvPr>
-        </p:nvSpPr>
-        <p:spPr>
-          <a:xfrm>
-            <a:off x="0" y="0"/>
-            <a:ext cx="2971800" cy="457200"/>
-          </a:xfrm>
-          <a:prstGeom prst="rect">
-            <a:avLst/>
-          </a:prstGeom>
-        </p:spPr>
-        <p:txBody>
-          <a:bodyPr vert="horz" lIns="91440" tIns="45720" rIns="91440" bIns="45720" rtlCol="0"/>
-          <a:lstStyle>
-            <a:lvl1pPr algn="l">
-              <a:defRPr sz="1200"/>
-            </a:lvl1pPr>
-          </a:lstStyle>
-          <a:p>
-            <a:endParaRPr lang="en-US"/>
-          </a:p>
-        </p:txBody>
-      </p:sp>
-      <p:sp>
-        <p:nvSpPr>
-          <p:cNvPr id="3" name="Date Placeholder 2"/>
-          <p:cNvSpPr>
-            <a:spLocks noGrp="1"/>
-          </p:cNvSpPr>
-          <p:nvPr>
-            <p:ph type="dt" idx="1"/>
-          </p:nvPr>
-        </p:nvSpPr>
-        <p:spPr>
-          <a:xfrm>
-            <a:off x="3884613" y="0"/>
-            <a:ext cx="2971800" cy="457200"/>
-          </a:xfrm>
-          <a:prstGeom prst="rect">
-            <a:avLst/>
-          </a:prstGeom>
-        </p:spPr>
-        <p:txBody>
-          <a:bodyPr vert="horz" lIns="91440" tIns="45720" rIns="91440" bIns="45720" rtlCol="0"/>
-          <a:lstStyle>
-            <a:lvl1pPr algn="r">
-              <a:defRPr sz="1200"/>
-            </a:lvl1pPr>
-          </a:lstStyle>
-          <a:p>
-            <a:fld id="{0F89C1C7-3DCD-1040-A9CF-14679D8B5DDD}" type="datetimeFigureOut">
-              <a:rPr lang="en-US" smtClean="0"/>
-              <a:t>10/17/16</a:t>
-            </a:fld>
-            <a:endParaRPr lang="en-US"/>
-          </a:p>
-        </p:txBody>
-      </p:sp>
-      <p:sp>
-        <p:nvSpPr>
-          <p:cNvPr id="4" name="Slide Image Placeholder 3"/>
-          <p:cNvSpPr>
-            <a:spLocks noGrp="1" noRot="1" noChangeAspect="1"/>
-          </p:cNvSpPr>
-          <p:nvPr>
-            <p:ph type="sldImg" idx="2"/>
-          </p:nvPr>
-        </p:nvSpPr>
-        <p:spPr>
-          <a:xfrm>
-            <a:off x="1143000" y="685800"/>
-            <a:ext cx="4572000" cy="3429000"/>
-          </a:xfrm>
-          <a:prstGeom prst="rect">
-            <a:avLst/>
-          </a:prstGeom>
-          <a:noFill/>
-          <a:ln w="12700">
-            <a:solidFill>
-              <a:prstClr val="black"/>
-            </a:solidFill>
-          </a:ln>
-        </p:spPr>
-        <p:txBody>
-          <a:bodyPr vert="horz" lIns="91440" tIns="45720" rIns="91440" bIns="45720" rtlCol="0" anchor="ctr"/>
-          <a:lstStyle/>
-          <a:p>
-            <a:endParaRPr lang="en-US"/>
-          </a:p>
-        </p:txBody>
-      </p:sp>
-      <p:sp>
-        <p:nvSpPr>
-          <p:cNvPr id="5" name="Notes Placeholder 4"/>
-          <p:cNvSpPr>
-            <a:spLocks noGrp="1"/>
-          </p:cNvSpPr>
-          <p:nvPr>
-            <p:ph type="body" sz="quarter" idx="3"/>
-          </p:nvPr>
-        </p:nvSpPr>
-        <p:spPr>
-          <a:xfrm>
-            <a:off x="685800" y="4343400"/>
-            <a:ext cx="5486400" cy="4114800"/>
-          </a:xfrm>
-          <a:prstGeom prst="rect">
-            <a:avLst/>
-          </a:prstGeom>
-        </p:spPr>
-        <p:txBody>
-          <a:bodyPr vert="horz" lIns="91440" tIns="45720" rIns="91440" bIns="45720" rtlCol="0"/>
-          <a:lstStyle/>
-          <a:p>
-            <a:pPr lvl="0"/>
-            <a:r>
-              <a:rPr lang="en-US" smtClean="0"/>
-              <a:t>Click to edit Master text styles</a:t>
-            </a:r>
-          </a:p>
-          <a:p>
-            <a:pPr lvl="1"/>
-            <a:r>
-              <a:rPr lang="en-US" smtClean="0"/>
-              <a:t>Second level</a:t>
-            </a:r>
-          </a:p>
-          <a:p>
-            <a:pPr lvl="2"/>
-            <a:r>
-              <a:rPr lang="en-US" smtClean="0"/>
-              <a:t>Third level</a:t>
-            </a:r>
-          </a:p>
-          <a:p>
-            <a:pPr lvl="3"/>
-            <a:r>
-              <a:rPr lang="en-US" smtClean="0"/>
-              <a:t>Fourth level</a:t>
-            </a:r>
-          </a:p>
-          <a:p>
-            <a:pPr lvl="4"/>
-            <a:r>
-              <a:rPr lang="en-US" smtClean="0"/>
-              <a:t>Fifth level</a:t>
-            </a:r>
-            <a:endParaRPr lang="en-US"/>
-          </a:p>
-        </p:txBody>
-      </p:sp>
-      <p:sp>
-        <p:nvSpPr>
-          <p:cNvPr id="6" name="Footer Placeholder 5"/>
-          <p:cNvSpPr>
-            <a:spLocks noGrp="1"/>
-          </p:cNvSpPr>
-          <p:nvPr>
-            <p:ph type="ftr" sz="quarter" idx="4"/>
-          </p:nvPr>
-        </p:nvSpPr>
-        <p:spPr>
-          <a:xfrm>
-            <a:off x="0" y="8685213"/>
-            <a:ext cx="2971800" cy="457200"/>
-          </a:xfrm>
-          <a:prstGeom prst="rect">
-            <a:avLst/>
-          </a:prstGeom>
-        </p:spPr>
-        <p:txBody>
-          <a:bodyPr vert="horz" lIns="91440" tIns="45720" rIns="91440" bIns="45720" rtlCol="0" anchor="b"/>
-          <a:lstStyle>
-            <a:lvl1pPr algn="l">
-              <a:defRPr sz="1200"/>
-            </a:lvl1pPr>
-          </a:lstStyle>
-          <a:p>
-            <a:endParaRPr lang="en-US"/>
-          </a:p>
-        </p:txBody>
-      </p:sp>
-      <p:sp>
-        <p:nvSpPr>
-          <p:cNvPr id="7" name="Slide Number Placeholder 6"/>
-          <p:cNvSpPr>
-            <a:spLocks noGrp="1"/>
-          </p:cNvSpPr>
-          <p:nvPr>
-            <p:ph type="sldNum" sz="quarter" idx="5"/>
-          </p:nvPr>
-        </p:nvSpPr>
-        <p:spPr>
-          <a:xfrm>
-            <a:off x="3884613" y="8685213"/>
-            <a:ext cx="2971800" cy="457200"/>
-          </a:xfrm>
-          <a:prstGeom prst="rect">
-            <a:avLst/>
-          </a:prstGeom>
-        </p:spPr>
-        <p:txBody>
-          <a:bodyPr vert="horz" lIns="91440" tIns="45720" rIns="91440" bIns="45720" rtlCol="0" anchor="b"/>
-          <a:lstStyle>
-            <a:lvl1pPr algn="r">
-              <a:defRPr sz="1200"/>
-            </a:lvl1pPr>
-          </a:lstStyle>
-          <a:p>
-            <a:fld id="{BB5E49A5-4136-284D-997B-48E1D791AD67}" type="slidenum">
-              <a:rPr lang="en-US" smtClean="0"/>
-              <a:t>‹#›</a:t>
-            </a:fld>
-            <a:endParaRPr lang="en-US"/>
-          </a:p>
-        </p:txBody>
-      </p:sp>
     </p:spTree>
     <p:extLst>
       <p:ext uri="{BB962C8B-B14F-4D97-AF65-F5344CB8AC3E}">
-        <p14:creationId xmlns:p14="http://schemas.microsoft.com/office/powerpoint/2010/main" val="2623252185"/>
+        <p14:creationId xmlns:p14="http://schemas.microsoft.com/office/powerpoint/2010/main" val="1335196724"/>
       </p:ext>
     </p:extLst>
   </p:cSld>
   <p:clrMap bg1="lt1" tx1="dk1" bg2="lt2" tx2="dk2" accent1="accent1" accent2="accent2" accent3="accent3" accent4="accent4" accent5="accent5" accent6="accent6" hlink="hlink" folHlink="folHlink"/>
   <p:notesStyle>
-    <a:lvl1pPr marL="0" algn="l" defTabSz="457200" rtl="0" eaLnBrk="1" latinLnBrk="0" hangingPunct="1">
+    <a:lvl1pPr marL="0" algn="l" defTabSz="914400" rtl="0" eaLnBrk="1" latinLnBrk="0" hangingPunct="1">
       <a:defRPr sz="1200" kern="1200">
         <a:solidFill>
           <a:schemeClr val="tx1"/>
@@ -383,7 +178,7 @@
         <a:cs typeface="+mn-cs"/>
       </a:defRPr>
     </a:lvl1pPr>
-    <a:lvl2pPr marL="457200" algn="l" defTabSz="457200" rtl="0" eaLnBrk="1" latinLnBrk="0" hangingPunct="1">
+    <a:lvl2pPr marL="457200" algn="l" defTabSz="914400" rtl="0" eaLnBrk="1" latinLnBrk="0" hangingPunct="1">
       <a:defRPr sz="1200" kern="1200">
         <a:solidFill>
           <a:schemeClr val="tx1"/>
@@ -393,7 +188,7 @@
         <a:cs typeface="+mn-cs"/>
       </a:defRPr>
     </a:lvl2pPr>
-    <a:lvl3pPr marL="914400" algn="l" defTabSz="457200" rtl="0" eaLnBrk="1" latinLnBrk="0" hangingPunct="1">
+    <a:lvl3pPr marL="914400" algn="l" defTabSz="914400" rtl="0" eaLnBrk="1" latinLnBrk="0" hangingPunct="1">
       <a:defRPr sz="1200" kern="1200">
         <a:solidFill>
           <a:schemeClr val="tx1"/>
@@ -403,7 +198,7 @@
         <a:cs typeface="+mn-cs"/>
       </a:defRPr>
     </a:lvl3pPr>
-    <a:lvl4pPr marL="1371600" algn="l" defTabSz="457200" rtl="0" eaLnBrk="1" latinLnBrk="0" hangingPunct="1">
+    <a:lvl4pPr marL="1371600" algn="l" defTabSz="914400" rtl="0" eaLnBrk="1" latinLnBrk="0" hangingPunct="1">
       <a:defRPr sz="1200" kern="1200">
         <a:solidFill>
           <a:schemeClr val="tx1"/>
@@ -413,7 +208,7 @@
         <a:cs typeface="+mn-cs"/>
       </a:defRPr>
     </a:lvl4pPr>
-    <a:lvl5pPr marL="1828800" algn="l" defTabSz="457200" rtl="0" eaLnBrk="1" latinLnBrk="0" hangingPunct="1">
+    <a:lvl5pPr marL="1828800" algn="l" defTabSz="914400" rtl="0" eaLnBrk="1" latinLnBrk="0" hangingPunct="1">
       <a:defRPr sz="1200" kern="1200">
         <a:solidFill>
           <a:schemeClr val="tx1"/>
@@ -423,7 +218,7 @@
         <a:cs typeface="+mn-cs"/>
       </a:defRPr>
     </a:lvl5pPr>
-    <a:lvl6pPr marL="2286000" algn="l" defTabSz="457200" rtl="0" eaLnBrk="1" latinLnBrk="0" hangingPunct="1">
+    <a:lvl6pPr marL="2286000" algn="l" defTabSz="914400" rtl="0" eaLnBrk="1" latinLnBrk="0" hangingPunct="1">
       <a:defRPr sz="1200" kern="1200">
         <a:solidFill>
           <a:schemeClr val="tx1"/>
@@ -433,7 +228,7 @@
         <a:cs typeface="+mn-cs"/>
       </a:defRPr>
     </a:lvl6pPr>
-    <a:lvl7pPr marL="2743200" algn="l" defTabSz="457200" rtl="0" eaLnBrk="1" latinLnBrk="0" hangingPunct="1">
+    <a:lvl7pPr marL="2743200" algn="l" defTabSz="914400" rtl="0" eaLnBrk="1" latinLnBrk="0" hangingPunct="1">
       <a:defRPr sz="1200" kern="1200">
         <a:solidFill>
           <a:schemeClr val="tx1"/>
@@ -443,7 +238,7 @@
         <a:cs typeface="+mn-cs"/>
       </a:defRPr>
     </a:lvl7pPr>
-    <a:lvl8pPr marL="3200400" algn="l" defTabSz="457200" rtl="0" eaLnBrk="1" latinLnBrk="0" hangingPunct="1">
+    <a:lvl8pPr marL="3200400" algn="l" defTabSz="914400" rtl="0" eaLnBrk="1" latinLnBrk="0" hangingPunct="1">
       <a:defRPr sz="1200" kern="1200">
         <a:solidFill>
           <a:schemeClr val="tx1"/>
@@ -453,7 +248,7 @@
         <a:cs typeface="+mn-cs"/>
       </a:defRPr>
     </a:lvl8pPr>
-    <a:lvl9pPr marL="3657600" algn="l" defTabSz="457200" rtl="0" eaLnBrk="1" latinLnBrk="0" hangingPunct="1">
+    <a:lvl9pPr marL="3657600" algn="l" defTabSz="914400" rtl="0" eaLnBrk="1" latinLnBrk="0" hangingPunct="1">
       <a:defRPr sz="1200" kern="1200">
         <a:solidFill>
           <a:schemeClr val="tx1"/>
@@ -468,7 +263,7 @@
 </file>
 
 <file path=ppt/notesSlides/notesSlide1.xml><?xml version="1.0" encoding="utf-8"?>
-<p:notes xmlns:a="http://schemas.openxmlformats.org/drawingml/2006/main" xmlns:p="http://schemas.openxmlformats.org/presentationml/2006/main" xmlns:r="http://schemas.openxmlformats.org/officeDocument/2006/relationships">
+<p:notes xmlns:a="http://schemas.openxmlformats.org/drawingml/2006/main" xmlns:r="http://schemas.openxmlformats.org/officeDocument/2006/relationships" xmlns:p="http://schemas.openxmlformats.org/presentationml/2006/main">
   <p:cSld>
     <p:spTree>
       <p:nvGrpSpPr>
@@ -488,43 +283,43 @@
         <p:nvSpPr>
           <p:cNvPr id="2" name="Slide Image Placeholder 1"/>
           <p:cNvSpPr>
+            <a:spLocks noGrp="1" noRot="1" noChangeAspect="1"/>
+          </p:cNvSpPr>
+          <p:nvPr>
+            <p:ph type="sldImg" idx="2"/>
+          </p:nvPr>
+        </p:nvSpPr>
+        <p:spPr/>
+      </p:sp>
+      <p:sp>
+        <p:nvSpPr>
+          <p:cNvPr id="3" name="Notes Placeholder 2"/>
+          <p:cNvSpPr>
             <a:spLocks noGrp="1"/>
           </p:cNvSpPr>
           <p:nvPr>
-            <p:ph type="sldImg" idx="2"/>
+            <p:ph type="body" sz="quarter" idx="3"/>
           </p:nvPr>
         </p:nvSpPr>
         <p:spPr/>
-      </p:sp>
-      <p:sp>
-        <p:nvSpPr>
-          <p:cNvPr id="3" name="Notes Placeholder 2"/>
+        <p:txBody>
+          <a:bodyPr/>
+          <a:lstStyle/>
+          <a:p>
+            <a:r>
+              <a:t>（5 秒）各位評審好，我們是「有拜有包庇」，作品是智慧香爐。</a:t>
+            </a:r>
+          </a:p>
+        </p:txBody>
+      </p:sp>
+      <p:sp>
+        <p:nvSpPr>
+          <p:cNvPr id="4" name="Slide Number Placeholder 3"/>
           <p:cNvSpPr>
             <a:spLocks noGrp="1"/>
           </p:cNvSpPr>
           <p:nvPr>
-            <p:ph type="body" idx="3" sz="quarter"/>
-          </p:nvPr>
-        </p:nvSpPr>
-        <p:spPr/>
-        <p:txBody>
-          <a:bodyPr/>
-          <a:lstStyle/>
-          <a:p>
-            <a:r>
-              <a:t>（5 秒）各位評審好，我們是「有拜有包庇」，作品是智慧香爐。</a:t>
-            </a:r>
-          </a:p>
-        </p:txBody>
-      </p:sp>
-      <p:sp>
-        <p:nvSpPr>
-          <p:cNvPr id="4" name="Slide Number Placeholder 3"/>
-          <p:cNvSpPr>
-            <a:spLocks noGrp="1"/>
-          </p:cNvSpPr>
-          <p:nvPr>
-            <p:ph type="sldNum" idx="5" sz="quarter"/>
+            <p:ph type="sldNum" sz="quarter" idx="5"/>
           </p:nvPr>
         </p:nvSpPr>
         <p:spPr/>
@@ -538,7 +333,7 @@
 </file>
 
 <file path=ppt/notesSlides/notesSlide10.xml><?xml version="1.0" encoding="utf-8"?>
-<p:notes xmlns:a="http://schemas.openxmlformats.org/drawingml/2006/main" xmlns:p="http://schemas.openxmlformats.org/presentationml/2006/main" xmlns:r="http://schemas.openxmlformats.org/officeDocument/2006/relationships">
+<p:notes xmlns:a="http://schemas.openxmlformats.org/drawingml/2006/main" xmlns:r="http://schemas.openxmlformats.org/officeDocument/2006/relationships" xmlns:p="http://schemas.openxmlformats.org/presentationml/2006/main">
   <p:cSld>
     <p:spTree>
       <p:nvGrpSpPr>
@@ -558,43 +353,43 @@
         <p:nvSpPr>
           <p:cNvPr id="2" name="Slide Image Placeholder 1"/>
           <p:cNvSpPr>
+            <a:spLocks noGrp="1" noRot="1" noChangeAspect="1"/>
+          </p:cNvSpPr>
+          <p:nvPr>
+            <p:ph type="sldImg" idx="2"/>
+          </p:nvPr>
+        </p:nvSpPr>
+        <p:spPr/>
+      </p:sp>
+      <p:sp>
+        <p:nvSpPr>
+          <p:cNvPr id="3" name="Notes Placeholder 2"/>
+          <p:cNvSpPr>
             <a:spLocks noGrp="1"/>
           </p:cNvSpPr>
           <p:nvPr>
-            <p:ph type="sldImg" idx="2"/>
+            <p:ph type="body" sz="quarter" idx="3"/>
           </p:nvPr>
         </p:nvSpPr>
         <p:spPr/>
-      </p:sp>
-      <p:sp>
-        <p:nvSpPr>
-          <p:cNvPr id="3" name="Notes Placeholder 2"/>
+        <p:txBody>
+          <a:bodyPr/>
+          <a:lstStyle/>
+          <a:p>
+            <a:r>
+              <a:t>（15 秒）本案對應五項 SDGs，每一項都配可量測指標，不做無法驗證的宣稱。下一步三步走：先在一座合作廟宇完成公開數據試點，再經聯誼會口碑擴散，最終把感測決策核心移植到餐飲油煙等更大市場。</a:t>
+            </a:r>
+          </a:p>
+        </p:txBody>
+      </p:sp>
+      <p:sp>
+        <p:nvSpPr>
+          <p:cNvPr id="4" name="Slide Number Placeholder 3"/>
           <p:cNvSpPr>
             <a:spLocks noGrp="1"/>
           </p:cNvSpPr>
           <p:nvPr>
-            <p:ph type="body" idx="3" sz="quarter"/>
-          </p:nvPr>
-        </p:nvSpPr>
-        <p:spPr/>
-        <p:txBody>
-          <a:bodyPr/>
-          <a:lstStyle/>
-          <a:p>
-            <a:r>
-              <a:t>（15 秒）本案對應五項 SDGs，每一項都配可量測指標，不做無法驗證的宣稱。下一步三步走：先在一座合作廟宇完成公開數據試點，再經聯誼會口碑擴散，最終把感測決策核心移植到餐飲油煙等更大市場。</a:t>
-            </a:r>
-          </a:p>
-        </p:txBody>
-      </p:sp>
-      <p:sp>
-        <p:nvSpPr>
-          <p:cNvPr id="4" name="Slide Number Placeholder 3"/>
-          <p:cNvSpPr>
-            <a:spLocks noGrp="1"/>
-          </p:cNvSpPr>
-          <p:nvPr>
-            <p:ph type="sldNum" idx="5" sz="quarter"/>
+            <p:ph type="sldNum" sz="quarter" idx="5"/>
           </p:nvPr>
         </p:nvSpPr>
         <p:spPr/>
@@ -608,7 +403,7 @@
 </file>
 
 <file path=ppt/notesSlides/notesSlide11.xml><?xml version="1.0" encoding="utf-8"?>
-<p:notes xmlns:a="http://schemas.openxmlformats.org/drawingml/2006/main" xmlns:p="http://schemas.openxmlformats.org/presentationml/2006/main" xmlns:r="http://schemas.openxmlformats.org/officeDocument/2006/relationships">
+<p:notes xmlns:a="http://schemas.openxmlformats.org/drawingml/2006/main" xmlns:r="http://schemas.openxmlformats.org/officeDocument/2006/relationships" xmlns:p="http://schemas.openxmlformats.org/presentationml/2006/main">
   <p:cSld>
     <p:spTree>
       <p:nvGrpSpPr>
@@ -628,43 +423,43 @@
         <p:nvSpPr>
           <p:cNvPr id="2" name="Slide Image Placeholder 1"/>
           <p:cNvSpPr>
+            <a:spLocks noGrp="1" noRot="1" noChangeAspect="1"/>
+          </p:cNvSpPr>
+          <p:nvPr>
+            <p:ph type="sldImg" idx="2"/>
+          </p:nvPr>
+        </p:nvSpPr>
+        <p:spPr/>
+      </p:sp>
+      <p:sp>
+        <p:nvSpPr>
+          <p:cNvPr id="3" name="Notes Placeholder 2"/>
+          <p:cNvSpPr>
             <a:spLocks noGrp="1"/>
           </p:cNvSpPr>
           <p:nvPr>
-            <p:ph type="sldImg" idx="2"/>
+            <p:ph type="body" sz="quarter" idx="3"/>
           </p:nvPr>
         </p:nvSpPr>
         <p:spPr/>
-      </p:sp>
-      <p:sp>
-        <p:nvSpPr>
-          <p:cNvPr id="3" name="Notes Placeholder 2"/>
+        <p:txBody>
+          <a:bodyPr/>
+          <a:lstStyle/>
+          <a:p>
+            <a:r>
+              <a:t>（10 秒，放慢）香照燒，神明照拜，煙不見了。健康跟信仰，不用二選一。我們是有拜有包庇，謝謝各位評審。（合十）</a:t>
+            </a:r>
+          </a:p>
+        </p:txBody>
+      </p:sp>
+      <p:sp>
+        <p:nvSpPr>
+          <p:cNvPr id="4" name="Slide Number Placeholder 3"/>
           <p:cNvSpPr>
             <a:spLocks noGrp="1"/>
           </p:cNvSpPr>
           <p:nvPr>
-            <p:ph type="body" idx="3" sz="quarter"/>
-          </p:nvPr>
-        </p:nvSpPr>
-        <p:spPr/>
-        <p:txBody>
-          <a:bodyPr/>
-          <a:lstStyle/>
-          <a:p>
-            <a:r>
-              <a:t>（10 秒，放慢）香照燒，神明照拜，煙不見了。健康跟信仰，不用二選一。我們是有拜有包庇，謝謝各位評審。（合十）</a:t>
-            </a:r>
-          </a:p>
-        </p:txBody>
-      </p:sp>
-      <p:sp>
-        <p:nvSpPr>
-          <p:cNvPr id="4" name="Slide Number Placeholder 3"/>
-          <p:cNvSpPr>
-            <a:spLocks noGrp="1"/>
-          </p:cNvSpPr>
-          <p:nvPr>
-            <p:ph type="sldNum" idx="5" sz="quarter"/>
+            <p:ph type="sldNum" sz="quarter" idx="5"/>
           </p:nvPr>
         </p:nvSpPr>
         <p:spPr/>
@@ -678,7 +473,7 @@
 </file>
 
 <file path=ppt/notesSlides/notesSlide2.xml><?xml version="1.0" encoding="utf-8"?>
-<p:notes xmlns:a="http://schemas.openxmlformats.org/drawingml/2006/main" xmlns:p="http://schemas.openxmlformats.org/presentationml/2006/main" xmlns:r="http://schemas.openxmlformats.org/officeDocument/2006/relationships">
+<p:notes xmlns:a="http://schemas.openxmlformats.org/drawingml/2006/main" xmlns:r="http://schemas.openxmlformats.org/officeDocument/2006/relationships" xmlns:p="http://schemas.openxmlformats.org/presentationml/2006/main">
   <p:cSld>
     <p:spTree>
       <p:nvGrpSpPr>
@@ -698,43 +493,43 @@
         <p:nvSpPr>
           <p:cNvPr id="2" name="Slide Image Placeholder 1"/>
           <p:cNvSpPr>
+            <a:spLocks noGrp="1" noRot="1" noChangeAspect="1"/>
+          </p:cNvSpPr>
+          <p:nvPr>
+            <p:ph type="sldImg" idx="2"/>
+          </p:nvPr>
+        </p:nvSpPr>
+        <p:spPr/>
+      </p:sp>
+      <p:sp>
+        <p:nvSpPr>
+          <p:cNvPr id="3" name="Notes Placeholder 2"/>
+          <p:cNvSpPr>
             <a:spLocks noGrp="1"/>
           </p:cNvSpPr>
           <p:nvPr>
-            <p:ph type="sldImg" idx="2"/>
+            <p:ph type="body" sz="quarter" idx="3"/>
           </p:nvPr>
         </p:nvSpPr>
         <p:spPr/>
-      </p:sp>
-      <p:sp>
-        <p:nvSpPr>
-          <p:cNvPr id="3" name="Notes Placeholder 2"/>
+        <p:txBody>
+          <a:bodyPr/>
+          <a:lstStyle/>
+          <a:p>
+            <a:r>
+              <a:t>（25 秒）先講結論：我們讓香繼續燒，但煙不再害人。為什麼要做？台大在龍山寺殿內實測，PM2.5 一度到每立方公尺 1,360 微克，是戶外的 50 倍；印度教加佛教就超過 17 億人的信仰要燒香；環保署每年收到超過 3 千件宮廟空污陳情。香的煙就是 PM2.5、就是致癌物，而且每天都在廟裡累積。</a:t>
+            </a:r>
+          </a:p>
+        </p:txBody>
+      </p:sp>
+      <p:sp>
+        <p:nvSpPr>
+          <p:cNvPr id="4" name="Slide Number Placeholder 3"/>
           <p:cNvSpPr>
             <a:spLocks noGrp="1"/>
           </p:cNvSpPr>
           <p:nvPr>
-            <p:ph type="body" idx="3" sz="quarter"/>
-          </p:nvPr>
-        </p:nvSpPr>
-        <p:spPr/>
-        <p:txBody>
-          <a:bodyPr/>
-          <a:lstStyle/>
-          <a:p>
-            <a:r>
-              <a:t>（25 秒）先講結論：我們讓香繼續燒，但煙不再害人。為什麼要做？台大在龍山寺殿內實測，PM2.5 一度到每立方公尺 1,360 微克，是戶外的 50 倍；印度教加佛教就超過 17 億人的信仰要燒香；環保署每年收到超過 3 千件宮廟空污陳情。香的煙就是 PM2.5、就是致癌物，而且每天都在廟裡累積。</a:t>
-            </a:r>
-          </a:p>
-        </p:txBody>
-      </p:sp>
-      <p:sp>
-        <p:nvSpPr>
-          <p:cNvPr id="4" name="Slide Number Placeholder 3"/>
-          <p:cNvSpPr>
-            <a:spLocks noGrp="1"/>
-          </p:cNvSpPr>
-          <p:nvPr>
-            <p:ph type="sldNum" idx="5" sz="quarter"/>
+            <p:ph type="sldNum" sz="quarter" idx="5"/>
           </p:nvPr>
         </p:nvSpPr>
         <p:spPr/>
@@ -748,7 +543,7 @@
 </file>
 
 <file path=ppt/notesSlides/notesSlide3.xml><?xml version="1.0" encoding="utf-8"?>
-<p:notes xmlns:a="http://schemas.openxmlformats.org/drawingml/2006/main" xmlns:p="http://schemas.openxmlformats.org/presentationml/2006/main" xmlns:r="http://schemas.openxmlformats.org/officeDocument/2006/relationships">
+<p:notes xmlns:a="http://schemas.openxmlformats.org/drawingml/2006/main" xmlns:r="http://schemas.openxmlformats.org/officeDocument/2006/relationships" xmlns:p="http://schemas.openxmlformats.org/presentationml/2006/main">
   <p:cSld>
     <p:spTree>
       <p:nvGrpSpPr>
@@ -768,43 +563,43 @@
         <p:nvSpPr>
           <p:cNvPr id="2" name="Slide Image Placeholder 1"/>
           <p:cNvSpPr>
+            <a:spLocks noGrp="1" noRot="1" noChangeAspect="1"/>
+          </p:cNvSpPr>
+          <p:nvPr>
+            <p:ph type="sldImg" idx="2"/>
+          </p:nvPr>
+        </p:nvSpPr>
+        <p:spPr/>
+      </p:sp>
+      <p:sp>
+        <p:nvSpPr>
+          <p:cNvPr id="3" name="Notes Placeholder 2"/>
+          <p:cNvSpPr>
             <a:spLocks noGrp="1"/>
           </p:cNvSpPr>
           <p:nvPr>
-            <p:ph type="sldImg" idx="2"/>
+            <p:ph type="body" sz="quarter" idx="3"/>
           </p:nvPr>
         </p:nvSpPr>
         <p:spPr/>
-      </p:sp>
-      <p:sp>
-        <p:nvSpPr>
-          <p:cNvPr id="3" name="Notes Placeholder 2"/>
+        <p:txBody>
+          <a:bodyPr/>
+          <a:lstStyle/>
+          <a:p>
+            <a:r>
+              <a:t>（25 秒）這個問題不是沒人解過。封爐、減香是叫信眾改變信仰，2017 年數萬人因此上凱道；碳中和金爐有效，但要 500 萬，全台九千多座中小廟宇根本負擔不起；清淨機和 IoT 監測，一個管不到爐口、一個只量不治。所以我們的立場只有一句：不禁香、不封爐，讓香爐自己解決自己的問題。</a:t>
+            </a:r>
+          </a:p>
+        </p:txBody>
+      </p:sp>
+      <p:sp>
+        <p:nvSpPr>
+          <p:cNvPr id="4" name="Slide Number Placeholder 3"/>
           <p:cNvSpPr>
             <a:spLocks noGrp="1"/>
           </p:cNvSpPr>
           <p:nvPr>
-            <p:ph type="body" idx="3" sz="quarter"/>
-          </p:nvPr>
-        </p:nvSpPr>
-        <p:spPr/>
-        <p:txBody>
-          <a:bodyPr/>
-          <a:lstStyle/>
-          <a:p>
-            <a:r>
-              <a:t>（25 秒）這個問題不是沒人解過。封爐、減香是叫信眾改變信仰，2017 年數萬人因此上凱道；碳中和金爐有效，但要 500 萬，全台九千多座中小廟宇根本負擔不起；清淨機和 IoT 監測，一個管不到爐口、一個只量不治。所以我們的立場只有一句：不禁香、不封爐，讓香爐自己解決自己的問題。</a:t>
-            </a:r>
-          </a:p>
-        </p:txBody>
-      </p:sp>
-      <p:sp>
-        <p:nvSpPr>
-          <p:cNvPr id="4" name="Slide Number Placeholder 3"/>
-          <p:cNvSpPr>
-            <a:spLocks noGrp="1"/>
-          </p:cNvSpPr>
-          <p:nvPr>
-            <p:ph type="sldNum" idx="5" sz="quarter"/>
+            <p:ph type="sldNum" sz="quarter" idx="5"/>
           </p:nvPr>
         </p:nvSpPr>
         <p:spPr/>
@@ -818,7 +613,7 @@
 </file>
 
 <file path=ppt/notesSlides/notesSlide4.xml><?xml version="1.0" encoding="utf-8"?>
-<p:notes xmlns:a="http://schemas.openxmlformats.org/drawingml/2006/main" xmlns:p="http://schemas.openxmlformats.org/presentationml/2006/main" xmlns:r="http://schemas.openxmlformats.org/officeDocument/2006/relationships">
+<p:notes xmlns:a="http://schemas.openxmlformats.org/drawingml/2006/main" xmlns:r="http://schemas.openxmlformats.org/officeDocument/2006/relationships" xmlns:p="http://schemas.openxmlformats.org/presentationml/2006/main">
   <p:cSld>
     <p:spTree>
       <p:nvGrpSpPr>
@@ -838,43 +633,43 @@
         <p:nvSpPr>
           <p:cNvPr id="2" name="Slide Image Placeholder 1"/>
           <p:cNvSpPr>
+            <a:spLocks noGrp="1" noRot="1" noChangeAspect="1"/>
+          </p:cNvSpPr>
+          <p:nvPr>
+            <p:ph type="sldImg" idx="2"/>
+          </p:nvPr>
+        </p:nvSpPr>
+        <p:spPr/>
+      </p:sp>
+      <p:sp>
+        <p:nvSpPr>
+          <p:cNvPr id="3" name="Notes Placeholder 2"/>
+          <p:cNvSpPr>
             <a:spLocks noGrp="1"/>
           </p:cNvSpPr>
           <p:nvPr>
-            <p:ph type="sldImg" idx="2"/>
+            <p:ph type="body" sz="quarter" idx="3"/>
           </p:nvPr>
         </p:nvSpPr>
         <p:spPr/>
-      </p:sp>
-      <p:sp>
-        <p:nvSpPr>
-          <p:cNvPr id="3" name="Notes Placeholder 2"/>
+        <p:txBody>
+          <a:bodyPr/>
+          <a:lstStyle/>
+          <a:p>
+            <a:r>
+              <a:t>（25 秒）智慧香爐是加裝在既有香爐上的 retrofit 模組——廟方不用換爐。漏斗大口讓插香跟原本一樣順手；煙在爐口就被抓走，經過金屬紗網、HEPA、活性碳三段過濾再排出；整台是參數化 3D 列印，桌上這台就是實機。</a:t>
+            </a:r>
+          </a:p>
+        </p:txBody>
+      </p:sp>
+      <p:sp>
+        <p:nvSpPr>
+          <p:cNvPr id="4" name="Slide Number Placeholder 3"/>
           <p:cNvSpPr>
             <a:spLocks noGrp="1"/>
           </p:cNvSpPr>
           <p:nvPr>
-            <p:ph type="body" idx="3" sz="quarter"/>
-          </p:nvPr>
-        </p:nvSpPr>
-        <p:spPr/>
-        <p:txBody>
-          <a:bodyPr/>
-          <a:lstStyle/>
-          <a:p>
-            <a:r>
-              <a:t>（25 秒）智慧香爐是加裝在既有香爐上的 retrofit 模組——廟方不用換爐。漏斗大口讓插香跟原本一樣順手；煙在爐口就被抓走，經過金屬紗網、HEPA、活性碳三段過濾再排出；整台是參數化 3D 列印，桌上這台就是實機。</a:t>
-            </a:r>
-          </a:p>
-        </p:txBody>
-      </p:sp>
-      <p:sp>
-        <p:nvSpPr>
-          <p:cNvPr id="4" name="Slide Number Placeholder 3"/>
-          <p:cNvSpPr>
-            <a:spLocks noGrp="1"/>
-          </p:cNvSpPr>
-          <p:nvPr>
-            <p:ph type="sldNum" idx="5" sz="quarter"/>
+            <p:ph type="sldNum" sz="quarter" idx="5"/>
           </p:nvPr>
         </p:nvSpPr>
         <p:spPr/>
@@ -888,7 +683,7 @@
 </file>
 
 <file path=ppt/notesSlides/notesSlide5.xml><?xml version="1.0" encoding="utf-8"?>
-<p:notes xmlns:a="http://schemas.openxmlformats.org/drawingml/2006/main" xmlns:p="http://schemas.openxmlformats.org/presentationml/2006/main" xmlns:r="http://schemas.openxmlformats.org/officeDocument/2006/relationships">
+<p:notes xmlns:a="http://schemas.openxmlformats.org/drawingml/2006/main" xmlns:r="http://schemas.openxmlformats.org/officeDocument/2006/relationships" xmlns:p="http://schemas.openxmlformats.org/presentationml/2006/main">
   <p:cSld>
     <p:spTree>
       <p:nvGrpSpPr>
@@ -908,43 +703,43 @@
         <p:nvSpPr>
           <p:cNvPr id="2" name="Slide Image Placeholder 1"/>
           <p:cNvSpPr>
+            <a:spLocks noGrp="1" noRot="1" noChangeAspect="1"/>
+          </p:cNvSpPr>
+          <p:nvPr>
+            <p:ph type="sldImg" idx="2"/>
+          </p:nvPr>
+        </p:nvSpPr>
+        <p:spPr/>
+      </p:sp>
+      <p:sp>
+        <p:nvSpPr>
+          <p:cNvPr id="3" name="Notes Placeholder 2"/>
+          <p:cNvSpPr>
             <a:spLocks noGrp="1"/>
           </p:cNvSpPr>
           <p:nvPr>
-            <p:ph type="sldImg" idx="2"/>
+            <p:ph type="body" sz="quarter" idx="3"/>
           </p:nvPr>
         </p:nvSpPr>
         <p:spPr/>
-      </p:sp>
-      <p:sp>
-        <p:nvSpPr>
-          <p:cNvPr id="3" name="Notes Placeholder 2"/>
+        <p:txBody>
+          <a:bodyPr/>
+          <a:lstStyle/>
+          <a:p>
+            <a:r>
+              <a:t>（25 秒）它為什麼是機器人、不是電風扇？因為它有完整的感測—決策—致動閉環：感測層量爐口、呼吸高度、進出風口三點；決策層用狀態機加 CO2 前饋——CO2 是人流的先行指標，人潮還沒插香、系統就先增速抽排，把尖峰削掉；機構層執行抽排過濾。每一筆決策都留紀錄、可重演。</a:t>
+            </a:r>
+          </a:p>
+        </p:txBody>
+      </p:sp>
+      <p:sp>
+        <p:nvSpPr>
+          <p:cNvPr id="4" name="Slide Number Placeholder 3"/>
           <p:cNvSpPr>
             <a:spLocks noGrp="1"/>
           </p:cNvSpPr>
           <p:nvPr>
-            <p:ph type="body" idx="3" sz="quarter"/>
-          </p:nvPr>
-        </p:nvSpPr>
-        <p:spPr/>
-        <p:txBody>
-          <a:bodyPr/>
-          <a:lstStyle/>
-          <a:p>
-            <a:r>
-              <a:t>（25 秒）它為什麼是機器人、不是電風扇？因為它有完整的感測—決策—致動閉環：感測層量爐口、呼吸高度、進出風口三點；決策層用狀態機加 CO2 前饋——CO2 是人流的先行指標，人潮還沒插香、系統就先增速抽排，把尖峰削掉；機構層執行抽排過濾。每一筆決策都留紀錄、可重演。</a:t>
-            </a:r>
-          </a:p>
-        </p:txBody>
-      </p:sp>
-      <p:sp>
-        <p:nvSpPr>
-          <p:cNvPr id="4" name="Slide Number Placeholder 3"/>
-          <p:cNvSpPr>
-            <a:spLocks noGrp="1"/>
-          </p:cNvSpPr>
-          <p:nvPr>
-            <p:ph type="sldNum" idx="5" sz="quarter"/>
+            <p:ph type="sldNum" sz="quarter" idx="5"/>
           </p:nvPr>
         </p:nvSpPr>
         <p:spPr/>
@@ -958,7 +753,7 @@
 </file>
 
 <file path=ppt/notesSlides/notesSlide6.xml><?xml version="1.0" encoding="utf-8"?>
-<p:notes xmlns:a="http://schemas.openxmlformats.org/drawingml/2006/main" xmlns:p="http://schemas.openxmlformats.org/presentationml/2006/main" xmlns:r="http://schemas.openxmlformats.org/officeDocument/2006/relationships">
+<p:notes xmlns:a="http://schemas.openxmlformats.org/drawingml/2006/main" xmlns:r="http://schemas.openxmlformats.org/officeDocument/2006/relationships" xmlns:p="http://schemas.openxmlformats.org/presentationml/2006/main">
   <p:cSld>
     <p:spTree>
       <p:nvGrpSpPr>
@@ -978,43 +773,43 @@
         <p:nvSpPr>
           <p:cNvPr id="2" name="Slide Image Placeholder 1"/>
           <p:cNvSpPr>
+            <a:spLocks noGrp="1" noRot="1" noChangeAspect="1"/>
+          </p:cNvSpPr>
+          <p:nvPr>
+            <p:ph type="sldImg" idx="2"/>
+          </p:nvPr>
+        </p:nvSpPr>
+        <p:spPr/>
+      </p:sp>
+      <p:sp>
+        <p:nvSpPr>
+          <p:cNvPr id="3" name="Notes Placeholder 2"/>
+          <p:cNvSpPr>
             <a:spLocks noGrp="1"/>
           </p:cNvSpPr>
           <p:nvPr>
-            <p:ph type="sldImg" idx="2"/>
+            <p:ph type="body" sz="quarter" idx="3"/>
           </p:nvPr>
         </p:nvSpPr>
         <p:spPr/>
-      </p:sp>
-      <p:sp>
-        <p:nvSpPr>
-          <p:cNvPr id="3" name="Notes Placeholder 2"/>
+        <p:txBody>
+          <a:bodyPr/>
+          <a:lstStyle/>
+          <a:p>
+            <a:r>
+              <a:t>（20 秒）決策核心是這台狀態機：待機、常態、高峰、異常四態，門檻相對背景基線、進出分離避免震盪。最上面那條是安全聯鎖：超溫或熱電偶失效，風扇立刻歸零，優先於一切邏輯——斷電時香爐就回到傳統香爐，故障模式天然安全。</a:t>
+            </a:r>
+          </a:p>
+        </p:txBody>
+      </p:sp>
+      <p:sp>
+        <p:nvSpPr>
+          <p:cNvPr id="4" name="Slide Number Placeholder 3"/>
           <p:cNvSpPr>
             <a:spLocks noGrp="1"/>
           </p:cNvSpPr>
           <p:nvPr>
-            <p:ph type="body" idx="3" sz="quarter"/>
-          </p:nvPr>
-        </p:nvSpPr>
-        <p:spPr/>
-        <p:txBody>
-          <a:bodyPr/>
-          <a:lstStyle/>
-          <a:p>
-            <a:r>
-              <a:t>（20 秒）決策核心是這台狀態機：待機、常態、高峰、異常四態，門檻相對背景基線、進出分離避免震盪。最上面那條是安全聯鎖：超溫或熱電偶失效，風扇立刻歸零，優先於一切邏輯——斷電時香爐就回到傳統香爐，故障模式天然安全。</a:t>
-            </a:r>
-          </a:p>
-        </p:txBody>
-      </p:sp>
-      <p:sp>
-        <p:nvSpPr>
-          <p:cNvPr id="4" name="Slide Number Placeholder 3"/>
-          <p:cNvSpPr>
-            <a:spLocks noGrp="1"/>
-          </p:cNvSpPr>
-          <p:nvPr>
-            <p:ph type="sldNum" idx="5" sz="quarter"/>
+            <p:ph type="sldNum" sz="quarter" idx="5"/>
           </p:nvPr>
         </p:nvSpPr>
         <p:spPr/>
@@ -1028,7 +823,7 @@
 </file>
 
 <file path=ppt/notesSlides/notesSlide7.xml><?xml version="1.0" encoding="utf-8"?>
-<p:notes xmlns:a="http://schemas.openxmlformats.org/drawingml/2006/main" xmlns:p="http://schemas.openxmlformats.org/presentationml/2006/main" xmlns:r="http://schemas.openxmlformats.org/officeDocument/2006/relationships">
+<p:notes xmlns:a="http://schemas.openxmlformats.org/drawingml/2006/main" xmlns:r="http://schemas.openxmlformats.org/officeDocument/2006/relationships" xmlns:p="http://schemas.openxmlformats.org/presentationml/2006/main">
   <p:cSld>
     <p:spTree>
       <p:nvGrpSpPr>
@@ -1048,43 +843,43 @@
         <p:nvSpPr>
           <p:cNvPr id="2" name="Slide Image Placeholder 1"/>
           <p:cNvSpPr>
+            <a:spLocks noGrp="1" noRot="1" noChangeAspect="1"/>
+          </p:cNvSpPr>
+          <p:nvPr>
+            <p:ph type="sldImg" idx="2"/>
+          </p:nvPr>
+        </p:nvSpPr>
+        <p:spPr/>
+      </p:sp>
+      <p:sp>
+        <p:nvSpPr>
+          <p:cNvPr id="3" name="Notes Placeholder 2"/>
+          <p:cNvSpPr>
             <a:spLocks noGrp="1"/>
           </p:cNvSpPr>
           <p:nvPr>
-            <p:ph type="sldImg" idx="2"/>
+            <p:ph type="body" sz="quarter" idx="3"/>
           </p:nvPr>
         </p:nvSpPr>
         <p:spPr/>
-      </p:sp>
-      <p:sp>
-        <p:nvSpPr>
-          <p:cNvPr id="3" name="Notes Placeholder 2"/>
+        <p:txBody>
+          <a:bodyPr/>
+          <a:lstStyle/>
+          <a:p>
+            <a:r>
+              <a:t>（20 秒）這不是概念簡報。原型已經實機上線：Pi 5 加控制器雙板，真實感測資料每一秒進雲端機隊面板，雲端中心站 12 項驗收全過；比賽現場模式也演練過了——手機熱點自動上雲、斷線自動補傳。全案有 29 條自動化設計規則，每次改設計就全部重跑。各位評審現在就可以掃這個 QR code 看機隊即時面板——這頁的一切都能當場驗證。</a:t>
+            </a:r>
+          </a:p>
+        </p:txBody>
+      </p:sp>
+      <p:sp>
+        <p:nvSpPr>
+          <p:cNvPr id="4" name="Slide Number Placeholder 3"/>
           <p:cNvSpPr>
             <a:spLocks noGrp="1"/>
           </p:cNvSpPr>
           <p:nvPr>
-            <p:ph type="body" idx="3" sz="quarter"/>
-          </p:nvPr>
-        </p:nvSpPr>
-        <p:spPr/>
-        <p:txBody>
-          <a:bodyPr/>
-          <a:lstStyle/>
-          <a:p>
-            <a:r>
-              <a:t>（20 秒）這不是概念簡報。原型已經實機上線：Pi 5 加控制器雙板，真實感測資料每一秒進雲端機隊面板，雲端中心站 12 項驗收全過；比賽現場模式也演練過了——手機熱點自動上雲、斷線自動補傳。全案有 29 條自動化設計規則，每次改設計就全部重跑。各位評審現在就可以掃這個 QR code 看機隊即時面板——這頁的一切都能當場驗證。</a:t>
-            </a:r>
-          </a:p>
-        </p:txBody>
-      </p:sp>
-      <p:sp>
-        <p:nvSpPr>
-          <p:cNvPr id="4" name="Slide Number Placeholder 3"/>
-          <p:cNvSpPr>
-            <a:spLocks noGrp="1"/>
-          </p:cNvSpPr>
-          <p:nvPr>
-            <p:ph type="sldNum" idx="5" sz="quarter"/>
+            <p:ph type="sldNum" sz="quarter" idx="5"/>
           </p:nvPr>
         </p:nvSpPr>
         <p:spPr/>
@@ -1098,7 +893,7 @@
 </file>
 
 <file path=ppt/notesSlides/notesSlide8.xml><?xml version="1.0" encoding="utf-8"?>
-<p:notes xmlns:a="http://schemas.openxmlformats.org/drawingml/2006/main" xmlns:p="http://schemas.openxmlformats.org/presentationml/2006/main" xmlns:r="http://schemas.openxmlformats.org/officeDocument/2006/relationships">
+<p:notes xmlns:a="http://schemas.openxmlformats.org/drawingml/2006/main" xmlns:r="http://schemas.openxmlformats.org/officeDocument/2006/relationships" xmlns:p="http://schemas.openxmlformats.org/presentationml/2006/main">
   <p:cSld>
     <p:spTree>
       <p:nvGrpSpPr>
@@ -1118,43 +913,43 @@
         <p:nvSpPr>
           <p:cNvPr id="2" name="Slide Image Placeholder 1"/>
           <p:cNvSpPr>
+            <a:spLocks noGrp="1" noRot="1" noChangeAspect="1"/>
+          </p:cNvSpPr>
+          <p:nvPr>
+            <p:ph type="sldImg" idx="2"/>
+          </p:nvPr>
+        </p:nvSpPr>
+        <p:spPr/>
+      </p:sp>
+      <p:sp>
+        <p:nvSpPr>
+          <p:cNvPr id="3" name="Notes Placeholder 2"/>
+          <p:cNvSpPr>
             <a:spLocks noGrp="1"/>
           </p:cNvSpPr>
           <p:nvPr>
-            <p:ph type="sldImg" idx="2"/>
+            <p:ph type="body" sz="quarter" idx="3"/>
           </p:nvPr>
         </p:nvSpPr>
         <p:spPr/>
-      </p:sp>
-      <p:sp>
-        <p:nvSpPr>
-          <p:cNvPr id="3" name="Notes Placeholder 2"/>
+        <p:txBody>
+          <a:bodyPr/>
+          <a:lstStyle/>
+          <a:p>
+            <a:r>
+              <a:t>（15 秒）我們也想講一個刪掉東西的故事。原本投入很多的磁力理香機構，實地檢討後發現跟信眾隨手插香的行為不相容——我們把它整組刪掉；集煙罩原本是縮口，插香要對準，我們改成漏斗大口。設計為使用者行為讓步，而不是要求使用者配合設計。</a:t>
+            </a:r>
+          </a:p>
+        </p:txBody>
+      </p:sp>
+      <p:sp>
+        <p:nvSpPr>
+          <p:cNvPr id="4" name="Slide Number Placeholder 3"/>
           <p:cNvSpPr>
             <a:spLocks noGrp="1"/>
           </p:cNvSpPr>
           <p:nvPr>
-            <p:ph type="body" idx="3" sz="quarter"/>
-          </p:nvPr>
-        </p:nvSpPr>
-        <p:spPr/>
-        <p:txBody>
-          <a:bodyPr/>
-          <a:lstStyle/>
-          <a:p>
-            <a:r>
-              <a:t>（15 秒）我們也想講一個刪掉東西的故事。原本投入很多的磁力理香機構，實地檢討後發現跟信眾隨手插香的行為不相容——我們把它整組刪掉；集煙罩原本是縮口，插香要對準，我們改成漏斗大口。設計為使用者行為讓步，而不是要求使用者配合設計。</a:t>
-            </a:r>
-          </a:p>
-        </p:txBody>
-      </p:sp>
-      <p:sp>
-        <p:nvSpPr>
-          <p:cNvPr id="4" name="Slide Number Placeholder 3"/>
-          <p:cNvSpPr>
-            <a:spLocks noGrp="1"/>
-          </p:cNvSpPr>
-          <p:nvPr>
-            <p:ph type="sldNum" idx="5" sz="quarter"/>
+            <p:ph type="sldNum" sz="quarter" idx="5"/>
           </p:nvPr>
         </p:nvSpPr>
         <p:spPr/>
@@ -1168,7 +963,7 @@
 </file>
 
 <file path=ppt/notesSlides/notesSlide9.xml><?xml version="1.0" encoding="utf-8"?>
-<p:notes xmlns:a="http://schemas.openxmlformats.org/drawingml/2006/main" xmlns:p="http://schemas.openxmlformats.org/presentationml/2006/main" xmlns:r="http://schemas.openxmlformats.org/officeDocument/2006/relationships">
+<p:notes xmlns:a="http://schemas.openxmlformats.org/drawingml/2006/main" xmlns:r="http://schemas.openxmlformats.org/officeDocument/2006/relationships" xmlns:p="http://schemas.openxmlformats.org/presentationml/2006/main">
   <p:cSld>
     <p:spTree>
       <p:nvGrpSpPr>
@@ -1188,43 +983,43 @@
         <p:nvSpPr>
           <p:cNvPr id="2" name="Slide Image Placeholder 1"/>
           <p:cNvSpPr>
+            <a:spLocks noGrp="1" noRot="1" noChangeAspect="1"/>
+          </p:cNvSpPr>
+          <p:nvPr>
+            <p:ph type="sldImg" idx="2"/>
+          </p:nvPr>
+        </p:nvSpPr>
+        <p:spPr/>
+      </p:sp>
+      <p:sp>
+        <p:nvSpPr>
+          <p:cNvPr id="3" name="Notes Placeholder 2"/>
+          <p:cNvSpPr>
             <a:spLocks noGrp="1"/>
           </p:cNvSpPr>
           <p:nvPr>
-            <p:ph type="sldImg" idx="2"/>
+            <p:ph type="body" sz="quarter" idx="3"/>
           </p:nvPr>
         </p:nvSpPr>
         <p:spPr/>
-      </p:sp>
-      <p:sp>
-        <p:nvSpPr>
-          <p:cNvPr id="3" name="Notes Placeholder 2"/>
+        <p:txBody>
+          <a:bodyPr/>
+          <a:lstStyle/>
+          <a:p>
+            <a:r>
+              <a:t>（20 秒）商業上，同樣做到保留儀式又有效減污的碳中和金爐要 680 萬，我們十年總持有成本約 88 萬，省 87%——這是九千多座中小廟宇第一次負擔得起的方案。商模是設備加年度訂閱：我們的收入跟廟裡的空氣品質綁在一起，空氣越乾淨、續訂越穩，誘因完全對齊。數值為概念階段估算。</a:t>
+            </a:r>
+          </a:p>
+        </p:txBody>
+      </p:sp>
+      <p:sp>
+        <p:nvSpPr>
+          <p:cNvPr id="4" name="Slide Number Placeholder 3"/>
           <p:cNvSpPr>
             <a:spLocks noGrp="1"/>
           </p:cNvSpPr>
           <p:nvPr>
-            <p:ph type="body" idx="3" sz="quarter"/>
-          </p:nvPr>
-        </p:nvSpPr>
-        <p:spPr/>
-        <p:txBody>
-          <a:bodyPr/>
-          <a:lstStyle/>
-          <a:p>
-            <a:r>
-              <a:t>（20 秒）商業上，同樣做到保留儀式又有效減污的碳中和金爐要 680 萬，我們十年總持有成本約 88 萬，省 87%——這是九千多座中小廟宇第一次負擔得起的方案。商模是設備加年度訂閱：我們的收入跟廟裡的空氣品質綁在一起，空氣越乾淨、續訂越穩，誘因完全對齊。數值為概念階段估算。</a:t>
-            </a:r>
-          </a:p>
-        </p:txBody>
-      </p:sp>
-      <p:sp>
-        <p:nvSpPr>
-          <p:cNvPr id="4" name="Slide Number Placeholder 3"/>
-          <p:cNvSpPr>
-            <a:spLocks noGrp="1"/>
-          </p:cNvSpPr>
-          <p:nvPr>
-            <p:ph type="sldNum" idx="5" sz="quarter"/>
+            <p:ph type="sldNum" sz="quarter" idx="5"/>
           </p:nvPr>
         </p:nvSpPr>
         <p:spPr/>
@@ -1275,10 +1070,9 @@
           <a:lstStyle/>
           <a:p>
             <a:r>
-              <a:rPr lang="en-US" smtClean="0"/>
+              <a:rPr lang="en-US"/>
               <a:t>Click to edit Master title style</a:t>
             </a:r>
-            <a:endParaRPr lang="en-US"/>
           </a:p>
         </p:txBody>
       </p:sp>
@@ -1394,10 +1188,9 @@
           </a:lstStyle>
           <a:p>
             <a:r>
-              <a:rPr lang="en-US" smtClean="0"/>
+              <a:rPr lang="en-US"/>
               <a:t>Click to edit Master subtitle style</a:t>
             </a:r>
-            <a:endParaRPr lang="en-US"/>
           </a:p>
         </p:txBody>
       </p:sp>
@@ -1418,7 +1211,7 @@
           <a:p>
             <a:fld id="{5BCAD085-E8A6-8845-BD4E-CB4CCA059FC4}" type="datetimeFigureOut">
               <a:rPr lang="en-US" smtClean="0"/>
-              <a:t>1/27/13</a:t>
+              <a:t>8/18/2026</a:t>
             </a:fld>
             <a:endParaRPr lang="en-US"/>
           </a:p>
@@ -1512,10 +1305,9 @@
           <a:lstStyle/>
           <a:p>
             <a:r>
-              <a:rPr lang="en-US" smtClean="0"/>
+              <a:rPr lang="en-US"/>
               <a:t>Click to edit Master title style</a:t>
             </a:r>
-            <a:endParaRPr lang="en-US"/>
           </a:p>
         </p:txBody>
       </p:sp>
@@ -1536,38 +1328,37 @@
           <a:p>
             <a:pPr lvl="0"/>
             <a:r>
-              <a:rPr lang="en-US" smtClean="0"/>
+              <a:rPr lang="en-US"/>
               <a:t>Click to edit Master text styles</a:t>
             </a:r>
           </a:p>
           <a:p>
             <a:pPr lvl="1"/>
             <a:r>
-              <a:rPr lang="en-US" smtClean="0"/>
+              <a:rPr lang="en-US"/>
               <a:t>Second level</a:t>
             </a:r>
           </a:p>
           <a:p>
             <a:pPr lvl="2"/>
             <a:r>
-              <a:rPr lang="en-US" smtClean="0"/>
+              <a:rPr lang="en-US"/>
               <a:t>Third level</a:t>
             </a:r>
           </a:p>
           <a:p>
             <a:pPr lvl="3"/>
             <a:r>
-              <a:rPr lang="en-US" smtClean="0"/>
+              <a:rPr lang="en-US"/>
               <a:t>Fourth level</a:t>
             </a:r>
           </a:p>
           <a:p>
             <a:pPr lvl="4"/>
             <a:r>
-              <a:rPr lang="en-US" smtClean="0"/>
+              <a:rPr lang="en-US"/>
               <a:t>Fifth level</a:t>
             </a:r>
-            <a:endParaRPr lang="en-US"/>
           </a:p>
         </p:txBody>
       </p:sp>
@@ -1588,7 +1379,7 @@
           <a:p>
             <a:fld id="{5BCAD085-E8A6-8845-BD4E-CB4CCA059FC4}" type="datetimeFigureOut">
               <a:rPr lang="en-US" smtClean="0"/>
-              <a:t>1/27/13</a:t>
+              <a:t>8/18/2026</a:t>
             </a:fld>
             <a:endParaRPr lang="en-US"/>
           </a:p>
@@ -1687,10 +1478,9 @@
           <a:lstStyle/>
           <a:p>
             <a:r>
-              <a:rPr lang="en-US" smtClean="0"/>
+              <a:rPr lang="en-US"/>
               <a:t>Click to edit Master title style</a:t>
             </a:r>
-            <a:endParaRPr lang="en-US"/>
           </a:p>
         </p:txBody>
       </p:sp>
@@ -1716,38 +1506,37 @@
           <a:p>
             <a:pPr lvl="0"/>
             <a:r>
-              <a:rPr lang="en-US" smtClean="0"/>
+              <a:rPr lang="en-US"/>
               <a:t>Click to edit Master text styles</a:t>
             </a:r>
           </a:p>
           <a:p>
             <a:pPr lvl="1"/>
             <a:r>
-              <a:rPr lang="en-US" smtClean="0"/>
+              <a:rPr lang="en-US"/>
               <a:t>Second level</a:t>
             </a:r>
           </a:p>
           <a:p>
             <a:pPr lvl="2"/>
             <a:r>
-              <a:rPr lang="en-US" smtClean="0"/>
+              <a:rPr lang="en-US"/>
               <a:t>Third level</a:t>
             </a:r>
           </a:p>
           <a:p>
             <a:pPr lvl="3"/>
             <a:r>
-              <a:rPr lang="en-US" smtClean="0"/>
+              <a:rPr lang="en-US"/>
               <a:t>Fourth level</a:t>
             </a:r>
           </a:p>
           <a:p>
             <a:pPr lvl="4"/>
             <a:r>
-              <a:rPr lang="en-US" smtClean="0"/>
+              <a:rPr lang="en-US"/>
               <a:t>Fifth level</a:t>
             </a:r>
-            <a:endParaRPr lang="en-US"/>
           </a:p>
         </p:txBody>
       </p:sp>
@@ -1768,7 +1557,7 @@
           <a:p>
             <a:fld id="{5BCAD085-E8A6-8845-BD4E-CB4CCA059FC4}" type="datetimeFigureOut">
               <a:rPr lang="en-US" smtClean="0"/>
-              <a:t>1/27/13</a:t>
+              <a:t>8/18/2026</a:t>
             </a:fld>
             <a:endParaRPr lang="en-US"/>
           </a:p>
@@ -1862,10 +1651,9 @@
           <a:lstStyle/>
           <a:p>
             <a:r>
-              <a:rPr lang="en-US" smtClean="0"/>
+              <a:rPr lang="en-US"/>
               <a:t>Click to edit Master title style</a:t>
             </a:r>
-            <a:endParaRPr lang="en-US"/>
           </a:p>
         </p:txBody>
       </p:sp>
@@ -1886,38 +1674,37 @@
           <a:p>
             <a:pPr lvl="0"/>
             <a:r>
-              <a:rPr lang="en-US" smtClean="0"/>
+              <a:rPr lang="en-US"/>
               <a:t>Click to edit Master text styles</a:t>
             </a:r>
           </a:p>
           <a:p>
             <a:pPr lvl="1"/>
             <a:r>
-              <a:rPr lang="en-US" smtClean="0"/>
+              <a:rPr lang="en-US"/>
               <a:t>Second level</a:t>
             </a:r>
           </a:p>
           <a:p>
             <a:pPr lvl="2"/>
             <a:r>
-              <a:rPr lang="en-US" smtClean="0"/>
+              <a:rPr lang="en-US"/>
               <a:t>Third level</a:t>
             </a:r>
           </a:p>
           <a:p>
             <a:pPr lvl="3"/>
             <a:r>
-              <a:rPr lang="en-US" smtClean="0"/>
+              <a:rPr lang="en-US"/>
               <a:t>Fourth level</a:t>
             </a:r>
           </a:p>
           <a:p>
             <a:pPr lvl="4"/>
             <a:r>
-              <a:rPr lang="en-US" smtClean="0"/>
+              <a:rPr lang="en-US"/>
               <a:t>Fifth level</a:t>
             </a:r>
-            <a:endParaRPr lang="en-US"/>
           </a:p>
         </p:txBody>
       </p:sp>
@@ -1938,7 +1725,7 @@
           <a:p>
             <a:fld id="{5BCAD085-E8A6-8845-BD4E-CB4CCA059FC4}" type="datetimeFigureOut">
               <a:rPr lang="en-US" smtClean="0"/>
-              <a:t>1/27/13</a:t>
+              <a:t>8/18/2026</a:t>
             </a:fld>
             <a:endParaRPr lang="en-US"/>
           </a:p>
@@ -2041,10 +1828,9 @@
           </a:lstStyle>
           <a:p>
             <a:r>
-              <a:rPr lang="en-US" smtClean="0"/>
+              <a:rPr lang="en-US"/>
               <a:t>Click to edit Master title style</a:t>
             </a:r>
-            <a:endParaRPr lang="en-US"/>
           </a:p>
         </p:txBody>
       </p:sp>
@@ -2161,7 +1947,7 @@
           <a:p>
             <a:pPr lvl="0"/>
             <a:r>
-              <a:rPr lang="en-US" smtClean="0"/>
+              <a:rPr lang="en-US"/>
               <a:t>Click to edit Master text styles</a:t>
             </a:r>
           </a:p>
@@ -2184,7 +1970,7 @@
           <a:p>
             <a:fld id="{5BCAD085-E8A6-8845-BD4E-CB4CCA059FC4}" type="datetimeFigureOut">
               <a:rPr lang="en-US" smtClean="0"/>
-              <a:t>1/27/13</a:t>
+              <a:t>8/18/2026</a:t>
             </a:fld>
             <a:endParaRPr lang="en-US"/>
           </a:p>
@@ -2278,10 +2064,9 @@
           <a:lstStyle/>
           <a:p>
             <a:r>
-              <a:rPr lang="en-US" smtClean="0"/>
+              <a:rPr lang="en-US"/>
               <a:t>Click to edit Master title style</a:t>
             </a:r>
-            <a:endParaRPr lang="en-US"/>
           </a:p>
         </p:txBody>
       </p:sp>
@@ -2335,38 +2120,37 @@
           <a:p>
             <a:pPr lvl="0"/>
             <a:r>
-              <a:rPr lang="en-US" smtClean="0"/>
+              <a:rPr lang="en-US"/>
               <a:t>Click to edit Master text styles</a:t>
             </a:r>
           </a:p>
           <a:p>
             <a:pPr lvl="1"/>
             <a:r>
-              <a:rPr lang="en-US" smtClean="0"/>
+              <a:rPr lang="en-US"/>
               <a:t>Second level</a:t>
             </a:r>
           </a:p>
           <a:p>
             <a:pPr lvl="2"/>
             <a:r>
-              <a:rPr lang="en-US" smtClean="0"/>
+              <a:rPr lang="en-US"/>
               <a:t>Third level</a:t>
             </a:r>
           </a:p>
           <a:p>
             <a:pPr lvl="3"/>
             <a:r>
-              <a:rPr lang="en-US" smtClean="0"/>
+              <a:rPr lang="en-US"/>
               <a:t>Fourth level</a:t>
             </a:r>
           </a:p>
           <a:p>
             <a:pPr lvl="4"/>
             <a:r>
-              <a:rPr lang="en-US" smtClean="0"/>
+              <a:rPr lang="en-US"/>
               <a:t>Fifth level</a:t>
             </a:r>
-            <a:endParaRPr lang="en-US"/>
           </a:p>
         </p:txBody>
       </p:sp>
@@ -2420,38 +2204,37 @@
           <a:p>
             <a:pPr lvl="0"/>
             <a:r>
-              <a:rPr lang="en-US" smtClean="0"/>
+              <a:rPr lang="en-US"/>
               <a:t>Click to edit Master text styles</a:t>
             </a:r>
           </a:p>
           <a:p>
             <a:pPr lvl="1"/>
             <a:r>
-              <a:rPr lang="en-US" smtClean="0"/>
+              <a:rPr lang="en-US"/>
               <a:t>Second level</a:t>
             </a:r>
           </a:p>
           <a:p>
             <a:pPr lvl="2"/>
             <a:r>
-              <a:rPr lang="en-US" smtClean="0"/>
+              <a:rPr lang="en-US"/>
               <a:t>Third level</a:t>
             </a:r>
           </a:p>
           <a:p>
             <a:pPr lvl="3"/>
             <a:r>
-              <a:rPr lang="en-US" smtClean="0"/>
+              <a:rPr lang="en-US"/>
               <a:t>Fourth level</a:t>
             </a:r>
           </a:p>
           <a:p>
             <a:pPr lvl="4"/>
             <a:r>
-              <a:rPr lang="en-US" smtClean="0"/>
+              <a:rPr lang="en-US"/>
               <a:t>Fifth level</a:t>
             </a:r>
-            <a:endParaRPr lang="en-US"/>
           </a:p>
         </p:txBody>
       </p:sp>
@@ -2472,7 +2255,7 @@
           <a:p>
             <a:fld id="{5BCAD085-E8A6-8845-BD4E-CB4CCA059FC4}" type="datetimeFigureOut">
               <a:rPr lang="en-US" smtClean="0"/>
-              <a:t>1/27/13</a:t>
+              <a:t>8/18/2026</a:t>
             </a:fld>
             <a:endParaRPr lang="en-US"/>
           </a:p>
@@ -2570,10 +2353,9 @@
           </a:lstStyle>
           <a:p>
             <a:r>
-              <a:rPr lang="en-US" smtClean="0"/>
+              <a:rPr lang="en-US"/>
               <a:t>Click to edit Master title style</a:t>
             </a:r>
-            <a:endParaRPr lang="en-US"/>
           </a:p>
         </p:txBody>
       </p:sp>
@@ -2636,7 +2418,7 @@
           <a:p>
             <a:pPr lvl="0"/>
             <a:r>
-              <a:rPr lang="en-US" smtClean="0"/>
+              <a:rPr lang="en-US"/>
               <a:t>Click to edit Master text styles</a:t>
             </a:r>
           </a:p>
@@ -2692,38 +2474,37 @@
           <a:p>
             <a:pPr lvl="0"/>
             <a:r>
-              <a:rPr lang="en-US" smtClean="0"/>
+              <a:rPr lang="en-US"/>
               <a:t>Click to edit Master text styles</a:t>
             </a:r>
           </a:p>
           <a:p>
             <a:pPr lvl="1"/>
             <a:r>
-              <a:rPr lang="en-US" smtClean="0"/>
+              <a:rPr lang="en-US"/>
               <a:t>Second level</a:t>
             </a:r>
           </a:p>
           <a:p>
             <a:pPr lvl="2"/>
             <a:r>
-              <a:rPr lang="en-US" smtClean="0"/>
+              <a:rPr lang="en-US"/>
               <a:t>Third level</a:t>
             </a:r>
           </a:p>
           <a:p>
             <a:pPr lvl="3"/>
             <a:r>
-              <a:rPr lang="en-US" smtClean="0"/>
+              <a:rPr lang="en-US"/>
               <a:t>Fourth level</a:t>
             </a:r>
           </a:p>
           <a:p>
             <a:pPr lvl="4"/>
             <a:r>
-              <a:rPr lang="en-US" smtClean="0"/>
+              <a:rPr lang="en-US"/>
               <a:t>Fifth level</a:t>
             </a:r>
-            <a:endParaRPr lang="en-US"/>
           </a:p>
         </p:txBody>
       </p:sp>
@@ -2786,7 +2567,7 @@
           <a:p>
             <a:pPr lvl="0"/>
             <a:r>
-              <a:rPr lang="en-US" smtClean="0"/>
+              <a:rPr lang="en-US"/>
               <a:t>Click to edit Master text styles</a:t>
             </a:r>
           </a:p>
@@ -2842,38 +2623,37 @@
           <a:p>
             <a:pPr lvl="0"/>
             <a:r>
-              <a:rPr lang="en-US" smtClean="0"/>
+              <a:rPr lang="en-US"/>
               <a:t>Click to edit Master text styles</a:t>
             </a:r>
           </a:p>
           <a:p>
             <a:pPr lvl="1"/>
             <a:r>
-              <a:rPr lang="en-US" smtClean="0"/>
+              <a:rPr lang="en-US"/>
               <a:t>Second level</a:t>
             </a:r>
           </a:p>
           <a:p>
             <a:pPr lvl="2"/>
             <a:r>
-              <a:rPr lang="en-US" smtClean="0"/>
+              <a:rPr lang="en-US"/>
               <a:t>Third level</a:t>
             </a:r>
           </a:p>
           <a:p>
             <a:pPr lvl="3"/>
             <a:r>
-              <a:rPr lang="en-US" smtClean="0"/>
+              <a:rPr lang="en-US"/>
               <a:t>Fourth level</a:t>
             </a:r>
           </a:p>
           <a:p>
             <a:pPr lvl="4"/>
             <a:r>
-              <a:rPr lang="en-US" smtClean="0"/>
+              <a:rPr lang="en-US"/>
               <a:t>Fifth level</a:t>
             </a:r>
-            <a:endParaRPr lang="en-US"/>
           </a:p>
         </p:txBody>
       </p:sp>
@@ -2894,7 +2674,7 @@
           <a:p>
             <a:fld id="{5BCAD085-E8A6-8845-BD4E-CB4CCA059FC4}" type="datetimeFigureOut">
               <a:rPr lang="en-US" smtClean="0"/>
-              <a:t>1/27/13</a:t>
+              <a:t>8/18/2026</a:t>
             </a:fld>
             <a:endParaRPr lang="en-US"/>
           </a:p>
@@ -2988,10 +2768,9 @@
           <a:lstStyle/>
           <a:p>
             <a:r>
-              <a:rPr lang="en-US" smtClean="0"/>
+              <a:rPr lang="en-US"/>
               <a:t>Click to edit Master title style</a:t>
             </a:r>
-            <a:endParaRPr lang="en-US"/>
           </a:p>
         </p:txBody>
       </p:sp>
@@ -3012,7 +2791,7 @@
           <a:p>
             <a:fld id="{5BCAD085-E8A6-8845-BD4E-CB4CCA059FC4}" type="datetimeFigureOut">
               <a:rPr lang="en-US" smtClean="0"/>
-              <a:t>1/27/13</a:t>
+              <a:t>8/18/2026</a:t>
             </a:fld>
             <a:endParaRPr lang="en-US"/>
           </a:p>
@@ -3107,7 +2886,7 @@
           <a:p>
             <a:fld id="{5BCAD085-E8A6-8845-BD4E-CB4CCA059FC4}" type="datetimeFigureOut">
               <a:rPr lang="en-US" smtClean="0"/>
-              <a:t>1/27/13</a:t>
+              <a:t>8/18/2026</a:t>
             </a:fld>
             <a:endParaRPr lang="en-US"/>
           </a:p>
@@ -3210,10 +2989,9 @@
           </a:lstStyle>
           <a:p>
             <a:r>
-              <a:rPr lang="en-US" smtClean="0"/>
+              <a:rPr lang="en-US"/>
               <a:t>Click to edit Master title style</a:t>
             </a:r>
-            <a:endParaRPr lang="en-US"/>
           </a:p>
         </p:txBody>
       </p:sp>
@@ -3267,38 +3045,37 @@
           <a:p>
             <a:pPr lvl="0"/>
             <a:r>
-              <a:rPr lang="en-US" smtClean="0"/>
+              <a:rPr lang="en-US"/>
               <a:t>Click to edit Master text styles</a:t>
             </a:r>
           </a:p>
           <a:p>
             <a:pPr lvl="1"/>
             <a:r>
-              <a:rPr lang="en-US" smtClean="0"/>
+              <a:rPr lang="en-US"/>
               <a:t>Second level</a:t>
             </a:r>
           </a:p>
           <a:p>
             <a:pPr lvl="2"/>
             <a:r>
-              <a:rPr lang="en-US" smtClean="0"/>
+              <a:rPr lang="en-US"/>
               <a:t>Third level</a:t>
             </a:r>
           </a:p>
           <a:p>
             <a:pPr lvl="3"/>
             <a:r>
-              <a:rPr lang="en-US" smtClean="0"/>
+              <a:rPr lang="en-US"/>
               <a:t>Fourth level</a:t>
             </a:r>
           </a:p>
           <a:p>
             <a:pPr lvl="4"/>
             <a:r>
-              <a:rPr lang="en-US" smtClean="0"/>
+              <a:rPr lang="en-US"/>
               <a:t>Fifth level</a:t>
             </a:r>
-            <a:endParaRPr lang="en-US"/>
           </a:p>
         </p:txBody>
       </p:sp>
@@ -3361,7 +3138,7 @@
           <a:p>
             <a:pPr lvl="0"/>
             <a:r>
-              <a:rPr lang="en-US" smtClean="0"/>
+              <a:rPr lang="en-US"/>
               <a:t>Click to edit Master text styles</a:t>
             </a:r>
           </a:p>
@@ -3384,7 +3161,7 @@
           <a:p>
             <a:fld id="{5BCAD085-E8A6-8845-BD4E-CB4CCA059FC4}" type="datetimeFigureOut">
               <a:rPr lang="en-US" smtClean="0"/>
-              <a:t>1/27/13</a:t>
+              <a:t>8/18/2026</a:t>
             </a:fld>
             <a:endParaRPr lang="en-US"/>
           </a:p>
@@ -3487,10 +3264,9 @@
           </a:lstStyle>
           <a:p>
             <a:r>
-              <a:rPr lang="en-US" smtClean="0"/>
+              <a:rPr lang="en-US"/>
               <a:t>Click to edit Master title style</a:t>
             </a:r>
-            <a:endParaRPr lang="en-US"/>
           </a:p>
         </p:txBody>
       </p:sp>
@@ -3614,7 +3390,7 @@
           <a:p>
             <a:pPr lvl="0"/>
             <a:r>
-              <a:rPr lang="en-US" smtClean="0"/>
+              <a:rPr lang="en-US"/>
               <a:t>Click to edit Master text styles</a:t>
             </a:r>
           </a:p>
@@ -3637,7 +3413,7 @@
           <a:p>
             <a:fld id="{5BCAD085-E8A6-8845-BD4E-CB4CCA059FC4}" type="datetimeFigureOut">
               <a:rPr lang="en-US" smtClean="0"/>
-              <a:t>1/27/13</a:t>
+              <a:t>8/18/2026</a:t>
             </a:fld>
             <a:endParaRPr lang="en-US"/>
           </a:p>
@@ -3746,10 +3522,9 @@
           <a:lstStyle/>
           <a:p>
             <a:r>
-              <a:rPr lang="en-US" smtClean="0"/>
+              <a:rPr lang="en-US"/>
               <a:t>Click to edit Master title style</a:t>
             </a:r>
-            <a:endParaRPr lang="en-US"/>
           </a:p>
         </p:txBody>
       </p:sp>
@@ -3780,38 +3555,37 @@
           <a:p>
             <a:pPr lvl="0"/>
             <a:r>
-              <a:rPr lang="en-US" smtClean="0"/>
+              <a:rPr lang="en-US"/>
               <a:t>Click to edit Master text styles</a:t>
             </a:r>
           </a:p>
           <a:p>
             <a:pPr lvl="1"/>
             <a:r>
-              <a:rPr lang="en-US" smtClean="0"/>
+              <a:rPr lang="en-US"/>
               <a:t>Second level</a:t>
             </a:r>
           </a:p>
           <a:p>
             <a:pPr lvl="2"/>
             <a:r>
-              <a:rPr lang="en-US" smtClean="0"/>
+              <a:rPr lang="en-US"/>
               <a:t>Third level</a:t>
             </a:r>
           </a:p>
           <a:p>
             <a:pPr lvl="3"/>
             <a:r>
-              <a:rPr lang="en-US" smtClean="0"/>
+              <a:rPr lang="en-US"/>
               <a:t>Fourth level</a:t>
             </a:r>
           </a:p>
           <a:p>
             <a:pPr lvl="4"/>
             <a:r>
-              <a:rPr lang="en-US" smtClean="0"/>
+              <a:rPr lang="en-US"/>
               <a:t>Fifth level</a:t>
             </a:r>
-            <a:endParaRPr lang="en-US"/>
           </a:p>
         </p:txBody>
       </p:sp>
@@ -3850,7 +3624,7 @@
           <a:p>
             <a:fld id="{5BCAD085-E8A6-8845-BD4E-CB4CCA059FC4}" type="datetimeFigureOut">
               <a:rPr lang="en-US" smtClean="0"/>
-              <a:t>1/27/13</a:t>
+              <a:t>8/18/2026</a:t>
             </a:fld>
             <a:endParaRPr lang="en-US"/>
           </a:p>
@@ -4209,7 +3983,7 @@
 </file>
 
 <file path=ppt/slides/slide1.xml><?xml version="1.0" encoding="utf-8"?>
-<p:sld xmlns:a="http://schemas.openxmlformats.org/drawingml/2006/main" xmlns:p="http://schemas.openxmlformats.org/presentationml/2006/main" xmlns:r="http://schemas.openxmlformats.org/officeDocument/2006/relationships">
+<p:sld xmlns:a="http://schemas.openxmlformats.org/drawingml/2006/main" xmlns:r="http://schemas.openxmlformats.org/officeDocument/2006/relationships" xmlns:p="http://schemas.openxmlformats.org/presentationml/2006/main">
   <p:cSld>
     <p:spTree>
       <p:nvGrpSpPr>
@@ -4217,7 +3991,14 @@
         <p:cNvGrpSpPr/>
         <p:nvPr/>
       </p:nvGrpSpPr>
-      <p:grpSpPr/>
+      <p:grpSpPr>
+        <a:xfrm>
+          <a:off x="0" y="0"/>
+          <a:ext cx="0" cy="0"/>
+          <a:chOff x="0" y="0"/>
+          <a:chExt cx="0" cy="0"/>
+        </a:xfrm>
+      </p:grpSpPr>
       <p:sp>
         <p:nvSpPr>
           <p:cNvPr id="2" name="Rectangle 1"/>
@@ -4259,6 +4040,7 @@
           <a:lstStyle/>
           <a:p>
             <a:pPr algn="ctr"/>
+            <a:endParaRPr/>
           </a:p>
         </p:txBody>
       </p:sp>
@@ -4327,6 +4109,7 @@
           <a:lstStyle/>
           <a:p>
             <a:pPr algn="ctr"/>
+            <a:endParaRPr/>
           </a:p>
         </p:txBody>
       </p:sp>
@@ -4450,7 +4233,7 @@
 </file>
 
 <file path=ppt/slides/slide10.xml><?xml version="1.0" encoding="utf-8"?>
-<p:sld xmlns:a="http://schemas.openxmlformats.org/drawingml/2006/main" xmlns:p="http://schemas.openxmlformats.org/presentationml/2006/main" xmlns:r="http://schemas.openxmlformats.org/officeDocument/2006/relationships">
+<p:sld xmlns:a="http://schemas.openxmlformats.org/drawingml/2006/main" xmlns:r="http://schemas.openxmlformats.org/officeDocument/2006/relationships" xmlns:p="http://schemas.openxmlformats.org/presentationml/2006/main">
   <p:cSld>
     <p:spTree>
       <p:nvGrpSpPr>
@@ -4458,7 +4241,14 @@
         <p:cNvGrpSpPr/>
         <p:nvPr/>
       </p:nvGrpSpPr>
-      <p:grpSpPr/>
+      <p:grpSpPr>
+        <a:xfrm>
+          <a:off x="0" y="0"/>
+          <a:ext cx="0" cy="0"/>
+          <a:chOff x="0" y="0"/>
+          <a:chExt cx="0" cy="0"/>
+        </a:xfrm>
+      </p:grpSpPr>
       <p:sp>
         <p:nvSpPr>
           <p:cNvPr id="2" name="Rectangle 1"/>
@@ -4500,6 +4290,7 @@
           <a:lstStyle/>
           <a:p>
             <a:pPr algn="ctr"/>
+            <a:endParaRPr/>
           </a:p>
         </p:txBody>
       </p:sp>
@@ -4535,7 +4326,7 @@
                 <a:ea typeface="微軟正黑體"/>
                 <a:cs typeface="微軟正黑體"/>
               </a:rPr>
-              <a:t>IMPACT &amp; NEXT｜影響與路線</a:t>
+              <a:t>BUSINESS｜可負擔＋誘因對齊</a:t>
             </a:r>
           </a:p>
         </p:txBody>
@@ -4572,14 +4363,14 @@
                 <a:ea typeface="微軟正黑體"/>
                 <a:cs typeface="微軟正黑體"/>
               </a:rPr>
-              <a:t>每項主張配一個可量測指標</a:t>
+              <a:t>十年成本只要金爐的 1/8</a:t>
             </a:r>
           </a:p>
         </p:txBody>
       </p:sp>
       <p:pic>
         <p:nvPicPr>
-          <p:cNvPr id="5" name="Picture 4" descr="image14.png"/>
+          <p:cNvPr id="5" name="Picture 4" descr="image9.png"/>
           <p:cNvPicPr>
             <a:picLocks noChangeAspect="1"/>
           </p:cNvPicPr>
@@ -4593,8 +4384,8 @@
         </p:blipFill>
         <p:spPr>
           <a:xfrm>
-            <a:off x="502920" y="1920240"/>
-            <a:ext cx="6949440" cy="3429593"/>
+            <a:off x="502920" y="1783080"/>
+            <a:ext cx="7256899" cy="4572000"/>
           </a:xfrm>
           <a:prstGeom prst="rect">
             <a:avLst/>
@@ -4603,20 +4394,186 @@
       </p:pic>
       <p:sp>
         <p:nvSpPr>
-          <p:cNvPr id="6" name="Rectangle 5"/>
+          <p:cNvPr id="6" name="TextBox 5"/>
+          <p:cNvSpPr txBox="1"/>
+          <p:nvPr/>
+        </p:nvSpPr>
+        <p:spPr>
+          <a:xfrm>
+            <a:off x="8092440" y="2103120"/>
+            <a:ext cx="3657600" cy="1463040"/>
+          </a:xfrm>
+          <a:prstGeom prst="rect">
+            <a:avLst/>
+          </a:prstGeom>
+          <a:noFill/>
+        </p:spPr>
+        <p:txBody>
+          <a:bodyPr wrap="square" anchor="t">
+            <a:spAutoFit/>
+          </a:bodyPr>
+          <a:lstStyle/>
+          <a:p>
+            <a:pPr algn="l"/>
+            <a:r>
+              <a:rPr sz="5800" b="1">
+                <a:solidFill>
+                  <a:srgbClr val="9E3B2F"/>
+                </a:solidFill>
+                <a:latin typeface="微軟正黑體"/>
+                <a:ea typeface="微軟正黑體"/>
+                <a:cs typeface="微軟正黑體"/>
+              </a:rPr>
+              <a:t>−87%</a:t>
+            </a:r>
+          </a:p>
+          <a:p>
+            <a:pPr algn="l"/>
+            <a:r>
+              <a:rPr sz="1700" b="0">
+                <a:solidFill>
+                  <a:srgbClr val="33302B"/>
+                </a:solidFill>
+                <a:latin typeface="微軟正黑體"/>
+                <a:ea typeface="微軟正黑體"/>
+                <a:cs typeface="微軟正黑體"/>
+              </a:rPr>
+              <a:t>十年 TCO vs 碳中和金爐</a:t>
+            </a:r>
+          </a:p>
+        </p:txBody>
+      </p:sp>
+      <p:sp>
+        <p:nvSpPr>
+          <p:cNvPr id="7" name="TextBox 6"/>
+          <p:cNvSpPr txBox="1"/>
+          <p:nvPr/>
+        </p:nvSpPr>
+        <p:spPr>
+          <a:xfrm>
+            <a:off x="8092440" y="3840480"/>
+            <a:ext cx="3657600" cy="2194560"/>
+          </a:xfrm>
+          <a:prstGeom prst="rect">
+            <a:avLst/>
+          </a:prstGeom>
+          <a:noFill/>
+        </p:spPr>
+        <p:txBody>
+          <a:bodyPr wrap="square" anchor="t">
+            <a:spAutoFit/>
+          </a:bodyPr>
+          <a:lstStyle/>
+          <a:p>
+            <a:pPr algn="l"/>
+            <a:r>
+              <a:rPr sz="1900" b="1">
+                <a:solidFill>
+                  <a:srgbClr val="33302B"/>
+                </a:solidFill>
+                <a:latin typeface="微軟正黑體"/>
+                <a:ea typeface="微軟正黑體"/>
+                <a:cs typeface="微軟正黑體"/>
+              </a:rPr>
+              <a:t>■ 設備＋年度訂閱制</a:t>
+            </a:r>
+          </a:p>
+          <a:p>
+            <a:pPr algn="l"/>
+            <a:r>
+              <a:rPr sz="1600" b="0">
+                <a:solidFill>
+                  <a:srgbClr val="33302B"/>
+                </a:solidFill>
+                <a:latin typeface="微軟正黑體"/>
+                <a:ea typeface="微軟正黑體"/>
+                <a:cs typeface="微軟正黑體"/>
+              </a:rPr>
+              <a:t>收入與廟宇空品綁定，誘因完全對齊</a:t>
+            </a:r>
+          </a:p>
+          <a:p>
+            <a:pPr algn="l"/>
+            <a:endParaRPr sz="1600" b="0">
+              <a:solidFill>
+                <a:srgbClr val="33302B"/>
+              </a:solidFill>
+              <a:latin typeface="微軟正黑體"/>
+              <a:ea typeface="微軟正黑體"/>
+              <a:cs typeface="微軟正黑體"/>
+            </a:endParaRPr>
+          </a:p>
+          <a:p>
+            <a:pPr algn="l"/>
+            <a:r>
+              <a:rPr sz="1900" b="1">
+                <a:solidFill>
+                  <a:srgbClr val="33302B"/>
+                </a:solidFill>
+                <a:latin typeface="微軟正黑體"/>
+                <a:ea typeface="微軟正黑體"/>
+                <a:cs typeface="微軟正黑體"/>
+              </a:rPr>
+              <a:t>■ TAM 1.2 萬座寺廟</a:t>
+            </a:r>
+          </a:p>
+          <a:p>
+            <a:pPr algn="l"/>
+            <a:r>
+              <a:rPr sz="1600" b="0">
+                <a:solidFill>
+                  <a:srgbClr val="33302B"/>
+                </a:solidFill>
+                <a:latin typeface="微軟正黑體"/>
+                <a:ea typeface="微軟正黑體"/>
+                <a:cs typeface="微軟正黑體"/>
+              </a:rPr>
+              <a:t>SOM 由聯誼會轄下廟宇由下而上試算</a:t>
+            </a:r>
+          </a:p>
+        </p:txBody>
+      </p:sp>
+    </p:spTree>
+  </p:cSld>
+  <p:clrMapOvr>
+    <a:masterClrMapping/>
+  </p:clrMapOvr>
+</p:sld>
+</file>
+
+<file path=ppt/slides/slide11.xml><?xml version="1.0" encoding="utf-8"?>
+<p:sld xmlns:a="http://schemas.openxmlformats.org/drawingml/2006/main" xmlns:r="http://schemas.openxmlformats.org/officeDocument/2006/relationships" xmlns:p="http://schemas.openxmlformats.org/presentationml/2006/main">
+  <p:cSld>
+    <p:spTree>
+      <p:nvGrpSpPr>
+        <p:cNvPr id="1" name=""/>
+        <p:cNvGrpSpPr/>
+        <p:nvPr/>
+      </p:nvGrpSpPr>
+      <p:grpSpPr>
+        <a:xfrm>
+          <a:off x="0" y="0"/>
+          <a:ext cx="0" cy="0"/>
+          <a:chOff x="0" y="0"/>
+          <a:chExt cx="0" cy="0"/>
+        </a:xfrm>
+      </p:grpSpPr>
+      <p:sp>
+        <p:nvSpPr>
+          <p:cNvPr id="2" name="Rectangle 1"/>
           <p:cNvSpPr/>
           <p:nvPr/>
         </p:nvSpPr>
         <p:spPr>
           <a:xfrm>
-            <a:off x="7772400" y="1920240"/>
-            <a:ext cx="3931920" cy="1188720"/>
+            <a:off x="0" y="0"/>
+            <a:ext cx="164592" cy="6858000"/>
           </a:xfrm>
           <a:prstGeom prst="rect">
             <a:avLst/>
           </a:prstGeom>
           <a:solidFill>
-            <a:srgbClr val="F8F4EC"/>
+            <a:srgbClr val="9E3B2F"/>
           </a:solidFill>
           <a:ln>
             <a:noFill/>
@@ -4642,19 +4599,20 @@
           <a:lstStyle/>
           <a:p>
             <a:pPr algn="ctr"/>
-          </a:p>
-        </p:txBody>
-      </p:sp>
-      <p:sp>
-        <p:nvSpPr>
-          <p:cNvPr id="7" name="TextBox 6"/>
+            <a:endParaRPr/>
+          </a:p>
+        </p:txBody>
+      </p:sp>
+      <p:sp>
+        <p:nvSpPr>
+          <p:cNvPr id="3" name="TextBox 2"/>
           <p:cNvSpPr txBox="1"/>
           <p:nvPr/>
         </p:nvSpPr>
         <p:spPr>
           <a:xfrm>
-            <a:off x="7955279" y="2084832"/>
-            <a:ext cx="640080" cy="822960"/>
+            <a:off x="502920" y="292608"/>
+            <a:ext cx="10058400" cy="457200"/>
           </a:xfrm>
           <a:prstGeom prst="rect">
             <a:avLst/>
@@ -4669,7 +4627,7 @@
           <a:p>
             <a:pPr algn="l"/>
             <a:r>
-              <a:rPr sz="3000" b="1">
+              <a:rPr sz="1500" b="1">
                 <a:solidFill>
                   <a:srgbClr val="C9A227"/>
                 </a:solidFill>
@@ -4677,21 +4635,21 @@
                 <a:ea typeface="微軟正黑體"/>
                 <a:cs typeface="微軟正黑體"/>
               </a:rPr>
-              <a:t>①</a:t>
-            </a:r>
-          </a:p>
-        </p:txBody>
-      </p:sp>
-      <p:sp>
-        <p:nvSpPr>
-          <p:cNvPr id="8" name="TextBox 7"/>
+              <a:t>IMPACT &amp; NEXT｜影響與路線</a:t>
+            </a:r>
+          </a:p>
+        </p:txBody>
+      </p:sp>
+      <p:sp>
+        <p:nvSpPr>
+          <p:cNvPr id="4" name="TextBox 3"/>
           <p:cNvSpPr txBox="1"/>
           <p:nvPr/>
         </p:nvSpPr>
         <p:spPr>
           <a:xfrm>
-            <a:off x="8641080" y="2029968"/>
-            <a:ext cx="3017520" cy="457200"/>
+            <a:off x="502920" y="603504"/>
+            <a:ext cx="11155680" cy="914400"/>
           </a:xfrm>
           <a:prstGeom prst="rect">
             <a:avLst/>
@@ -4706,7 +4664,7 @@
           <a:p>
             <a:pPr algn="l"/>
             <a:r>
-              <a:rPr sz="2000" b="1">
+              <a:rPr sz="3300" b="1">
                 <a:solidFill>
                   <a:srgbClr val="33302B"/>
                 </a:solidFill>
@@ -4714,58 +4672,44 @@
                 <a:ea typeface="微軟正黑體"/>
                 <a:cs typeface="微軟正黑體"/>
               </a:rPr>
-              <a:t>示範試點</a:t>
-            </a:r>
-          </a:p>
-        </p:txBody>
-      </p:sp>
-      <p:sp>
-        <p:nvSpPr>
-          <p:cNvPr id="9" name="TextBox 8"/>
-          <p:cNvSpPr txBox="1"/>
-          <p:nvPr/>
-        </p:nvSpPr>
-        <p:spPr>
-          <a:xfrm>
-            <a:off x="8641080" y="2450592"/>
-            <a:ext cx="3017520" cy="640080"/>
-          </a:xfrm>
-          <a:prstGeom prst="rect">
-            <a:avLst/>
-          </a:prstGeom>
-          <a:noFill/>
-        </p:spPr>
-        <p:txBody>
-          <a:bodyPr wrap="square" anchor="t">
-            <a:spAutoFit/>
-          </a:bodyPr>
-          <a:lstStyle/>
-          <a:p>
-            <a:pPr algn="l"/>
-            <a:r>
-              <a:rPr sz="1400" b="0">
-                <a:solidFill>
-                  <a:srgbClr val="8A8377"/>
-                </a:solidFill>
-                <a:latin typeface="微軟正黑體"/>
-                <a:ea typeface="微軟正黑體"/>
-                <a:cs typeface="微軟正黑體"/>
-              </a:rPr>
-              <a:t>一座合作廟宇
-公開實測數據</a:t>
-            </a:r>
-          </a:p>
-        </p:txBody>
-      </p:sp>
-      <p:sp>
-        <p:nvSpPr>
-          <p:cNvPr id="10" name="Rectangle 9"/>
+              <a:t>每項主張配一個可量測指標</a:t>
+            </a:r>
+          </a:p>
+        </p:txBody>
+      </p:sp>
+      <p:pic>
+        <p:nvPicPr>
+          <p:cNvPr id="5" name="Picture 4" descr="image14.png"/>
+          <p:cNvPicPr>
+            <a:picLocks noChangeAspect="1"/>
+          </p:cNvPicPr>
+          <p:nvPr/>
+        </p:nvPicPr>
+        <p:blipFill>
+          <a:blip r:embed="rId3"/>
+          <a:stretch>
+            <a:fillRect/>
+          </a:stretch>
+        </p:blipFill>
+        <p:spPr>
+          <a:xfrm>
+            <a:off x="502920" y="1920240"/>
+            <a:ext cx="6949440" cy="3429593"/>
+          </a:xfrm>
+          <a:prstGeom prst="rect">
+            <a:avLst/>
+          </a:prstGeom>
+        </p:spPr>
+      </p:pic>
+      <p:sp>
+        <p:nvSpPr>
+          <p:cNvPr id="6" name="Rectangle 5"/>
           <p:cNvSpPr/>
           <p:nvPr/>
         </p:nvSpPr>
         <p:spPr>
           <a:xfrm>
-            <a:off x="7772400" y="3337560"/>
+            <a:off x="7772400" y="1920240"/>
             <a:ext cx="3931920" cy="1188720"/>
           </a:xfrm>
           <a:prstGeom prst="rect">
@@ -4798,18 +4742,19 @@
           <a:lstStyle/>
           <a:p>
             <a:pPr algn="ctr"/>
-          </a:p>
-        </p:txBody>
-      </p:sp>
-      <p:sp>
-        <p:nvSpPr>
-          <p:cNvPr id="11" name="TextBox 10"/>
+            <a:endParaRPr/>
+          </a:p>
+        </p:txBody>
+      </p:sp>
+      <p:sp>
+        <p:nvSpPr>
+          <p:cNvPr id="7" name="TextBox 6"/>
           <p:cNvSpPr txBox="1"/>
           <p:nvPr/>
         </p:nvSpPr>
         <p:spPr>
           <a:xfrm>
-            <a:off x="7955279" y="3502152"/>
+            <a:off x="7955279" y="2084832"/>
             <a:ext cx="640080" cy="822960"/>
           </a:xfrm>
           <a:prstGeom prst="rect">
@@ -4833,20 +4778,20 @@
                 <a:ea typeface="微軟正黑體"/>
                 <a:cs typeface="微軟正黑體"/>
               </a:rPr>
-              <a:t>②</a:t>
-            </a:r>
-          </a:p>
-        </p:txBody>
-      </p:sp>
-      <p:sp>
-        <p:nvSpPr>
-          <p:cNvPr id="12" name="TextBox 11"/>
+              <a:t>①</a:t>
+            </a:r>
+          </a:p>
+        </p:txBody>
+      </p:sp>
+      <p:sp>
+        <p:nvSpPr>
+          <p:cNvPr id="8" name="TextBox 7"/>
           <p:cNvSpPr txBox="1"/>
           <p:nvPr/>
         </p:nvSpPr>
         <p:spPr>
           <a:xfrm>
-            <a:off x="8641080" y="3447288"/>
+            <a:off x="8641080" y="2029968"/>
             <a:ext cx="3017520" cy="457200"/>
           </a:xfrm>
           <a:prstGeom prst="rect">
@@ -4870,20 +4815,20 @@
                 <a:ea typeface="微軟正黑體"/>
                 <a:cs typeface="微軟正黑體"/>
               </a:rPr>
-              <a:t>口碑擴散</a:t>
-            </a:r>
-          </a:p>
-        </p:txBody>
-      </p:sp>
-      <p:sp>
-        <p:nvSpPr>
-          <p:cNvPr id="13" name="TextBox 12"/>
+              <a:t>示範試點</a:t>
+            </a:r>
+          </a:p>
+        </p:txBody>
+      </p:sp>
+      <p:sp>
+        <p:nvSpPr>
+          <p:cNvPr id="9" name="TextBox 8"/>
           <p:cNvSpPr txBox="1"/>
           <p:nvPr/>
         </p:nvSpPr>
         <p:spPr>
           <a:xfrm>
-            <a:off x="8641080" y="3867912"/>
+            <a:off x="8641080" y="2450592"/>
             <a:ext cx="3017520" cy="640080"/>
           </a:xfrm>
           <a:prstGeom prst="rect">
@@ -4907,21 +4852,21 @@
                 <a:ea typeface="微軟正黑體"/>
                 <a:cs typeface="微軟正黑體"/>
               </a:rPr>
-              <a:t>聯誼會通路
-首批付費導入</a:t>
-            </a:r>
-          </a:p>
-        </p:txBody>
-      </p:sp>
-      <p:sp>
-        <p:nvSpPr>
-          <p:cNvPr id="14" name="Rectangle 13"/>
+              <a:t>一座合作廟宇
+公開實測數據</a:t>
+            </a:r>
+          </a:p>
+        </p:txBody>
+      </p:sp>
+      <p:sp>
+        <p:nvSpPr>
+          <p:cNvPr id="10" name="Rectangle 9"/>
           <p:cNvSpPr/>
           <p:nvPr/>
         </p:nvSpPr>
         <p:spPr>
           <a:xfrm>
-            <a:off x="7772400" y="4754880"/>
+            <a:off x="7772400" y="3337560"/>
             <a:ext cx="3931920" cy="1188720"/>
           </a:xfrm>
           <a:prstGeom prst="rect">
@@ -4954,18 +4899,19 @@
           <a:lstStyle/>
           <a:p>
             <a:pPr algn="ctr"/>
-          </a:p>
-        </p:txBody>
-      </p:sp>
-      <p:sp>
-        <p:nvSpPr>
-          <p:cNvPr id="15" name="TextBox 14"/>
+            <a:endParaRPr/>
+          </a:p>
+        </p:txBody>
+      </p:sp>
+      <p:sp>
+        <p:nvSpPr>
+          <p:cNvPr id="11" name="TextBox 10"/>
           <p:cNvSpPr txBox="1"/>
           <p:nvPr/>
         </p:nvSpPr>
         <p:spPr>
           <a:xfrm>
-            <a:off x="7955279" y="4919472"/>
+            <a:off x="7955279" y="3502152"/>
             <a:ext cx="640080" cy="822960"/>
           </a:xfrm>
           <a:prstGeom prst="rect">
@@ -4989,20 +4935,20 @@
                 <a:ea typeface="微軟正黑體"/>
                 <a:cs typeface="微軟正黑體"/>
               </a:rPr>
-              <a:t>③</a:t>
-            </a:r>
-          </a:p>
-        </p:txBody>
-      </p:sp>
-      <p:sp>
-        <p:nvSpPr>
-          <p:cNvPr id="16" name="TextBox 15"/>
+              <a:t>②</a:t>
+            </a:r>
+          </a:p>
+        </p:txBody>
+      </p:sp>
+      <p:sp>
+        <p:nvSpPr>
+          <p:cNvPr id="12" name="TextBox 11"/>
           <p:cNvSpPr txBox="1"/>
           <p:nvPr/>
         </p:nvSpPr>
         <p:spPr>
           <a:xfrm>
-            <a:off x="8641080" y="4864608"/>
+            <a:off x="8641080" y="3447288"/>
             <a:ext cx="3017520" cy="457200"/>
           </a:xfrm>
           <a:prstGeom prst="rect">
@@ -5026,20 +4972,20 @@
                 <a:ea typeface="微軟正黑體"/>
                 <a:cs typeface="微軟正黑體"/>
               </a:rPr>
-              <a:t>跨域移植</a:t>
-            </a:r>
-          </a:p>
-        </p:txBody>
-      </p:sp>
-      <p:sp>
-        <p:nvSpPr>
-          <p:cNvPr id="17" name="TextBox 16"/>
+              <a:t>口碑擴散</a:t>
+            </a:r>
+          </a:p>
+        </p:txBody>
+      </p:sp>
+      <p:sp>
+        <p:nvSpPr>
+          <p:cNvPr id="13" name="TextBox 12"/>
           <p:cNvSpPr txBox="1"/>
           <p:nvPr/>
         </p:nvSpPr>
         <p:spPr>
           <a:xfrm>
-            <a:off x="8641080" y="5285232"/>
+            <a:off x="8641080" y="3867912"/>
             <a:ext cx="3017520" cy="640080"/>
           </a:xfrm>
           <a:prstGeom prst="rect">
@@ -5063,46 +5009,28 @@
                 <a:ea typeface="微軟正黑體"/>
                 <a:cs typeface="微軟正黑體"/>
               </a:rPr>
-              <a:t>餐飲油煙・密閉空品
-更大市場</a:t>
-            </a:r>
-          </a:p>
-        </p:txBody>
-      </p:sp>
-    </p:spTree>
-  </p:cSld>
-  <p:clrMapOvr>
-    <a:masterClrMapping/>
-  </p:clrMapOvr>
-</p:sld>
-</file>
-
-<file path=ppt/slides/slide11.xml><?xml version="1.0" encoding="utf-8"?>
-<p:sld xmlns:a="http://schemas.openxmlformats.org/drawingml/2006/main" xmlns:p="http://schemas.openxmlformats.org/presentationml/2006/main" xmlns:r="http://schemas.openxmlformats.org/officeDocument/2006/relationships">
-  <p:cSld>
-    <p:spTree>
-      <p:nvGrpSpPr>
-        <p:cNvPr id="1" name=""/>
-        <p:cNvGrpSpPr/>
-        <p:nvPr/>
-      </p:nvGrpSpPr>
-      <p:grpSpPr/>
-      <p:sp>
-        <p:nvSpPr>
-          <p:cNvPr id="2" name="Rectangle 1"/>
+              <a:t>聯誼會通路
+首批付費導入</a:t>
+            </a:r>
+          </a:p>
+        </p:txBody>
+      </p:sp>
+      <p:sp>
+        <p:nvSpPr>
+          <p:cNvPr id="14" name="Rectangle 13"/>
           <p:cNvSpPr/>
           <p:nvPr/>
         </p:nvSpPr>
         <p:spPr>
           <a:xfrm>
-            <a:off x="0" y="0"/>
-            <a:ext cx="12191695" cy="6858000"/>
+            <a:off x="7772400" y="4754880"/>
+            <a:ext cx="3931920" cy="1188720"/>
           </a:xfrm>
           <a:prstGeom prst="rect">
             <a:avLst/>
           </a:prstGeom>
           <a:solidFill>
-            <a:srgbClr val="2E2A26"/>
+            <a:srgbClr val="F8F4EC"/>
           </a:solidFill>
           <a:ln>
             <a:noFill/>
@@ -5128,19 +5056,20 @@
           <a:lstStyle/>
           <a:p>
             <a:pPr algn="ctr"/>
-          </a:p>
-        </p:txBody>
-      </p:sp>
-      <p:sp>
-        <p:nvSpPr>
-          <p:cNvPr id="3" name="TextBox 2"/>
+            <a:endParaRPr/>
+          </a:p>
+        </p:txBody>
+      </p:sp>
+      <p:sp>
+        <p:nvSpPr>
+          <p:cNvPr id="15" name="TextBox 14"/>
           <p:cNvSpPr txBox="1"/>
           <p:nvPr/>
         </p:nvSpPr>
         <p:spPr>
           <a:xfrm>
-            <a:off x="914400" y="2148840"/>
-            <a:ext cx="10332720" cy="1737360"/>
+            <a:off x="7955279" y="4919472"/>
+            <a:ext cx="640080" cy="822960"/>
           </a:xfrm>
           <a:prstGeom prst="rect">
             <a:avLst/>
@@ -5153,31 +5082,31 @@
           </a:bodyPr>
           <a:lstStyle/>
           <a:p>
-            <a:pPr algn="ctr"/>
-            <a:r>
-              <a:rPr sz="4400" b="1">
-                <a:solidFill>
-                  <a:srgbClr val="FFFFFF"/>
+            <a:pPr algn="l"/>
+            <a:r>
+              <a:rPr sz="3000" b="1">
+                <a:solidFill>
+                  <a:srgbClr val="C9A227"/>
                 </a:solidFill>
                 <a:latin typeface="微軟正黑體"/>
                 <a:ea typeface="微軟正黑體"/>
                 <a:cs typeface="微軟正黑體"/>
               </a:rPr>
-              <a:t>香照燒，神明照拜，煙不見了。</a:t>
-            </a:r>
-          </a:p>
-        </p:txBody>
-      </p:sp>
-      <p:sp>
-        <p:nvSpPr>
-          <p:cNvPr id="4" name="TextBox 3"/>
+              <a:t>③</a:t>
+            </a:r>
+          </a:p>
+        </p:txBody>
+      </p:sp>
+      <p:sp>
+        <p:nvSpPr>
+          <p:cNvPr id="16" name="TextBox 15"/>
           <p:cNvSpPr txBox="1"/>
           <p:nvPr/>
         </p:nvSpPr>
         <p:spPr>
           <a:xfrm>
-            <a:off x="914400" y="3566160"/>
-            <a:ext cx="10332720" cy="914400"/>
+            <a:off x="8641080" y="4864608"/>
+            <a:ext cx="3017520" cy="457200"/>
           </a:xfrm>
           <a:prstGeom prst="rect">
             <a:avLst/>
@@ -5190,31 +5119,31 @@
           </a:bodyPr>
           <a:lstStyle/>
           <a:p>
-            <a:pPr algn="ctr"/>
-            <a:r>
-              <a:rPr sz="3000" b="0">
-                <a:solidFill>
-                  <a:srgbClr val="E8C86A"/>
+            <a:pPr algn="l"/>
+            <a:r>
+              <a:rPr sz="2000" b="1">
+                <a:solidFill>
+                  <a:srgbClr val="33302B"/>
                 </a:solidFill>
                 <a:latin typeface="微軟正黑體"/>
                 <a:ea typeface="微軟正黑體"/>
                 <a:cs typeface="微軟正黑體"/>
               </a:rPr>
-              <a:t>健康跟信仰，不用二選一。</a:t>
-            </a:r>
-          </a:p>
-        </p:txBody>
-      </p:sp>
-      <p:sp>
-        <p:nvSpPr>
-          <p:cNvPr id="5" name="TextBox 4"/>
+              <a:t>跨域移植</a:t>
+            </a:r>
+          </a:p>
+        </p:txBody>
+      </p:sp>
+      <p:sp>
+        <p:nvSpPr>
+          <p:cNvPr id="17" name="TextBox 16"/>
           <p:cNvSpPr txBox="1"/>
           <p:nvPr/>
         </p:nvSpPr>
         <p:spPr>
           <a:xfrm>
-            <a:off x="914400" y="5760720"/>
-            <a:ext cx="10332720" cy="548640"/>
+            <a:off x="8641080" y="5285232"/>
+            <a:ext cx="3017520" cy="640080"/>
           </a:xfrm>
           <a:prstGeom prst="rect">
             <a:avLst/>
@@ -5227,17 +5156,18 @@
           </a:bodyPr>
           <a:lstStyle/>
           <a:p>
-            <a:pPr algn="ctr"/>
-            <a:r>
-              <a:rPr sz="1800" b="0">
-                <a:solidFill>
-                  <a:srgbClr val="AFAFAF"/>
+            <a:pPr algn="l"/>
+            <a:r>
+              <a:rPr sz="1400" b="0">
+                <a:solidFill>
+                  <a:srgbClr val="8A8377"/>
                 </a:solidFill>
                 <a:latin typeface="微軟正黑體"/>
                 <a:ea typeface="微軟正黑體"/>
                 <a:cs typeface="微軟正黑體"/>
               </a:rPr>
-              <a:t>智慧香爐｜有拜有包庇｜謝謝聆聽</a:t>
+              <a:t>餐飲油煙・密閉空品
+更大市場</a:t>
             </a:r>
           </a:p>
         </p:txBody>
@@ -5250,8 +5180,8 @@
 </p:sld>
 </file>
 
-<file path=ppt/slides/slide2.xml><?xml version="1.0" encoding="utf-8"?>
-<p:sld xmlns:a="http://schemas.openxmlformats.org/drawingml/2006/main" xmlns:p="http://schemas.openxmlformats.org/presentationml/2006/main" xmlns:r="http://schemas.openxmlformats.org/officeDocument/2006/relationships">
+<file path=ppt/slides/slide12.xml><?xml version="1.0" encoding="utf-8"?>
+<p:sld xmlns:a="http://schemas.openxmlformats.org/drawingml/2006/main" xmlns:r="http://schemas.openxmlformats.org/officeDocument/2006/relationships" xmlns:p="http://schemas.openxmlformats.org/presentationml/2006/main">
   <p:cSld>
     <p:spTree>
       <p:nvGrpSpPr>
@@ -5259,7 +5189,14 @@
         <p:cNvGrpSpPr/>
         <p:nvPr/>
       </p:nvGrpSpPr>
-      <p:grpSpPr/>
+      <p:grpSpPr>
+        <a:xfrm>
+          <a:off x="0" y="0"/>
+          <a:ext cx="0" cy="0"/>
+          <a:chOff x="0" y="0"/>
+          <a:chExt cx="0" cy="0"/>
+        </a:xfrm>
+      </p:grpSpPr>
       <p:sp>
         <p:nvSpPr>
           <p:cNvPr id="2" name="Rectangle 1"/>
@@ -5269,13 +5206,13 @@
         <p:spPr>
           <a:xfrm>
             <a:off x="0" y="0"/>
-            <a:ext cx="164592" cy="6858000"/>
+            <a:ext cx="12191695" cy="6858000"/>
           </a:xfrm>
           <a:prstGeom prst="rect">
             <a:avLst/>
           </a:prstGeom>
           <a:solidFill>
-            <a:srgbClr val="9E3B2F"/>
+            <a:srgbClr val="2E2A26"/>
           </a:solidFill>
           <a:ln>
             <a:noFill/>
@@ -5301,6 +5238,7 @@
           <a:lstStyle/>
           <a:p>
             <a:pPr algn="ctr"/>
+            <a:endParaRPr/>
           </a:p>
         </p:txBody>
       </p:sp>
@@ -5312,8 +5250,8 @@
         </p:nvSpPr>
         <p:spPr>
           <a:xfrm>
-            <a:off x="502920" y="292608"/>
-            <a:ext cx="10058400" cy="457200"/>
+            <a:off x="914400" y="2148840"/>
+            <a:ext cx="10332720" cy="1737360"/>
           </a:xfrm>
           <a:prstGeom prst="rect">
             <a:avLst/>
@@ -5326,17 +5264,17 @@
           </a:bodyPr>
           <a:lstStyle/>
           <a:p>
-            <a:pPr algn="l"/>
-            <a:r>
-              <a:rPr sz="1500" b="1">
-                <a:solidFill>
-                  <a:srgbClr val="C9A227"/>
+            <a:pPr algn="ctr"/>
+            <a:r>
+              <a:rPr sz="4400" b="1">
+                <a:solidFill>
+                  <a:srgbClr val="FFFFFF"/>
                 </a:solidFill>
                 <a:latin typeface="微軟正黑體"/>
                 <a:ea typeface="微軟正黑體"/>
                 <a:cs typeface="微軟正黑體"/>
               </a:rPr>
-              <a:t>OPENING｜結論先行</a:t>
+              <a:t>香照燒，神明照拜，煙不見了。</a:t>
             </a:r>
           </a:p>
         </p:txBody>
@@ -5349,8 +5287,8 @@
         </p:nvSpPr>
         <p:spPr>
           <a:xfrm>
-            <a:off x="502920" y="603504"/>
-            <a:ext cx="11155680" cy="914400"/>
+            <a:off x="914400" y="3566160"/>
+            <a:ext cx="10332720" cy="914400"/>
           </a:xfrm>
           <a:prstGeom prst="rect">
             <a:avLst/>
@@ -5363,37 +5301,99 @@
           </a:bodyPr>
           <a:lstStyle/>
           <a:p>
-            <a:pPr algn="l"/>
-            <a:r>
-              <a:rPr sz="3300" b="1">
-                <a:solidFill>
-                  <a:srgbClr val="33302B"/>
+            <a:pPr algn="ctr"/>
+            <a:r>
+              <a:rPr sz="3000" b="0">
+                <a:solidFill>
+                  <a:srgbClr val="E8C86A"/>
                 </a:solidFill>
                 <a:latin typeface="微軟正黑體"/>
                 <a:ea typeface="微軟正黑體"/>
                 <a:cs typeface="微軟正黑體"/>
               </a:rPr>
-              <a:t>我們讓香繼續燒，但煙不再害人。</a:t>
-            </a:r>
-          </a:p>
-        </p:txBody>
-      </p:sp>
-      <p:sp>
-        <p:nvSpPr>
-          <p:cNvPr id="5" name="Rectangle 4"/>
+              <a:t>健康跟信仰，不用二選一。</a:t>
+            </a:r>
+          </a:p>
+        </p:txBody>
+      </p:sp>
+      <p:sp>
+        <p:nvSpPr>
+          <p:cNvPr id="5" name="TextBox 4"/>
+          <p:cNvSpPr txBox="1"/>
+          <p:nvPr/>
+        </p:nvSpPr>
+        <p:spPr>
+          <a:xfrm>
+            <a:off x="914400" y="5760720"/>
+            <a:ext cx="10332720" cy="548640"/>
+          </a:xfrm>
+          <a:prstGeom prst="rect">
+            <a:avLst/>
+          </a:prstGeom>
+          <a:noFill/>
+        </p:spPr>
+        <p:txBody>
+          <a:bodyPr wrap="square" anchor="t">
+            <a:spAutoFit/>
+          </a:bodyPr>
+          <a:lstStyle/>
+          <a:p>
+            <a:pPr algn="ctr"/>
+            <a:r>
+              <a:rPr sz="1800" b="0">
+                <a:solidFill>
+                  <a:srgbClr val="AFAFAF"/>
+                </a:solidFill>
+                <a:latin typeface="微軟正黑體"/>
+                <a:ea typeface="微軟正黑體"/>
+                <a:cs typeface="微軟正黑體"/>
+              </a:rPr>
+              <a:t>智慧香爐｜有拜有包庇｜謝謝聆聽</a:t>
+            </a:r>
+          </a:p>
+        </p:txBody>
+      </p:sp>
+    </p:spTree>
+  </p:cSld>
+  <p:clrMapOvr>
+    <a:masterClrMapping/>
+  </p:clrMapOvr>
+</p:sld>
+</file>
+
+<file path=ppt/slides/slide2.xml><?xml version="1.0" encoding="utf-8"?>
+<p:sld xmlns:a="http://schemas.openxmlformats.org/drawingml/2006/main" xmlns:r="http://schemas.openxmlformats.org/officeDocument/2006/relationships" xmlns:p="http://schemas.openxmlformats.org/presentationml/2006/main">
+  <p:cSld>
+    <p:spTree>
+      <p:nvGrpSpPr>
+        <p:cNvPr id="1" name=""/>
+        <p:cNvGrpSpPr/>
+        <p:nvPr/>
+      </p:nvGrpSpPr>
+      <p:grpSpPr>
+        <a:xfrm>
+          <a:off x="0" y="0"/>
+          <a:ext cx="0" cy="0"/>
+          <a:chOff x="0" y="0"/>
+          <a:chExt cx="0" cy="0"/>
+        </a:xfrm>
+      </p:grpSpPr>
+      <p:sp>
+        <p:nvSpPr>
+          <p:cNvPr id="2" name="Rectangle 1"/>
           <p:cNvSpPr/>
           <p:nvPr/>
         </p:nvSpPr>
         <p:spPr>
           <a:xfrm>
-            <a:off x="685800" y="2011680"/>
-            <a:ext cx="3383280" cy="3291840"/>
+            <a:off x="0" y="0"/>
+            <a:ext cx="164592" cy="6858000"/>
           </a:xfrm>
           <a:prstGeom prst="rect">
             <a:avLst/>
           </a:prstGeom>
           <a:solidFill>
-            <a:srgbClr val="F8F4EC"/>
+            <a:srgbClr val="9E3B2F"/>
           </a:solidFill>
           <a:ln>
             <a:noFill/>
@@ -5419,19 +5419,20 @@
           <a:lstStyle/>
           <a:p>
             <a:pPr algn="ctr"/>
-          </a:p>
-        </p:txBody>
-      </p:sp>
-      <p:sp>
-        <p:nvSpPr>
-          <p:cNvPr id="6" name="TextBox 5"/>
+            <a:endParaRPr/>
+          </a:p>
+        </p:txBody>
+      </p:sp>
+      <p:sp>
+        <p:nvSpPr>
+          <p:cNvPr id="3" name="TextBox 2"/>
           <p:cNvSpPr txBox="1"/>
           <p:nvPr/>
         </p:nvSpPr>
         <p:spPr>
           <a:xfrm>
-            <a:off x="685800" y="2514600"/>
-            <a:ext cx="3383280" cy="1280160"/>
+            <a:off x="502920" y="292608"/>
+            <a:ext cx="10058400" cy="457200"/>
           </a:xfrm>
           <a:prstGeom prst="rect">
             <a:avLst/>
@@ -5444,31 +5445,31 @@
           </a:bodyPr>
           <a:lstStyle/>
           <a:p>
-            <a:pPr algn="ctr"/>
-            <a:r>
-              <a:rPr sz="5400" b="1">
-                <a:solidFill>
-                  <a:srgbClr val="9E3B2F"/>
+            <a:pPr algn="l"/>
+            <a:r>
+              <a:rPr sz="1500" b="1">
+                <a:solidFill>
+                  <a:srgbClr val="C9A227"/>
                 </a:solidFill>
                 <a:latin typeface="微軟正黑體"/>
                 <a:ea typeface="微軟正黑體"/>
                 <a:cs typeface="微軟正黑體"/>
               </a:rPr>
-              <a:t>50 倍</a:t>
-            </a:r>
-          </a:p>
-        </p:txBody>
-      </p:sp>
-      <p:sp>
-        <p:nvSpPr>
-          <p:cNvPr id="7" name="TextBox 6"/>
+              <a:t>OPENING｜結論先行</a:t>
+            </a:r>
+          </a:p>
+        </p:txBody>
+      </p:sp>
+      <p:sp>
+        <p:nvSpPr>
+          <p:cNvPr id="4" name="TextBox 3"/>
           <p:cNvSpPr txBox="1"/>
           <p:nvPr/>
         </p:nvSpPr>
         <p:spPr>
           <a:xfrm>
-            <a:off x="685800" y="3886200"/>
-            <a:ext cx="3383280" cy="1280160"/>
+            <a:off x="502920" y="603504"/>
+            <a:ext cx="11155680" cy="914400"/>
           </a:xfrm>
           <a:prstGeom prst="rect">
             <a:avLst/>
@@ -5481,9 +5482,9 @@
           </a:bodyPr>
           <a:lstStyle/>
           <a:p>
-            <a:pPr algn="ctr"/>
-            <a:r>
-              <a:rPr sz="1700" b="0">
+            <a:pPr algn="l"/>
+            <a:r>
+              <a:rPr sz="3300" b="1">
                 <a:solidFill>
                   <a:srgbClr val="33302B"/>
                 </a:solidFill>
@@ -5491,21 +5492,20 @@
                 <a:ea typeface="微軟正黑體"/>
                 <a:cs typeface="微軟正黑體"/>
               </a:rPr>
-              <a:t>殿內 PM2.5 一度達戶外 50 倍
-（龍山寺實測 1,360 μg/m³）</a:t>
-            </a:r>
-          </a:p>
-        </p:txBody>
-      </p:sp>
-      <p:sp>
-        <p:nvSpPr>
-          <p:cNvPr id="8" name="Rectangle 7"/>
+              <a:t>我們讓香繼續燒，但煙不再害人。</a:t>
+            </a:r>
+          </a:p>
+        </p:txBody>
+      </p:sp>
+      <p:sp>
+        <p:nvSpPr>
+          <p:cNvPr id="5" name="Rectangle 4"/>
           <p:cNvSpPr/>
           <p:nvPr/>
         </p:nvSpPr>
         <p:spPr>
           <a:xfrm>
-            <a:off x="4526280" y="2011680"/>
+            <a:off x="685800" y="2011680"/>
             <a:ext cx="3383280" cy="3291840"/>
           </a:xfrm>
           <a:prstGeom prst="rect">
@@ -5538,18 +5538,19 @@
           <a:lstStyle/>
           <a:p>
             <a:pPr algn="ctr"/>
-          </a:p>
-        </p:txBody>
-      </p:sp>
-      <p:sp>
-        <p:nvSpPr>
-          <p:cNvPr id="9" name="TextBox 8"/>
+            <a:endParaRPr/>
+          </a:p>
+        </p:txBody>
+      </p:sp>
+      <p:sp>
+        <p:nvSpPr>
+          <p:cNvPr id="6" name="TextBox 5"/>
           <p:cNvSpPr txBox="1"/>
           <p:nvPr/>
         </p:nvSpPr>
         <p:spPr>
           <a:xfrm>
-            <a:off x="4526280" y="2514600"/>
+            <a:off x="685800" y="2514600"/>
             <a:ext cx="3383280" cy="1280160"/>
           </a:xfrm>
           <a:prstGeom prst="rect">
@@ -5573,20 +5574,20 @@
                 <a:ea typeface="微軟正黑體"/>
                 <a:cs typeface="微軟正黑體"/>
               </a:rPr>
-              <a:t>17 億+</a:t>
-            </a:r>
-          </a:p>
-        </p:txBody>
-      </p:sp>
-      <p:sp>
-        <p:nvSpPr>
-          <p:cNvPr id="10" name="TextBox 9"/>
+              <a:t>50 倍</a:t>
+            </a:r>
+          </a:p>
+        </p:txBody>
+      </p:sp>
+      <p:sp>
+        <p:nvSpPr>
+          <p:cNvPr id="7" name="TextBox 6"/>
           <p:cNvSpPr txBox="1"/>
           <p:nvPr/>
         </p:nvSpPr>
         <p:spPr>
           <a:xfrm>
-            <a:off x="4526280" y="3886200"/>
+            <a:off x="685800" y="3886200"/>
             <a:ext cx="3383280" cy="1280160"/>
           </a:xfrm>
           <a:prstGeom prst="rect">
@@ -5610,21 +5611,21 @@
                 <a:ea typeface="微軟正黑體"/>
                 <a:cs typeface="微軟正黑體"/>
               </a:rPr>
-              <a:t>印度教＋佛教信仰人口
-道教與民間信仰另計</a:t>
-            </a:r>
-          </a:p>
-        </p:txBody>
-      </p:sp>
-      <p:sp>
-        <p:nvSpPr>
-          <p:cNvPr id="11" name="Rectangle 10"/>
+              <a:t>殿內 PM2.5 一度達戶外 50 倍
+（龍山寺實測 1,360 μg/m³）</a:t>
+            </a:r>
+          </a:p>
+        </p:txBody>
+      </p:sp>
+      <p:sp>
+        <p:nvSpPr>
+          <p:cNvPr id="8" name="Rectangle 7"/>
           <p:cNvSpPr/>
           <p:nvPr/>
         </p:nvSpPr>
         <p:spPr>
           <a:xfrm>
-            <a:off x="8366760" y="2011680"/>
+            <a:off x="4526280" y="2011680"/>
             <a:ext cx="3383280" cy="3291840"/>
           </a:xfrm>
           <a:prstGeom prst="rect">
@@ -5657,18 +5658,19 @@
           <a:lstStyle/>
           <a:p>
             <a:pPr algn="ctr"/>
-          </a:p>
-        </p:txBody>
-      </p:sp>
-      <p:sp>
-        <p:nvSpPr>
-          <p:cNvPr id="12" name="TextBox 11"/>
+            <a:endParaRPr/>
+          </a:p>
+        </p:txBody>
+      </p:sp>
+      <p:sp>
+        <p:nvSpPr>
+          <p:cNvPr id="9" name="TextBox 8"/>
           <p:cNvSpPr txBox="1"/>
           <p:nvPr/>
         </p:nvSpPr>
         <p:spPr>
           <a:xfrm>
-            <a:off x="8366760" y="2514600"/>
+            <a:off x="4526280" y="2514600"/>
             <a:ext cx="3383280" cy="1280160"/>
           </a:xfrm>
           <a:prstGeom prst="rect">
@@ -5692,20 +5694,20 @@
                 <a:ea typeface="微軟正黑體"/>
                 <a:cs typeface="微軟正黑體"/>
               </a:rPr>
-              <a:t>3,000+ 件</a:t>
-            </a:r>
-          </a:p>
-        </p:txBody>
-      </p:sp>
-      <p:sp>
-        <p:nvSpPr>
-          <p:cNvPr id="13" name="TextBox 12"/>
+              <a:t>17 億+</a:t>
+            </a:r>
+          </a:p>
+        </p:txBody>
+      </p:sp>
+      <p:sp>
+        <p:nvSpPr>
+          <p:cNvPr id="10" name="TextBox 9"/>
           <p:cNvSpPr txBox="1"/>
           <p:nvPr/>
         </p:nvSpPr>
         <p:spPr>
           <a:xfrm>
-            <a:off x="8366760" y="3886200"/>
+            <a:off x="4526280" y="3886200"/>
             <a:ext cx="3383280" cy="1280160"/>
           </a:xfrm>
           <a:prstGeom prst="rect">
@@ -5729,83 +5731,28 @@
                 <a:ea typeface="微軟正黑體"/>
                 <a:cs typeface="微軟正黑體"/>
               </a:rPr>
-              <a:t>環保署每年宮廟
-空污陳情案件</a:t>
-            </a:r>
-          </a:p>
-        </p:txBody>
-      </p:sp>
-      <p:sp>
-        <p:nvSpPr>
-          <p:cNvPr id="14" name="TextBox 13"/>
-          <p:cNvSpPr txBox="1"/>
-          <p:nvPr/>
-        </p:nvSpPr>
-        <p:spPr>
-          <a:xfrm>
-            <a:off x="685800" y="5806440"/>
-            <a:ext cx="10972800" cy="548640"/>
-          </a:xfrm>
-          <a:prstGeom prst="rect">
-            <a:avLst/>
-          </a:prstGeom>
-          <a:noFill/>
-        </p:spPr>
-        <p:txBody>
-          <a:bodyPr wrap="square" anchor="t">
-            <a:spAutoFit/>
-          </a:bodyPr>
-          <a:lstStyle/>
-          <a:p>
-            <a:pPr algn="l"/>
-            <a:r>
-              <a:rPr sz="1300" b="0">
-                <a:solidFill>
-                  <a:srgbClr val="8A8377"/>
-                </a:solidFill>
-                <a:latin typeface="微軟正黑體"/>
-                <a:ea typeface="微軟正黑體"/>
-                <a:cs typeface="微軟正黑體"/>
-              </a:rPr>
-              <a:t>來源：台大公衛實測（公視 2015）、AAQR 2022 同儕審查研究、環保署統計——完整出處見計畫書。</a:t>
-            </a:r>
-          </a:p>
-        </p:txBody>
-      </p:sp>
-    </p:spTree>
-  </p:cSld>
-  <p:clrMapOvr>
-    <a:masterClrMapping/>
-  </p:clrMapOvr>
-</p:sld>
-</file>
-
-<file path=ppt/slides/slide3.xml><?xml version="1.0" encoding="utf-8"?>
-<p:sld xmlns:a="http://schemas.openxmlformats.org/drawingml/2006/main" xmlns:p="http://schemas.openxmlformats.org/presentationml/2006/main" xmlns:r="http://schemas.openxmlformats.org/officeDocument/2006/relationships">
-  <p:cSld>
-    <p:spTree>
-      <p:nvGrpSpPr>
-        <p:cNvPr id="1" name=""/>
-        <p:cNvGrpSpPr/>
-        <p:nvPr/>
-      </p:nvGrpSpPr>
-      <p:grpSpPr/>
-      <p:sp>
-        <p:nvSpPr>
-          <p:cNvPr id="2" name="Rectangle 1"/>
+              <a:t>印度教＋佛教信仰人口
+道教與民間信仰另計</a:t>
+            </a:r>
+          </a:p>
+        </p:txBody>
+      </p:sp>
+      <p:sp>
+        <p:nvSpPr>
+          <p:cNvPr id="11" name="Rectangle 10"/>
           <p:cNvSpPr/>
           <p:nvPr/>
         </p:nvSpPr>
         <p:spPr>
           <a:xfrm>
-            <a:off x="0" y="0"/>
-            <a:ext cx="164592" cy="6858000"/>
+            <a:off x="8366760" y="2011680"/>
+            <a:ext cx="3383280" cy="3291840"/>
           </a:xfrm>
           <a:prstGeom prst="rect">
             <a:avLst/>
           </a:prstGeom>
           <a:solidFill>
-            <a:srgbClr val="9E3B2F"/>
+            <a:srgbClr val="F8F4EC"/>
           </a:solidFill>
           <a:ln>
             <a:noFill/>
@@ -5831,19 +5778,20 @@
           <a:lstStyle/>
           <a:p>
             <a:pPr algn="ctr"/>
-          </a:p>
-        </p:txBody>
-      </p:sp>
-      <p:sp>
-        <p:nvSpPr>
-          <p:cNvPr id="3" name="TextBox 2"/>
+            <a:endParaRPr/>
+          </a:p>
+        </p:txBody>
+      </p:sp>
+      <p:sp>
+        <p:nvSpPr>
+          <p:cNvPr id="12" name="TextBox 11"/>
           <p:cNvSpPr txBox="1"/>
           <p:nvPr/>
         </p:nvSpPr>
         <p:spPr>
           <a:xfrm>
-            <a:off x="502920" y="292608"/>
-            <a:ext cx="10058400" cy="457200"/>
+            <a:off x="8366760" y="2514600"/>
+            <a:ext cx="3383280" cy="1280160"/>
           </a:xfrm>
           <a:prstGeom prst="rect">
             <a:avLst/>
@@ -5856,31 +5804,31 @@
           </a:bodyPr>
           <a:lstStyle/>
           <a:p>
-            <a:pPr algn="l"/>
-            <a:r>
-              <a:rPr sz="1500" b="1">
-                <a:solidFill>
-                  <a:srgbClr val="C9A227"/>
+            <a:pPr algn="ctr"/>
+            <a:r>
+              <a:rPr sz="5400" b="1">
+                <a:solidFill>
+                  <a:srgbClr val="9E3B2F"/>
                 </a:solidFill>
                 <a:latin typeface="微軟正黑體"/>
                 <a:ea typeface="微軟正黑體"/>
                 <a:cs typeface="微軟正黑體"/>
               </a:rPr>
-              <a:t>PROBLEM｜為什麼過去都失敗</a:t>
-            </a:r>
-          </a:p>
-        </p:txBody>
-      </p:sp>
-      <p:sp>
-        <p:nvSpPr>
-          <p:cNvPr id="4" name="TextBox 3"/>
+              <a:t>3,000+ 件</a:t>
+            </a:r>
+          </a:p>
+        </p:txBody>
+      </p:sp>
+      <p:sp>
+        <p:nvSpPr>
+          <p:cNvPr id="13" name="TextBox 12"/>
           <p:cNvSpPr txBox="1"/>
           <p:nvPr/>
         </p:nvSpPr>
         <p:spPr>
           <a:xfrm>
-            <a:off x="502920" y="603504"/>
-            <a:ext cx="11155680" cy="914400"/>
+            <a:off x="8366760" y="3886200"/>
+            <a:ext cx="3383280" cy="1280160"/>
           </a:xfrm>
           <a:prstGeom prst="rect">
             <a:avLst/>
@@ -5893,9 +5841,9 @@
           </a:bodyPr>
           <a:lstStyle/>
           <a:p>
-            <a:pPr algn="l"/>
-            <a:r>
-              <a:rPr sz="3300" b="1">
+            <a:pPr algn="ctr"/>
+            <a:r>
+              <a:rPr sz="1700" b="0">
                 <a:solidFill>
                   <a:srgbClr val="33302B"/>
                 </a:solidFill>
@@ -5903,27 +5851,90 @@
                 <a:ea typeface="微軟正黑體"/>
                 <a:cs typeface="微軟正黑體"/>
               </a:rPr>
-              <a:t>既有方案：不是傷信仰，就是買不起</a:t>
-            </a:r>
-          </a:p>
-        </p:txBody>
-      </p:sp>
-      <p:sp>
-        <p:nvSpPr>
-          <p:cNvPr id="5" name="Rectangle 4"/>
+              <a:t>環保署每年宮廟
+空污陳情案件</a:t>
+            </a:r>
+          </a:p>
+        </p:txBody>
+      </p:sp>
+      <p:sp>
+        <p:nvSpPr>
+          <p:cNvPr id="14" name="TextBox 13"/>
+          <p:cNvSpPr txBox="1"/>
+          <p:nvPr/>
+        </p:nvSpPr>
+        <p:spPr>
+          <a:xfrm>
+            <a:off x="685800" y="5806440"/>
+            <a:ext cx="10972800" cy="548640"/>
+          </a:xfrm>
+          <a:prstGeom prst="rect">
+            <a:avLst/>
+          </a:prstGeom>
+          <a:noFill/>
+        </p:spPr>
+        <p:txBody>
+          <a:bodyPr wrap="square" anchor="t">
+            <a:spAutoFit/>
+          </a:bodyPr>
+          <a:lstStyle/>
+          <a:p>
+            <a:pPr algn="l"/>
+            <a:r>
+              <a:rPr sz="1300" b="0">
+                <a:solidFill>
+                  <a:srgbClr val="8A8377"/>
+                </a:solidFill>
+                <a:latin typeface="微軟正黑體"/>
+                <a:ea typeface="微軟正黑體"/>
+                <a:cs typeface="微軟正黑體"/>
+              </a:rPr>
+              <a:t>來源：台大公衛實測（公視 2015）、AAQR 2022 同儕審查研究、環保署統計——完整出處見計畫書。</a:t>
+            </a:r>
+          </a:p>
+        </p:txBody>
+      </p:sp>
+    </p:spTree>
+  </p:cSld>
+  <p:clrMapOvr>
+    <a:masterClrMapping/>
+  </p:clrMapOvr>
+</p:sld>
+</file>
+
+<file path=ppt/slides/slide3.xml><?xml version="1.0" encoding="utf-8"?>
+<p:sld xmlns:a="http://schemas.openxmlformats.org/drawingml/2006/main" xmlns:r="http://schemas.openxmlformats.org/officeDocument/2006/relationships" xmlns:p="http://schemas.openxmlformats.org/presentationml/2006/main">
+  <p:cSld>
+    <p:spTree>
+      <p:nvGrpSpPr>
+        <p:cNvPr id="1" name=""/>
+        <p:cNvGrpSpPr/>
+        <p:nvPr/>
+      </p:nvGrpSpPr>
+      <p:grpSpPr>
+        <a:xfrm>
+          <a:off x="0" y="0"/>
+          <a:ext cx="0" cy="0"/>
+          <a:chOff x="0" y="0"/>
+          <a:chExt cx="0" cy="0"/>
+        </a:xfrm>
+      </p:grpSpPr>
+      <p:sp>
+        <p:nvSpPr>
+          <p:cNvPr id="2" name="Rectangle 1"/>
           <p:cNvSpPr/>
           <p:nvPr/>
         </p:nvSpPr>
         <p:spPr>
           <a:xfrm>
-            <a:off x="685800" y="1965960"/>
-            <a:ext cx="2926080" cy="868680"/>
+            <a:off x="0" y="0"/>
+            <a:ext cx="164592" cy="6858000"/>
           </a:xfrm>
           <a:prstGeom prst="rect">
             <a:avLst/>
           </a:prstGeom>
           <a:solidFill>
-            <a:srgbClr val="F8F4EC"/>
+            <a:srgbClr val="9E3B2F"/>
           </a:solidFill>
           <a:ln>
             <a:noFill/>
@@ -5949,19 +5960,20 @@
           <a:lstStyle/>
           <a:p>
             <a:pPr algn="ctr"/>
-          </a:p>
-        </p:txBody>
-      </p:sp>
-      <p:sp>
-        <p:nvSpPr>
-          <p:cNvPr id="6" name="TextBox 5"/>
+            <a:endParaRPr/>
+          </a:p>
+        </p:txBody>
+      </p:sp>
+      <p:sp>
+        <p:nvSpPr>
+          <p:cNvPr id="3" name="TextBox 2"/>
           <p:cNvSpPr txBox="1"/>
           <p:nvPr/>
         </p:nvSpPr>
         <p:spPr>
           <a:xfrm>
-            <a:off x="868680" y="2167128"/>
-            <a:ext cx="2743200" cy="548640"/>
+            <a:off x="502920" y="292608"/>
+            <a:ext cx="10058400" cy="457200"/>
           </a:xfrm>
           <a:prstGeom prst="rect">
             <a:avLst/>
@@ -5976,29 +5988,29 @@
           <a:p>
             <a:pPr algn="l"/>
             <a:r>
-              <a:rPr sz="2100" b="1">
-                <a:solidFill>
-                  <a:srgbClr val="33302B"/>
+              <a:rPr sz="1500" b="1">
+                <a:solidFill>
+                  <a:srgbClr val="C9A227"/>
                 </a:solidFill>
                 <a:latin typeface="微軟正黑體"/>
                 <a:ea typeface="微軟正黑體"/>
                 <a:cs typeface="微軟正黑體"/>
               </a:rPr>
-              <a:t>封爐・減香</a:t>
-            </a:r>
-          </a:p>
-        </p:txBody>
-      </p:sp>
-      <p:sp>
-        <p:nvSpPr>
-          <p:cNvPr id="7" name="TextBox 6"/>
+              <a:t>PROBLEM｜為什麼過去都失敗</a:t>
+            </a:r>
+          </a:p>
+        </p:txBody>
+      </p:sp>
+      <p:sp>
+        <p:nvSpPr>
+          <p:cNvPr id="4" name="TextBox 3"/>
           <p:cNvSpPr txBox="1"/>
           <p:nvPr/>
         </p:nvSpPr>
         <p:spPr>
           <a:xfrm>
-            <a:off x="3886200" y="2167128"/>
-            <a:ext cx="4937760" cy="548640"/>
+            <a:off x="502920" y="603504"/>
+            <a:ext cx="11155680" cy="914400"/>
           </a:xfrm>
           <a:prstGeom prst="rect">
             <a:avLst/>
@@ -6013,7 +6025,7 @@
           <a:p>
             <a:pPr algn="l"/>
             <a:r>
-              <a:rPr sz="1900" b="0">
+              <a:rPr sz="3300" b="1">
                 <a:solidFill>
                   <a:srgbClr val="33302B"/>
                 </a:solidFill>
@@ -6021,57 +6033,20 @@
                 <a:ea typeface="微軟正黑體"/>
                 <a:cs typeface="微軟正黑體"/>
               </a:rPr>
-              <a:t>叫人改變信仰 → 2017 年凱道抗爭</a:t>
-            </a:r>
-          </a:p>
-        </p:txBody>
-      </p:sp>
-      <p:sp>
-        <p:nvSpPr>
-          <p:cNvPr id="8" name="TextBox 7"/>
-          <p:cNvSpPr txBox="1"/>
-          <p:nvPr/>
-        </p:nvSpPr>
-        <p:spPr>
-          <a:xfrm>
-            <a:off x="8869680" y="2167128"/>
-            <a:ext cx="2926080" cy="548640"/>
-          </a:xfrm>
-          <a:prstGeom prst="rect">
-            <a:avLst/>
-          </a:prstGeom>
-          <a:noFill/>
-        </p:spPr>
-        <p:txBody>
-          <a:bodyPr wrap="square" anchor="t">
-            <a:spAutoFit/>
-          </a:bodyPr>
-          <a:lstStyle/>
-          <a:p>
-            <a:pPr algn="l"/>
-            <a:r>
-              <a:rPr sz="1900" b="1">
-                <a:solidFill>
-                  <a:srgbClr val="9E3B2F"/>
-                </a:solidFill>
-                <a:latin typeface="微軟正黑體"/>
-                <a:ea typeface="微軟正黑體"/>
-                <a:cs typeface="微軟正黑體"/>
-              </a:rPr>
-              <a:t>儀式被犧牲</a:t>
-            </a:r>
-          </a:p>
-        </p:txBody>
-      </p:sp>
-      <p:sp>
-        <p:nvSpPr>
-          <p:cNvPr id="9" name="Rectangle 8"/>
+              <a:t>既有方案：不是傷信仰，就是買不起</a:t>
+            </a:r>
+          </a:p>
+        </p:txBody>
+      </p:sp>
+      <p:sp>
+        <p:nvSpPr>
+          <p:cNvPr id="5" name="Rectangle 4"/>
           <p:cNvSpPr/>
           <p:nvPr/>
         </p:nvSpPr>
         <p:spPr>
           <a:xfrm>
-            <a:off x="685800" y="3017520"/>
+            <a:off x="685800" y="1965960"/>
             <a:ext cx="2926080" cy="868680"/>
           </a:xfrm>
           <a:prstGeom prst="rect">
@@ -6104,18 +6079,19 @@
           <a:lstStyle/>
           <a:p>
             <a:pPr algn="ctr"/>
-          </a:p>
-        </p:txBody>
-      </p:sp>
-      <p:sp>
-        <p:nvSpPr>
-          <p:cNvPr id="10" name="TextBox 9"/>
+            <a:endParaRPr/>
+          </a:p>
+        </p:txBody>
+      </p:sp>
+      <p:sp>
+        <p:nvSpPr>
+          <p:cNvPr id="6" name="TextBox 5"/>
           <p:cNvSpPr txBox="1"/>
           <p:nvPr/>
         </p:nvSpPr>
         <p:spPr>
           <a:xfrm>
-            <a:off x="868680" y="3218688"/>
+            <a:off x="868680" y="2167128"/>
             <a:ext cx="2743200" cy="548640"/>
           </a:xfrm>
           <a:prstGeom prst="rect">
@@ -6139,20 +6115,20 @@
                 <a:ea typeface="微軟正黑體"/>
                 <a:cs typeface="微軟正黑體"/>
               </a:rPr>
-              <a:t>碳中和金爐</a:t>
-            </a:r>
-          </a:p>
-        </p:txBody>
-      </p:sp>
-      <p:sp>
-        <p:nvSpPr>
-          <p:cNvPr id="11" name="TextBox 10"/>
+              <a:t>封爐・減香</a:t>
+            </a:r>
+          </a:p>
+        </p:txBody>
+      </p:sp>
+      <p:sp>
+        <p:nvSpPr>
+          <p:cNvPr id="7" name="TextBox 6"/>
           <p:cNvSpPr txBox="1"/>
           <p:nvPr/>
         </p:nvSpPr>
         <p:spPr>
           <a:xfrm>
-            <a:off x="3886200" y="3218688"/>
+            <a:off x="3886200" y="2167128"/>
             <a:ext cx="4937760" cy="548640"/>
           </a:xfrm>
           <a:prstGeom prst="rect">
@@ -6176,20 +6152,20 @@
                 <a:ea typeface="微軟正黑體"/>
                 <a:cs typeface="微軟正黑體"/>
               </a:rPr>
-              <a:t>有效，但約 500 萬元</a:t>
-            </a:r>
-          </a:p>
-        </p:txBody>
-      </p:sp>
-      <p:sp>
-        <p:nvSpPr>
-          <p:cNvPr id="12" name="TextBox 11"/>
+              <a:t>叫人改變信仰 → 2017 年凱道抗爭</a:t>
+            </a:r>
+          </a:p>
+        </p:txBody>
+      </p:sp>
+      <p:sp>
+        <p:nvSpPr>
+          <p:cNvPr id="8" name="TextBox 7"/>
           <p:cNvSpPr txBox="1"/>
           <p:nvPr/>
         </p:nvSpPr>
         <p:spPr>
           <a:xfrm>
-            <a:off x="8869680" y="3218688"/>
+            <a:off x="8869680" y="2167128"/>
             <a:ext cx="2926080" cy="548640"/>
           </a:xfrm>
           <a:prstGeom prst="rect">
@@ -6213,20 +6189,20 @@
                 <a:ea typeface="微軟正黑體"/>
                 <a:cs typeface="微軟正黑體"/>
               </a:rPr>
-              <a:t>中小廟宇買不起</a:t>
-            </a:r>
-          </a:p>
-        </p:txBody>
-      </p:sp>
-      <p:sp>
-        <p:nvSpPr>
-          <p:cNvPr id="13" name="Rectangle 12"/>
+              <a:t>儀式被犧牲</a:t>
+            </a:r>
+          </a:p>
+        </p:txBody>
+      </p:sp>
+      <p:sp>
+        <p:nvSpPr>
+          <p:cNvPr id="9" name="Rectangle 8"/>
           <p:cNvSpPr/>
           <p:nvPr/>
         </p:nvSpPr>
         <p:spPr>
           <a:xfrm>
-            <a:off x="685800" y="4069079"/>
+            <a:off x="685800" y="3017520"/>
             <a:ext cx="2926080" cy="868680"/>
           </a:xfrm>
           <a:prstGeom prst="rect">
@@ -6259,18 +6235,19 @@
           <a:lstStyle/>
           <a:p>
             <a:pPr algn="ctr"/>
-          </a:p>
-        </p:txBody>
-      </p:sp>
-      <p:sp>
-        <p:nvSpPr>
-          <p:cNvPr id="14" name="TextBox 13"/>
+            <a:endParaRPr/>
+          </a:p>
+        </p:txBody>
+      </p:sp>
+      <p:sp>
+        <p:nvSpPr>
+          <p:cNvPr id="10" name="TextBox 9"/>
           <p:cNvSpPr txBox="1"/>
           <p:nvPr/>
         </p:nvSpPr>
         <p:spPr>
           <a:xfrm>
-            <a:off x="868680" y="4270247"/>
+            <a:off x="868680" y="3218688"/>
             <a:ext cx="2743200" cy="548640"/>
           </a:xfrm>
           <a:prstGeom prst="rect">
@@ -6294,20 +6271,20 @@
                 <a:ea typeface="微軟正黑體"/>
                 <a:cs typeface="微軟正黑體"/>
               </a:rPr>
-              <a:t>清淨機／IoT 監測</a:t>
-            </a:r>
-          </a:p>
-        </p:txBody>
-      </p:sp>
-      <p:sp>
-        <p:nvSpPr>
-          <p:cNvPr id="15" name="TextBox 14"/>
+              <a:t>碳中和金爐</a:t>
+            </a:r>
+          </a:p>
+        </p:txBody>
+      </p:sp>
+      <p:sp>
+        <p:nvSpPr>
+          <p:cNvPr id="11" name="TextBox 10"/>
           <p:cNvSpPr txBox="1"/>
           <p:nvPr/>
         </p:nvSpPr>
         <p:spPr>
           <a:xfrm>
-            <a:off x="3886200" y="4270247"/>
+            <a:off x="3886200" y="3218688"/>
             <a:ext cx="4937760" cy="548640"/>
           </a:xfrm>
           <a:prstGeom prst="rect">
@@ -6331,20 +6308,20 @@
                 <a:ea typeface="微軟正黑體"/>
                 <a:cs typeface="微軟正黑體"/>
               </a:rPr>
-              <a:t>管不到爐口／只量測不治理</a:t>
-            </a:r>
-          </a:p>
-        </p:txBody>
-      </p:sp>
-      <p:sp>
-        <p:nvSpPr>
-          <p:cNvPr id="16" name="TextBox 15"/>
+              <a:t>有效，但約 500 萬元</a:t>
+            </a:r>
+          </a:p>
+        </p:txBody>
+      </p:sp>
+      <p:sp>
+        <p:nvSpPr>
+          <p:cNvPr id="12" name="TextBox 11"/>
           <p:cNvSpPr txBox="1"/>
           <p:nvPr/>
         </p:nvSpPr>
         <p:spPr>
           <a:xfrm>
-            <a:off x="8869680" y="4270247"/>
+            <a:off x="8869680" y="3218688"/>
             <a:ext cx="2926080" cy="548640"/>
           </a:xfrm>
           <a:prstGeom prst="rect">
@@ -6368,27 +6345,27 @@
                 <a:ea typeface="微軟正黑體"/>
                 <a:cs typeface="微軟正黑體"/>
               </a:rPr>
-              <a:t>治標不治本</a:t>
-            </a:r>
-          </a:p>
-        </p:txBody>
-      </p:sp>
-      <p:sp>
-        <p:nvSpPr>
-          <p:cNvPr id="17" name="Rectangle 16"/>
+              <a:t>中小廟宇買不起</a:t>
+            </a:r>
+          </a:p>
+        </p:txBody>
+      </p:sp>
+      <p:sp>
+        <p:nvSpPr>
+          <p:cNvPr id="13" name="Rectangle 12"/>
           <p:cNvSpPr/>
           <p:nvPr/>
         </p:nvSpPr>
         <p:spPr>
           <a:xfrm>
-            <a:off x="685800" y="5349240"/>
-            <a:ext cx="10881360" cy="960120"/>
+            <a:off x="685800" y="4069079"/>
+            <a:ext cx="2926080" cy="868680"/>
           </a:xfrm>
           <a:prstGeom prst="rect">
             <a:avLst/>
           </a:prstGeom>
           <a:solidFill>
-            <a:srgbClr val="9E3B2F"/>
+            <a:srgbClr val="F8F4EC"/>
           </a:solidFill>
           <a:ln>
             <a:noFill/>
@@ -6414,19 +6391,20 @@
           <a:lstStyle/>
           <a:p>
             <a:pPr algn="ctr"/>
-          </a:p>
-        </p:txBody>
-      </p:sp>
-      <p:sp>
-        <p:nvSpPr>
-          <p:cNvPr id="18" name="TextBox 17"/>
+            <a:endParaRPr/>
+          </a:p>
+        </p:txBody>
+      </p:sp>
+      <p:sp>
+        <p:nvSpPr>
+          <p:cNvPr id="14" name="TextBox 13"/>
           <p:cNvSpPr txBox="1"/>
           <p:nvPr/>
         </p:nvSpPr>
         <p:spPr>
           <a:xfrm>
-            <a:off x="685800" y="5532120"/>
-            <a:ext cx="10881360" cy="640080"/>
+            <a:off x="868680" y="4270247"/>
+            <a:ext cx="2743200" cy="548640"/>
           </a:xfrm>
           <a:prstGeom prst="rect">
             <a:avLst/>
@@ -6439,49 +6417,105 @@
           </a:bodyPr>
           <a:lstStyle/>
           <a:p>
-            <a:pPr algn="ctr"/>
-            <a:r>
-              <a:rPr sz="2300" b="1">
-                <a:solidFill>
-                  <a:srgbClr val="FFFFFF"/>
+            <a:pPr algn="l"/>
+            <a:r>
+              <a:rPr sz="2100" b="1">
+                <a:solidFill>
+                  <a:srgbClr val="33302B"/>
                 </a:solidFill>
                 <a:latin typeface="微軟正黑體"/>
                 <a:ea typeface="微軟正黑體"/>
                 <a:cs typeface="微軟正黑體"/>
               </a:rPr>
-              <a:t>我們的立場：不禁香、不封爐——把治理裝進香爐，而不是把禁令加在信眾身上</a:t>
-            </a:r>
-          </a:p>
-        </p:txBody>
-      </p:sp>
-    </p:spTree>
-  </p:cSld>
-  <p:clrMapOvr>
-    <a:masterClrMapping/>
-  </p:clrMapOvr>
-</p:sld>
-</file>
-
-<file path=ppt/slides/slide4.xml><?xml version="1.0" encoding="utf-8"?>
-<p:sld xmlns:a="http://schemas.openxmlformats.org/drawingml/2006/main" xmlns:p="http://schemas.openxmlformats.org/presentationml/2006/main" xmlns:r="http://schemas.openxmlformats.org/officeDocument/2006/relationships">
-  <p:cSld>
-    <p:spTree>
-      <p:nvGrpSpPr>
-        <p:cNvPr id="1" name=""/>
-        <p:cNvGrpSpPr/>
-        <p:nvPr/>
-      </p:nvGrpSpPr>
-      <p:grpSpPr/>
-      <p:sp>
-        <p:nvSpPr>
-          <p:cNvPr id="2" name="Rectangle 1"/>
+              <a:t>清淨機／IoT 監測</a:t>
+            </a:r>
+          </a:p>
+        </p:txBody>
+      </p:sp>
+      <p:sp>
+        <p:nvSpPr>
+          <p:cNvPr id="15" name="TextBox 14"/>
+          <p:cNvSpPr txBox="1"/>
+          <p:nvPr/>
+        </p:nvSpPr>
+        <p:spPr>
+          <a:xfrm>
+            <a:off x="3886200" y="4270247"/>
+            <a:ext cx="4937760" cy="548640"/>
+          </a:xfrm>
+          <a:prstGeom prst="rect">
+            <a:avLst/>
+          </a:prstGeom>
+          <a:noFill/>
+        </p:spPr>
+        <p:txBody>
+          <a:bodyPr wrap="square" anchor="t">
+            <a:spAutoFit/>
+          </a:bodyPr>
+          <a:lstStyle/>
+          <a:p>
+            <a:pPr algn="l"/>
+            <a:r>
+              <a:rPr sz="1900" b="0">
+                <a:solidFill>
+                  <a:srgbClr val="33302B"/>
+                </a:solidFill>
+                <a:latin typeface="微軟正黑體"/>
+                <a:ea typeface="微軟正黑體"/>
+                <a:cs typeface="微軟正黑體"/>
+              </a:rPr>
+              <a:t>管不到爐口／只量測不治理</a:t>
+            </a:r>
+          </a:p>
+        </p:txBody>
+      </p:sp>
+      <p:sp>
+        <p:nvSpPr>
+          <p:cNvPr id="16" name="TextBox 15"/>
+          <p:cNvSpPr txBox="1"/>
+          <p:nvPr/>
+        </p:nvSpPr>
+        <p:spPr>
+          <a:xfrm>
+            <a:off x="8869680" y="4270247"/>
+            <a:ext cx="2926080" cy="548640"/>
+          </a:xfrm>
+          <a:prstGeom prst="rect">
+            <a:avLst/>
+          </a:prstGeom>
+          <a:noFill/>
+        </p:spPr>
+        <p:txBody>
+          <a:bodyPr wrap="square" anchor="t">
+            <a:spAutoFit/>
+          </a:bodyPr>
+          <a:lstStyle/>
+          <a:p>
+            <a:pPr algn="l"/>
+            <a:r>
+              <a:rPr sz="1900" b="1">
+                <a:solidFill>
+                  <a:srgbClr val="9E3B2F"/>
+                </a:solidFill>
+                <a:latin typeface="微軟正黑體"/>
+                <a:ea typeface="微軟正黑體"/>
+                <a:cs typeface="微軟正黑體"/>
+              </a:rPr>
+              <a:t>治標不治本</a:t>
+            </a:r>
+          </a:p>
+        </p:txBody>
+      </p:sp>
+      <p:sp>
+        <p:nvSpPr>
+          <p:cNvPr id="17" name="Rectangle 16"/>
           <p:cNvSpPr/>
           <p:nvPr/>
         </p:nvSpPr>
         <p:spPr>
           <a:xfrm>
-            <a:off x="0" y="0"/>
-            <a:ext cx="164592" cy="6858000"/>
+            <a:off x="685800" y="5349240"/>
+            <a:ext cx="10881360" cy="960120"/>
           </a:xfrm>
           <a:prstGeom prst="rect">
             <a:avLst/>
@@ -6513,19 +6547,20 @@
           <a:lstStyle/>
           <a:p>
             <a:pPr algn="ctr"/>
-          </a:p>
-        </p:txBody>
-      </p:sp>
-      <p:sp>
-        <p:nvSpPr>
-          <p:cNvPr id="3" name="TextBox 2"/>
+            <a:endParaRPr/>
+          </a:p>
+        </p:txBody>
+      </p:sp>
+      <p:sp>
+        <p:nvSpPr>
+          <p:cNvPr id="18" name="TextBox 17"/>
           <p:cNvSpPr txBox="1"/>
           <p:nvPr/>
         </p:nvSpPr>
         <p:spPr>
           <a:xfrm>
-            <a:off x="502920" y="292608"/>
-            <a:ext cx="10058400" cy="457200"/>
+            <a:off x="685800" y="5532120"/>
+            <a:ext cx="10881360" cy="640080"/>
           </a:xfrm>
           <a:prstGeom prst="rect">
             <a:avLst/>
@@ -6538,374 +6573,17 @@
           </a:bodyPr>
           <a:lstStyle/>
           <a:p>
-            <a:pPr algn="l"/>
-            <a:r>
-              <a:rPr sz="1500" b="1">
-                <a:solidFill>
-                  <a:srgbClr val="C9A227"/>
+            <a:pPr algn="ctr"/>
+            <a:r>
+              <a:rPr sz="2300" b="1">
+                <a:solidFill>
+                  <a:srgbClr val="FFFFFF"/>
                 </a:solidFill>
                 <a:latin typeface="微軟正黑體"/>
                 <a:ea typeface="微軟正黑體"/>
                 <a:cs typeface="微軟正黑體"/>
               </a:rPr>
-              <a:t>SOLUTION｜我們的方案</a:t>
-            </a:r>
-          </a:p>
-        </p:txBody>
-      </p:sp>
-      <p:sp>
-        <p:nvSpPr>
-          <p:cNvPr id="4" name="TextBox 3"/>
-          <p:cNvSpPr txBox="1"/>
-          <p:nvPr/>
-        </p:nvSpPr>
-        <p:spPr>
-          <a:xfrm>
-            <a:off x="502920" y="603504"/>
-            <a:ext cx="11155680" cy="914400"/>
-          </a:xfrm>
-          <a:prstGeom prst="rect">
-            <a:avLst/>
-          </a:prstGeom>
-          <a:noFill/>
-        </p:spPr>
-        <p:txBody>
-          <a:bodyPr wrap="square" anchor="t">
-            <a:spAutoFit/>
-          </a:bodyPr>
-          <a:lstStyle/>
-          <a:p>
-            <a:pPr algn="l"/>
-            <a:r>
-              <a:rPr sz="3300" b="1">
-                <a:solidFill>
-                  <a:srgbClr val="33302B"/>
-                </a:solidFill>
-                <a:latin typeface="微軟正黑體"/>
-                <a:ea typeface="微軟正黑體"/>
-                <a:cs typeface="微軟正黑體"/>
-              </a:rPr>
-              <a:t>加裝在既有香爐上的自主治理模組</a:t>
-            </a:r>
-          </a:p>
-        </p:txBody>
-      </p:sp>
-      <p:pic>
-        <p:nvPicPr>
-          <p:cNvPr id="5" name="Picture 4" descr="_view_組裝.png"/>
-          <p:cNvPicPr>
-            <a:picLocks noChangeAspect="1"/>
-          </p:cNvPicPr>
-          <p:nvPr/>
-        </p:nvPicPr>
-        <p:blipFill>
-          <a:blip r:embed="rId3"/>
-          <a:stretch>
-            <a:fillRect/>
-          </a:stretch>
-        </p:blipFill>
-        <p:spPr>
-          <a:xfrm>
-            <a:off x="502920" y="1691640"/>
-            <a:ext cx="5974080" cy="4480560"/>
-          </a:xfrm>
-          <a:prstGeom prst="rect">
-            <a:avLst/>
-          </a:prstGeom>
-        </p:spPr>
-      </p:pic>
-      <p:sp>
-        <p:nvSpPr>
-          <p:cNvPr id="6" name="TextBox 5"/>
-          <p:cNvSpPr txBox="1"/>
-          <p:nvPr/>
-        </p:nvSpPr>
-        <p:spPr>
-          <a:xfrm>
-            <a:off x="6537960" y="1828800"/>
-            <a:ext cx="5120640" cy="502920"/>
-          </a:xfrm>
-          <a:prstGeom prst="rect">
-            <a:avLst/>
-          </a:prstGeom>
-          <a:noFill/>
-        </p:spPr>
-        <p:txBody>
-          <a:bodyPr wrap="square" anchor="t">
-            <a:spAutoFit/>
-          </a:bodyPr>
-          <a:lstStyle/>
-          <a:p>
-            <a:pPr algn="l"/>
-            <a:r>
-              <a:rPr sz="2100" b="1">
-                <a:solidFill>
-                  <a:srgbClr val="9E3B2F"/>
-                </a:solidFill>
-                <a:latin typeface="微軟正黑體"/>
-                <a:ea typeface="微軟正黑體"/>
-                <a:cs typeface="微軟正黑體"/>
-              </a:rPr>
-              <a:t>■ 不換爐的 retrofit</a:t>
-            </a:r>
-          </a:p>
-        </p:txBody>
-      </p:sp>
-      <p:sp>
-        <p:nvSpPr>
-          <p:cNvPr id="7" name="TextBox 6"/>
-          <p:cNvSpPr txBox="1"/>
-          <p:nvPr/>
-        </p:nvSpPr>
-        <p:spPr>
-          <a:xfrm>
-            <a:off x="6812280" y="2267712"/>
-            <a:ext cx="4937760" cy="548640"/>
-          </a:xfrm>
-          <a:prstGeom prst="rect">
-            <a:avLst/>
-          </a:prstGeom>
-          <a:noFill/>
-        </p:spPr>
-        <p:txBody>
-          <a:bodyPr wrap="square" anchor="t">
-            <a:spAutoFit/>
-          </a:bodyPr>
-          <a:lstStyle/>
-          <a:p>
-            <a:pPr algn="l"/>
-            <a:r>
-              <a:rPr sz="1600" b="0">
-                <a:solidFill>
-                  <a:srgbClr val="33302B"/>
-                </a:solidFill>
-                <a:latin typeface="微軟正黑體"/>
-                <a:ea typeface="微軟正黑體"/>
-                <a:cs typeface="微軟正黑體"/>
-              </a:rPr>
-              <a:t>買方是廟方管委會，導入零儀式衝擊</a:t>
-            </a:r>
-          </a:p>
-        </p:txBody>
-      </p:sp>
-      <p:sp>
-        <p:nvSpPr>
-          <p:cNvPr id="8" name="TextBox 7"/>
-          <p:cNvSpPr txBox="1"/>
-          <p:nvPr/>
-        </p:nvSpPr>
-        <p:spPr>
-          <a:xfrm>
-            <a:off x="6537960" y="2907791"/>
-            <a:ext cx="5120640" cy="502920"/>
-          </a:xfrm>
-          <a:prstGeom prst="rect">
-            <a:avLst/>
-          </a:prstGeom>
-          <a:noFill/>
-        </p:spPr>
-        <p:txBody>
-          <a:bodyPr wrap="square" anchor="t">
-            <a:spAutoFit/>
-          </a:bodyPr>
-          <a:lstStyle/>
-          <a:p>
-            <a:pPr algn="l"/>
-            <a:r>
-              <a:rPr sz="2100" b="1">
-                <a:solidFill>
-                  <a:srgbClr val="9E3B2F"/>
-                </a:solidFill>
-                <a:latin typeface="微軟正黑體"/>
-                <a:ea typeface="微軟正黑體"/>
-                <a:cs typeface="微軟正黑體"/>
-              </a:rPr>
-              <a:t>■ 漏斗大口集煙罩</a:t>
-            </a:r>
-          </a:p>
-        </p:txBody>
-      </p:sp>
-      <p:sp>
-        <p:nvSpPr>
-          <p:cNvPr id="9" name="TextBox 8"/>
-          <p:cNvSpPr txBox="1"/>
-          <p:nvPr/>
-        </p:nvSpPr>
-        <p:spPr>
-          <a:xfrm>
-            <a:off x="6812280" y="3346703"/>
-            <a:ext cx="4937760" cy="548640"/>
-          </a:xfrm>
-          <a:prstGeom prst="rect">
-            <a:avLst/>
-          </a:prstGeom>
-          <a:noFill/>
-        </p:spPr>
-        <p:txBody>
-          <a:bodyPr wrap="square" anchor="t">
-            <a:spAutoFit/>
-          </a:bodyPr>
-          <a:lstStyle/>
-          <a:p>
-            <a:pPr algn="l"/>
-            <a:r>
-              <a:rPr sz="1600" b="0">
-                <a:solidFill>
-                  <a:srgbClr val="33302B"/>
-                </a:solidFill>
-                <a:latin typeface="微軟正黑體"/>
-                <a:ea typeface="微軟正黑體"/>
-                <a:cs typeface="微軟正黑體"/>
-              </a:rPr>
-              <a:t>插香跟原本一樣順手；爐口點源捕集，效率遠超全室換氣</a:t>
-            </a:r>
-          </a:p>
-        </p:txBody>
-      </p:sp>
-      <p:sp>
-        <p:nvSpPr>
-          <p:cNvPr id="10" name="TextBox 9"/>
-          <p:cNvSpPr txBox="1"/>
-          <p:nvPr/>
-        </p:nvSpPr>
-        <p:spPr>
-          <a:xfrm>
-            <a:off x="6537960" y="3986783"/>
-            <a:ext cx="5120640" cy="502920"/>
-          </a:xfrm>
-          <a:prstGeom prst="rect">
-            <a:avLst/>
-          </a:prstGeom>
-          <a:noFill/>
-        </p:spPr>
-        <p:txBody>
-          <a:bodyPr wrap="square" anchor="t">
-            <a:spAutoFit/>
-          </a:bodyPr>
-          <a:lstStyle/>
-          <a:p>
-            <a:pPr algn="l"/>
-            <a:r>
-              <a:rPr sz="2100" b="1">
-                <a:solidFill>
-                  <a:srgbClr val="9E3B2F"/>
-                </a:solidFill>
-                <a:latin typeface="微軟正黑體"/>
-                <a:ea typeface="微軟正黑體"/>
-                <a:cs typeface="微軟正黑體"/>
-              </a:rPr>
-              <a:t>■ 三段過濾鏈</a:t>
-            </a:r>
-          </a:p>
-        </p:txBody>
-      </p:sp>
-      <p:sp>
-        <p:nvSpPr>
-          <p:cNvPr id="11" name="TextBox 10"/>
-          <p:cNvSpPr txBox="1"/>
-          <p:nvPr/>
-        </p:nvSpPr>
-        <p:spPr>
-          <a:xfrm>
-            <a:off x="6812280" y="4425695"/>
-            <a:ext cx="4937760" cy="548640"/>
-          </a:xfrm>
-          <a:prstGeom prst="rect">
-            <a:avLst/>
-          </a:prstGeom>
-          <a:noFill/>
-        </p:spPr>
-        <p:txBody>
-          <a:bodyPr wrap="square" anchor="t">
-            <a:spAutoFit/>
-          </a:bodyPr>
-          <a:lstStyle/>
-          <a:p>
-            <a:pPr algn="l"/>
-            <a:r>
-              <a:rPr sz="1600" b="0">
-                <a:solidFill>
-                  <a:srgbClr val="33302B"/>
-                </a:solidFill>
-                <a:latin typeface="微軟正黑體"/>
-                <a:ea typeface="微軟正黑體"/>
-                <a:cs typeface="微軟正黑體"/>
-              </a:rPr>
-              <a:t>金屬紗網（擋火星）→ HEPA → 活性碳，順序即安全</a:t>
-            </a:r>
-          </a:p>
-        </p:txBody>
-      </p:sp>
-      <p:sp>
-        <p:nvSpPr>
-          <p:cNvPr id="12" name="TextBox 11"/>
-          <p:cNvSpPr txBox="1"/>
-          <p:nvPr/>
-        </p:nvSpPr>
-        <p:spPr>
-          <a:xfrm>
-            <a:off x="6537960" y="5065776"/>
-            <a:ext cx="5120640" cy="502920"/>
-          </a:xfrm>
-          <a:prstGeom prst="rect">
-            <a:avLst/>
-          </a:prstGeom>
-          <a:noFill/>
-        </p:spPr>
-        <p:txBody>
-          <a:bodyPr wrap="square" anchor="t">
-            <a:spAutoFit/>
-          </a:bodyPr>
-          <a:lstStyle/>
-          <a:p>
-            <a:pPr algn="l"/>
-            <a:r>
-              <a:rPr sz="2100" b="1">
-                <a:solidFill>
-                  <a:srgbClr val="9E3B2F"/>
-                </a:solidFill>
-                <a:latin typeface="微軟正黑體"/>
-                <a:ea typeface="微軟正黑體"/>
-                <a:cs typeface="微軟正黑體"/>
-              </a:rPr>
-              <a:t>■ 變頻抽排</a:t>
-            </a:r>
-          </a:p>
-        </p:txBody>
-      </p:sp>
-      <p:sp>
-        <p:nvSpPr>
-          <p:cNvPr id="13" name="TextBox 12"/>
-          <p:cNvSpPr txBox="1"/>
-          <p:nvPr/>
-        </p:nvSpPr>
-        <p:spPr>
-          <a:xfrm>
-            <a:off x="6812280" y="5504688"/>
-            <a:ext cx="4937760" cy="548640"/>
-          </a:xfrm>
-          <a:prstGeom prst="rect">
-            <a:avLst/>
-          </a:prstGeom>
-          <a:noFill/>
-        </p:spPr>
-        <p:txBody>
-          <a:bodyPr wrap="square" anchor="t">
-            <a:spAutoFit/>
-          </a:bodyPr>
-          <a:lstStyle/>
-          <a:p>
-            <a:pPr algn="l"/>
-            <a:r>
-              <a:rPr sz="1600" b="0">
-                <a:solidFill>
-                  <a:srgbClr val="33302B"/>
-                </a:solidFill>
-                <a:latin typeface="微軟正黑體"/>
-                <a:ea typeface="微軟正黑體"/>
-                <a:cs typeface="微軟正黑體"/>
-              </a:rPr>
-              <a:t>隨人流與濃度自動調速——省電、低噪、削尖峰</a:t>
+              <a:t>我們的立場：不禁香、不封爐——把治理裝進香爐，而不是把禁令加在信眾身上</a:t>
             </a:r>
           </a:p>
         </p:txBody>
@@ -6918,8 +6596,8 @@
 </p:sld>
 </file>
 
-<file path=ppt/slides/slide5.xml><?xml version="1.0" encoding="utf-8"?>
-<p:sld xmlns:a="http://schemas.openxmlformats.org/drawingml/2006/main" xmlns:p="http://schemas.openxmlformats.org/presentationml/2006/main" xmlns:r="http://schemas.openxmlformats.org/officeDocument/2006/relationships">
+<file path=ppt/slides/slide4.xml><?xml version="1.0" encoding="utf-8"?>
+<p:sld xmlns:a="http://schemas.openxmlformats.org/drawingml/2006/main" xmlns:r="http://schemas.openxmlformats.org/officeDocument/2006/relationships" xmlns:p="http://schemas.openxmlformats.org/presentationml/2006/main">
   <p:cSld>
     <p:spTree>
       <p:nvGrpSpPr>
@@ -6927,7 +6605,14 @@
         <p:cNvGrpSpPr/>
         <p:nvPr/>
       </p:nvGrpSpPr>
-      <p:grpSpPr/>
+      <p:grpSpPr>
+        <a:xfrm>
+          <a:off x="0" y="0"/>
+          <a:ext cx="0" cy="0"/>
+          <a:chOff x="0" y="0"/>
+          <a:chExt cx="0" cy="0"/>
+        </a:xfrm>
+      </p:grpSpPr>
       <p:sp>
         <p:nvSpPr>
           <p:cNvPr id="2" name="Rectangle 1"/>
@@ -6969,6 +6654,7 @@
           <a:lstStyle/>
           <a:p>
             <a:pPr algn="ctr"/>
+            <a:endParaRPr/>
           </a:p>
         </p:txBody>
       </p:sp>
@@ -7004,7 +6690,7 @@
                 <a:ea typeface="微軟正黑體"/>
                 <a:cs typeface="微軟正黑體"/>
               </a:rPr>
-              <a:t>SYSTEM｜三層閉環</a:t>
+              <a:t>SOLUTION｜我們的方案</a:t>
             </a:r>
           </a:p>
         </p:txBody>
@@ -7041,14 +6727,14 @@
                 <a:ea typeface="微軟正黑體"/>
                 <a:cs typeface="微軟正黑體"/>
               </a:rPr>
-              <a:t>偵測 → 行動 → 再偵測，每筆決策可重演</a:t>
+              <a:t>加裝在既有香爐上的自主治理模組</a:t>
             </a:r>
           </a:p>
         </p:txBody>
       </p:sp>
       <p:pic>
         <p:nvPicPr>
-          <p:cNvPr id="5" name="Picture 4" descr="image3.png"/>
+          <p:cNvPr id="5" name="Picture 4" descr="_view_組裝.png"/>
           <p:cNvPicPr>
             <a:picLocks noChangeAspect="1"/>
           </p:cNvPicPr>
@@ -7062,14 +6748,310 @@
         </p:blipFill>
         <p:spPr>
           <a:xfrm>
-            <a:off x="2365897" y="1600200"/>
-            <a:ext cx="7459901" cy="4983480"/>
+            <a:off x="502920" y="1691640"/>
+            <a:ext cx="5974080" cy="4480560"/>
           </a:xfrm>
           <a:prstGeom prst="rect">
             <a:avLst/>
           </a:prstGeom>
         </p:spPr>
       </p:pic>
+      <p:sp>
+        <p:nvSpPr>
+          <p:cNvPr id="6" name="TextBox 5"/>
+          <p:cNvSpPr txBox="1"/>
+          <p:nvPr/>
+        </p:nvSpPr>
+        <p:spPr>
+          <a:xfrm>
+            <a:off x="6537960" y="1828800"/>
+            <a:ext cx="5120640" cy="502920"/>
+          </a:xfrm>
+          <a:prstGeom prst="rect">
+            <a:avLst/>
+          </a:prstGeom>
+          <a:noFill/>
+        </p:spPr>
+        <p:txBody>
+          <a:bodyPr wrap="square" anchor="t">
+            <a:spAutoFit/>
+          </a:bodyPr>
+          <a:lstStyle/>
+          <a:p>
+            <a:pPr algn="l"/>
+            <a:r>
+              <a:rPr sz="2100" b="1">
+                <a:solidFill>
+                  <a:srgbClr val="9E3B2F"/>
+                </a:solidFill>
+                <a:latin typeface="微軟正黑體"/>
+                <a:ea typeface="微軟正黑體"/>
+                <a:cs typeface="微軟正黑體"/>
+              </a:rPr>
+              <a:t>■ 不換爐的 retrofit</a:t>
+            </a:r>
+          </a:p>
+        </p:txBody>
+      </p:sp>
+      <p:sp>
+        <p:nvSpPr>
+          <p:cNvPr id="7" name="TextBox 6"/>
+          <p:cNvSpPr txBox="1"/>
+          <p:nvPr/>
+        </p:nvSpPr>
+        <p:spPr>
+          <a:xfrm>
+            <a:off x="6812280" y="2267712"/>
+            <a:ext cx="4937760" cy="548640"/>
+          </a:xfrm>
+          <a:prstGeom prst="rect">
+            <a:avLst/>
+          </a:prstGeom>
+          <a:noFill/>
+        </p:spPr>
+        <p:txBody>
+          <a:bodyPr wrap="square" anchor="t">
+            <a:spAutoFit/>
+          </a:bodyPr>
+          <a:lstStyle/>
+          <a:p>
+            <a:pPr algn="l"/>
+            <a:r>
+              <a:rPr sz="1600" b="0">
+                <a:solidFill>
+                  <a:srgbClr val="33302B"/>
+                </a:solidFill>
+                <a:latin typeface="微軟正黑體"/>
+                <a:ea typeface="微軟正黑體"/>
+                <a:cs typeface="微軟正黑體"/>
+              </a:rPr>
+              <a:t>買方是廟方管委會，導入零儀式衝擊</a:t>
+            </a:r>
+          </a:p>
+        </p:txBody>
+      </p:sp>
+      <p:sp>
+        <p:nvSpPr>
+          <p:cNvPr id="8" name="TextBox 7"/>
+          <p:cNvSpPr txBox="1"/>
+          <p:nvPr/>
+        </p:nvSpPr>
+        <p:spPr>
+          <a:xfrm>
+            <a:off x="6537960" y="2907791"/>
+            <a:ext cx="5120640" cy="502920"/>
+          </a:xfrm>
+          <a:prstGeom prst="rect">
+            <a:avLst/>
+          </a:prstGeom>
+          <a:noFill/>
+        </p:spPr>
+        <p:txBody>
+          <a:bodyPr wrap="square" anchor="t">
+            <a:spAutoFit/>
+          </a:bodyPr>
+          <a:lstStyle/>
+          <a:p>
+            <a:pPr algn="l"/>
+            <a:r>
+              <a:rPr sz="2100" b="1">
+                <a:solidFill>
+                  <a:srgbClr val="9E3B2F"/>
+                </a:solidFill>
+                <a:latin typeface="微軟正黑體"/>
+                <a:ea typeface="微軟正黑體"/>
+                <a:cs typeface="微軟正黑體"/>
+              </a:rPr>
+              <a:t>■ 漏斗大口集煙罩</a:t>
+            </a:r>
+          </a:p>
+        </p:txBody>
+      </p:sp>
+      <p:sp>
+        <p:nvSpPr>
+          <p:cNvPr id="9" name="TextBox 8"/>
+          <p:cNvSpPr txBox="1"/>
+          <p:nvPr/>
+        </p:nvSpPr>
+        <p:spPr>
+          <a:xfrm>
+            <a:off x="6812280" y="3346703"/>
+            <a:ext cx="4937760" cy="548640"/>
+          </a:xfrm>
+          <a:prstGeom prst="rect">
+            <a:avLst/>
+          </a:prstGeom>
+          <a:noFill/>
+        </p:spPr>
+        <p:txBody>
+          <a:bodyPr wrap="square" anchor="t">
+            <a:spAutoFit/>
+          </a:bodyPr>
+          <a:lstStyle/>
+          <a:p>
+            <a:pPr algn="l"/>
+            <a:r>
+              <a:rPr sz="1600" b="0">
+                <a:solidFill>
+                  <a:srgbClr val="33302B"/>
+                </a:solidFill>
+                <a:latin typeface="微軟正黑體"/>
+                <a:ea typeface="微軟正黑體"/>
+                <a:cs typeface="微軟正黑體"/>
+              </a:rPr>
+              <a:t>插香跟原本一樣順手；爐口點源捕集，效率遠超全室換氣</a:t>
+            </a:r>
+          </a:p>
+        </p:txBody>
+      </p:sp>
+      <p:sp>
+        <p:nvSpPr>
+          <p:cNvPr id="10" name="TextBox 9"/>
+          <p:cNvSpPr txBox="1"/>
+          <p:nvPr/>
+        </p:nvSpPr>
+        <p:spPr>
+          <a:xfrm>
+            <a:off x="6537960" y="3986783"/>
+            <a:ext cx="5120640" cy="502920"/>
+          </a:xfrm>
+          <a:prstGeom prst="rect">
+            <a:avLst/>
+          </a:prstGeom>
+          <a:noFill/>
+        </p:spPr>
+        <p:txBody>
+          <a:bodyPr wrap="square" anchor="t">
+            <a:spAutoFit/>
+          </a:bodyPr>
+          <a:lstStyle/>
+          <a:p>
+            <a:pPr algn="l"/>
+            <a:r>
+              <a:rPr sz="2100" b="1">
+                <a:solidFill>
+                  <a:srgbClr val="9E3B2F"/>
+                </a:solidFill>
+                <a:latin typeface="微軟正黑體"/>
+                <a:ea typeface="微軟正黑體"/>
+                <a:cs typeface="微軟正黑體"/>
+              </a:rPr>
+              <a:t>■ 三段過濾鏈</a:t>
+            </a:r>
+          </a:p>
+        </p:txBody>
+      </p:sp>
+      <p:sp>
+        <p:nvSpPr>
+          <p:cNvPr id="11" name="TextBox 10"/>
+          <p:cNvSpPr txBox="1"/>
+          <p:nvPr/>
+        </p:nvSpPr>
+        <p:spPr>
+          <a:xfrm>
+            <a:off x="6812280" y="4425695"/>
+            <a:ext cx="4937760" cy="548640"/>
+          </a:xfrm>
+          <a:prstGeom prst="rect">
+            <a:avLst/>
+          </a:prstGeom>
+          <a:noFill/>
+        </p:spPr>
+        <p:txBody>
+          <a:bodyPr wrap="square" anchor="t">
+            <a:spAutoFit/>
+          </a:bodyPr>
+          <a:lstStyle/>
+          <a:p>
+            <a:pPr algn="l"/>
+            <a:r>
+              <a:rPr sz="1600" b="0">
+                <a:solidFill>
+                  <a:srgbClr val="33302B"/>
+                </a:solidFill>
+                <a:latin typeface="微軟正黑體"/>
+                <a:ea typeface="微軟正黑體"/>
+                <a:cs typeface="微軟正黑體"/>
+              </a:rPr>
+              <a:t>金屬紗網（擋火星）→ HEPA → 活性碳，順序即安全</a:t>
+            </a:r>
+          </a:p>
+        </p:txBody>
+      </p:sp>
+      <p:sp>
+        <p:nvSpPr>
+          <p:cNvPr id="12" name="TextBox 11"/>
+          <p:cNvSpPr txBox="1"/>
+          <p:nvPr/>
+        </p:nvSpPr>
+        <p:spPr>
+          <a:xfrm>
+            <a:off x="6537960" y="5065776"/>
+            <a:ext cx="5120640" cy="502920"/>
+          </a:xfrm>
+          <a:prstGeom prst="rect">
+            <a:avLst/>
+          </a:prstGeom>
+          <a:noFill/>
+        </p:spPr>
+        <p:txBody>
+          <a:bodyPr wrap="square" anchor="t">
+            <a:spAutoFit/>
+          </a:bodyPr>
+          <a:lstStyle/>
+          <a:p>
+            <a:pPr algn="l"/>
+            <a:r>
+              <a:rPr sz="2100" b="1">
+                <a:solidFill>
+                  <a:srgbClr val="9E3B2F"/>
+                </a:solidFill>
+                <a:latin typeface="微軟正黑體"/>
+                <a:ea typeface="微軟正黑體"/>
+                <a:cs typeface="微軟正黑體"/>
+              </a:rPr>
+              <a:t>■ 變頻抽排</a:t>
+            </a:r>
+          </a:p>
+        </p:txBody>
+      </p:sp>
+      <p:sp>
+        <p:nvSpPr>
+          <p:cNvPr id="13" name="TextBox 12"/>
+          <p:cNvSpPr txBox="1"/>
+          <p:nvPr/>
+        </p:nvSpPr>
+        <p:spPr>
+          <a:xfrm>
+            <a:off x="6812280" y="5504688"/>
+            <a:ext cx="4937760" cy="548640"/>
+          </a:xfrm>
+          <a:prstGeom prst="rect">
+            <a:avLst/>
+          </a:prstGeom>
+          <a:noFill/>
+        </p:spPr>
+        <p:txBody>
+          <a:bodyPr wrap="square" anchor="t">
+            <a:spAutoFit/>
+          </a:bodyPr>
+          <a:lstStyle/>
+          <a:p>
+            <a:pPr algn="l"/>
+            <a:r>
+              <a:rPr sz="1600" b="0">
+                <a:solidFill>
+                  <a:srgbClr val="33302B"/>
+                </a:solidFill>
+                <a:latin typeface="微軟正黑體"/>
+                <a:ea typeface="微軟正黑體"/>
+                <a:cs typeface="微軟正黑體"/>
+              </a:rPr>
+              <a:t>隨人流與濃度自動調速——省電、低噪、削尖峰</a:t>
+            </a:r>
+          </a:p>
+        </p:txBody>
+      </p:sp>
     </p:spTree>
   </p:cSld>
   <p:clrMapOvr>
@@ -7078,8 +7060,8 @@
 </p:sld>
 </file>
 
-<file path=ppt/slides/slide6.xml><?xml version="1.0" encoding="utf-8"?>
-<p:sld xmlns:a="http://schemas.openxmlformats.org/drawingml/2006/main" xmlns:p="http://schemas.openxmlformats.org/presentationml/2006/main" xmlns:r="http://schemas.openxmlformats.org/officeDocument/2006/relationships">
+<file path=ppt/slides/slide5.xml><?xml version="1.0" encoding="utf-8"?>
+<p:sld xmlns:a="http://schemas.openxmlformats.org/drawingml/2006/main" xmlns:r="http://schemas.openxmlformats.org/officeDocument/2006/relationships" xmlns:p="http://schemas.openxmlformats.org/presentationml/2006/main">
   <p:cSld>
     <p:spTree>
       <p:nvGrpSpPr>
@@ -7087,7 +7069,14 @@
         <p:cNvGrpSpPr/>
         <p:nvPr/>
       </p:nvGrpSpPr>
-      <p:grpSpPr/>
+      <p:grpSpPr>
+        <a:xfrm>
+          <a:off x="0" y="0"/>
+          <a:ext cx="0" cy="0"/>
+          <a:chOff x="0" y="0"/>
+          <a:chExt cx="0" cy="0"/>
+        </a:xfrm>
+      </p:grpSpPr>
       <p:sp>
         <p:nvSpPr>
           <p:cNvPr id="2" name="Rectangle 1"/>
@@ -7129,6 +7118,7 @@
           <a:lstStyle/>
           <a:p>
             <a:pPr algn="ctr"/>
+            <a:endParaRPr/>
           </a:p>
         </p:txBody>
       </p:sp>
@@ -7164,7 +7154,7 @@
                 <a:ea typeface="微軟正黑體"/>
                 <a:cs typeface="微軟正黑體"/>
               </a:rPr>
-              <a:t>INTELLIGENCE｜決策核心</a:t>
+              <a:t>SYSTEM｜三層閉環</a:t>
             </a:r>
           </a:p>
         </p:txBody>
@@ -7201,14 +7191,14 @@
                 <a:ea typeface="微軟正黑體"/>
                 <a:cs typeface="微軟正黑體"/>
               </a:rPr>
-              <a:t>前饋削峰 ＋ 安全聯鎖優先於一切</a:t>
+              <a:t>偵測 → 行動 → 再偵測，每筆決策可重演</a:t>
             </a:r>
           </a:p>
         </p:txBody>
       </p:sp>
       <p:pic>
         <p:nvPicPr>
-          <p:cNvPr id="5" name="Picture 4" descr="image5.png"/>
+          <p:cNvPr id="5" name="Picture 4" descr="image3.png"/>
           <p:cNvPicPr>
             <a:picLocks noChangeAspect="1"/>
           </p:cNvPicPr>
@@ -7222,65 +7212,14 @@
         </p:blipFill>
         <p:spPr>
           <a:xfrm>
-            <a:off x="1112367" y="1828800"/>
-            <a:ext cx="9966960" cy="3986784"/>
+            <a:off x="2365897" y="1600200"/>
+            <a:ext cx="7459901" cy="4983480"/>
           </a:xfrm>
           <a:prstGeom prst="rect">
             <a:avLst/>
           </a:prstGeom>
         </p:spPr>
       </p:pic>
-      <p:sp>
-        <p:nvSpPr>
-          <p:cNvPr id="6" name="TextBox 5"/>
-          <p:cNvSpPr txBox="1"/>
-          <p:nvPr/>
-        </p:nvSpPr>
-        <p:spPr>
-          <a:xfrm>
-            <a:off x="685800" y="5897880"/>
-            <a:ext cx="10972800" cy="822960"/>
-          </a:xfrm>
-          <a:prstGeom prst="rect">
-            <a:avLst/>
-          </a:prstGeom>
-          <a:noFill/>
-        </p:spPr>
-        <p:txBody>
-          <a:bodyPr wrap="square" anchor="t">
-            <a:spAutoFit/>
-          </a:bodyPr>
-          <a:lstStyle/>
-          <a:p>
-            <a:pPr algn="ctr"/>
-            <a:r>
-              <a:rPr sz="1600" b="0">
-                <a:solidFill>
-                  <a:srgbClr val="33302B"/>
-                </a:solidFill>
-                <a:latin typeface="微軟正黑體"/>
-                <a:ea typeface="微軟正黑體"/>
-                <a:cs typeface="微軟正黑體"/>
-              </a:rPr>
-              <a:t>門檻與實機韌體同步：進高峰＝基線+300ppm・遲滯退場＝基線+200・前饋 θ=120 ppm/min</a:t>
-            </a:r>
-          </a:p>
-          <a:p>
-            <a:pPr algn="ctr"/>
-            <a:r>
-              <a:rPr sz="1400" b="0">
-                <a:solidFill>
-                  <a:srgbClr val="8A8377"/>
-                </a:solidFill>
-                <a:latin typeface="微軟正黑體"/>
-                <a:ea typeface="微軟正黑體"/>
-                <a:cs typeface="微軟正黑體"/>
-              </a:rPr>
-              <a:t>悶燒偵測：CO/CO₂ 比＋爐溫特徵 → 60 秒內全速抽排＋告警（設計目標，將實測檢定）</a:t>
-            </a:r>
-          </a:p>
-        </p:txBody>
-      </p:sp>
     </p:spTree>
   </p:cSld>
   <p:clrMapOvr>
@@ -7289,8 +7228,8 @@
 </p:sld>
 </file>
 
-<file path=ppt/slides/slide7.xml><?xml version="1.0" encoding="utf-8"?>
-<p:sld xmlns:a="http://schemas.openxmlformats.org/drawingml/2006/main" xmlns:p="http://schemas.openxmlformats.org/presentationml/2006/main" xmlns:r="http://schemas.openxmlformats.org/officeDocument/2006/relationships">
+<file path=ppt/slides/slide6.xml><?xml version="1.0" encoding="utf-8"?>
+<p:sld xmlns:a="http://schemas.openxmlformats.org/drawingml/2006/main" xmlns:r="http://schemas.openxmlformats.org/officeDocument/2006/relationships" xmlns:p="http://schemas.openxmlformats.org/presentationml/2006/main">
   <p:cSld>
     <p:spTree>
       <p:nvGrpSpPr>
@@ -7298,7 +7237,14 @@
         <p:cNvGrpSpPr/>
         <p:nvPr/>
       </p:nvGrpSpPr>
-      <p:grpSpPr/>
+      <p:grpSpPr>
+        <a:xfrm>
+          <a:off x="0" y="0"/>
+          <a:ext cx="0" cy="0"/>
+          <a:chOff x="0" y="0"/>
+          <a:chExt cx="0" cy="0"/>
+        </a:xfrm>
+      </p:grpSpPr>
       <p:sp>
         <p:nvSpPr>
           <p:cNvPr id="2" name="Rectangle 1"/>
@@ -7340,6 +7286,7 @@
           <a:lstStyle/>
           <a:p>
             <a:pPr algn="ctr"/>
+            <a:endParaRPr/>
           </a:p>
         </p:txBody>
       </p:sp>
@@ -7375,7 +7322,7 @@
                 <a:ea typeface="微軟正黑體"/>
                 <a:cs typeface="微軟正黑體"/>
               </a:rPr>
-              <a:t>TRACTION｜已經在跑的證據</a:t>
+              <a:t>INTELLIGENCE｜決策核心</a:t>
             </a:r>
           </a:p>
         </p:txBody>
@@ -7412,27 +7359,127 @@
                 <a:ea typeface="微軟正黑體"/>
                 <a:cs typeface="微軟正黑體"/>
               </a:rPr>
-              <a:t>不是簡報做得好，是系統真的在跑</a:t>
-            </a:r>
-          </a:p>
-        </p:txBody>
-      </p:sp>
-      <p:sp>
-        <p:nvSpPr>
-          <p:cNvPr id="5" name="Rectangle 4"/>
+              <a:t>前饋削峰 ＋ 安全聯鎖優先於一切</a:t>
+            </a:r>
+          </a:p>
+        </p:txBody>
+      </p:sp>
+      <p:pic>
+        <p:nvPicPr>
+          <p:cNvPr id="5" name="Picture 4" descr="image5.png"/>
+          <p:cNvPicPr>
+            <a:picLocks noChangeAspect="1"/>
+          </p:cNvPicPr>
+          <p:nvPr/>
+        </p:nvPicPr>
+        <p:blipFill>
+          <a:blip r:embed="rId3"/>
+          <a:stretch>
+            <a:fillRect/>
+          </a:stretch>
+        </p:blipFill>
+        <p:spPr>
+          <a:xfrm>
+            <a:off x="1112367" y="1828800"/>
+            <a:ext cx="9966960" cy="3986784"/>
+          </a:xfrm>
+          <a:prstGeom prst="rect">
+            <a:avLst/>
+          </a:prstGeom>
+        </p:spPr>
+      </p:pic>
+      <p:sp>
+        <p:nvSpPr>
+          <p:cNvPr id="6" name="TextBox 5"/>
+          <p:cNvSpPr txBox="1"/>
+          <p:nvPr/>
+        </p:nvSpPr>
+        <p:spPr>
+          <a:xfrm>
+            <a:off x="685800" y="5897880"/>
+            <a:ext cx="10972800" cy="822960"/>
+          </a:xfrm>
+          <a:prstGeom prst="rect">
+            <a:avLst/>
+          </a:prstGeom>
+          <a:noFill/>
+        </p:spPr>
+        <p:txBody>
+          <a:bodyPr wrap="square" anchor="t">
+            <a:spAutoFit/>
+          </a:bodyPr>
+          <a:lstStyle/>
+          <a:p>
+            <a:pPr algn="ctr"/>
+            <a:r>
+              <a:rPr sz="1600" b="0">
+                <a:solidFill>
+                  <a:srgbClr val="33302B"/>
+                </a:solidFill>
+                <a:latin typeface="微軟正黑體"/>
+                <a:ea typeface="微軟正黑體"/>
+                <a:cs typeface="微軟正黑體"/>
+              </a:rPr>
+              <a:t>門檻與實機韌體同步：進高峰＝基線+300ppm・遲滯退場＝基線+200・前饋 θ=120 ppm/min</a:t>
+            </a:r>
+          </a:p>
+          <a:p>
+            <a:pPr algn="ctr"/>
+            <a:r>
+              <a:rPr sz="1400" b="0">
+                <a:solidFill>
+                  <a:srgbClr val="8A8377"/>
+                </a:solidFill>
+                <a:latin typeface="微軟正黑體"/>
+                <a:ea typeface="微軟正黑體"/>
+                <a:cs typeface="微軟正黑體"/>
+              </a:rPr>
+              <a:t>悶燒偵測：CO/CO₂ 比＋爐溫特徵 → 60 秒內全速抽排＋告警（設計目標，將實測檢定）</a:t>
+            </a:r>
+          </a:p>
+        </p:txBody>
+      </p:sp>
+    </p:spTree>
+  </p:cSld>
+  <p:clrMapOvr>
+    <a:masterClrMapping/>
+  </p:clrMapOvr>
+</p:sld>
+</file>
+
+<file path=ppt/slides/slide7.xml><?xml version="1.0" encoding="utf-8"?>
+<p:sld xmlns:a="http://schemas.openxmlformats.org/drawingml/2006/main" xmlns:r="http://schemas.openxmlformats.org/officeDocument/2006/relationships" xmlns:p="http://schemas.openxmlformats.org/presentationml/2006/main">
+  <p:cSld>
+    <p:spTree>
+      <p:nvGrpSpPr>
+        <p:cNvPr id="1" name=""/>
+        <p:cNvGrpSpPr/>
+        <p:nvPr/>
+      </p:nvGrpSpPr>
+      <p:grpSpPr>
+        <a:xfrm>
+          <a:off x="0" y="0"/>
+          <a:ext cx="0" cy="0"/>
+          <a:chOff x="0" y="0"/>
+          <a:chExt cx="0" cy="0"/>
+        </a:xfrm>
+      </p:grpSpPr>
+      <p:sp>
+        <p:nvSpPr>
+          <p:cNvPr id="2" name="Rectangle 1"/>
           <p:cNvSpPr/>
           <p:nvPr/>
         </p:nvSpPr>
         <p:spPr>
           <a:xfrm>
-            <a:off x="685800" y="2011680"/>
-            <a:ext cx="3383280" cy="2971800"/>
+            <a:off x="0" y="0"/>
+            <a:ext cx="164592" cy="6858000"/>
           </a:xfrm>
           <a:prstGeom prst="rect">
             <a:avLst/>
           </a:prstGeom>
           <a:solidFill>
-            <a:srgbClr val="F8F4EC"/>
+            <a:srgbClr val="9E3B2F"/>
           </a:solidFill>
           <a:ln>
             <a:noFill/>
@@ -7458,19 +7505,20 @@
           <a:lstStyle/>
           <a:p>
             <a:pPr algn="ctr"/>
-          </a:p>
-        </p:txBody>
-      </p:sp>
-      <p:sp>
-        <p:nvSpPr>
-          <p:cNvPr id="6" name="TextBox 5"/>
+            <a:endParaRPr/>
+          </a:p>
+        </p:txBody>
+      </p:sp>
+      <p:sp>
+        <p:nvSpPr>
+          <p:cNvPr id="3" name="TextBox 2"/>
           <p:cNvSpPr txBox="1"/>
           <p:nvPr/>
         </p:nvSpPr>
         <p:spPr>
           <a:xfrm>
-            <a:off x="685800" y="2331720"/>
-            <a:ext cx="3383280" cy="1005840"/>
+            <a:off x="502920" y="292608"/>
+            <a:ext cx="10058400" cy="457200"/>
           </a:xfrm>
           <a:prstGeom prst="rect">
             <a:avLst/>
@@ -7483,31 +7531,31 @@
           </a:bodyPr>
           <a:lstStyle/>
           <a:p>
-            <a:pPr algn="ctr"/>
-            <a:r>
-              <a:rPr sz="4200" b="1">
-                <a:solidFill>
-                  <a:srgbClr val="9E3B2F"/>
+            <a:pPr algn="l"/>
+            <a:r>
+              <a:rPr sz="1500" b="1">
+                <a:solidFill>
+                  <a:srgbClr val="C9A227"/>
                 </a:solidFill>
                 <a:latin typeface="微軟正黑體"/>
                 <a:ea typeface="微軟正黑體"/>
                 <a:cs typeface="微軟正黑體"/>
               </a:rPr>
-              <a:t>2026-08</a:t>
-            </a:r>
-          </a:p>
-        </p:txBody>
-      </p:sp>
-      <p:sp>
-        <p:nvSpPr>
-          <p:cNvPr id="7" name="TextBox 6"/>
+              <a:t>TRACTION｜已經在跑的證據</a:t>
+            </a:r>
+          </a:p>
+        </p:txBody>
+      </p:sp>
+      <p:sp>
+        <p:nvSpPr>
+          <p:cNvPr id="4" name="TextBox 3"/>
           <p:cNvSpPr txBox="1"/>
           <p:nvPr/>
         </p:nvSpPr>
         <p:spPr>
           <a:xfrm>
-            <a:off x="914400" y="3520440"/>
-            <a:ext cx="2926080" cy="1371600"/>
+            <a:off x="502920" y="603504"/>
+            <a:ext cx="11155680" cy="914400"/>
           </a:xfrm>
           <a:prstGeom prst="rect">
             <a:avLst/>
@@ -7520,9 +7568,9 @@
           </a:bodyPr>
           <a:lstStyle/>
           <a:p>
-            <a:pPr algn="ctr"/>
-            <a:r>
-              <a:rPr sz="1600" b="0">
+            <a:pPr algn="l"/>
+            <a:r>
+              <a:rPr sz="3300" b="1">
                 <a:solidFill>
                   <a:srgbClr val="33302B"/>
                 </a:solidFill>
@@ -7530,22 +7578,20 @@
                 <a:ea typeface="微軟正黑體"/>
                 <a:cs typeface="微軟正黑體"/>
               </a:rPr>
-              <a:t>原型實機上線
-熱點自動上雲・斷線補傳
-現場模式演練通過</a:t>
-            </a:r>
-          </a:p>
-        </p:txBody>
-      </p:sp>
-      <p:sp>
-        <p:nvSpPr>
-          <p:cNvPr id="8" name="Rectangle 7"/>
+              <a:t>不是簡報做得好，是系統真的在跑</a:t>
+            </a:r>
+          </a:p>
+        </p:txBody>
+      </p:sp>
+      <p:sp>
+        <p:nvSpPr>
+          <p:cNvPr id="5" name="Rectangle 4"/>
           <p:cNvSpPr/>
           <p:nvPr/>
         </p:nvSpPr>
         <p:spPr>
           <a:xfrm>
-            <a:off x="4526280" y="2011680"/>
+            <a:off x="685800" y="2011680"/>
             <a:ext cx="3383280" cy="2971800"/>
           </a:xfrm>
           <a:prstGeom prst="rect">
@@ -7578,18 +7624,19 @@
           <a:lstStyle/>
           <a:p>
             <a:pPr algn="ctr"/>
-          </a:p>
-        </p:txBody>
-      </p:sp>
-      <p:sp>
-        <p:nvSpPr>
-          <p:cNvPr id="9" name="TextBox 8"/>
+            <a:endParaRPr/>
+          </a:p>
+        </p:txBody>
+      </p:sp>
+      <p:sp>
+        <p:nvSpPr>
+          <p:cNvPr id="6" name="TextBox 5"/>
           <p:cNvSpPr txBox="1"/>
           <p:nvPr/>
         </p:nvSpPr>
         <p:spPr>
           <a:xfrm>
-            <a:off x="4526280" y="2331720"/>
+            <a:off x="685800" y="2331720"/>
             <a:ext cx="3383280" cy="1005840"/>
           </a:xfrm>
           <a:prstGeom prst="rect">
@@ -7613,20 +7660,20 @@
                 <a:ea typeface="微軟正黑體"/>
                 <a:cs typeface="微軟正黑體"/>
               </a:rPr>
-              <a:t>12 項</a:t>
-            </a:r>
-          </a:p>
-        </p:txBody>
-      </p:sp>
-      <p:sp>
-        <p:nvSpPr>
-          <p:cNvPr id="10" name="TextBox 9"/>
+              <a:t>2026-08</a:t>
+            </a:r>
+          </a:p>
+        </p:txBody>
+      </p:sp>
+      <p:sp>
+        <p:nvSpPr>
+          <p:cNvPr id="7" name="TextBox 6"/>
           <p:cNvSpPr txBox="1"/>
           <p:nvPr/>
         </p:nvSpPr>
         <p:spPr>
           <a:xfrm>
-            <a:off x="4754880" y="3520440"/>
+            <a:off x="914400" y="3520440"/>
             <a:ext cx="2926080" cy="1371600"/>
           </a:xfrm>
           <a:prstGeom prst="rect">
@@ -7650,22 +7697,22 @@
                 <a:ea typeface="微軟正黑體"/>
                 <a:cs typeface="微軟正黑體"/>
               </a:rPr>
-              <a:t>雲端中心站驗收全過
-免帳密公開儀表板 ×3
-評審隨時可看</a:t>
-            </a:r>
-          </a:p>
-        </p:txBody>
-      </p:sp>
-      <p:sp>
-        <p:nvSpPr>
-          <p:cNvPr id="11" name="Rectangle 10"/>
+              <a:t>原型實機上線
+熱點自動上雲・斷線補傳
+現場模式演練通過</a:t>
+            </a:r>
+          </a:p>
+        </p:txBody>
+      </p:sp>
+      <p:sp>
+        <p:nvSpPr>
+          <p:cNvPr id="8" name="Rectangle 7"/>
           <p:cNvSpPr/>
           <p:nvPr/>
         </p:nvSpPr>
         <p:spPr>
           <a:xfrm>
-            <a:off x="8366760" y="2011680"/>
+            <a:off x="4526280" y="2011680"/>
             <a:ext cx="3383280" cy="2971800"/>
           </a:xfrm>
           <a:prstGeom prst="rect">
@@ -7698,18 +7745,19 @@
           <a:lstStyle/>
           <a:p>
             <a:pPr algn="ctr"/>
-          </a:p>
-        </p:txBody>
-      </p:sp>
-      <p:sp>
-        <p:nvSpPr>
-          <p:cNvPr id="12" name="TextBox 11"/>
+            <a:endParaRPr/>
+          </a:p>
+        </p:txBody>
+      </p:sp>
+      <p:sp>
+        <p:nvSpPr>
+          <p:cNvPr id="9" name="TextBox 8"/>
           <p:cNvSpPr txBox="1"/>
           <p:nvPr/>
         </p:nvSpPr>
         <p:spPr>
           <a:xfrm>
-            <a:off x="8366760" y="2331720"/>
+            <a:off x="4526280" y="2331720"/>
             <a:ext cx="3383280" cy="1005840"/>
           </a:xfrm>
           <a:prstGeom prst="rect">
@@ -7733,20 +7781,20 @@
                 <a:ea typeface="微軟正黑體"/>
                 <a:cs typeface="微軟正黑體"/>
               </a:rPr>
-              <a:t>29 條</a:t>
-            </a:r>
-          </a:p>
-        </p:txBody>
-      </p:sp>
-      <p:sp>
-        <p:nvSpPr>
-          <p:cNvPr id="13" name="TextBox 12"/>
+              <a:t>12 項</a:t>
+            </a:r>
+          </a:p>
+        </p:txBody>
+      </p:sp>
+      <p:sp>
+        <p:nvSpPr>
+          <p:cNvPr id="10" name="TextBox 9"/>
           <p:cNvSpPr txBox="1"/>
           <p:nvPr/>
         </p:nvSpPr>
         <p:spPr>
           <a:xfrm>
-            <a:off x="8595360" y="3520440"/>
+            <a:off x="4754880" y="3520440"/>
             <a:ext cx="2926080" cy="1371600"/>
           </a:xfrm>
           <a:prstGeom prst="rect">
@@ -7770,122 +7818,29 @@
                 <a:ea typeface="微軟正黑體"/>
                 <a:cs typeface="微軟正黑體"/>
               </a:rPr>
-              <a:t>自動化設計規則
-機構/電路/韌體/雲端
-跨層自檢・改一處全鏈重驗</a:t>
-            </a:r>
-          </a:p>
-        </p:txBody>
-      </p:sp>
-      <p:pic>
-        <p:nvPicPr>
-          <p:cNvPr id="14" name="Picture 13" descr="qr_fleet.png"/>
-          <p:cNvPicPr>
-            <a:picLocks noChangeAspect="1"/>
-          </p:cNvPicPr>
-          <p:nvPr/>
-        </p:nvPicPr>
-        <p:blipFill>
-          <a:blip r:embed="rId3"/>
-          <a:stretch>
-            <a:fillRect/>
-          </a:stretch>
-        </p:blipFill>
-        <p:spPr>
-          <a:xfrm>
-            <a:off x="868680" y="5230368"/>
-            <a:ext cx="1371600" cy="1371600"/>
-          </a:xfrm>
-          <a:prstGeom prst="rect">
-            <a:avLst/>
-          </a:prstGeom>
-        </p:spPr>
-      </p:pic>
-      <p:sp>
-        <p:nvSpPr>
-          <p:cNvPr id="15" name="TextBox 14"/>
-          <p:cNvSpPr txBox="1"/>
-          <p:nvPr/>
-        </p:nvSpPr>
-        <p:spPr>
-          <a:xfrm>
-            <a:off x="2468880" y="5468112"/>
-            <a:ext cx="9052560" cy="1005840"/>
-          </a:xfrm>
-          <a:prstGeom prst="rect">
-            <a:avLst/>
-          </a:prstGeom>
-          <a:noFill/>
-        </p:spPr>
-        <p:txBody>
-          <a:bodyPr wrap="square" anchor="t">
-            <a:spAutoFit/>
-          </a:bodyPr>
-          <a:lstStyle/>
-          <a:p>
-            <a:pPr algn="l"/>
-            <a:r>
-              <a:rPr sz="2200" b="1">
-                <a:solidFill>
-                  <a:srgbClr val="33302B"/>
-                </a:solidFill>
-                <a:latin typeface="微軟正黑體"/>
-                <a:ea typeface="微軟正黑體"/>
-                <a:cs typeface="微軟正黑體"/>
-              </a:rPr>
-              <a:t>掃碼即看：機隊即時面板（公開唯讀・免帳密）</a:t>
-            </a:r>
-          </a:p>
-          <a:p>
-            <a:pPr algn="l"/>
-            <a:r>
-              <a:rPr sz="1500" b="0">
-                <a:solidFill>
-                  <a:srgbClr val="8A8377"/>
-                </a:solidFill>
-                <a:latin typeface="微軟正黑體"/>
-                <a:ea typeface="微軟正黑體"/>
-                <a:cs typeface="微軟正黑體"/>
-              </a:rPr>
-              <a:t>程式碼與資料集開放，結論可重現——每一項都能當場驗證</a:t>
-            </a:r>
-          </a:p>
-        </p:txBody>
-      </p:sp>
-    </p:spTree>
-  </p:cSld>
-  <p:clrMapOvr>
-    <a:masterClrMapping/>
-  </p:clrMapOvr>
-</p:sld>
-</file>
-
-<file path=ppt/slides/slide8.xml><?xml version="1.0" encoding="utf-8"?>
-<p:sld xmlns:a="http://schemas.openxmlformats.org/drawingml/2006/main" xmlns:p="http://schemas.openxmlformats.org/presentationml/2006/main" xmlns:r="http://schemas.openxmlformats.org/officeDocument/2006/relationships">
-  <p:cSld>
-    <p:spTree>
-      <p:nvGrpSpPr>
-        <p:cNvPr id="1" name=""/>
-        <p:cNvGrpSpPr/>
-        <p:nvPr/>
-      </p:nvGrpSpPr>
-      <p:grpSpPr/>
-      <p:sp>
-        <p:nvSpPr>
-          <p:cNvPr id="2" name="Rectangle 1"/>
+              <a:t>雲端中心站驗收全過
+免帳密公開儀表板 ×3
+評審隨時可看</a:t>
+            </a:r>
+          </a:p>
+        </p:txBody>
+      </p:sp>
+      <p:sp>
+        <p:nvSpPr>
+          <p:cNvPr id="11" name="Rectangle 10"/>
           <p:cNvSpPr/>
           <p:nvPr/>
         </p:nvSpPr>
         <p:spPr>
           <a:xfrm>
-            <a:off x="0" y="0"/>
-            <a:ext cx="164592" cy="6858000"/>
+            <a:off x="8366760" y="2011680"/>
+            <a:ext cx="3383280" cy="2971800"/>
           </a:xfrm>
           <a:prstGeom prst="rect">
             <a:avLst/>
           </a:prstGeom>
           <a:solidFill>
-            <a:srgbClr val="9E3B2F"/>
+            <a:srgbClr val="F8F4EC"/>
           </a:solidFill>
           <a:ln>
             <a:noFill/>
@@ -7911,19 +7866,20 @@
           <a:lstStyle/>
           <a:p>
             <a:pPr algn="ctr"/>
-          </a:p>
-        </p:txBody>
-      </p:sp>
-      <p:sp>
-        <p:nvSpPr>
-          <p:cNvPr id="3" name="TextBox 2"/>
+            <a:endParaRPr/>
+          </a:p>
+        </p:txBody>
+      </p:sp>
+      <p:sp>
+        <p:nvSpPr>
+          <p:cNvPr id="12" name="TextBox 11"/>
           <p:cNvSpPr txBox="1"/>
           <p:nvPr/>
         </p:nvSpPr>
         <p:spPr>
           <a:xfrm>
-            <a:off x="502920" y="292608"/>
-            <a:ext cx="10058400" cy="457200"/>
+            <a:off x="8366760" y="2331720"/>
+            <a:ext cx="3383280" cy="1005840"/>
           </a:xfrm>
           <a:prstGeom prst="rect">
             <a:avLst/>
@@ -7936,31 +7892,31 @@
           </a:bodyPr>
           <a:lstStyle/>
           <a:p>
-            <a:pPr algn="l"/>
-            <a:r>
-              <a:rPr sz="1500" b="1">
-                <a:solidFill>
-                  <a:srgbClr val="C9A227"/>
+            <a:pPr algn="ctr"/>
+            <a:r>
+              <a:rPr sz="4200" b="1">
+                <a:solidFill>
+                  <a:srgbClr val="9E3B2F"/>
                 </a:solidFill>
                 <a:latin typeface="微軟正黑體"/>
                 <a:ea typeface="微軟正黑體"/>
                 <a:cs typeface="微軟正黑體"/>
               </a:rPr>
-              <a:t>ITERATION｜敢刪，才是工程</a:t>
-            </a:r>
-          </a:p>
-        </p:txBody>
-      </p:sp>
-      <p:sp>
-        <p:nvSpPr>
-          <p:cNvPr id="4" name="TextBox 3"/>
+              <a:t>29 條</a:t>
+            </a:r>
+          </a:p>
+        </p:txBody>
+      </p:sp>
+      <p:sp>
+        <p:nvSpPr>
+          <p:cNvPr id="13" name="TextBox 12"/>
           <p:cNvSpPr txBox="1"/>
           <p:nvPr/>
         </p:nvSpPr>
         <p:spPr>
           <a:xfrm>
-            <a:off x="502920" y="603504"/>
-            <a:ext cx="11155680" cy="914400"/>
+            <a:off x="8595360" y="3520440"/>
+            <a:ext cx="2926080" cy="1371600"/>
           </a:xfrm>
           <a:prstGeom prst="rect">
             <a:avLst/>
@@ -7973,9 +7929,9 @@
           </a:bodyPr>
           <a:lstStyle/>
           <a:p>
-            <a:pPr algn="l"/>
-            <a:r>
-              <a:rPr sz="3300" b="1">
+            <a:pPr algn="ctr"/>
+            <a:r>
+              <a:rPr sz="1600" b="0">
                 <a:solidFill>
                   <a:srgbClr val="33302B"/>
                 </a:solidFill>
@@ -7983,27 +7939,129 @@
                 <a:ea typeface="微軟正黑體"/>
                 <a:cs typeface="微軟正黑體"/>
               </a:rPr>
-              <a:t>兩次關鍵迭代：都是為真實行為讓步</a:t>
-            </a:r>
-          </a:p>
-        </p:txBody>
-      </p:sp>
-      <p:sp>
-        <p:nvSpPr>
-          <p:cNvPr id="5" name="Rectangle 4"/>
+              <a:t>自動化設計規則
+機構/電路/韌體/雲端
+跨層自檢・改一處全鏈重驗</a:t>
+            </a:r>
+          </a:p>
+        </p:txBody>
+      </p:sp>
+      <p:pic>
+        <p:nvPicPr>
+          <p:cNvPr id="14" name="Picture 13" descr="qr_fleet.png"/>
+          <p:cNvPicPr>
+            <a:picLocks noChangeAspect="1"/>
+          </p:cNvPicPr>
+          <p:nvPr/>
+        </p:nvPicPr>
+        <p:blipFill>
+          <a:blip r:embed="rId3"/>
+          <a:stretch>
+            <a:fillRect/>
+          </a:stretch>
+        </p:blipFill>
+        <p:spPr>
+          <a:xfrm>
+            <a:off x="868680" y="5230368"/>
+            <a:ext cx="1371600" cy="1371600"/>
+          </a:xfrm>
+          <a:prstGeom prst="rect">
+            <a:avLst/>
+          </a:prstGeom>
+        </p:spPr>
+      </p:pic>
+      <p:sp>
+        <p:nvSpPr>
+          <p:cNvPr id="15" name="TextBox 14"/>
+          <p:cNvSpPr txBox="1"/>
+          <p:nvPr/>
+        </p:nvSpPr>
+        <p:spPr>
+          <a:xfrm>
+            <a:off x="2468880" y="5468112"/>
+            <a:ext cx="9052560" cy="1005840"/>
+          </a:xfrm>
+          <a:prstGeom prst="rect">
+            <a:avLst/>
+          </a:prstGeom>
+          <a:noFill/>
+        </p:spPr>
+        <p:txBody>
+          <a:bodyPr wrap="square" anchor="t">
+            <a:spAutoFit/>
+          </a:bodyPr>
+          <a:lstStyle/>
+          <a:p>
+            <a:pPr algn="l"/>
+            <a:r>
+              <a:rPr sz="2200" b="1">
+                <a:solidFill>
+                  <a:srgbClr val="33302B"/>
+                </a:solidFill>
+                <a:latin typeface="微軟正黑體"/>
+                <a:ea typeface="微軟正黑體"/>
+                <a:cs typeface="微軟正黑體"/>
+              </a:rPr>
+              <a:t>掃碼即看：機隊即時面板（公開唯讀・免帳密）</a:t>
+            </a:r>
+          </a:p>
+          <a:p>
+            <a:pPr algn="l"/>
+            <a:r>
+              <a:rPr sz="1500" b="0">
+                <a:solidFill>
+                  <a:srgbClr val="8A8377"/>
+                </a:solidFill>
+                <a:latin typeface="微軟正黑體"/>
+                <a:ea typeface="微軟正黑體"/>
+                <a:cs typeface="微軟正黑體"/>
+              </a:rPr>
+              <a:t>程式碼與資料集開放，結論可重現——每一項都能當場驗證</a:t>
+            </a:r>
+          </a:p>
+        </p:txBody>
+      </p:sp>
+    </p:spTree>
+  </p:cSld>
+  <p:clrMapOvr>
+    <a:masterClrMapping/>
+  </p:clrMapOvr>
+</p:sld>
+</file>
+
+<file path=ppt/slides/slide8.xml><?xml version="1.0" encoding="utf-8"?>
+<p:sld xmlns:a="http://schemas.openxmlformats.org/drawingml/2006/main" xmlns:r="http://schemas.openxmlformats.org/officeDocument/2006/relationships" xmlns:p="http://schemas.openxmlformats.org/presentationml/2006/main">
+  <p:cSld>
+    <p:spTree>
+      <p:nvGrpSpPr>
+        <p:cNvPr id="1" name=""/>
+        <p:cNvGrpSpPr/>
+        <p:nvPr/>
+      </p:nvGrpSpPr>
+      <p:grpSpPr>
+        <a:xfrm>
+          <a:off x="0" y="0"/>
+          <a:ext cx="0" cy="0"/>
+          <a:chOff x="0" y="0"/>
+          <a:chExt cx="0" cy="0"/>
+        </a:xfrm>
+      </p:grpSpPr>
+      <p:sp>
+        <p:nvSpPr>
+          <p:cNvPr id="2" name="Rectangle 1"/>
           <p:cNvSpPr/>
           <p:nvPr/>
         </p:nvSpPr>
         <p:spPr>
           <a:xfrm>
-            <a:off x="685800" y="1920240"/>
-            <a:ext cx="5349240" cy="3931920"/>
+            <a:off x="0" y="0"/>
+            <a:ext cx="164592" cy="6858000"/>
           </a:xfrm>
           <a:prstGeom prst="rect">
             <a:avLst/>
           </a:prstGeom>
           <a:solidFill>
-            <a:srgbClr val="F8F4EC"/>
+            <a:srgbClr val="9E3B2F"/>
           </a:solidFill>
           <a:ln>
             <a:noFill/>
@@ -8029,19 +8087,20 @@
           <a:lstStyle/>
           <a:p>
             <a:pPr algn="ctr"/>
-          </a:p>
-        </p:txBody>
-      </p:sp>
-      <p:sp>
-        <p:nvSpPr>
-          <p:cNvPr id="6" name="TextBox 5"/>
+            <a:endParaRPr/>
+          </a:p>
+        </p:txBody>
+      </p:sp>
+      <p:sp>
+        <p:nvSpPr>
+          <p:cNvPr id="3" name="TextBox 2"/>
           <p:cNvSpPr txBox="1"/>
           <p:nvPr/>
         </p:nvSpPr>
         <p:spPr>
           <a:xfrm>
-            <a:off x="960120" y="2194560"/>
-            <a:ext cx="4846320" cy="3383280"/>
+            <a:off x="502920" y="292608"/>
+            <a:ext cx="10058400" cy="457200"/>
           </a:xfrm>
           <a:prstGeom prst="rect">
             <a:avLst/>
@@ -8056,21 +8115,44 @@
           <a:p>
             <a:pPr algn="l"/>
             <a:r>
-              <a:rPr sz="2400" b="1">
-                <a:solidFill>
-                  <a:srgbClr val="9E3B2F"/>
+              <a:rPr sz="1500" b="1">
+                <a:solidFill>
+                  <a:srgbClr val="C9A227"/>
                 </a:solidFill>
                 <a:latin typeface="微軟正黑體"/>
                 <a:ea typeface="微軟正黑體"/>
                 <a:cs typeface="微軟正黑體"/>
               </a:rPr>
-              <a:t>刪掉：磁力理香機構</a:t>
-            </a:r>
-          </a:p>
+              <a:t>ITERATION｜敢刪，才是工程</a:t>
+            </a:r>
+          </a:p>
+        </p:txBody>
+      </p:sp>
+      <p:sp>
+        <p:nvSpPr>
+          <p:cNvPr id="4" name="TextBox 3"/>
+          <p:cNvSpPr txBox="1"/>
+          <p:nvPr/>
+        </p:nvSpPr>
+        <p:spPr>
+          <a:xfrm>
+            <a:off x="502920" y="603504"/>
+            <a:ext cx="11155680" cy="914400"/>
+          </a:xfrm>
+          <a:prstGeom prst="rect">
+            <a:avLst/>
+          </a:prstGeom>
+          <a:noFill/>
+        </p:spPr>
+        <p:txBody>
+          <a:bodyPr wrap="square" anchor="t">
+            <a:spAutoFit/>
+          </a:bodyPr>
+          <a:lstStyle/>
           <a:p>
             <a:pPr algn="l"/>
             <a:r>
-              <a:rPr sz="800" b="0">
+              <a:rPr sz="3300" b="1">
                 <a:solidFill>
                   <a:srgbClr val="33302B"/>
                 </a:solidFill>
@@ -8078,62 +8160,20 @@
                 <a:ea typeface="微軟正黑體"/>
                 <a:cs typeface="微軟正黑體"/>
               </a:rPr>
-              <a:t/>
-            </a:r>
-          </a:p>
-          <a:p>
-            <a:pPr algn="l"/>
-            <a:r>
-              <a:rPr sz="1800" b="0">
-                <a:solidFill>
-                  <a:srgbClr val="33302B"/>
-                </a:solidFill>
-                <a:latin typeface="微軟正黑體"/>
-                <a:ea typeface="微軟正黑體"/>
-                <a:cs typeface="微軟正黑體"/>
-              </a:rPr>
-              <a:t>投入數週開發＋專利研議，但與信眾「隨手插進香灰」的真實行為不相容。</a:t>
-            </a:r>
-          </a:p>
-          <a:p>
-            <a:pPr algn="l"/>
-            <a:r>
-              <a:rPr sz="800" b="0">
-                <a:solidFill>
-                  <a:srgbClr val="33302B"/>
-                </a:solidFill>
-                <a:latin typeface="微軟正黑體"/>
-                <a:ea typeface="微軟正黑體"/>
-                <a:cs typeface="微軟正黑體"/>
-              </a:rPr>
-              <a:t/>
-            </a:r>
-          </a:p>
-          <a:p>
-            <a:pPr algn="l"/>
-            <a:r>
-              <a:rPr sz="1800" b="1">
-                <a:solidFill>
-                  <a:srgbClr val="33302B"/>
-                </a:solidFill>
-                <a:latin typeface="微軟正黑體"/>
-                <a:ea typeface="微軟正黑體"/>
-                <a:cs typeface="微軟正黑體"/>
-              </a:rPr>
-              <a:t>→ 2026-08 整組移除，資源集中在真正有效的抽排治理。</a:t>
-            </a:r>
-          </a:p>
-        </p:txBody>
-      </p:sp>
-      <p:sp>
-        <p:nvSpPr>
-          <p:cNvPr id="7" name="Rectangle 6"/>
+              <a:t>兩次關鍵迭代：都是為真實行為讓步</a:t>
+            </a:r>
+          </a:p>
+        </p:txBody>
+      </p:sp>
+      <p:sp>
+        <p:nvSpPr>
+          <p:cNvPr id="5" name="Rectangle 4"/>
           <p:cNvSpPr/>
           <p:nvPr/>
         </p:nvSpPr>
         <p:spPr>
           <a:xfrm>
-            <a:off x="6263640" y="1920240"/>
+            <a:off x="685800" y="1920240"/>
             <a:ext cx="5349240" cy="3931920"/>
           </a:xfrm>
           <a:prstGeom prst="rect">
@@ -8166,18 +8206,19 @@
           <a:lstStyle/>
           <a:p>
             <a:pPr algn="ctr"/>
-          </a:p>
-        </p:txBody>
-      </p:sp>
-      <p:sp>
-        <p:nvSpPr>
-          <p:cNvPr id="8" name="TextBox 7"/>
+            <a:endParaRPr/>
+          </a:p>
+        </p:txBody>
+      </p:sp>
+      <p:sp>
+        <p:nvSpPr>
+          <p:cNvPr id="6" name="TextBox 5"/>
           <p:cNvSpPr txBox="1"/>
           <p:nvPr/>
         </p:nvSpPr>
         <p:spPr>
           <a:xfrm>
-            <a:off x="6537960" y="2194560"/>
+            <a:off x="960120" y="2194560"/>
             <a:ext cx="4846320" cy="3383280"/>
           </a:xfrm>
           <a:prstGeom prst="rect">
@@ -8195,19 +8236,30 @@
             <a:r>
               <a:rPr sz="2400" b="1">
                 <a:solidFill>
-                  <a:srgbClr val="C9A227"/>
+                  <a:srgbClr val="9E3B2F"/>
                 </a:solidFill>
                 <a:latin typeface="微軟正黑體"/>
                 <a:ea typeface="微軟正黑體"/>
                 <a:cs typeface="微軟正黑體"/>
               </a:rPr>
-              <a:t>改掉：縮口 → 漏斗大口</a:t>
+              <a:t>刪掉：磁力理香機構</a:t>
             </a:r>
           </a:p>
           <a:p>
             <a:pPr algn="l"/>
-            <a:r>
-              <a:rPr sz="800" b="0">
+            <a:endParaRPr sz="2400" b="1">
+              <a:solidFill>
+                <a:srgbClr val="9E3B2F"/>
+              </a:solidFill>
+              <a:latin typeface="微軟正黑體"/>
+              <a:ea typeface="微軟正黑體"/>
+              <a:cs typeface="微軟正黑體"/>
+            </a:endParaRPr>
+          </a:p>
+          <a:p>
+            <a:pPr algn="l"/>
+            <a:r>
+              <a:rPr sz="1800" b="0">
                 <a:solidFill>
                   <a:srgbClr val="33302B"/>
                 </a:solidFill>
@@ -8215,13 +8267,24 @@
                 <a:ea typeface="微軟正黑體"/>
                 <a:cs typeface="微軟正黑體"/>
               </a:rPr>
-              <a:t/>
+              <a:t>投入數週開發＋專利研議，但與信眾「隨手插進香灰」的真實行為不相容。</a:t>
             </a:r>
           </a:p>
           <a:p>
             <a:pPr algn="l"/>
-            <a:r>
-              <a:rPr sz="1800" b="0">
+            <a:endParaRPr sz="1800" b="0">
+              <a:solidFill>
+                <a:srgbClr val="33302B"/>
+              </a:solidFill>
+              <a:latin typeface="微軟正黑體"/>
+              <a:ea typeface="微軟正黑體"/>
+              <a:cs typeface="微軟正黑體"/>
+            </a:endParaRPr>
+          </a:p>
+          <a:p>
+            <a:pPr algn="l"/>
+            <a:r>
+              <a:rPr sz="1800" b="1">
                 <a:solidFill>
                   <a:srgbClr val="33302B"/>
                 </a:solidFill>
@@ -8229,110 +8292,27 @@
                 <a:ea typeface="微軟正黑體"/>
                 <a:cs typeface="微軟正黑體"/>
               </a:rPr>
-              <a:t>原罩頂縮口 96mm，插香要對準才進得去。</a:t>
-            </a:r>
-          </a:p>
-          <a:p>
-            <a:pPr algn="l"/>
-            <a:r>
-              <a:rPr sz="800" b="0">
-                <a:solidFill>
-                  <a:srgbClr val="33302B"/>
-                </a:solidFill>
-                <a:latin typeface="微軟正黑體"/>
-                <a:ea typeface="微軟正黑體"/>
-                <a:cs typeface="微軟正黑體"/>
-              </a:rPr>
-              <a:t/>
-            </a:r>
-          </a:p>
-          <a:p>
-            <a:pPr algn="l"/>
-            <a:r>
-              <a:rPr sz="1800" b="1">
-                <a:solidFill>
-                  <a:srgbClr val="33302B"/>
-                </a:solidFill>
-                <a:latin typeface="微軟正黑體"/>
-                <a:ea typeface="微軟正黑體"/>
-                <a:cs typeface="微軟正黑體"/>
-              </a:rPr>
-              <a:t>→ 外擴成 180mm 向上大口：插香零門檻，倒印列印還免支撐。</a:t>
-            </a:r>
-          </a:p>
-        </p:txBody>
-      </p:sp>
-      <p:sp>
-        <p:nvSpPr>
-          <p:cNvPr id="9" name="TextBox 8"/>
-          <p:cNvSpPr txBox="1"/>
-          <p:nvPr/>
-        </p:nvSpPr>
-        <p:spPr>
-          <a:xfrm>
-            <a:off x="685800" y="6035040"/>
-            <a:ext cx="10972800" cy="502920"/>
-          </a:xfrm>
-          <a:prstGeom prst="rect">
-            <a:avLst/>
-          </a:prstGeom>
-          <a:noFill/>
-        </p:spPr>
-        <p:txBody>
-          <a:bodyPr wrap="square" anchor="t">
-            <a:spAutoFit/>
-          </a:bodyPr>
-          <a:lstStyle/>
-          <a:p>
-            <a:pPr algn="ctr"/>
-            <a:r>
-              <a:rPr sz="1800" b="1">
-                <a:solidFill>
-                  <a:srgbClr val="33302B"/>
-                </a:solidFill>
-                <a:latin typeface="微軟正黑體"/>
-                <a:ea typeface="微軟正黑體"/>
-                <a:cs typeface="微軟正黑體"/>
-              </a:rPr>
-              <a:t>設計為使用者行為讓步，而不是要求使用者配合設計。</a:t>
-            </a:r>
-          </a:p>
-        </p:txBody>
-      </p:sp>
-    </p:spTree>
-  </p:cSld>
-  <p:clrMapOvr>
-    <a:masterClrMapping/>
-  </p:clrMapOvr>
-</p:sld>
-</file>
-
-<file path=ppt/slides/slide9.xml><?xml version="1.0" encoding="utf-8"?>
-<p:sld xmlns:a="http://schemas.openxmlformats.org/drawingml/2006/main" xmlns:p="http://schemas.openxmlformats.org/presentationml/2006/main" xmlns:r="http://schemas.openxmlformats.org/officeDocument/2006/relationships">
-  <p:cSld>
-    <p:spTree>
-      <p:nvGrpSpPr>
-        <p:cNvPr id="1" name=""/>
-        <p:cNvGrpSpPr/>
-        <p:nvPr/>
-      </p:nvGrpSpPr>
-      <p:grpSpPr/>
-      <p:sp>
-        <p:nvSpPr>
-          <p:cNvPr id="2" name="Rectangle 1"/>
+              <a:t>→ 2026-08 整組移除，資源集中在真正有效的抽排治理。</a:t>
+            </a:r>
+          </a:p>
+        </p:txBody>
+      </p:sp>
+      <p:sp>
+        <p:nvSpPr>
+          <p:cNvPr id="7" name="Rectangle 6"/>
           <p:cNvSpPr/>
           <p:nvPr/>
         </p:nvSpPr>
         <p:spPr>
           <a:xfrm>
-            <a:off x="0" y="0"/>
-            <a:ext cx="164592" cy="6858000"/>
+            <a:off x="6263640" y="1920240"/>
+            <a:ext cx="5349240" cy="3931920"/>
           </a:xfrm>
           <a:prstGeom prst="rect">
             <a:avLst/>
           </a:prstGeom>
           <a:solidFill>
-            <a:srgbClr val="9E3B2F"/>
+            <a:srgbClr val="F8F4EC"/>
           </a:solidFill>
           <a:ln>
             <a:noFill/>
@@ -8358,19 +8338,20 @@
           <a:lstStyle/>
           <a:p>
             <a:pPr algn="ctr"/>
-          </a:p>
-        </p:txBody>
-      </p:sp>
-      <p:sp>
-        <p:nvSpPr>
-          <p:cNvPr id="3" name="TextBox 2"/>
+            <a:endParaRPr/>
+          </a:p>
+        </p:txBody>
+      </p:sp>
+      <p:sp>
+        <p:nvSpPr>
+          <p:cNvPr id="8" name="TextBox 7"/>
           <p:cNvSpPr txBox="1"/>
           <p:nvPr/>
         </p:nvSpPr>
         <p:spPr>
           <a:xfrm>
-            <a:off x="502920" y="292608"/>
-            <a:ext cx="10058400" cy="457200"/>
+            <a:off x="6537960" y="2194560"/>
+            <a:ext cx="4846320" cy="3383280"/>
           </a:xfrm>
           <a:prstGeom prst="rect">
             <a:avLst/>
@@ -8385,7 +8366,7 @@
           <a:p>
             <a:pPr algn="l"/>
             <a:r>
-              <a:rPr sz="1500" b="1">
+              <a:rPr sz="2400" b="1">
                 <a:solidFill>
                   <a:srgbClr val="C9A227"/>
                 </a:solidFill>
@@ -8393,36 +8374,24 @@
                 <a:ea typeface="微軟正黑體"/>
                 <a:cs typeface="微軟正黑體"/>
               </a:rPr>
-              <a:t>BUSINESS｜可負擔＋誘因對齊</a:t>
-            </a:r>
-          </a:p>
-        </p:txBody>
-      </p:sp>
-      <p:sp>
-        <p:nvSpPr>
-          <p:cNvPr id="4" name="TextBox 3"/>
-          <p:cNvSpPr txBox="1"/>
-          <p:nvPr/>
-        </p:nvSpPr>
-        <p:spPr>
-          <a:xfrm>
-            <a:off x="502920" y="603504"/>
-            <a:ext cx="11155680" cy="914400"/>
-          </a:xfrm>
-          <a:prstGeom prst="rect">
-            <a:avLst/>
-          </a:prstGeom>
-          <a:noFill/>
-        </p:spPr>
-        <p:txBody>
-          <a:bodyPr wrap="square" anchor="t">
-            <a:spAutoFit/>
-          </a:bodyPr>
-          <a:lstStyle/>
+              <a:t>改掉：縮口 → 漏斗大口</a:t>
+            </a:r>
+          </a:p>
           <a:p>
             <a:pPr algn="l"/>
-            <a:r>
-              <a:rPr sz="3300" b="1">
+            <a:endParaRPr sz="2400" b="1">
+              <a:solidFill>
+                <a:srgbClr val="C9A227"/>
+              </a:solidFill>
+              <a:latin typeface="微軟正黑體"/>
+              <a:ea typeface="微軟正黑體"/>
+              <a:cs typeface="微軟正黑體"/>
+            </a:endParaRPr>
+          </a:p>
+          <a:p>
+            <a:pPr algn="l"/>
+            <a:r>
+              <a:rPr sz="1800" b="0">
                 <a:solidFill>
                   <a:srgbClr val="33302B"/>
                 </a:solidFill>
@@ -8430,180 +8399,134 @@
                 <a:ea typeface="微軟正黑體"/>
                 <a:cs typeface="微軟正黑體"/>
               </a:rPr>
-              <a:t>十年成本只要金爐的 1/8</a:t>
-            </a:r>
-          </a:p>
-        </p:txBody>
-      </p:sp>
+              <a:t>原罩頂縮口 96mm，插香要對準才進得去。</a:t>
+            </a:r>
+          </a:p>
+          <a:p>
+            <a:pPr algn="l"/>
+            <a:endParaRPr sz="1800" b="0">
+              <a:solidFill>
+                <a:srgbClr val="33302B"/>
+              </a:solidFill>
+              <a:latin typeface="微軟正黑體"/>
+              <a:ea typeface="微軟正黑體"/>
+              <a:cs typeface="微軟正黑體"/>
+            </a:endParaRPr>
+          </a:p>
+          <a:p>
+            <a:pPr algn="l"/>
+            <a:r>
+              <a:rPr sz="1800" b="1">
+                <a:solidFill>
+                  <a:srgbClr val="33302B"/>
+                </a:solidFill>
+                <a:latin typeface="微軟正黑體"/>
+                <a:ea typeface="微軟正黑體"/>
+                <a:cs typeface="微軟正黑體"/>
+              </a:rPr>
+              <a:t>→ 外擴成 180mm 向上大口：插香零門檻，倒印列印還免支撐。</a:t>
+            </a:r>
+          </a:p>
+        </p:txBody>
+      </p:sp>
+      <p:sp>
+        <p:nvSpPr>
+          <p:cNvPr id="9" name="TextBox 8"/>
+          <p:cNvSpPr txBox="1"/>
+          <p:nvPr/>
+        </p:nvSpPr>
+        <p:spPr>
+          <a:xfrm>
+            <a:off x="685800" y="6035040"/>
+            <a:ext cx="10972800" cy="502920"/>
+          </a:xfrm>
+          <a:prstGeom prst="rect">
+            <a:avLst/>
+          </a:prstGeom>
+          <a:noFill/>
+        </p:spPr>
+        <p:txBody>
+          <a:bodyPr wrap="square" anchor="t">
+            <a:spAutoFit/>
+          </a:bodyPr>
+          <a:lstStyle/>
+          <a:p>
+            <a:pPr algn="ctr"/>
+            <a:r>
+              <a:rPr sz="1800" b="1">
+                <a:solidFill>
+                  <a:srgbClr val="33302B"/>
+                </a:solidFill>
+                <a:latin typeface="微軟正黑體"/>
+                <a:ea typeface="微軟正黑體"/>
+                <a:cs typeface="微軟正黑體"/>
+              </a:rPr>
+              <a:t>設計為使用者行為讓步，而不是要求使用者配合設計。</a:t>
+            </a:r>
+          </a:p>
+        </p:txBody>
+      </p:sp>
+    </p:spTree>
+  </p:cSld>
+  <p:clrMapOvr>
+    <a:masterClrMapping/>
+  </p:clrMapOvr>
+</p:sld>
+</file>
+
+<file path=ppt/slides/slide9.xml><?xml version="1.0" encoding="utf-8"?>
+<p:sld xmlns:a="http://schemas.openxmlformats.org/drawingml/2006/main" xmlns:r="http://schemas.openxmlformats.org/officeDocument/2006/relationships" xmlns:p="http://schemas.openxmlformats.org/presentationml/2006/main">
+  <p:cSld>
+    <p:spTree>
+      <p:nvGrpSpPr>
+        <p:cNvPr id="1" name=""/>
+        <p:cNvGrpSpPr/>
+        <p:nvPr/>
+      </p:nvGrpSpPr>
+      <p:grpSpPr>
+        <a:xfrm>
+          <a:off x="0" y="0"/>
+          <a:ext cx="0" cy="0"/>
+          <a:chOff x="0" y="0"/>
+          <a:chExt cx="0" cy="0"/>
+        </a:xfrm>
+      </p:grpSpPr>
       <p:pic>
         <p:nvPicPr>
-          <p:cNvPr id="5" name="Picture 4" descr="image9.png"/>
+          <p:cNvPr id="3" name="圖片 2">
+            <a:extLst>
+              <a:ext uri="{FF2B5EF4-FFF2-40B4-BE49-F238E27FC236}">
+                <a16:creationId xmlns:a16="http://schemas.microsoft.com/office/drawing/2014/main" id="{277CED29-2258-9FB2-594F-BED109D8F71E}"/>
+              </a:ext>
+            </a:extLst>
+          </p:cNvPr>
           <p:cNvPicPr>
             <a:picLocks noChangeAspect="1"/>
           </p:cNvPicPr>
           <p:nvPr/>
         </p:nvPicPr>
         <p:blipFill>
-          <a:blip r:embed="rId3"/>
+          <a:blip r:embed="rId2"/>
           <a:stretch>
             <a:fillRect/>
           </a:stretch>
         </p:blipFill>
         <p:spPr>
           <a:xfrm>
-            <a:off x="502920" y="1783080"/>
-            <a:ext cx="7256899" cy="4572000"/>
+            <a:off x="541867" y="304678"/>
+            <a:ext cx="11108267" cy="6248644"/>
           </a:xfrm>
           <a:prstGeom prst="rect">
             <a:avLst/>
           </a:prstGeom>
         </p:spPr>
       </p:pic>
-      <p:sp>
-        <p:nvSpPr>
-          <p:cNvPr id="6" name="TextBox 5"/>
-          <p:cNvSpPr txBox="1"/>
-          <p:nvPr/>
-        </p:nvSpPr>
-        <p:spPr>
-          <a:xfrm>
-            <a:off x="8092440" y="2103120"/>
-            <a:ext cx="3657600" cy="1463040"/>
-          </a:xfrm>
-          <a:prstGeom prst="rect">
-            <a:avLst/>
-          </a:prstGeom>
-          <a:noFill/>
-        </p:spPr>
-        <p:txBody>
-          <a:bodyPr wrap="square" anchor="t">
-            <a:spAutoFit/>
-          </a:bodyPr>
-          <a:lstStyle/>
-          <a:p>
-            <a:pPr algn="l"/>
-            <a:r>
-              <a:rPr sz="5800" b="1">
-                <a:solidFill>
-                  <a:srgbClr val="9E3B2F"/>
-                </a:solidFill>
-                <a:latin typeface="微軟正黑體"/>
-                <a:ea typeface="微軟正黑體"/>
-                <a:cs typeface="微軟正黑體"/>
-              </a:rPr>
-              <a:t>−87%</a:t>
-            </a:r>
-          </a:p>
-          <a:p>
-            <a:pPr algn="l"/>
-            <a:r>
-              <a:rPr sz="1700" b="0">
-                <a:solidFill>
-                  <a:srgbClr val="33302B"/>
-                </a:solidFill>
-                <a:latin typeface="微軟正黑體"/>
-                <a:ea typeface="微軟正黑體"/>
-                <a:cs typeface="微軟正黑體"/>
-              </a:rPr>
-              <a:t>十年 TCO vs 碳中和金爐</a:t>
-            </a:r>
-          </a:p>
-        </p:txBody>
-      </p:sp>
-      <p:sp>
-        <p:nvSpPr>
-          <p:cNvPr id="7" name="TextBox 6"/>
-          <p:cNvSpPr txBox="1"/>
-          <p:nvPr/>
-        </p:nvSpPr>
-        <p:spPr>
-          <a:xfrm>
-            <a:off x="8092440" y="3840480"/>
-            <a:ext cx="3657600" cy="2194560"/>
-          </a:xfrm>
-          <a:prstGeom prst="rect">
-            <a:avLst/>
-          </a:prstGeom>
-          <a:noFill/>
-        </p:spPr>
-        <p:txBody>
-          <a:bodyPr wrap="square" anchor="t">
-            <a:spAutoFit/>
-          </a:bodyPr>
-          <a:lstStyle/>
-          <a:p>
-            <a:pPr algn="l"/>
-            <a:r>
-              <a:rPr sz="1900" b="1">
-                <a:solidFill>
-                  <a:srgbClr val="33302B"/>
-                </a:solidFill>
-                <a:latin typeface="微軟正黑體"/>
-                <a:ea typeface="微軟正黑體"/>
-                <a:cs typeface="微軟正黑體"/>
-              </a:rPr>
-              <a:t>■ 設備＋年度訂閱制</a:t>
-            </a:r>
-          </a:p>
-          <a:p>
-            <a:pPr algn="l"/>
-            <a:r>
-              <a:rPr sz="1600" b="0">
-                <a:solidFill>
-                  <a:srgbClr val="33302B"/>
-                </a:solidFill>
-                <a:latin typeface="微軟正黑體"/>
-                <a:ea typeface="微軟正黑體"/>
-                <a:cs typeface="微軟正黑體"/>
-              </a:rPr>
-              <a:t>收入與廟宇空品綁定，誘因完全對齊</a:t>
-            </a:r>
-          </a:p>
-          <a:p>
-            <a:pPr algn="l"/>
-            <a:r>
-              <a:rPr sz="600" b="0">
-                <a:solidFill>
-                  <a:srgbClr val="33302B"/>
-                </a:solidFill>
-                <a:latin typeface="微軟正黑體"/>
-                <a:ea typeface="微軟正黑體"/>
-                <a:cs typeface="微軟正黑體"/>
-              </a:rPr>
-              <a:t/>
-            </a:r>
-          </a:p>
-          <a:p>
-            <a:pPr algn="l"/>
-            <a:r>
-              <a:rPr sz="1900" b="1">
-                <a:solidFill>
-                  <a:srgbClr val="33302B"/>
-                </a:solidFill>
-                <a:latin typeface="微軟正黑體"/>
-                <a:ea typeface="微軟正黑體"/>
-                <a:cs typeface="微軟正黑體"/>
-              </a:rPr>
-              <a:t>■ TAM 1.2 萬座寺廟</a:t>
-            </a:r>
-          </a:p>
-          <a:p>
-            <a:pPr algn="l"/>
-            <a:r>
-              <a:rPr sz="1600" b="0">
-                <a:solidFill>
-                  <a:srgbClr val="33302B"/>
-                </a:solidFill>
-                <a:latin typeface="微軟正黑體"/>
-                <a:ea typeface="微軟正黑體"/>
-                <a:cs typeface="微軟正黑體"/>
-              </a:rPr>
-              <a:t>SOM 由聯誼會轄下廟宇由下而上試算</a:t>
-            </a:r>
-          </a:p>
-        </p:txBody>
-      </p:sp>
     </p:spTree>
+    <p:extLst>
+      <p:ext uri="{BB962C8B-B14F-4D97-AF65-F5344CB8AC3E}">
+        <p14:creationId xmlns:p14="http://schemas.microsoft.com/office/powerpoint/2010/main" val="2437354475"/>
+      </p:ext>
+    </p:extLst>
   </p:cSld>
   <p:clrMapOvr>
     <a:masterClrMapping/>
@@ -8932,7 +8855,7 @@
 </file>
 
 <file path=ppt/theme/theme2.xml><?xml version="1.0" encoding="utf-8"?>
-<a:theme xmlns:a="http://schemas.openxmlformats.org/drawingml/2006/main" name="Office Theme">
+<a:theme xmlns:a="http://schemas.openxmlformats.org/drawingml/2006/main" name="Office 佈景主題">
   <a:themeElements>
     <a:clrScheme name="Office">
       <a:dk1>
@@ -8942,44 +8865,44 @@
         <a:sysClr val="window" lastClr="FFFFFF"/>
       </a:lt1>
       <a:dk2>
-        <a:srgbClr val="1F497D"/>
+        <a:srgbClr val="0E2841"/>
       </a:dk2>
       <a:lt2>
-        <a:srgbClr val="EEECE1"/>
+        <a:srgbClr val="E8E8E8"/>
       </a:lt2>
       <a:accent1>
-        <a:srgbClr val="4F81BD"/>
+        <a:srgbClr val="156082"/>
       </a:accent1>
       <a:accent2>
-        <a:srgbClr val="C0504D"/>
+        <a:srgbClr val="E97132"/>
       </a:accent2>
       <a:accent3>
-        <a:srgbClr val="9BBB59"/>
+        <a:srgbClr val="196B24"/>
       </a:accent3>
       <a:accent4>
-        <a:srgbClr val="8064A2"/>
+        <a:srgbClr val="0F9ED5"/>
       </a:accent4>
       <a:accent5>
-        <a:srgbClr val="4BACC6"/>
+        <a:srgbClr val="A02B93"/>
       </a:accent5>
       <a:accent6>
-        <a:srgbClr val="F79646"/>
+        <a:srgbClr val="4EA72E"/>
       </a:accent6>
       <a:hlink>
-        <a:srgbClr val="0000FF"/>
+        <a:srgbClr val="467886"/>
       </a:hlink>
       <a:folHlink>
-        <a:srgbClr val="800080"/>
+        <a:srgbClr val="96607D"/>
       </a:folHlink>
     </a:clrScheme>
     <a:fontScheme name="Office">
       <a:majorFont>
-        <a:latin typeface="Calibri"/>
+        <a:latin typeface="Aptos Display" panose="02110004020202020204"/>
         <a:ea typeface=""/>
         <a:cs typeface=""/>
-        <a:font script="Jpan" typeface="ＭＳ Ｐゴシック"/>
+        <a:font script="Jpan" typeface="游ゴシック Light"/>
         <a:font script="Hang" typeface="맑은 고딕"/>
-        <a:font script="Hans" typeface="宋体"/>
+        <a:font script="Hans" typeface="等线 Light"/>
         <a:font script="Hant" typeface="新細明體"/>
         <a:font script="Arab" typeface="Times New Roman"/>
         <a:font script="Hebr" typeface="Times New Roman"/>
@@ -9007,14 +8930,31 @@
         <a:font script="Viet" typeface="Times New Roman"/>
         <a:font script="Uigh" typeface="Microsoft Uighur"/>
         <a:font script="Geor" typeface="Sylfaen"/>
+        <a:font script="Armn" typeface="Arial"/>
+        <a:font script="Bugi" typeface="Leelawadee UI"/>
+        <a:font script="Bopo" typeface="Microsoft JhengHei"/>
+        <a:font script="Java" typeface="Javanese Text"/>
+        <a:font script="Lisu" typeface="Segoe UI"/>
+        <a:font script="Mymr" typeface="Myanmar Text"/>
+        <a:font script="Nkoo" typeface="Ebrima"/>
+        <a:font script="Olck" typeface="Nirmala UI"/>
+        <a:font script="Osma" typeface="Ebrima"/>
+        <a:font script="Phag" typeface="Phagspa"/>
+        <a:font script="Syrn" typeface="Estrangelo Edessa"/>
+        <a:font script="Syrj" typeface="Estrangelo Edessa"/>
+        <a:font script="Syre" typeface="Estrangelo Edessa"/>
+        <a:font script="Sora" typeface="Nirmala UI"/>
+        <a:font script="Tale" typeface="Microsoft Tai Le"/>
+        <a:font script="Talu" typeface="Microsoft New Tai Lue"/>
+        <a:font script="Tfng" typeface="Ebrima"/>
       </a:majorFont>
       <a:minorFont>
-        <a:latin typeface="Calibri"/>
+        <a:latin typeface="Aptos" panose="02110004020202020204"/>
         <a:ea typeface=""/>
         <a:cs typeface=""/>
-        <a:font script="Jpan" typeface="ＭＳ Ｐゴシック"/>
+        <a:font script="Jpan" typeface="游ゴシック"/>
         <a:font script="Hang" typeface="맑은 고딕"/>
-        <a:font script="Hans" typeface="宋体"/>
+        <a:font script="Hans" typeface="等线"/>
         <a:font script="Hant" typeface="新細明體"/>
         <a:font script="Arab" typeface="Arial"/>
         <a:font script="Hebr" typeface="Arial"/>
@@ -9042,6 +8982,23 @@
         <a:font script="Viet" typeface="Arial"/>
         <a:font script="Uigh" typeface="Microsoft Uighur"/>
         <a:font script="Geor" typeface="Sylfaen"/>
+        <a:font script="Armn" typeface="Arial"/>
+        <a:font script="Bugi" typeface="Leelawadee UI"/>
+        <a:font script="Bopo" typeface="Microsoft JhengHei"/>
+        <a:font script="Java" typeface="Javanese Text"/>
+        <a:font script="Lisu" typeface="Segoe UI"/>
+        <a:font script="Mymr" typeface="Myanmar Text"/>
+        <a:font script="Nkoo" typeface="Ebrima"/>
+        <a:font script="Olck" typeface="Nirmala UI"/>
+        <a:font script="Osma" typeface="Ebrima"/>
+        <a:font script="Phag" typeface="Phagspa"/>
+        <a:font script="Syrn" typeface="Estrangelo Edessa"/>
+        <a:font script="Syrj" typeface="Estrangelo Edessa"/>
+        <a:font script="Syre" typeface="Estrangelo Edessa"/>
+        <a:font script="Sora" typeface="Nirmala UI"/>
+        <a:font script="Tale" typeface="Microsoft Tai Le"/>
+        <a:font script="Talu" typeface="Microsoft New Tai Lue"/>
+        <a:font script="Tfng" typeface="Ebrima"/>
       </a:minorFont>
     </a:fontScheme>
     <a:fmtScheme name="Office">
@@ -9053,180 +9010,136 @@
           <a:gsLst>
             <a:gs pos="0">
               <a:schemeClr val="phClr">
-                <a:tint val="50000"/>
-                <a:satMod val="300000"/>
+                <a:lumMod val="110000"/>
+                <a:satMod val="105000"/>
+                <a:tint val="67000"/>
               </a:schemeClr>
             </a:gs>
-            <a:gs pos="35000">
+            <a:gs pos="50000">
               <a:schemeClr val="phClr">
-                <a:tint val="37000"/>
-                <a:satMod val="300000"/>
+                <a:lumMod val="105000"/>
+                <a:satMod val="103000"/>
+                <a:tint val="73000"/>
               </a:schemeClr>
             </a:gs>
             <a:gs pos="100000">
               <a:schemeClr val="phClr">
-                <a:tint val="15000"/>
-                <a:satMod val="350000"/>
+                <a:lumMod val="105000"/>
+                <a:satMod val="109000"/>
+                <a:tint val="81000"/>
               </a:schemeClr>
             </a:gs>
           </a:gsLst>
-          <a:lin ang="16200000" scaled="1"/>
+          <a:lin ang="5400000" scaled="0"/>
         </a:gradFill>
         <a:gradFill rotWithShape="1">
           <a:gsLst>
             <a:gs pos="0">
               <a:schemeClr val="phClr">
-                <a:tint val="100000"/>
+                <a:satMod val="103000"/>
+                <a:lumMod val="102000"/>
+                <a:tint val="94000"/>
+              </a:schemeClr>
+            </a:gs>
+            <a:gs pos="50000">
+              <a:schemeClr val="phClr">
+                <a:satMod val="110000"/>
+                <a:lumMod val="100000"/>
                 <a:shade val="100000"/>
-                <a:satMod val="130000"/>
               </a:schemeClr>
             </a:gs>
             <a:gs pos="100000">
               <a:schemeClr val="phClr">
-                <a:tint val="50000"/>
-                <a:shade val="100000"/>
-                <a:satMod val="350000"/>
+                <a:lumMod val="99000"/>
+                <a:satMod val="120000"/>
+                <a:shade val="78000"/>
               </a:schemeClr>
             </a:gs>
           </a:gsLst>
-          <a:lin ang="16200000" scaled="0"/>
+          <a:lin ang="5400000" scaled="0"/>
         </a:gradFill>
       </a:fillStyleLst>
       <a:lnStyleLst>
-        <a:ln w="9525" cap="flat" cmpd="sng" algn="ctr">
+        <a:ln w="12700" cap="flat" cmpd="sng" algn="ctr">
           <a:solidFill>
-            <a:schemeClr val="phClr">
-              <a:shade val="95000"/>
-              <a:satMod val="105000"/>
-            </a:schemeClr>
+            <a:schemeClr val="phClr"/>
           </a:solidFill>
           <a:prstDash val="solid"/>
+          <a:miter lim="800000"/>
+        </a:ln>
+        <a:ln w="19050" cap="flat" cmpd="sng" algn="ctr">
+          <a:solidFill>
+            <a:schemeClr val="phClr"/>
+          </a:solidFill>
+          <a:prstDash val="solid"/>
+          <a:miter lim="800000"/>
         </a:ln>
         <a:ln w="25400" cap="flat" cmpd="sng" algn="ctr">
           <a:solidFill>
             <a:schemeClr val="phClr"/>
           </a:solidFill>
           <a:prstDash val="solid"/>
-        </a:ln>
-        <a:ln w="38100" cap="flat" cmpd="sng" algn="ctr">
-          <a:solidFill>
-            <a:schemeClr val="phClr"/>
-          </a:solidFill>
-          <a:prstDash val="solid"/>
+          <a:miter lim="800000"/>
         </a:ln>
       </a:lnStyleLst>
       <a:effectStyleLst>
         <a:effectStyle>
+          <a:effectLst/>
+        </a:effectStyle>
+        <a:effectStyle>
+          <a:effectLst/>
+        </a:effectStyle>
+        <a:effectStyle>
           <a:effectLst>
-            <a:outerShdw blurRad="40000" dist="20000" dir="5400000" rotWithShape="0">
+            <a:outerShdw blurRad="57150" dist="19050" dir="5400000" algn="ctr" rotWithShape="0">
               <a:srgbClr val="000000">
-                <a:alpha val="38000"/>
+                <a:alpha val="63000"/>
               </a:srgbClr>
             </a:outerShdw>
           </a:effectLst>
-        </a:effectStyle>
-        <a:effectStyle>
-          <a:effectLst>
-            <a:outerShdw blurRad="40000" dist="23000" dir="5400000" rotWithShape="0">
-              <a:srgbClr val="000000">
-                <a:alpha val="35000"/>
-              </a:srgbClr>
-            </a:outerShdw>
-          </a:effectLst>
-        </a:effectStyle>
-        <a:effectStyle>
-          <a:effectLst>
-            <a:outerShdw blurRad="40000" dist="23000" dir="5400000" rotWithShape="0">
-              <a:srgbClr val="000000">
-                <a:alpha val="35000"/>
-              </a:srgbClr>
-            </a:outerShdw>
-          </a:effectLst>
-          <a:scene3d>
-            <a:camera prst="orthographicFront">
-              <a:rot lat="0" lon="0" rev="0"/>
-            </a:camera>
-            <a:lightRig rig="threePt" dir="t">
-              <a:rot lat="0" lon="0" rev="1200000"/>
-            </a:lightRig>
-          </a:scene3d>
-          <a:sp3d>
-            <a:bevelT w="63500" h="25400"/>
-          </a:sp3d>
         </a:effectStyle>
       </a:effectStyleLst>
       <a:bgFillStyleLst>
         <a:solidFill>
           <a:schemeClr val="phClr"/>
         </a:solidFill>
+        <a:solidFill>
+          <a:schemeClr val="phClr">
+            <a:tint val="95000"/>
+            <a:satMod val="170000"/>
+          </a:schemeClr>
+        </a:solidFill>
         <a:gradFill rotWithShape="1">
           <a:gsLst>
             <a:gs pos="0">
               <a:schemeClr val="phClr">
-                <a:tint val="40000"/>
-                <a:satMod val="350000"/>
+                <a:tint val="93000"/>
+                <a:satMod val="150000"/>
+                <a:shade val="98000"/>
+                <a:lumMod val="102000"/>
               </a:schemeClr>
             </a:gs>
-            <a:gs pos="40000">
+            <a:gs pos="50000">
               <a:schemeClr val="phClr">
-                <a:tint val="45000"/>
-                <a:shade val="99000"/>
-                <a:satMod val="350000"/>
+                <a:tint val="98000"/>
+                <a:satMod val="130000"/>
+                <a:shade val="90000"/>
+                <a:lumMod val="103000"/>
               </a:schemeClr>
             </a:gs>
             <a:gs pos="100000">
               <a:schemeClr val="phClr">
-                <a:shade val="20000"/>
-                <a:satMod val="255000"/>
+                <a:shade val="63000"/>
+                <a:satMod val="120000"/>
               </a:schemeClr>
             </a:gs>
           </a:gsLst>
-          <a:path path="circle">
-            <a:fillToRect l="50000" t="-80000" r="50000" b="180000"/>
-          </a:path>
-        </a:gradFill>
-        <a:gradFill rotWithShape="1">
-          <a:gsLst>
-            <a:gs pos="0">
-              <a:schemeClr val="phClr">
-                <a:tint val="80000"/>
-                <a:satMod val="300000"/>
-              </a:schemeClr>
-            </a:gs>
-            <a:gs pos="100000">
-              <a:schemeClr val="phClr">
-                <a:shade val="30000"/>
-                <a:satMod val="200000"/>
-              </a:schemeClr>
-            </a:gs>
-          </a:gsLst>
-          <a:path path="circle">
-            <a:fillToRect l="50000" t="50000" r="50000" b="50000"/>
-          </a:path>
+          <a:lin ang="5400000" scaled="0"/>
         </a:gradFill>
       </a:bgFillStyleLst>
     </a:fmtScheme>
   </a:themeElements>
   <a:objectDefaults>
-    <a:spDef>
-      <a:spPr/>
-      <a:bodyPr/>
-      <a:lstStyle/>
-      <a:style>
-        <a:lnRef idx="1">
-          <a:schemeClr val="accent1"/>
-        </a:lnRef>
-        <a:fillRef idx="3">
-          <a:schemeClr val="accent1"/>
-        </a:fillRef>
-        <a:effectRef idx="2">
-          <a:schemeClr val="accent1"/>
-        </a:effectRef>
-        <a:fontRef idx="minor">
-          <a:schemeClr val="lt1"/>
-        </a:fontRef>
-      </a:style>
-    </a:spDef>
     <a:lnDef>
       <a:spPr/>
       <a:bodyPr/>
@@ -9248,5 +9161,10 @@
     </a:lnDef>
   </a:objectDefaults>
   <a:extraClrSchemeLst/>
+  <a:extLst>
+    <a:ext uri="{05A4C25C-085E-4340-85A3-A5531E510DB2}">
+      <thm15:themeFamily xmlns:thm15="http://schemas.microsoft.com/office/thememl/2012/main" name="Office Theme" id="{2E142A2C-CD16-42D6-873A-C26D2A0506FA}" vid="{1BDDFF52-6CD6-40A5-AB3C-68EB2F1E4D0A}"/>
+    </a:ext>
+  </a:extLst>
 </a:theme>
 </file>
--- a/簡報/現場簡報_3分鐘.pptx
+++ b/簡報/現場簡報_3分鐘.pptx
@@ -5,7 +5,7 @@
     <p:sldMasterId id="2147483648" r:id="rId1"/>
   </p:sldMasterIdLst>
   <p:notesMasterIdLst>
-    <p:notesMasterId r:id="rId14"/>
+    <p:notesMasterId r:id="rId16"/>
   </p:notesMasterIdLst>
   <p:sldIdLst>
     <p:sldId id="256" r:id="rId2"/>
@@ -13,13 +13,15 @@
     <p:sldId id="258" r:id="rId4"/>
     <p:sldId id="259" r:id="rId5"/>
     <p:sldId id="260" r:id="rId6"/>
-    <p:sldId id="261" r:id="rId7"/>
-    <p:sldId id="262" r:id="rId8"/>
-    <p:sldId id="263" r:id="rId9"/>
-    <p:sldId id="267" r:id="rId10"/>
-    <p:sldId id="264" r:id="rId11"/>
-    <p:sldId id="265" r:id="rId12"/>
-    <p:sldId id="266" r:id="rId13"/>
+    <p:sldId id="269" r:id="rId7"/>
+    <p:sldId id="261" r:id="rId8"/>
+    <p:sldId id="268" r:id="rId9"/>
+    <p:sldId id="262" r:id="rId10"/>
+    <p:sldId id="263" r:id="rId11"/>
+    <p:sldId id="267" r:id="rId12"/>
+    <p:sldId id="264" r:id="rId13"/>
+    <p:sldId id="265" r:id="rId14"/>
+    <p:sldId id="266" r:id="rId15"/>
   </p:sldIdLst>
   <p:sldSz cx="12192000" cy="6858000"/>
   <p:notesSz cx="6858000" cy="9144000"/>
@@ -1211,7 +1213,7 @@
           <a:p>
             <a:fld id="{5BCAD085-E8A6-8845-BD4E-CB4CCA059FC4}" type="datetimeFigureOut">
               <a:rPr lang="en-US" smtClean="0"/>
-              <a:t>8/18/2026</a:t>
+              <a:t>8/21/2026</a:t>
             </a:fld>
             <a:endParaRPr lang="en-US"/>
           </a:p>
@@ -1379,7 +1381,7 @@
           <a:p>
             <a:fld id="{5BCAD085-E8A6-8845-BD4E-CB4CCA059FC4}" type="datetimeFigureOut">
               <a:rPr lang="en-US" smtClean="0"/>
-              <a:t>8/18/2026</a:t>
+              <a:t>8/21/2026</a:t>
             </a:fld>
             <a:endParaRPr lang="en-US"/>
           </a:p>
@@ -1557,7 +1559,7 @@
           <a:p>
             <a:fld id="{5BCAD085-E8A6-8845-BD4E-CB4CCA059FC4}" type="datetimeFigureOut">
               <a:rPr lang="en-US" smtClean="0"/>
-              <a:t>8/18/2026</a:t>
+              <a:t>8/21/2026</a:t>
             </a:fld>
             <a:endParaRPr lang="en-US"/>
           </a:p>
@@ -1725,7 +1727,7 @@
           <a:p>
             <a:fld id="{5BCAD085-E8A6-8845-BD4E-CB4CCA059FC4}" type="datetimeFigureOut">
               <a:rPr lang="en-US" smtClean="0"/>
-              <a:t>8/18/2026</a:t>
+              <a:t>8/21/2026</a:t>
             </a:fld>
             <a:endParaRPr lang="en-US"/>
           </a:p>
@@ -1970,7 +1972,7 @@
           <a:p>
             <a:fld id="{5BCAD085-E8A6-8845-BD4E-CB4CCA059FC4}" type="datetimeFigureOut">
               <a:rPr lang="en-US" smtClean="0"/>
-              <a:t>8/18/2026</a:t>
+              <a:t>8/21/2026</a:t>
             </a:fld>
             <a:endParaRPr lang="en-US"/>
           </a:p>
@@ -2255,7 +2257,7 @@
           <a:p>
             <a:fld id="{5BCAD085-E8A6-8845-BD4E-CB4CCA059FC4}" type="datetimeFigureOut">
               <a:rPr lang="en-US" smtClean="0"/>
-              <a:t>8/18/2026</a:t>
+              <a:t>8/21/2026</a:t>
             </a:fld>
             <a:endParaRPr lang="en-US"/>
           </a:p>
@@ -2674,7 +2676,7 @@
           <a:p>
             <a:fld id="{5BCAD085-E8A6-8845-BD4E-CB4CCA059FC4}" type="datetimeFigureOut">
               <a:rPr lang="en-US" smtClean="0"/>
-              <a:t>8/18/2026</a:t>
+              <a:t>8/21/2026</a:t>
             </a:fld>
             <a:endParaRPr lang="en-US"/>
           </a:p>
@@ -2791,7 +2793,7 @@
           <a:p>
             <a:fld id="{5BCAD085-E8A6-8845-BD4E-CB4CCA059FC4}" type="datetimeFigureOut">
               <a:rPr lang="en-US" smtClean="0"/>
-              <a:t>8/18/2026</a:t>
+              <a:t>8/21/2026</a:t>
             </a:fld>
             <a:endParaRPr lang="en-US"/>
           </a:p>
@@ -2886,7 +2888,7 @@
           <a:p>
             <a:fld id="{5BCAD085-E8A6-8845-BD4E-CB4CCA059FC4}" type="datetimeFigureOut">
               <a:rPr lang="en-US" smtClean="0"/>
-              <a:t>8/18/2026</a:t>
+              <a:t>8/21/2026</a:t>
             </a:fld>
             <a:endParaRPr lang="en-US"/>
           </a:p>
@@ -3161,7 +3163,7 @@
           <a:p>
             <a:fld id="{5BCAD085-E8A6-8845-BD4E-CB4CCA059FC4}" type="datetimeFigureOut">
               <a:rPr lang="en-US" smtClean="0"/>
-              <a:t>8/18/2026</a:t>
+              <a:t>8/21/2026</a:t>
             </a:fld>
             <a:endParaRPr lang="en-US"/>
           </a:p>
@@ -3413,7 +3415,7 @@
           <a:p>
             <a:fld id="{5BCAD085-E8A6-8845-BD4E-CB4CCA059FC4}" type="datetimeFigureOut">
               <a:rPr lang="en-US" smtClean="0"/>
-              <a:t>8/18/2026</a:t>
+              <a:t>8/21/2026</a:t>
             </a:fld>
             <a:endParaRPr lang="en-US"/>
           </a:p>
@@ -3624,7 +3626,7 @@
           <a:p>
             <a:fld id="{5BCAD085-E8A6-8845-BD4E-CB4CCA059FC4}" type="datetimeFigureOut">
               <a:rPr lang="en-US" smtClean="0"/>
-              <a:t>8/18/2026</a:t>
+              <a:t>8/21/2026</a:t>
             </a:fld>
             <a:endParaRPr lang="en-US"/>
           </a:p>
@@ -4326,7 +4328,7 @@
                 <a:ea typeface="微軟正黑體"/>
                 <a:cs typeface="微軟正黑體"/>
               </a:rPr>
-              <a:t>BUSINESS｜可負擔＋誘因對齊</a:t>
+              <a:t>ITERATION｜敢刪，才是工程</a:t>
             </a:r>
           </a:p>
         </p:txBody>
@@ -4363,217 +4365,27 @@
                 <a:ea typeface="微軟正黑體"/>
                 <a:cs typeface="微軟正黑體"/>
               </a:rPr>
-              <a:t>十年成本只要金爐的 1/8</a:t>
-            </a:r>
-          </a:p>
-        </p:txBody>
-      </p:sp>
-      <p:pic>
-        <p:nvPicPr>
-          <p:cNvPr id="5" name="Picture 4" descr="image9.png"/>
-          <p:cNvPicPr>
-            <a:picLocks noChangeAspect="1"/>
-          </p:cNvPicPr>
-          <p:nvPr/>
-        </p:nvPicPr>
-        <p:blipFill>
-          <a:blip r:embed="rId3"/>
-          <a:stretch>
-            <a:fillRect/>
-          </a:stretch>
-        </p:blipFill>
-        <p:spPr>
-          <a:xfrm>
-            <a:off x="502920" y="1783080"/>
-            <a:ext cx="7256899" cy="4572000"/>
-          </a:xfrm>
-          <a:prstGeom prst="rect">
-            <a:avLst/>
-          </a:prstGeom>
-        </p:spPr>
-      </p:pic>
-      <p:sp>
-        <p:nvSpPr>
-          <p:cNvPr id="6" name="TextBox 5"/>
-          <p:cNvSpPr txBox="1"/>
-          <p:nvPr/>
-        </p:nvSpPr>
-        <p:spPr>
-          <a:xfrm>
-            <a:off x="8092440" y="2103120"/>
-            <a:ext cx="3657600" cy="1463040"/>
-          </a:xfrm>
-          <a:prstGeom prst="rect">
-            <a:avLst/>
-          </a:prstGeom>
-          <a:noFill/>
-        </p:spPr>
-        <p:txBody>
-          <a:bodyPr wrap="square" anchor="t">
-            <a:spAutoFit/>
-          </a:bodyPr>
-          <a:lstStyle/>
-          <a:p>
-            <a:pPr algn="l"/>
-            <a:r>
-              <a:rPr sz="5800" b="1">
-                <a:solidFill>
-                  <a:srgbClr val="9E3B2F"/>
-                </a:solidFill>
-                <a:latin typeface="微軟正黑體"/>
-                <a:ea typeface="微軟正黑體"/>
-                <a:cs typeface="微軟正黑體"/>
-              </a:rPr>
-              <a:t>−87%</a:t>
-            </a:r>
-          </a:p>
-          <a:p>
-            <a:pPr algn="l"/>
-            <a:r>
-              <a:rPr sz="1700" b="0">
-                <a:solidFill>
-                  <a:srgbClr val="33302B"/>
-                </a:solidFill>
-                <a:latin typeface="微軟正黑體"/>
-                <a:ea typeface="微軟正黑體"/>
-                <a:cs typeface="微軟正黑體"/>
-              </a:rPr>
-              <a:t>十年 TCO vs 碳中和金爐</a:t>
-            </a:r>
-          </a:p>
-        </p:txBody>
-      </p:sp>
-      <p:sp>
-        <p:nvSpPr>
-          <p:cNvPr id="7" name="TextBox 6"/>
-          <p:cNvSpPr txBox="1"/>
-          <p:nvPr/>
-        </p:nvSpPr>
-        <p:spPr>
-          <a:xfrm>
-            <a:off x="8092440" y="3840480"/>
-            <a:ext cx="3657600" cy="2194560"/>
-          </a:xfrm>
-          <a:prstGeom prst="rect">
-            <a:avLst/>
-          </a:prstGeom>
-          <a:noFill/>
-        </p:spPr>
-        <p:txBody>
-          <a:bodyPr wrap="square" anchor="t">
-            <a:spAutoFit/>
-          </a:bodyPr>
-          <a:lstStyle/>
-          <a:p>
-            <a:pPr algn="l"/>
-            <a:r>
-              <a:rPr sz="1900" b="1">
-                <a:solidFill>
-                  <a:srgbClr val="33302B"/>
-                </a:solidFill>
-                <a:latin typeface="微軟正黑體"/>
-                <a:ea typeface="微軟正黑體"/>
-                <a:cs typeface="微軟正黑體"/>
-              </a:rPr>
-              <a:t>■ 設備＋年度訂閱制</a:t>
-            </a:r>
-          </a:p>
-          <a:p>
-            <a:pPr algn="l"/>
-            <a:r>
-              <a:rPr sz="1600" b="0">
-                <a:solidFill>
-                  <a:srgbClr val="33302B"/>
-                </a:solidFill>
-                <a:latin typeface="微軟正黑體"/>
-                <a:ea typeface="微軟正黑體"/>
-                <a:cs typeface="微軟正黑體"/>
-              </a:rPr>
-              <a:t>收入與廟宇空品綁定，誘因完全對齊</a:t>
-            </a:r>
-          </a:p>
-          <a:p>
-            <a:pPr algn="l"/>
-            <a:endParaRPr sz="1600" b="0">
-              <a:solidFill>
-                <a:srgbClr val="33302B"/>
-              </a:solidFill>
-              <a:latin typeface="微軟正黑體"/>
-              <a:ea typeface="微軟正黑體"/>
-              <a:cs typeface="微軟正黑體"/>
-            </a:endParaRPr>
-          </a:p>
-          <a:p>
-            <a:pPr algn="l"/>
-            <a:r>
-              <a:rPr sz="1900" b="1">
-                <a:solidFill>
-                  <a:srgbClr val="33302B"/>
-                </a:solidFill>
-                <a:latin typeface="微軟正黑體"/>
-                <a:ea typeface="微軟正黑體"/>
-                <a:cs typeface="微軟正黑體"/>
-              </a:rPr>
-              <a:t>■ TAM 1.2 萬座寺廟</a:t>
-            </a:r>
-          </a:p>
-          <a:p>
-            <a:pPr algn="l"/>
-            <a:r>
-              <a:rPr sz="1600" b="0">
-                <a:solidFill>
-                  <a:srgbClr val="33302B"/>
-                </a:solidFill>
-                <a:latin typeface="微軟正黑體"/>
-                <a:ea typeface="微軟正黑體"/>
-                <a:cs typeface="微軟正黑體"/>
-              </a:rPr>
-              <a:t>SOM 由聯誼會轄下廟宇由下而上試算</a:t>
-            </a:r>
-          </a:p>
-        </p:txBody>
-      </p:sp>
-    </p:spTree>
-  </p:cSld>
-  <p:clrMapOvr>
-    <a:masterClrMapping/>
-  </p:clrMapOvr>
-</p:sld>
-</file>
-
-<file path=ppt/slides/slide11.xml><?xml version="1.0" encoding="utf-8"?>
-<p:sld xmlns:a="http://schemas.openxmlformats.org/drawingml/2006/main" xmlns:r="http://schemas.openxmlformats.org/officeDocument/2006/relationships" xmlns:p="http://schemas.openxmlformats.org/presentationml/2006/main">
-  <p:cSld>
-    <p:spTree>
-      <p:nvGrpSpPr>
-        <p:cNvPr id="1" name=""/>
-        <p:cNvGrpSpPr/>
-        <p:nvPr/>
-      </p:nvGrpSpPr>
-      <p:grpSpPr>
-        <a:xfrm>
-          <a:off x="0" y="0"/>
-          <a:ext cx="0" cy="0"/>
-          <a:chOff x="0" y="0"/>
-          <a:chExt cx="0" cy="0"/>
-        </a:xfrm>
-      </p:grpSpPr>
-      <p:sp>
-        <p:nvSpPr>
-          <p:cNvPr id="2" name="Rectangle 1"/>
+              <a:t>兩次關鍵迭代：都是為真實行為讓步</a:t>
+            </a:r>
+          </a:p>
+        </p:txBody>
+      </p:sp>
+      <p:sp>
+        <p:nvSpPr>
+          <p:cNvPr id="5" name="Rectangle 4"/>
           <p:cNvSpPr/>
           <p:nvPr/>
         </p:nvSpPr>
         <p:spPr>
           <a:xfrm>
-            <a:off x="0" y="0"/>
-            <a:ext cx="164592" cy="6858000"/>
+            <a:off x="685800" y="1920240"/>
+            <a:ext cx="5349240" cy="3931920"/>
           </a:xfrm>
           <a:prstGeom prst="rect">
             <a:avLst/>
           </a:prstGeom>
           <a:solidFill>
-            <a:srgbClr val="9E3B2F"/>
+            <a:srgbClr val="F8F4EC"/>
           </a:solidFill>
           <a:ln>
             <a:noFill/>
@@ -4605,14 +4417,14 @@
       </p:sp>
       <p:sp>
         <p:nvSpPr>
-          <p:cNvPr id="3" name="TextBox 2"/>
+          <p:cNvPr id="6" name="TextBox 5"/>
           <p:cNvSpPr txBox="1"/>
           <p:nvPr/>
         </p:nvSpPr>
         <p:spPr>
           <a:xfrm>
-            <a:off x="502920" y="292608"/>
-            <a:ext cx="10058400" cy="457200"/>
+            <a:off x="960120" y="2194560"/>
+            <a:ext cx="4846320" cy="3383280"/>
           </a:xfrm>
           <a:prstGeom prst="rect">
             <a:avLst/>
@@ -4627,44 +4439,32 @@
           <a:p>
             <a:pPr algn="l"/>
             <a:r>
-              <a:rPr sz="1500" b="1">
-                <a:solidFill>
-                  <a:srgbClr val="C9A227"/>
+              <a:rPr sz="2400" b="1">
+                <a:solidFill>
+                  <a:srgbClr val="9E3B2F"/>
                 </a:solidFill>
                 <a:latin typeface="微軟正黑體"/>
                 <a:ea typeface="微軟正黑體"/>
                 <a:cs typeface="微軟正黑體"/>
               </a:rPr>
-              <a:t>IMPACT &amp; NEXT｜影響與路線</a:t>
-            </a:r>
-          </a:p>
-        </p:txBody>
-      </p:sp>
-      <p:sp>
-        <p:nvSpPr>
-          <p:cNvPr id="4" name="TextBox 3"/>
-          <p:cNvSpPr txBox="1"/>
-          <p:nvPr/>
-        </p:nvSpPr>
-        <p:spPr>
-          <a:xfrm>
-            <a:off x="502920" y="603504"/>
-            <a:ext cx="11155680" cy="914400"/>
-          </a:xfrm>
-          <a:prstGeom prst="rect">
-            <a:avLst/>
-          </a:prstGeom>
-          <a:noFill/>
-        </p:spPr>
-        <p:txBody>
-          <a:bodyPr wrap="square" anchor="t">
-            <a:spAutoFit/>
-          </a:bodyPr>
-          <a:lstStyle/>
+              <a:t>刪掉：磁力理香機構</a:t>
+            </a:r>
+          </a:p>
           <a:p>
             <a:pPr algn="l"/>
-            <a:r>
-              <a:rPr sz="3300" b="1">
+            <a:endParaRPr sz="2400" b="1">
+              <a:solidFill>
+                <a:srgbClr val="9E3B2F"/>
+              </a:solidFill>
+              <a:latin typeface="微軟正黑體"/>
+              <a:ea typeface="微軟正黑體"/>
+              <a:cs typeface="微軟正黑體"/>
+            </a:endParaRPr>
+          </a:p>
+          <a:p>
+            <a:pPr algn="l"/>
+            <a:r>
+              <a:rPr sz="1800" b="0">
                 <a:solidFill>
                   <a:srgbClr val="33302B"/>
                 </a:solidFill>
@@ -4672,45 +4472,46 @@
                 <a:ea typeface="微軟正黑體"/>
                 <a:cs typeface="微軟正黑體"/>
               </a:rPr>
-              <a:t>每項主張配一個可量測指標</a:t>
-            </a:r>
-          </a:p>
-        </p:txBody>
-      </p:sp>
-      <p:pic>
-        <p:nvPicPr>
-          <p:cNvPr id="5" name="Picture 4" descr="image14.png"/>
-          <p:cNvPicPr>
-            <a:picLocks noChangeAspect="1"/>
-          </p:cNvPicPr>
-          <p:nvPr/>
-        </p:nvPicPr>
-        <p:blipFill>
-          <a:blip r:embed="rId3"/>
-          <a:stretch>
-            <a:fillRect/>
-          </a:stretch>
-        </p:blipFill>
-        <p:spPr>
-          <a:xfrm>
-            <a:off x="502920" y="1920240"/>
-            <a:ext cx="6949440" cy="3429593"/>
-          </a:xfrm>
-          <a:prstGeom prst="rect">
-            <a:avLst/>
-          </a:prstGeom>
-        </p:spPr>
-      </p:pic>
-      <p:sp>
-        <p:nvSpPr>
-          <p:cNvPr id="6" name="Rectangle 5"/>
+              <a:t>投入數週開發＋專利研議，但與信眾「隨手插進香灰」的真實行為不相容。</a:t>
+            </a:r>
+          </a:p>
+          <a:p>
+            <a:pPr algn="l"/>
+            <a:endParaRPr sz="1800" b="0">
+              <a:solidFill>
+                <a:srgbClr val="33302B"/>
+              </a:solidFill>
+              <a:latin typeface="微軟正黑體"/>
+              <a:ea typeface="微軟正黑體"/>
+              <a:cs typeface="微軟正黑體"/>
+            </a:endParaRPr>
+          </a:p>
+          <a:p>
+            <a:pPr algn="l"/>
+            <a:r>
+              <a:rPr sz="1800" b="1">
+                <a:solidFill>
+                  <a:srgbClr val="33302B"/>
+                </a:solidFill>
+                <a:latin typeface="微軟正黑體"/>
+                <a:ea typeface="微軟正黑體"/>
+                <a:cs typeface="微軟正黑體"/>
+              </a:rPr>
+              <a:t>→ 2026-08 整組移除，資源集中在真正有效的抽排治理。</a:t>
+            </a:r>
+          </a:p>
+        </p:txBody>
+      </p:sp>
+      <p:sp>
+        <p:nvSpPr>
+          <p:cNvPr id="7" name="Rectangle 6"/>
           <p:cNvSpPr/>
           <p:nvPr/>
         </p:nvSpPr>
         <p:spPr>
           <a:xfrm>
-            <a:off x="7772400" y="1920240"/>
-            <a:ext cx="3931920" cy="1188720"/>
+            <a:off x="6263640" y="1920240"/>
+            <a:ext cx="5349240" cy="3931920"/>
           </a:xfrm>
           <a:prstGeom prst="rect">
             <a:avLst/>
@@ -4748,14 +4549,14 @@
       </p:sp>
       <p:sp>
         <p:nvSpPr>
-          <p:cNvPr id="7" name="TextBox 6"/>
+          <p:cNvPr id="8" name="TextBox 7"/>
           <p:cNvSpPr txBox="1"/>
           <p:nvPr/>
         </p:nvSpPr>
         <p:spPr>
           <a:xfrm>
-            <a:off x="7955279" y="2084832"/>
-            <a:ext cx="640080" cy="822960"/>
+            <a:off x="6537960" y="2194560"/>
+            <a:ext cx="4846320" cy="3383280"/>
           </a:xfrm>
           <a:prstGeom prst="rect">
             <a:avLst/>
@@ -4770,7 +4571,7 @@
           <a:p>
             <a:pPr algn="l"/>
             <a:r>
-              <a:rPr sz="3000" b="1">
+              <a:rPr sz="2400" b="1">
                 <a:solidFill>
                   <a:srgbClr val="C9A227"/>
                 </a:solidFill>
@@ -4778,3478 +4579,14 @@
                 <a:ea typeface="微軟正黑體"/>
                 <a:cs typeface="微軟正黑體"/>
               </a:rPr>
-              <a:t>①</a:t>
-            </a:r>
-          </a:p>
-        </p:txBody>
-      </p:sp>
-      <p:sp>
-        <p:nvSpPr>
-          <p:cNvPr id="8" name="TextBox 7"/>
-          <p:cNvSpPr txBox="1"/>
-          <p:nvPr/>
-        </p:nvSpPr>
-        <p:spPr>
-          <a:xfrm>
-            <a:off x="8641080" y="2029968"/>
-            <a:ext cx="3017520" cy="457200"/>
-          </a:xfrm>
-          <a:prstGeom prst="rect">
-            <a:avLst/>
-          </a:prstGeom>
-          <a:noFill/>
-        </p:spPr>
-        <p:txBody>
-          <a:bodyPr wrap="square" anchor="t">
-            <a:spAutoFit/>
-          </a:bodyPr>
-          <a:lstStyle/>
-          <a:p>
-            <a:pPr algn="l"/>
-            <a:r>
-              <a:rPr sz="2000" b="1">
-                <a:solidFill>
-                  <a:srgbClr val="33302B"/>
-                </a:solidFill>
-                <a:latin typeface="微軟正黑體"/>
-                <a:ea typeface="微軟正黑體"/>
-                <a:cs typeface="微軟正黑體"/>
-              </a:rPr>
-              <a:t>示範試點</a:t>
-            </a:r>
-          </a:p>
-        </p:txBody>
-      </p:sp>
-      <p:sp>
-        <p:nvSpPr>
-          <p:cNvPr id="9" name="TextBox 8"/>
-          <p:cNvSpPr txBox="1"/>
-          <p:nvPr/>
-        </p:nvSpPr>
-        <p:spPr>
-          <a:xfrm>
-            <a:off x="8641080" y="2450592"/>
-            <a:ext cx="3017520" cy="640080"/>
-          </a:xfrm>
-          <a:prstGeom prst="rect">
-            <a:avLst/>
-          </a:prstGeom>
-          <a:noFill/>
-        </p:spPr>
-        <p:txBody>
-          <a:bodyPr wrap="square" anchor="t">
-            <a:spAutoFit/>
-          </a:bodyPr>
-          <a:lstStyle/>
-          <a:p>
-            <a:pPr algn="l"/>
-            <a:r>
-              <a:rPr sz="1400" b="0">
-                <a:solidFill>
-                  <a:srgbClr val="8A8377"/>
-                </a:solidFill>
-                <a:latin typeface="微軟正黑體"/>
-                <a:ea typeface="微軟正黑體"/>
-                <a:cs typeface="微軟正黑體"/>
-              </a:rPr>
-              <a:t>一座合作廟宇
-公開實測數據</a:t>
-            </a:r>
-          </a:p>
-        </p:txBody>
-      </p:sp>
-      <p:sp>
-        <p:nvSpPr>
-          <p:cNvPr id="10" name="Rectangle 9"/>
-          <p:cNvSpPr/>
-          <p:nvPr/>
-        </p:nvSpPr>
-        <p:spPr>
-          <a:xfrm>
-            <a:off x="7772400" y="3337560"/>
-            <a:ext cx="3931920" cy="1188720"/>
-          </a:xfrm>
-          <a:prstGeom prst="rect">
-            <a:avLst/>
-          </a:prstGeom>
-          <a:solidFill>
-            <a:srgbClr val="F8F4EC"/>
-          </a:solidFill>
-          <a:ln>
-            <a:noFill/>
-          </a:ln>
-          <a:effectLst/>
-        </p:spPr>
-        <p:style>
-          <a:lnRef idx="1">
-            <a:schemeClr val="accent1"/>
-          </a:lnRef>
-          <a:fillRef idx="3">
-            <a:schemeClr val="accent1"/>
-          </a:fillRef>
-          <a:effectRef idx="2">
-            <a:schemeClr val="accent1"/>
-          </a:effectRef>
-          <a:fontRef idx="minor">
-            <a:schemeClr val="lt1"/>
-          </a:fontRef>
-        </p:style>
-        <p:txBody>
-          <a:bodyPr rtlCol="0" anchor="ctr"/>
-          <a:lstStyle/>
-          <a:p>
-            <a:pPr algn="ctr"/>
-            <a:endParaRPr/>
-          </a:p>
-        </p:txBody>
-      </p:sp>
-      <p:sp>
-        <p:nvSpPr>
-          <p:cNvPr id="11" name="TextBox 10"/>
-          <p:cNvSpPr txBox="1"/>
-          <p:nvPr/>
-        </p:nvSpPr>
-        <p:spPr>
-          <a:xfrm>
-            <a:off x="7955279" y="3502152"/>
-            <a:ext cx="640080" cy="822960"/>
-          </a:xfrm>
-          <a:prstGeom prst="rect">
-            <a:avLst/>
-          </a:prstGeom>
-          <a:noFill/>
-        </p:spPr>
-        <p:txBody>
-          <a:bodyPr wrap="square" anchor="t">
-            <a:spAutoFit/>
-          </a:bodyPr>
-          <a:lstStyle/>
-          <a:p>
-            <a:pPr algn="l"/>
-            <a:r>
-              <a:rPr sz="3000" b="1">
-                <a:solidFill>
-                  <a:srgbClr val="C9A227"/>
-                </a:solidFill>
-                <a:latin typeface="微軟正黑體"/>
-                <a:ea typeface="微軟正黑體"/>
-                <a:cs typeface="微軟正黑體"/>
-              </a:rPr>
-              <a:t>②</a:t>
-            </a:r>
-          </a:p>
-        </p:txBody>
-      </p:sp>
-      <p:sp>
-        <p:nvSpPr>
-          <p:cNvPr id="12" name="TextBox 11"/>
-          <p:cNvSpPr txBox="1"/>
-          <p:nvPr/>
-        </p:nvSpPr>
-        <p:spPr>
-          <a:xfrm>
-            <a:off x="8641080" y="3447288"/>
-            <a:ext cx="3017520" cy="457200"/>
-          </a:xfrm>
-          <a:prstGeom prst="rect">
-            <a:avLst/>
-          </a:prstGeom>
-          <a:noFill/>
-        </p:spPr>
-        <p:txBody>
-          <a:bodyPr wrap="square" anchor="t">
-            <a:spAutoFit/>
-          </a:bodyPr>
-          <a:lstStyle/>
-          <a:p>
-            <a:pPr algn="l"/>
-            <a:r>
-              <a:rPr sz="2000" b="1">
-                <a:solidFill>
-                  <a:srgbClr val="33302B"/>
-                </a:solidFill>
-                <a:latin typeface="微軟正黑體"/>
-                <a:ea typeface="微軟正黑體"/>
-                <a:cs typeface="微軟正黑體"/>
-              </a:rPr>
-              <a:t>口碑擴散</a:t>
-            </a:r>
-          </a:p>
-        </p:txBody>
-      </p:sp>
-      <p:sp>
-        <p:nvSpPr>
-          <p:cNvPr id="13" name="TextBox 12"/>
-          <p:cNvSpPr txBox="1"/>
-          <p:nvPr/>
-        </p:nvSpPr>
-        <p:spPr>
-          <a:xfrm>
-            <a:off x="8641080" y="3867912"/>
-            <a:ext cx="3017520" cy="640080"/>
-          </a:xfrm>
-          <a:prstGeom prst="rect">
-            <a:avLst/>
-          </a:prstGeom>
-          <a:noFill/>
-        </p:spPr>
-        <p:txBody>
-          <a:bodyPr wrap="square" anchor="t">
-            <a:spAutoFit/>
-          </a:bodyPr>
-          <a:lstStyle/>
-          <a:p>
-            <a:pPr algn="l"/>
-            <a:r>
-              <a:rPr sz="1400" b="0">
-                <a:solidFill>
-                  <a:srgbClr val="8A8377"/>
-                </a:solidFill>
-                <a:latin typeface="微軟正黑體"/>
-                <a:ea typeface="微軟正黑體"/>
-                <a:cs typeface="微軟正黑體"/>
-              </a:rPr>
-              <a:t>聯誼會通路
-首批付費導入</a:t>
-            </a:r>
-          </a:p>
-        </p:txBody>
-      </p:sp>
-      <p:sp>
-        <p:nvSpPr>
-          <p:cNvPr id="14" name="Rectangle 13"/>
-          <p:cNvSpPr/>
-          <p:nvPr/>
-        </p:nvSpPr>
-        <p:spPr>
-          <a:xfrm>
-            <a:off x="7772400" y="4754880"/>
-            <a:ext cx="3931920" cy="1188720"/>
-          </a:xfrm>
-          <a:prstGeom prst="rect">
-            <a:avLst/>
-          </a:prstGeom>
-          <a:solidFill>
-            <a:srgbClr val="F8F4EC"/>
-          </a:solidFill>
-          <a:ln>
-            <a:noFill/>
-          </a:ln>
-          <a:effectLst/>
-        </p:spPr>
-        <p:style>
-          <a:lnRef idx="1">
-            <a:schemeClr val="accent1"/>
-          </a:lnRef>
-          <a:fillRef idx="3">
-            <a:schemeClr val="accent1"/>
-          </a:fillRef>
-          <a:effectRef idx="2">
-            <a:schemeClr val="accent1"/>
-          </a:effectRef>
-          <a:fontRef idx="minor">
-            <a:schemeClr val="lt1"/>
-          </a:fontRef>
-        </p:style>
-        <p:txBody>
-          <a:bodyPr rtlCol="0" anchor="ctr"/>
-          <a:lstStyle/>
-          <a:p>
-            <a:pPr algn="ctr"/>
-            <a:endParaRPr/>
-          </a:p>
-        </p:txBody>
-      </p:sp>
-      <p:sp>
-        <p:nvSpPr>
-          <p:cNvPr id="15" name="TextBox 14"/>
-          <p:cNvSpPr txBox="1"/>
-          <p:nvPr/>
-        </p:nvSpPr>
-        <p:spPr>
-          <a:xfrm>
-            <a:off x="7955279" y="4919472"/>
-            <a:ext cx="640080" cy="822960"/>
-          </a:xfrm>
-          <a:prstGeom prst="rect">
-            <a:avLst/>
-          </a:prstGeom>
-          <a:noFill/>
-        </p:spPr>
-        <p:txBody>
-          <a:bodyPr wrap="square" anchor="t">
-            <a:spAutoFit/>
-          </a:bodyPr>
-          <a:lstStyle/>
-          <a:p>
-            <a:pPr algn="l"/>
-            <a:r>
-              <a:rPr sz="3000" b="1">
-                <a:solidFill>
-                  <a:srgbClr val="C9A227"/>
-                </a:solidFill>
-                <a:latin typeface="微軟正黑體"/>
-                <a:ea typeface="微軟正黑體"/>
-                <a:cs typeface="微軟正黑體"/>
-              </a:rPr>
-              <a:t>③</a:t>
-            </a:r>
-          </a:p>
-        </p:txBody>
-      </p:sp>
-      <p:sp>
-        <p:nvSpPr>
-          <p:cNvPr id="16" name="TextBox 15"/>
-          <p:cNvSpPr txBox="1"/>
-          <p:nvPr/>
-        </p:nvSpPr>
-        <p:spPr>
-          <a:xfrm>
-            <a:off x="8641080" y="4864608"/>
-            <a:ext cx="3017520" cy="457200"/>
-          </a:xfrm>
-          <a:prstGeom prst="rect">
-            <a:avLst/>
-          </a:prstGeom>
-          <a:noFill/>
-        </p:spPr>
-        <p:txBody>
-          <a:bodyPr wrap="square" anchor="t">
-            <a:spAutoFit/>
-          </a:bodyPr>
-          <a:lstStyle/>
-          <a:p>
-            <a:pPr algn="l"/>
-            <a:r>
-              <a:rPr sz="2000" b="1">
-                <a:solidFill>
-                  <a:srgbClr val="33302B"/>
-                </a:solidFill>
-                <a:latin typeface="微軟正黑體"/>
-                <a:ea typeface="微軟正黑體"/>
-                <a:cs typeface="微軟正黑體"/>
-              </a:rPr>
-              <a:t>跨域移植</a:t>
-            </a:r>
-          </a:p>
-        </p:txBody>
-      </p:sp>
-      <p:sp>
-        <p:nvSpPr>
-          <p:cNvPr id="17" name="TextBox 16"/>
-          <p:cNvSpPr txBox="1"/>
-          <p:nvPr/>
-        </p:nvSpPr>
-        <p:spPr>
-          <a:xfrm>
-            <a:off x="8641080" y="5285232"/>
-            <a:ext cx="3017520" cy="640080"/>
-          </a:xfrm>
-          <a:prstGeom prst="rect">
-            <a:avLst/>
-          </a:prstGeom>
-          <a:noFill/>
-        </p:spPr>
-        <p:txBody>
-          <a:bodyPr wrap="square" anchor="t">
-            <a:spAutoFit/>
-          </a:bodyPr>
-          <a:lstStyle/>
-          <a:p>
-            <a:pPr algn="l"/>
-            <a:r>
-              <a:rPr sz="1400" b="0">
-                <a:solidFill>
-                  <a:srgbClr val="8A8377"/>
-                </a:solidFill>
-                <a:latin typeface="微軟正黑體"/>
-                <a:ea typeface="微軟正黑體"/>
-                <a:cs typeface="微軟正黑體"/>
-              </a:rPr>
-              <a:t>餐飲油煙・密閉空品
-更大市場</a:t>
-            </a:r>
-          </a:p>
-        </p:txBody>
-      </p:sp>
-    </p:spTree>
-  </p:cSld>
-  <p:clrMapOvr>
-    <a:masterClrMapping/>
-  </p:clrMapOvr>
-</p:sld>
-</file>
-
-<file path=ppt/slides/slide12.xml><?xml version="1.0" encoding="utf-8"?>
-<p:sld xmlns:a="http://schemas.openxmlformats.org/drawingml/2006/main" xmlns:r="http://schemas.openxmlformats.org/officeDocument/2006/relationships" xmlns:p="http://schemas.openxmlformats.org/presentationml/2006/main">
-  <p:cSld>
-    <p:spTree>
-      <p:nvGrpSpPr>
-        <p:cNvPr id="1" name=""/>
-        <p:cNvGrpSpPr/>
-        <p:nvPr/>
-      </p:nvGrpSpPr>
-      <p:grpSpPr>
-        <a:xfrm>
-          <a:off x="0" y="0"/>
-          <a:ext cx="0" cy="0"/>
-          <a:chOff x="0" y="0"/>
-          <a:chExt cx="0" cy="0"/>
-        </a:xfrm>
-      </p:grpSpPr>
-      <p:sp>
-        <p:nvSpPr>
-          <p:cNvPr id="2" name="Rectangle 1"/>
-          <p:cNvSpPr/>
-          <p:nvPr/>
-        </p:nvSpPr>
-        <p:spPr>
-          <a:xfrm>
-            <a:off x="0" y="0"/>
-            <a:ext cx="12191695" cy="6858000"/>
-          </a:xfrm>
-          <a:prstGeom prst="rect">
-            <a:avLst/>
-          </a:prstGeom>
-          <a:solidFill>
-            <a:srgbClr val="2E2A26"/>
-          </a:solidFill>
-          <a:ln>
-            <a:noFill/>
-          </a:ln>
-          <a:effectLst/>
-        </p:spPr>
-        <p:style>
-          <a:lnRef idx="1">
-            <a:schemeClr val="accent1"/>
-          </a:lnRef>
-          <a:fillRef idx="3">
-            <a:schemeClr val="accent1"/>
-          </a:fillRef>
-          <a:effectRef idx="2">
-            <a:schemeClr val="accent1"/>
-          </a:effectRef>
-          <a:fontRef idx="minor">
-            <a:schemeClr val="lt1"/>
-          </a:fontRef>
-        </p:style>
-        <p:txBody>
-          <a:bodyPr rtlCol="0" anchor="ctr"/>
-          <a:lstStyle/>
-          <a:p>
-            <a:pPr algn="ctr"/>
-            <a:endParaRPr/>
-          </a:p>
-        </p:txBody>
-      </p:sp>
-      <p:sp>
-        <p:nvSpPr>
-          <p:cNvPr id="3" name="TextBox 2"/>
-          <p:cNvSpPr txBox="1"/>
-          <p:nvPr/>
-        </p:nvSpPr>
-        <p:spPr>
-          <a:xfrm>
-            <a:off x="914400" y="2148840"/>
-            <a:ext cx="10332720" cy="1737360"/>
-          </a:xfrm>
-          <a:prstGeom prst="rect">
-            <a:avLst/>
-          </a:prstGeom>
-          <a:noFill/>
-        </p:spPr>
-        <p:txBody>
-          <a:bodyPr wrap="square" anchor="t">
-            <a:spAutoFit/>
-          </a:bodyPr>
-          <a:lstStyle/>
-          <a:p>
-            <a:pPr algn="ctr"/>
-            <a:r>
-              <a:rPr sz="4400" b="1">
-                <a:solidFill>
-                  <a:srgbClr val="FFFFFF"/>
-                </a:solidFill>
-                <a:latin typeface="微軟正黑體"/>
-                <a:ea typeface="微軟正黑體"/>
-                <a:cs typeface="微軟正黑體"/>
-              </a:rPr>
-              <a:t>香照燒，神明照拜，煙不見了。</a:t>
-            </a:r>
-          </a:p>
-        </p:txBody>
-      </p:sp>
-      <p:sp>
-        <p:nvSpPr>
-          <p:cNvPr id="4" name="TextBox 3"/>
-          <p:cNvSpPr txBox="1"/>
-          <p:nvPr/>
-        </p:nvSpPr>
-        <p:spPr>
-          <a:xfrm>
-            <a:off x="914400" y="3566160"/>
-            <a:ext cx="10332720" cy="914400"/>
-          </a:xfrm>
-          <a:prstGeom prst="rect">
-            <a:avLst/>
-          </a:prstGeom>
-          <a:noFill/>
-        </p:spPr>
-        <p:txBody>
-          <a:bodyPr wrap="square" anchor="t">
-            <a:spAutoFit/>
-          </a:bodyPr>
-          <a:lstStyle/>
-          <a:p>
-            <a:pPr algn="ctr"/>
-            <a:r>
-              <a:rPr sz="3000" b="0">
-                <a:solidFill>
-                  <a:srgbClr val="E8C86A"/>
-                </a:solidFill>
-                <a:latin typeface="微軟正黑體"/>
-                <a:ea typeface="微軟正黑體"/>
-                <a:cs typeface="微軟正黑體"/>
-              </a:rPr>
-              <a:t>健康跟信仰，不用二選一。</a:t>
-            </a:r>
-          </a:p>
-        </p:txBody>
-      </p:sp>
-      <p:sp>
-        <p:nvSpPr>
-          <p:cNvPr id="5" name="TextBox 4"/>
-          <p:cNvSpPr txBox="1"/>
-          <p:nvPr/>
-        </p:nvSpPr>
-        <p:spPr>
-          <a:xfrm>
-            <a:off x="914400" y="5760720"/>
-            <a:ext cx="10332720" cy="548640"/>
-          </a:xfrm>
-          <a:prstGeom prst="rect">
-            <a:avLst/>
-          </a:prstGeom>
-          <a:noFill/>
-        </p:spPr>
-        <p:txBody>
-          <a:bodyPr wrap="square" anchor="t">
-            <a:spAutoFit/>
-          </a:bodyPr>
-          <a:lstStyle/>
-          <a:p>
-            <a:pPr algn="ctr"/>
-            <a:r>
-              <a:rPr sz="1800" b="0">
-                <a:solidFill>
-                  <a:srgbClr val="AFAFAF"/>
-                </a:solidFill>
-                <a:latin typeface="微軟正黑體"/>
-                <a:ea typeface="微軟正黑體"/>
-                <a:cs typeface="微軟正黑體"/>
-              </a:rPr>
-              <a:t>智慧香爐｜有拜有包庇｜謝謝聆聽</a:t>
-            </a:r>
-          </a:p>
-        </p:txBody>
-      </p:sp>
-    </p:spTree>
-  </p:cSld>
-  <p:clrMapOvr>
-    <a:masterClrMapping/>
-  </p:clrMapOvr>
-</p:sld>
-</file>
-
-<file path=ppt/slides/slide2.xml><?xml version="1.0" encoding="utf-8"?>
-<p:sld xmlns:a="http://schemas.openxmlformats.org/drawingml/2006/main" xmlns:r="http://schemas.openxmlformats.org/officeDocument/2006/relationships" xmlns:p="http://schemas.openxmlformats.org/presentationml/2006/main">
-  <p:cSld>
-    <p:spTree>
-      <p:nvGrpSpPr>
-        <p:cNvPr id="1" name=""/>
-        <p:cNvGrpSpPr/>
-        <p:nvPr/>
-      </p:nvGrpSpPr>
-      <p:grpSpPr>
-        <a:xfrm>
-          <a:off x="0" y="0"/>
-          <a:ext cx="0" cy="0"/>
-          <a:chOff x="0" y="0"/>
-          <a:chExt cx="0" cy="0"/>
-        </a:xfrm>
-      </p:grpSpPr>
-      <p:sp>
-        <p:nvSpPr>
-          <p:cNvPr id="2" name="Rectangle 1"/>
-          <p:cNvSpPr/>
-          <p:nvPr/>
-        </p:nvSpPr>
-        <p:spPr>
-          <a:xfrm>
-            <a:off x="0" y="0"/>
-            <a:ext cx="164592" cy="6858000"/>
-          </a:xfrm>
-          <a:prstGeom prst="rect">
-            <a:avLst/>
-          </a:prstGeom>
-          <a:solidFill>
-            <a:srgbClr val="9E3B2F"/>
-          </a:solidFill>
-          <a:ln>
-            <a:noFill/>
-          </a:ln>
-          <a:effectLst/>
-        </p:spPr>
-        <p:style>
-          <a:lnRef idx="1">
-            <a:schemeClr val="accent1"/>
-          </a:lnRef>
-          <a:fillRef idx="3">
-            <a:schemeClr val="accent1"/>
-          </a:fillRef>
-          <a:effectRef idx="2">
-            <a:schemeClr val="accent1"/>
-          </a:effectRef>
-          <a:fontRef idx="minor">
-            <a:schemeClr val="lt1"/>
-          </a:fontRef>
-        </p:style>
-        <p:txBody>
-          <a:bodyPr rtlCol="0" anchor="ctr"/>
-          <a:lstStyle/>
-          <a:p>
-            <a:pPr algn="ctr"/>
-            <a:endParaRPr/>
-          </a:p>
-        </p:txBody>
-      </p:sp>
-      <p:sp>
-        <p:nvSpPr>
-          <p:cNvPr id="3" name="TextBox 2"/>
-          <p:cNvSpPr txBox="1"/>
-          <p:nvPr/>
-        </p:nvSpPr>
-        <p:spPr>
-          <a:xfrm>
-            <a:off x="502920" y="292608"/>
-            <a:ext cx="10058400" cy="457200"/>
-          </a:xfrm>
-          <a:prstGeom prst="rect">
-            <a:avLst/>
-          </a:prstGeom>
-          <a:noFill/>
-        </p:spPr>
-        <p:txBody>
-          <a:bodyPr wrap="square" anchor="t">
-            <a:spAutoFit/>
-          </a:bodyPr>
-          <a:lstStyle/>
-          <a:p>
-            <a:pPr algn="l"/>
-            <a:r>
-              <a:rPr sz="1500" b="1">
-                <a:solidFill>
-                  <a:srgbClr val="C9A227"/>
-                </a:solidFill>
-                <a:latin typeface="微軟正黑體"/>
-                <a:ea typeface="微軟正黑體"/>
-                <a:cs typeface="微軟正黑體"/>
-              </a:rPr>
-              <a:t>OPENING｜結論先行</a:t>
-            </a:r>
-          </a:p>
-        </p:txBody>
-      </p:sp>
-      <p:sp>
-        <p:nvSpPr>
-          <p:cNvPr id="4" name="TextBox 3"/>
-          <p:cNvSpPr txBox="1"/>
-          <p:nvPr/>
-        </p:nvSpPr>
-        <p:spPr>
-          <a:xfrm>
-            <a:off x="502920" y="603504"/>
-            <a:ext cx="11155680" cy="914400"/>
-          </a:xfrm>
-          <a:prstGeom prst="rect">
-            <a:avLst/>
-          </a:prstGeom>
-          <a:noFill/>
-        </p:spPr>
-        <p:txBody>
-          <a:bodyPr wrap="square" anchor="t">
-            <a:spAutoFit/>
-          </a:bodyPr>
-          <a:lstStyle/>
-          <a:p>
-            <a:pPr algn="l"/>
-            <a:r>
-              <a:rPr sz="3300" b="1">
-                <a:solidFill>
-                  <a:srgbClr val="33302B"/>
-                </a:solidFill>
-                <a:latin typeface="微軟正黑體"/>
-                <a:ea typeface="微軟正黑體"/>
-                <a:cs typeface="微軟正黑體"/>
-              </a:rPr>
-              <a:t>我們讓香繼續燒，但煙不再害人。</a:t>
-            </a:r>
-          </a:p>
-        </p:txBody>
-      </p:sp>
-      <p:sp>
-        <p:nvSpPr>
-          <p:cNvPr id="5" name="Rectangle 4"/>
-          <p:cNvSpPr/>
-          <p:nvPr/>
-        </p:nvSpPr>
-        <p:spPr>
-          <a:xfrm>
-            <a:off x="685800" y="2011680"/>
-            <a:ext cx="3383280" cy="3291840"/>
-          </a:xfrm>
-          <a:prstGeom prst="rect">
-            <a:avLst/>
-          </a:prstGeom>
-          <a:solidFill>
-            <a:srgbClr val="F8F4EC"/>
-          </a:solidFill>
-          <a:ln>
-            <a:noFill/>
-          </a:ln>
-          <a:effectLst/>
-        </p:spPr>
-        <p:style>
-          <a:lnRef idx="1">
-            <a:schemeClr val="accent1"/>
-          </a:lnRef>
-          <a:fillRef idx="3">
-            <a:schemeClr val="accent1"/>
-          </a:fillRef>
-          <a:effectRef idx="2">
-            <a:schemeClr val="accent1"/>
-          </a:effectRef>
-          <a:fontRef idx="minor">
-            <a:schemeClr val="lt1"/>
-          </a:fontRef>
-        </p:style>
-        <p:txBody>
-          <a:bodyPr rtlCol="0" anchor="ctr"/>
-          <a:lstStyle/>
-          <a:p>
-            <a:pPr algn="ctr"/>
-            <a:endParaRPr/>
-          </a:p>
-        </p:txBody>
-      </p:sp>
-      <p:sp>
-        <p:nvSpPr>
-          <p:cNvPr id="6" name="TextBox 5"/>
-          <p:cNvSpPr txBox="1"/>
-          <p:nvPr/>
-        </p:nvSpPr>
-        <p:spPr>
-          <a:xfrm>
-            <a:off x="685800" y="2514600"/>
-            <a:ext cx="3383280" cy="1280160"/>
-          </a:xfrm>
-          <a:prstGeom prst="rect">
-            <a:avLst/>
-          </a:prstGeom>
-          <a:noFill/>
-        </p:spPr>
-        <p:txBody>
-          <a:bodyPr wrap="square" anchor="t">
-            <a:spAutoFit/>
-          </a:bodyPr>
-          <a:lstStyle/>
-          <a:p>
-            <a:pPr algn="ctr"/>
-            <a:r>
-              <a:rPr sz="5400" b="1">
-                <a:solidFill>
-                  <a:srgbClr val="9E3B2F"/>
-                </a:solidFill>
-                <a:latin typeface="微軟正黑體"/>
-                <a:ea typeface="微軟正黑體"/>
-                <a:cs typeface="微軟正黑體"/>
-              </a:rPr>
-              <a:t>50 倍</a:t>
-            </a:r>
-          </a:p>
-        </p:txBody>
-      </p:sp>
-      <p:sp>
-        <p:nvSpPr>
-          <p:cNvPr id="7" name="TextBox 6"/>
-          <p:cNvSpPr txBox="1"/>
-          <p:nvPr/>
-        </p:nvSpPr>
-        <p:spPr>
-          <a:xfrm>
-            <a:off x="685800" y="3886200"/>
-            <a:ext cx="3383280" cy="1280160"/>
-          </a:xfrm>
-          <a:prstGeom prst="rect">
-            <a:avLst/>
-          </a:prstGeom>
-          <a:noFill/>
-        </p:spPr>
-        <p:txBody>
-          <a:bodyPr wrap="square" anchor="t">
-            <a:spAutoFit/>
-          </a:bodyPr>
-          <a:lstStyle/>
-          <a:p>
-            <a:pPr algn="ctr"/>
-            <a:r>
-              <a:rPr sz="1700" b="0">
-                <a:solidFill>
-                  <a:srgbClr val="33302B"/>
-                </a:solidFill>
-                <a:latin typeface="微軟正黑體"/>
-                <a:ea typeface="微軟正黑體"/>
-                <a:cs typeface="微軟正黑體"/>
-              </a:rPr>
-              <a:t>殿內 PM2.5 一度達戶外 50 倍
-（龍山寺實測 1,360 μg/m³）</a:t>
-            </a:r>
-          </a:p>
-        </p:txBody>
-      </p:sp>
-      <p:sp>
-        <p:nvSpPr>
-          <p:cNvPr id="8" name="Rectangle 7"/>
-          <p:cNvSpPr/>
-          <p:nvPr/>
-        </p:nvSpPr>
-        <p:spPr>
-          <a:xfrm>
-            <a:off x="4526280" y="2011680"/>
-            <a:ext cx="3383280" cy="3291840"/>
-          </a:xfrm>
-          <a:prstGeom prst="rect">
-            <a:avLst/>
-          </a:prstGeom>
-          <a:solidFill>
-            <a:srgbClr val="F8F4EC"/>
-          </a:solidFill>
-          <a:ln>
-            <a:noFill/>
-          </a:ln>
-          <a:effectLst/>
-        </p:spPr>
-        <p:style>
-          <a:lnRef idx="1">
-            <a:schemeClr val="accent1"/>
-          </a:lnRef>
-          <a:fillRef idx="3">
-            <a:schemeClr val="accent1"/>
-          </a:fillRef>
-          <a:effectRef idx="2">
-            <a:schemeClr val="accent1"/>
-          </a:effectRef>
-          <a:fontRef idx="minor">
-            <a:schemeClr val="lt1"/>
-          </a:fontRef>
-        </p:style>
-        <p:txBody>
-          <a:bodyPr rtlCol="0" anchor="ctr"/>
-          <a:lstStyle/>
-          <a:p>
-            <a:pPr algn="ctr"/>
-            <a:endParaRPr/>
-          </a:p>
-        </p:txBody>
-      </p:sp>
-      <p:sp>
-        <p:nvSpPr>
-          <p:cNvPr id="9" name="TextBox 8"/>
-          <p:cNvSpPr txBox="1"/>
-          <p:nvPr/>
-        </p:nvSpPr>
-        <p:spPr>
-          <a:xfrm>
-            <a:off x="4526280" y="2514600"/>
-            <a:ext cx="3383280" cy="1280160"/>
-          </a:xfrm>
-          <a:prstGeom prst="rect">
-            <a:avLst/>
-          </a:prstGeom>
-          <a:noFill/>
-        </p:spPr>
-        <p:txBody>
-          <a:bodyPr wrap="square" anchor="t">
-            <a:spAutoFit/>
-          </a:bodyPr>
-          <a:lstStyle/>
-          <a:p>
-            <a:pPr algn="ctr"/>
-            <a:r>
-              <a:rPr sz="5400" b="1">
-                <a:solidFill>
-                  <a:srgbClr val="9E3B2F"/>
-                </a:solidFill>
-                <a:latin typeface="微軟正黑體"/>
-                <a:ea typeface="微軟正黑體"/>
-                <a:cs typeface="微軟正黑體"/>
-              </a:rPr>
-              <a:t>17 億+</a:t>
-            </a:r>
-          </a:p>
-        </p:txBody>
-      </p:sp>
-      <p:sp>
-        <p:nvSpPr>
-          <p:cNvPr id="10" name="TextBox 9"/>
-          <p:cNvSpPr txBox="1"/>
-          <p:nvPr/>
-        </p:nvSpPr>
-        <p:spPr>
-          <a:xfrm>
-            <a:off x="4526280" y="3886200"/>
-            <a:ext cx="3383280" cy="1280160"/>
-          </a:xfrm>
-          <a:prstGeom prst="rect">
-            <a:avLst/>
-          </a:prstGeom>
-          <a:noFill/>
-        </p:spPr>
-        <p:txBody>
-          <a:bodyPr wrap="square" anchor="t">
-            <a:spAutoFit/>
-          </a:bodyPr>
-          <a:lstStyle/>
-          <a:p>
-            <a:pPr algn="ctr"/>
-            <a:r>
-              <a:rPr sz="1700" b="0">
-                <a:solidFill>
-                  <a:srgbClr val="33302B"/>
-                </a:solidFill>
-                <a:latin typeface="微軟正黑體"/>
-                <a:ea typeface="微軟正黑體"/>
-                <a:cs typeface="微軟正黑體"/>
-              </a:rPr>
-              <a:t>印度教＋佛教信仰人口
-道教與民間信仰另計</a:t>
-            </a:r>
-          </a:p>
-        </p:txBody>
-      </p:sp>
-      <p:sp>
-        <p:nvSpPr>
-          <p:cNvPr id="11" name="Rectangle 10"/>
-          <p:cNvSpPr/>
-          <p:nvPr/>
-        </p:nvSpPr>
-        <p:spPr>
-          <a:xfrm>
-            <a:off x="8366760" y="2011680"/>
-            <a:ext cx="3383280" cy="3291840"/>
-          </a:xfrm>
-          <a:prstGeom prst="rect">
-            <a:avLst/>
-          </a:prstGeom>
-          <a:solidFill>
-            <a:srgbClr val="F8F4EC"/>
-          </a:solidFill>
-          <a:ln>
-            <a:noFill/>
-          </a:ln>
-          <a:effectLst/>
-        </p:spPr>
-        <p:style>
-          <a:lnRef idx="1">
-            <a:schemeClr val="accent1"/>
-          </a:lnRef>
-          <a:fillRef idx="3">
-            <a:schemeClr val="accent1"/>
-          </a:fillRef>
-          <a:effectRef idx="2">
-            <a:schemeClr val="accent1"/>
-          </a:effectRef>
-          <a:fontRef idx="minor">
-            <a:schemeClr val="lt1"/>
-          </a:fontRef>
-        </p:style>
-        <p:txBody>
-          <a:bodyPr rtlCol="0" anchor="ctr"/>
-          <a:lstStyle/>
-          <a:p>
-            <a:pPr algn="ctr"/>
-            <a:endParaRPr/>
-          </a:p>
-        </p:txBody>
-      </p:sp>
-      <p:sp>
-        <p:nvSpPr>
-          <p:cNvPr id="12" name="TextBox 11"/>
-          <p:cNvSpPr txBox="1"/>
-          <p:nvPr/>
-        </p:nvSpPr>
-        <p:spPr>
-          <a:xfrm>
-            <a:off x="8366760" y="2514600"/>
-            <a:ext cx="3383280" cy="1280160"/>
-          </a:xfrm>
-          <a:prstGeom prst="rect">
-            <a:avLst/>
-          </a:prstGeom>
-          <a:noFill/>
-        </p:spPr>
-        <p:txBody>
-          <a:bodyPr wrap="square" anchor="t">
-            <a:spAutoFit/>
-          </a:bodyPr>
-          <a:lstStyle/>
-          <a:p>
-            <a:pPr algn="ctr"/>
-            <a:r>
-              <a:rPr sz="5400" b="1">
-                <a:solidFill>
-                  <a:srgbClr val="9E3B2F"/>
-                </a:solidFill>
-                <a:latin typeface="微軟正黑體"/>
-                <a:ea typeface="微軟正黑體"/>
-                <a:cs typeface="微軟正黑體"/>
-              </a:rPr>
-              <a:t>3,000+ 件</a:t>
-            </a:r>
-          </a:p>
-        </p:txBody>
-      </p:sp>
-      <p:sp>
-        <p:nvSpPr>
-          <p:cNvPr id="13" name="TextBox 12"/>
-          <p:cNvSpPr txBox="1"/>
-          <p:nvPr/>
-        </p:nvSpPr>
-        <p:spPr>
-          <a:xfrm>
-            <a:off x="8366760" y="3886200"/>
-            <a:ext cx="3383280" cy="1280160"/>
-          </a:xfrm>
-          <a:prstGeom prst="rect">
-            <a:avLst/>
-          </a:prstGeom>
-          <a:noFill/>
-        </p:spPr>
-        <p:txBody>
-          <a:bodyPr wrap="square" anchor="t">
-            <a:spAutoFit/>
-          </a:bodyPr>
-          <a:lstStyle/>
-          <a:p>
-            <a:pPr algn="ctr"/>
-            <a:r>
-              <a:rPr sz="1700" b="0">
-                <a:solidFill>
-                  <a:srgbClr val="33302B"/>
-                </a:solidFill>
-                <a:latin typeface="微軟正黑體"/>
-                <a:ea typeface="微軟正黑體"/>
-                <a:cs typeface="微軟正黑體"/>
-              </a:rPr>
-              <a:t>環保署每年宮廟
-空污陳情案件</a:t>
-            </a:r>
-          </a:p>
-        </p:txBody>
-      </p:sp>
-      <p:sp>
-        <p:nvSpPr>
-          <p:cNvPr id="14" name="TextBox 13"/>
-          <p:cNvSpPr txBox="1"/>
-          <p:nvPr/>
-        </p:nvSpPr>
-        <p:spPr>
-          <a:xfrm>
-            <a:off x="685800" y="5806440"/>
-            <a:ext cx="10972800" cy="548640"/>
-          </a:xfrm>
-          <a:prstGeom prst="rect">
-            <a:avLst/>
-          </a:prstGeom>
-          <a:noFill/>
-        </p:spPr>
-        <p:txBody>
-          <a:bodyPr wrap="square" anchor="t">
-            <a:spAutoFit/>
-          </a:bodyPr>
-          <a:lstStyle/>
-          <a:p>
-            <a:pPr algn="l"/>
-            <a:r>
-              <a:rPr sz="1300" b="0">
-                <a:solidFill>
-                  <a:srgbClr val="8A8377"/>
-                </a:solidFill>
-                <a:latin typeface="微軟正黑體"/>
-                <a:ea typeface="微軟正黑體"/>
-                <a:cs typeface="微軟正黑體"/>
-              </a:rPr>
-              <a:t>來源：台大公衛實測（公視 2015）、AAQR 2022 同儕審查研究、環保署統計——完整出處見計畫書。</a:t>
-            </a:r>
-          </a:p>
-        </p:txBody>
-      </p:sp>
-    </p:spTree>
-  </p:cSld>
-  <p:clrMapOvr>
-    <a:masterClrMapping/>
-  </p:clrMapOvr>
-</p:sld>
-</file>
-
-<file path=ppt/slides/slide3.xml><?xml version="1.0" encoding="utf-8"?>
-<p:sld xmlns:a="http://schemas.openxmlformats.org/drawingml/2006/main" xmlns:r="http://schemas.openxmlformats.org/officeDocument/2006/relationships" xmlns:p="http://schemas.openxmlformats.org/presentationml/2006/main">
-  <p:cSld>
-    <p:spTree>
-      <p:nvGrpSpPr>
-        <p:cNvPr id="1" name=""/>
-        <p:cNvGrpSpPr/>
-        <p:nvPr/>
-      </p:nvGrpSpPr>
-      <p:grpSpPr>
-        <a:xfrm>
-          <a:off x="0" y="0"/>
-          <a:ext cx="0" cy="0"/>
-          <a:chOff x="0" y="0"/>
-          <a:chExt cx="0" cy="0"/>
-        </a:xfrm>
-      </p:grpSpPr>
-      <p:sp>
-        <p:nvSpPr>
-          <p:cNvPr id="2" name="Rectangle 1"/>
-          <p:cNvSpPr/>
-          <p:nvPr/>
-        </p:nvSpPr>
-        <p:spPr>
-          <a:xfrm>
-            <a:off x="0" y="0"/>
-            <a:ext cx="164592" cy="6858000"/>
-          </a:xfrm>
-          <a:prstGeom prst="rect">
-            <a:avLst/>
-          </a:prstGeom>
-          <a:solidFill>
-            <a:srgbClr val="9E3B2F"/>
-          </a:solidFill>
-          <a:ln>
-            <a:noFill/>
-          </a:ln>
-          <a:effectLst/>
-        </p:spPr>
-        <p:style>
-          <a:lnRef idx="1">
-            <a:schemeClr val="accent1"/>
-          </a:lnRef>
-          <a:fillRef idx="3">
-            <a:schemeClr val="accent1"/>
-          </a:fillRef>
-          <a:effectRef idx="2">
-            <a:schemeClr val="accent1"/>
-          </a:effectRef>
-          <a:fontRef idx="minor">
-            <a:schemeClr val="lt1"/>
-          </a:fontRef>
-        </p:style>
-        <p:txBody>
-          <a:bodyPr rtlCol="0" anchor="ctr"/>
-          <a:lstStyle/>
-          <a:p>
-            <a:pPr algn="ctr"/>
-            <a:endParaRPr/>
-          </a:p>
-        </p:txBody>
-      </p:sp>
-      <p:sp>
-        <p:nvSpPr>
-          <p:cNvPr id="3" name="TextBox 2"/>
-          <p:cNvSpPr txBox="1"/>
-          <p:nvPr/>
-        </p:nvSpPr>
-        <p:spPr>
-          <a:xfrm>
-            <a:off x="502920" y="292608"/>
-            <a:ext cx="10058400" cy="457200"/>
-          </a:xfrm>
-          <a:prstGeom prst="rect">
-            <a:avLst/>
-          </a:prstGeom>
-          <a:noFill/>
-        </p:spPr>
-        <p:txBody>
-          <a:bodyPr wrap="square" anchor="t">
-            <a:spAutoFit/>
-          </a:bodyPr>
-          <a:lstStyle/>
-          <a:p>
-            <a:pPr algn="l"/>
-            <a:r>
-              <a:rPr sz="1500" b="1">
-                <a:solidFill>
-                  <a:srgbClr val="C9A227"/>
-                </a:solidFill>
-                <a:latin typeface="微軟正黑體"/>
-                <a:ea typeface="微軟正黑體"/>
-                <a:cs typeface="微軟正黑體"/>
-              </a:rPr>
-              <a:t>PROBLEM｜為什麼過去都失敗</a:t>
-            </a:r>
-          </a:p>
-        </p:txBody>
-      </p:sp>
-      <p:sp>
-        <p:nvSpPr>
-          <p:cNvPr id="4" name="TextBox 3"/>
-          <p:cNvSpPr txBox="1"/>
-          <p:nvPr/>
-        </p:nvSpPr>
-        <p:spPr>
-          <a:xfrm>
-            <a:off x="502920" y="603504"/>
-            <a:ext cx="11155680" cy="914400"/>
-          </a:xfrm>
-          <a:prstGeom prst="rect">
-            <a:avLst/>
-          </a:prstGeom>
-          <a:noFill/>
-        </p:spPr>
-        <p:txBody>
-          <a:bodyPr wrap="square" anchor="t">
-            <a:spAutoFit/>
-          </a:bodyPr>
-          <a:lstStyle/>
-          <a:p>
-            <a:pPr algn="l"/>
-            <a:r>
-              <a:rPr sz="3300" b="1">
-                <a:solidFill>
-                  <a:srgbClr val="33302B"/>
-                </a:solidFill>
-                <a:latin typeface="微軟正黑體"/>
-                <a:ea typeface="微軟正黑體"/>
-                <a:cs typeface="微軟正黑體"/>
-              </a:rPr>
-              <a:t>既有方案：不是傷信仰，就是買不起</a:t>
-            </a:r>
-          </a:p>
-        </p:txBody>
-      </p:sp>
-      <p:sp>
-        <p:nvSpPr>
-          <p:cNvPr id="5" name="Rectangle 4"/>
-          <p:cNvSpPr/>
-          <p:nvPr/>
-        </p:nvSpPr>
-        <p:spPr>
-          <a:xfrm>
-            <a:off x="685800" y="1965960"/>
-            <a:ext cx="2926080" cy="868680"/>
-          </a:xfrm>
-          <a:prstGeom prst="rect">
-            <a:avLst/>
-          </a:prstGeom>
-          <a:solidFill>
-            <a:srgbClr val="F8F4EC"/>
-          </a:solidFill>
-          <a:ln>
-            <a:noFill/>
-          </a:ln>
-          <a:effectLst/>
-        </p:spPr>
-        <p:style>
-          <a:lnRef idx="1">
-            <a:schemeClr val="accent1"/>
-          </a:lnRef>
-          <a:fillRef idx="3">
-            <a:schemeClr val="accent1"/>
-          </a:fillRef>
-          <a:effectRef idx="2">
-            <a:schemeClr val="accent1"/>
-          </a:effectRef>
-          <a:fontRef idx="minor">
-            <a:schemeClr val="lt1"/>
-          </a:fontRef>
-        </p:style>
-        <p:txBody>
-          <a:bodyPr rtlCol="0" anchor="ctr"/>
-          <a:lstStyle/>
-          <a:p>
-            <a:pPr algn="ctr"/>
-            <a:endParaRPr/>
-          </a:p>
-        </p:txBody>
-      </p:sp>
-      <p:sp>
-        <p:nvSpPr>
-          <p:cNvPr id="6" name="TextBox 5"/>
-          <p:cNvSpPr txBox="1"/>
-          <p:nvPr/>
-        </p:nvSpPr>
-        <p:spPr>
-          <a:xfrm>
-            <a:off x="868680" y="2167128"/>
-            <a:ext cx="2743200" cy="548640"/>
-          </a:xfrm>
-          <a:prstGeom prst="rect">
-            <a:avLst/>
-          </a:prstGeom>
-          <a:noFill/>
-        </p:spPr>
-        <p:txBody>
-          <a:bodyPr wrap="square" anchor="t">
-            <a:spAutoFit/>
-          </a:bodyPr>
-          <a:lstStyle/>
-          <a:p>
-            <a:pPr algn="l"/>
-            <a:r>
-              <a:rPr sz="2100" b="1">
-                <a:solidFill>
-                  <a:srgbClr val="33302B"/>
-                </a:solidFill>
-                <a:latin typeface="微軟正黑體"/>
-                <a:ea typeface="微軟正黑體"/>
-                <a:cs typeface="微軟正黑體"/>
-              </a:rPr>
-              <a:t>封爐・減香</a:t>
-            </a:r>
-          </a:p>
-        </p:txBody>
-      </p:sp>
-      <p:sp>
-        <p:nvSpPr>
-          <p:cNvPr id="7" name="TextBox 6"/>
-          <p:cNvSpPr txBox="1"/>
-          <p:nvPr/>
-        </p:nvSpPr>
-        <p:spPr>
-          <a:xfrm>
-            <a:off x="3886200" y="2167128"/>
-            <a:ext cx="4937760" cy="548640"/>
-          </a:xfrm>
-          <a:prstGeom prst="rect">
-            <a:avLst/>
-          </a:prstGeom>
-          <a:noFill/>
-        </p:spPr>
-        <p:txBody>
-          <a:bodyPr wrap="square" anchor="t">
-            <a:spAutoFit/>
-          </a:bodyPr>
-          <a:lstStyle/>
-          <a:p>
-            <a:pPr algn="l"/>
-            <a:r>
-              <a:rPr sz="1900" b="0">
-                <a:solidFill>
-                  <a:srgbClr val="33302B"/>
-                </a:solidFill>
-                <a:latin typeface="微軟正黑體"/>
-                <a:ea typeface="微軟正黑體"/>
-                <a:cs typeface="微軟正黑體"/>
-              </a:rPr>
-              <a:t>叫人改變信仰 → 2017 年凱道抗爭</a:t>
-            </a:r>
-          </a:p>
-        </p:txBody>
-      </p:sp>
-      <p:sp>
-        <p:nvSpPr>
-          <p:cNvPr id="8" name="TextBox 7"/>
-          <p:cNvSpPr txBox="1"/>
-          <p:nvPr/>
-        </p:nvSpPr>
-        <p:spPr>
-          <a:xfrm>
-            <a:off x="8869680" y="2167128"/>
-            <a:ext cx="2926080" cy="548640"/>
-          </a:xfrm>
-          <a:prstGeom prst="rect">
-            <a:avLst/>
-          </a:prstGeom>
-          <a:noFill/>
-        </p:spPr>
-        <p:txBody>
-          <a:bodyPr wrap="square" anchor="t">
-            <a:spAutoFit/>
-          </a:bodyPr>
-          <a:lstStyle/>
-          <a:p>
-            <a:pPr algn="l"/>
-            <a:r>
-              <a:rPr sz="1900" b="1">
-                <a:solidFill>
-                  <a:srgbClr val="9E3B2F"/>
-                </a:solidFill>
-                <a:latin typeface="微軟正黑體"/>
-                <a:ea typeface="微軟正黑體"/>
-                <a:cs typeface="微軟正黑體"/>
-              </a:rPr>
-              <a:t>儀式被犧牲</a:t>
-            </a:r>
-          </a:p>
-        </p:txBody>
-      </p:sp>
-      <p:sp>
-        <p:nvSpPr>
-          <p:cNvPr id="9" name="Rectangle 8"/>
-          <p:cNvSpPr/>
-          <p:nvPr/>
-        </p:nvSpPr>
-        <p:spPr>
-          <a:xfrm>
-            <a:off x="685800" y="3017520"/>
-            <a:ext cx="2926080" cy="868680"/>
-          </a:xfrm>
-          <a:prstGeom prst="rect">
-            <a:avLst/>
-          </a:prstGeom>
-          <a:solidFill>
-            <a:srgbClr val="F8F4EC"/>
-          </a:solidFill>
-          <a:ln>
-            <a:noFill/>
-          </a:ln>
-          <a:effectLst/>
-        </p:spPr>
-        <p:style>
-          <a:lnRef idx="1">
-            <a:schemeClr val="accent1"/>
-          </a:lnRef>
-          <a:fillRef idx="3">
-            <a:schemeClr val="accent1"/>
-          </a:fillRef>
-          <a:effectRef idx="2">
-            <a:schemeClr val="accent1"/>
-          </a:effectRef>
-          <a:fontRef idx="minor">
-            <a:schemeClr val="lt1"/>
-          </a:fontRef>
-        </p:style>
-        <p:txBody>
-          <a:bodyPr rtlCol="0" anchor="ctr"/>
-          <a:lstStyle/>
-          <a:p>
-            <a:pPr algn="ctr"/>
-            <a:endParaRPr/>
-          </a:p>
-        </p:txBody>
-      </p:sp>
-      <p:sp>
-        <p:nvSpPr>
-          <p:cNvPr id="10" name="TextBox 9"/>
-          <p:cNvSpPr txBox="1"/>
-          <p:nvPr/>
-        </p:nvSpPr>
-        <p:spPr>
-          <a:xfrm>
-            <a:off x="868680" y="3218688"/>
-            <a:ext cx="2743200" cy="548640"/>
-          </a:xfrm>
-          <a:prstGeom prst="rect">
-            <a:avLst/>
-          </a:prstGeom>
-          <a:noFill/>
-        </p:spPr>
-        <p:txBody>
-          <a:bodyPr wrap="square" anchor="t">
-            <a:spAutoFit/>
-          </a:bodyPr>
-          <a:lstStyle/>
-          <a:p>
-            <a:pPr algn="l"/>
-            <a:r>
-              <a:rPr sz="2100" b="1">
-                <a:solidFill>
-                  <a:srgbClr val="33302B"/>
-                </a:solidFill>
-                <a:latin typeface="微軟正黑體"/>
-                <a:ea typeface="微軟正黑體"/>
-                <a:cs typeface="微軟正黑體"/>
-              </a:rPr>
-              <a:t>碳中和金爐</a:t>
-            </a:r>
-          </a:p>
-        </p:txBody>
-      </p:sp>
-      <p:sp>
-        <p:nvSpPr>
-          <p:cNvPr id="11" name="TextBox 10"/>
-          <p:cNvSpPr txBox="1"/>
-          <p:nvPr/>
-        </p:nvSpPr>
-        <p:spPr>
-          <a:xfrm>
-            <a:off x="3886200" y="3218688"/>
-            <a:ext cx="4937760" cy="548640"/>
-          </a:xfrm>
-          <a:prstGeom prst="rect">
-            <a:avLst/>
-          </a:prstGeom>
-          <a:noFill/>
-        </p:spPr>
-        <p:txBody>
-          <a:bodyPr wrap="square" anchor="t">
-            <a:spAutoFit/>
-          </a:bodyPr>
-          <a:lstStyle/>
-          <a:p>
-            <a:pPr algn="l"/>
-            <a:r>
-              <a:rPr sz="1900" b="0">
-                <a:solidFill>
-                  <a:srgbClr val="33302B"/>
-                </a:solidFill>
-                <a:latin typeface="微軟正黑體"/>
-                <a:ea typeface="微軟正黑體"/>
-                <a:cs typeface="微軟正黑體"/>
-              </a:rPr>
-              <a:t>有效，但約 500 萬元</a:t>
-            </a:r>
-          </a:p>
-        </p:txBody>
-      </p:sp>
-      <p:sp>
-        <p:nvSpPr>
-          <p:cNvPr id="12" name="TextBox 11"/>
-          <p:cNvSpPr txBox="1"/>
-          <p:nvPr/>
-        </p:nvSpPr>
-        <p:spPr>
-          <a:xfrm>
-            <a:off x="8869680" y="3218688"/>
-            <a:ext cx="2926080" cy="548640"/>
-          </a:xfrm>
-          <a:prstGeom prst="rect">
-            <a:avLst/>
-          </a:prstGeom>
-          <a:noFill/>
-        </p:spPr>
-        <p:txBody>
-          <a:bodyPr wrap="square" anchor="t">
-            <a:spAutoFit/>
-          </a:bodyPr>
-          <a:lstStyle/>
-          <a:p>
-            <a:pPr algn="l"/>
-            <a:r>
-              <a:rPr sz="1900" b="1">
-                <a:solidFill>
-                  <a:srgbClr val="9E3B2F"/>
-                </a:solidFill>
-                <a:latin typeface="微軟正黑體"/>
-                <a:ea typeface="微軟正黑體"/>
-                <a:cs typeface="微軟正黑體"/>
-              </a:rPr>
-              <a:t>中小廟宇買不起</a:t>
-            </a:r>
-          </a:p>
-        </p:txBody>
-      </p:sp>
-      <p:sp>
-        <p:nvSpPr>
-          <p:cNvPr id="13" name="Rectangle 12"/>
-          <p:cNvSpPr/>
-          <p:nvPr/>
-        </p:nvSpPr>
-        <p:spPr>
-          <a:xfrm>
-            <a:off x="685800" y="4069079"/>
-            <a:ext cx="2926080" cy="868680"/>
-          </a:xfrm>
-          <a:prstGeom prst="rect">
-            <a:avLst/>
-          </a:prstGeom>
-          <a:solidFill>
-            <a:srgbClr val="F8F4EC"/>
-          </a:solidFill>
-          <a:ln>
-            <a:noFill/>
-          </a:ln>
-          <a:effectLst/>
-        </p:spPr>
-        <p:style>
-          <a:lnRef idx="1">
-            <a:schemeClr val="accent1"/>
-          </a:lnRef>
-          <a:fillRef idx="3">
-            <a:schemeClr val="accent1"/>
-          </a:fillRef>
-          <a:effectRef idx="2">
-            <a:schemeClr val="accent1"/>
-          </a:effectRef>
-          <a:fontRef idx="minor">
-            <a:schemeClr val="lt1"/>
-          </a:fontRef>
-        </p:style>
-        <p:txBody>
-          <a:bodyPr rtlCol="0" anchor="ctr"/>
-          <a:lstStyle/>
-          <a:p>
-            <a:pPr algn="ctr"/>
-            <a:endParaRPr/>
-          </a:p>
-        </p:txBody>
-      </p:sp>
-      <p:sp>
-        <p:nvSpPr>
-          <p:cNvPr id="14" name="TextBox 13"/>
-          <p:cNvSpPr txBox="1"/>
-          <p:nvPr/>
-        </p:nvSpPr>
-        <p:spPr>
-          <a:xfrm>
-            <a:off x="868680" y="4270247"/>
-            <a:ext cx="2743200" cy="548640"/>
-          </a:xfrm>
-          <a:prstGeom prst="rect">
-            <a:avLst/>
-          </a:prstGeom>
-          <a:noFill/>
-        </p:spPr>
-        <p:txBody>
-          <a:bodyPr wrap="square" anchor="t">
-            <a:spAutoFit/>
-          </a:bodyPr>
-          <a:lstStyle/>
-          <a:p>
-            <a:pPr algn="l"/>
-            <a:r>
-              <a:rPr sz="2100" b="1">
-                <a:solidFill>
-                  <a:srgbClr val="33302B"/>
-                </a:solidFill>
-                <a:latin typeface="微軟正黑體"/>
-                <a:ea typeface="微軟正黑體"/>
-                <a:cs typeface="微軟正黑體"/>
-              </a:rPr>
-              <a:t>清淨機／IoT 監測</a:t>
-            </a:r>
-          </a:p>
-        </p:txBody>
-      </p:sp>
-      <p:sp>
-        <p:nvSpPr>
-          <p:cNvPr id="15" name="TextBox 14"/>
-          <p:cNvSpPr txBox="1"/>
-          <p:nvPr/>
-        </p:nvSpPr>
-        <p:spPr>
-          <a:xfrm>
-            <a:off x="3886200" y="4270247"/>
-            <a:ext cx="4937760" cy="548640"/>
-          </a:xfrm>
-          <a:prstGeom prst="rect">
-            <a:avLst/>
-          </a:prstGeom>
-          <a:noFill/>
-        </p:spPr>
-        <p:txBody>
-          <a:bodyPr wrap="square" anchor="t">
-            <a:spAutoFit/>
-          </a:bodyPr>
-          <a:lstStyle/>
-          <a:p>
-            <a:pPr algn="l"/>
-            <a:r>
-              <a:rPr sz="1900" b="0">
-                <a:solidFill>
-                  <a:srgbClr val="33302B"/>
-                </a:solidFill>
-                <a:latin typeface="微軟正黑體"/>
-                <a:ea typeface="微軟正黑體"/>
-                <a:cs typeface="微軟正黑體"/>
-              </a:rPr>
-              <a:t>管不到爐口／只量測不治理</a:t>
-            </a:r>
-          </a:p>
-        </p:txBody>
-      </p:sp>
-      <p:sp>
-        <p:nvSpPr>
-          <p:cNvPr id="16" name="TextBox 15"/>
-          <p:cNvSpPr txBox="1"/>
-          <p:nvPr/>
-        </p:nvSpPr>
-        <p:spPr>
-          <a:xfrm>
-            <a:off x="8869680" y="4270247"/>
-            <a:ext cx="2926080" cy="548640"/>
-          </a:xfrm>
-          <a:prstGeom prst="rect">
-            <a:avLst/>
-          </a:prstGeom>
-          <a:noFill/>
-        </p:spPr>
-        <p:txBody>
-          <a:bodyPr wrap="square" anchor="t">
-            <a:spAutoFit/>
-          </a:bodyPr>
-          <a:lstStyle/>
-          <a:p>
-            <a:pPr algn="l"/>
-            <a:r>
-              <a:rPr sz="1900" b="1">
-                <a:solidFill>
-                  <a:srgbClr val="9E3B2F"/>
-                </a:solidFill>
-                <a:latin typeface="微軟正黑體"/>
-                <a:ea typeface="微軟正黑體"/>
-                <a:cs typeface="微軟正黑體"/>
-              </a:rPr>
-              <a:t>治標不治本</a:t>
-            </a:r>
-          </a:p>
-        </p:txBody>
-      </p:sp>
-      <p:sp>
-        <p:nvSpPr>
-          <p:cNvPr id="17" name="Rectangle 16"/>
-          <p:cNvSpPr/>
-          <p:nvPr/>
-        </p:nvSpPr>
-        <p:spPr>
-          <a:xfrm>
-            <a:off x="685800" y="5349240"/>
-            <a:ext cx="10881360" cy="960120"/>
-          </a:xfrm>
-          <a:prstGeom prst="rect">
-            <a:avLst/>
-          </a:prstGeom>
-          <a:solidFill>
-            <a:srgbClr val="9E3B2F"/>
-          </a:solidFill>
-          <a:ln>
-            <a:noFill/>
-          </a:ln>
-          <a:effectLst/>
-        </p:spPr>
-        <p:style>
-          <a:lnRef idx="1">
-            <a:schemeClr val="accent1"/>
-          </a:lnRef>
-          <a:fillRef idx="3">
-            <a:schemeClr val="accent1"/>
-          </a:fillRef>
-          <a:effectRef idx="2">
-            <a:schemeClr val="accent1"/>
-          </a:effectRef>
-          <a:fontRef idx="minor">
-            <a:schemeClr val="lt1"/>
-          </a:fontRef>
-        </p:style>
-        <p:txBody>
-          <a:bodyPr rtlCol="0" anchor="ctr"/>
-          <a:lstStyle/>
-          <a:p>
-            <a:pPr algn="ctr"/>
-            <a:endParaRPr/>
-          </a:p>
-        </p:txBody>
-      </p:sp>
-      <p:sp>
-        <p:nvSpPr>
-          <p:cNvPr id="18" name="TextBox 17"/>
-          <p:cNvSpPr txBox="1"/>
-          <p:nvPr/>
-        </p:nvSpPr>
-        <p:spPr>
-          <a:xfrm>
-            <a:off x="685800" y="5532120"/>
-            <a:ext cx="10881360" cy="640080"/>
-          </a:xfrm>
-          <a:prstGeom prst="rect">
-            <a:avLst/>
-          </a:prstGeom>
-          <a:noFill/>
-        </p:spPr>
-        <p:txBody>
-          <a:bodyPr wrap="square" anchor="t">
-            <a:spAutoFit/>
-          </a:bodyPr>
-          <a:lstStyle/>
-          <a:p>
-            <a:pPr algn="ctr"/>
-            <a:r>
-              <a:rPr sz="2300" b="1">
-                <a:solidFill>
-                  <a:srgbClr val="FFFFFF"/>
-                </a:solidFill>
-                <a:latin typeface="微軟正黑體"/>
-                <a:ea typeface="微軟正黑體"/>
-                <a:cs typeface="微軟正黑體"/>
-              </a:rPr>
-              <a:t>我們的立場：不禁香、不封爐——把治理裝進香爐，而不是把禁令加在信眾身上</a:t>
-            </a:r>
-          </a:p>
-        </p:txBody>
-      </p:sp>
-    </p:spTree>
-  </p:cSld>
-  <p:clrMapOvr>
-    <a:masterClrMapping/>
-  </p:clrMapOvr>
-</p:sld>
-</file>
-
-<file path=ppt/slides/slide4.xml><?xml version="1.0" encoding="utf-8"?>
-<p:sld xmlns:a="http://schemas.openxmlformats.org/drawingml/2006/main" xmlns:r="http://schemas.openxmlformats.org/officeDocument/2006/relationships" xmlns:p="http://schemas.openxmlformats.org/presentationml/2006/main">
-  <p:cSld>
-    <p:spTree>
-      <p:nvGrpSpPr>
-        <p:cNvPr id="1" name=""/>
-        <p:cNvGrpSpPr/>
-        <p:nvPr/>
-      </p:nvGrpSpPr>
-      <p:grpSpPr>
-        <a:xfrm>
-          <a:off x="0" y="0"/>
-          <a:ext cx="0" cy="0"/>
-          <a:chOff x="0" y="0"/>
-          <a:chExt cx="0" cy="0"/>
-        </a:xfrm>
-      </p:grpSpPr>
-      <p:sp>
-        <p:nvSpPr>
-          <p:cNvPr id="2" name="Rectangle 1"/>
-          <p:cNvSpPr/>
-          <p:nvPr/>
-        </p:nvSpPr>
-        <p:spPr>
-          <a:xfrm>
-            <a:off x="0" y="0"/>
-            <a:ext cx="164592" cy="6858000"/>
-          </a:xfrm>
-          <a:prstGeom prst="rect">
-            <a:avLst/>
-          </a:prstGeom>
-          <a:solidFill>
-            <a:srgbClr val="9E3B2F"/>
-          </a:solidFill>
-          <a:ln>
-            <a:noFill/>
-          </a:ln>
-          <a:effectLst/>
-        </p:spPr>
-        <p:style>
-          <a:lnRef idx="1">
-            <a:schemeClr val="accent1"/>
-          </a:lnRef>
-          <a:fillRef idx="3">
-            <a:schemeClr val="accent1"/>
-          </a:fillRef>
-          <a:effectRef idx="2">
-            <a:schemeClr val="accent1"/>
-          </a:effectRef>
-          <a:fontRef idx="minor">
-            <a:schemeClr val="lt1"/>
-          </a:fontRef>
-        </p:style>
-        <p:txBody>
-          <a:bodyPr rtlCol="0" anchor="ctr"/>
-          <a:lstStyle/>
-          <a:p>
-            <a:pPr algn="ctr"/>
-            <a:endParaRPr/>
-          </a:p>
-        </p:txBody>
-      </p:sp>
-      <p:sp>
-        <p:nvSpPr>
-          <p:cNvPr id="3" name="TextBox 2"/>
-          <p:cNvSpPr txBox="1"/>
-          <p:nvPr/>
-        </p:nvSpPr>
-        <p:spPr>
-          <a:xfrm>
-            <a:off x="502920" y="292608"/>
-            <a:ext cx="10058400" cy="457200"/>
-          </a:xfrm>
-          <a:prstGeom prst="rect">
-            <a:avLst/>
-          </a:prstGeom>
-          <a:noFill/>
-        </p:spPr>
-        <p:txBody>
-          <a:bodyPr wrap="square" anchor="t">
-            <a:spAutoFit/>
-          </a:bodyPr>
-          <a:lstStyle/>
-          <a:p>
-            <a:pPr algn="l"/>
-            <a:r>
-              <a:rPr sz="1500" b="1">
-                <a:solidFill>
-                  <a:srgbClr val="C9A227"/>
-                </a:solidFill>
-                <a:latin typeface="微軟正黑體"/>
-                <a:ea typeface="微軟正黑體"/>
-                <a:cs typeface="微軟正黑體"/>
-              </a:rPr>
-              <a:t>SOLUTION｜我們的方案</a:t>
-            </a:r>
-          </a:p>
-        </p:txBody>
-      </p:sp>
-      <p:sp>
-        <p:nvSpPr>
-          <p:cNvPr id="4" name="TextBox 3"/>
-          <p:cNvSpPr txBox="1"/>
-          <p:nvPr/>
-        </p:nvSpPr>
-        <p:spPr>
-          <a:xfrm>
-            <a:off x="502920" y="603504"/>
-            <a:ext cx="11155680" cy="914400"/>
-          </a:xfrm>
-          <a:prstGeom prst="rect">
-            <a:avLst/>
-          </a:prstGeom>
-          <a:noFill/>
-        </p:spPr>
-        <p:txBody>
-          <a:bodyPr wrap="square" anchor="t">
-            <a:spAutoFit/>
-          </a:bodyPr>
-          <a:lstStyle/>
-          <a:p>
-            <a:pPr algn="l"/>
-            <a:r>
-              <a:rPr sz="3300" b="1">
-                <a:solidFill>
-                  <a:srgbClr val="33302B"/>
-                </a:solidFill>
-                <a:latin typeface="微軟正黑體"/>
-                <a:ea typeface="微軟正黑體"/>
-                <a:cs typeface="微軟正黑體"/>
-              </a:rPr>
-              <a:t>加裝在既有香爐上的自主治理模組</a:t>
-            </a:r>
-          </a:p>
-        </p:txBody>
-      </p:sp>
-      <p:pic>
-        <p:nvPicPr>
-          <p:cNvPr id="5" name="Picture 4" descr="_view_組裝.png"/>
-          <p:cNvPicPr>
-            <a:picLocks noChangeAspect="1"/>
-          </p:cNvPicPr>
-          <p:nvPr/>
-        </p:nvPicPr>
-        <p:blipFill>
-          <a:blip r:embed="rId3"/>
-          <a:stretch>
-            <a:fillRect/>
-          </a:stretch>
-        </p:blipFill>
-        <p:spPr>
-          <a:xfrm>
-            <a:off x="502920" y="1691640"/>
-            <a:ext cx="5974080" cy="4480560"/>
-          </a:xfrm>
-          <a:prstGeom prst="rect">
-            <a:avLst/>
-          </a:prstGeom>
-        </p:spPr>
-      </p:pic>
-      <p:sp>
-        <p:nvSpPr>
-          <p:cNvPr id="6" name="TextBox 5"/>
-          <p:cNvSpPr txBox="1"/>
-          <p:nvPr/>
-        </p:nvSpPr>
-        <p:spPr>
-          <a:xfrm>
-            <a:off x="6537960" y="1828800"/>
-            <a:ext cx="5120640" cy="502920"/>
-          </a:xfrm>
-          <a:prstGeom prst="rect">
-            <a:avLst/>
-          </a:prstGeom>
-          <a:noFill/>
-        </p:spPr>
-        <p:txBody>
-          <a:bodyPr wrap="square" anchor="t">
-            <a:spAutoFit/>
-          </a:bodyPr>
-          <a:lstStyle/>
-          <a:p>
-            <a:pPr algn="l"/>
-            <a:r>
-              <a:rPr sz="2100" b="1">
-                <a:solidFill>
-                  <a:srgbClr val="9E3B2F"/>
-                </a:solidFill>
-                <a:latin typeface="微軟正黑體"/>
-                <a:ea typeface="微軟正黑體"/>
-                <a:cs typeface="微軟正黑體"/>
-              </a:rPr>
-              <a:t>■ 不換爐的 retrofit</a:t>
-            </a:r>
-          </a:p>
-        </p:txBody>
-      </p:sp>
-      <p:sp>
-        <p:nvSpPr>
-          <p:cNvPr id="7" name="TextBox 6"/>
-          <p:cNvSpPr txBox="1"/>
-          <p:nvPr/>
-        </p:nvSpPr>
-        <p:spPr>
-          <a:xfrm>
-            <a:off x="6812280" y="2267712"/>
-            <a:ext cx="4937760" cy="548640"/>
-          </a:xfrm>
-          <a:prstGeom prst="rect">
-            <a:avLst/>
-          </a:prstGeom>
-          <a:noFill/>
-        </p:spPr>
-        <p:txBody>
-          <a:bodyPr wrap="square" anchor="t">
-            <a:spAutoFit/>
-          </a:bodyPr>
-          <a:lstStyle/>
-          <a:p>
-            <a:pPr algn="l"/>
-            <a:r>
-              <a:rPr sz="1600" b="0">
-                <a:solidFill>
-                  <a:srgbClr val="33302B"/>
-                </a:solidFill>
-                <a:latin typeface="微軟正黑體"/>
-                <a:ea typeface="微軟正黑體"/>
-                <a:cs typeface="微軟正黑體"/>
-              </a:rPr>
-              <a:t>買方是廟方管委會，導入零儀式衝擊</a:t>
-            </a:r>
-          </a:p>
-        </p:txBody>
-      </p:sp>
-      <p:sp>
-        <p:nvSpPr>
-          <p:cNvPr id="8" name="TextBox 7"/>
-          <p:cNvSpPr txBox="1"/>
-          <p:nvPr/>
-        </p:nvSpPr>
-        <p:spPr>
-          <a:xfrm>
-            <a:off x="6537960" y="2907791"/>
-            <a:ext cx="5120640" cy="502920"/>
-          </a:xfrm>
-          <a:prstGeom prst="rect">
-            <a:avLst/>
-          </a:prstGeom>
-          <a:noFill/>
-        </p:spPr>
-        <p:txBody>
-          <a:bodyPr wrap="square" anchor="t">
-            <a:spAutoFit/>
-          </a:bodyPr>
-          <a:lstStyle/>
-          <a:p>
-            <a:pPr algn="l"/>
-            <a:r>
-              <a:rPr sz="2100" b="1">
-                <a:solidFill>
-                  <a:srgbClr val="9E3B2F"/>
-                </a:solidFill>
-                <a:latin typeface="微軟正黑體"/>
-                <a:ea typeface="微軟正黑體"/>
-                <a:cs typeface="微軟正黑體"/>
-              </a:rPr>
-              <a:t>■ 漏斗大口集煙罩</a:t>
-            </a:r>
-          </a:p>
-        </p:txBody>
-      </p:sp>
-      <p:sp>
-        <p:nvSpPr>
-          <p:cNvPr id="9" name="TextBox 8"/>
-          <p:cNvSpPr txBox="1"/>
-          <p:nvPr/>
-        </p:nvSpPr>
-        <p:spPr>
-          <a:xfrm>
-            <a:off x="6812280" y="3346703"/>
-            <a:ext cx="4937760" cy="548640"/>
-          </a:xfrm>
-          <a:prstGeom prst="rect">
-            <a:avLst/>
-          </a:prstGeom>
-          <a:noFill/>
-        </p:spPr>
-        <p:txBody>
-          <a:bodyPr wrap="square" anchor="t">
-            <a:spAutoFit/>
-          </a:bodyPr>
-          <a:lstStyle/>
-          <a:p>
-            <a:pPr algn="l"/>
-            <a:r>
-              <a:rPr sz="1600" b="0">
-                <a:solidFill>
-                  <a:srgbClr val="33302B"/>
-                </a:solidFill>
-                <a:latin typeface="微軟正黑體"/>
-                <a:ea typeface="微軟正黑體"/>
-                <a:cs typeface="微軟正黑體"/>
-              </a:rPr>
-              <a:t>插香跟原本一樣順手；爐口點源捕集，效率遠超全室換氣</a:t>
-            </a:r>
-          </a:p>
-        </p:txBody>
-      </p:sp>
-      <p:sp>
-        <p:nvSpPr>
-          <p:cNvPr id="10" name="TextBox 9"/>
-          <p:cNvSpPr txBox="1"/>
-          <p:nvPr/>
-        </p:nvSpPr>
-        <p:spPr>
-          <a:xfrm>
-            <a:off x="6537960" y="3986783"/>
-            <a:ext cx="5120640" cy="502920"/>
-          </a:xfrm>
-          <a:prstGeom prst="rect">
-            <a:avLst/>
-          </a:prstGeom>
-          <a:noFill/>
-        </p:spPr>
-        <p:txBody>
-          <a:bodyPr wrap="square" anchor="t">
-            <a:spAutoFit/>
-          </a:bodyPr>
-          <a:lstStyle/>
-          <a:p>
-            <a:pPr algn="l"/>
-            <a:r>
-              <a:rPr sz="2100" b="1">
-                <a:solidFill>
-                  <a:srgbClr val="9E3B2F"/>
-                </a:solidFill>
-                <a:latin typeface="微軟正黑體"/>
-                <a:ea typeface="微軟正黑體"/>
-                <a:cs typeface="微軟正黑體"/>
-              </a:rPr>
-              <a:t>■ 三段過濾鏈</a:t>
-            </a:r>
-          </a:p>
-        </p:txBody>
-      </p:sp>
-      <p:sp>
-        <p:nvSpPr>
-          <p:cNvPr id="11" name="TextBox 10"/>
-          <p:cNvSpPr txBox="1"/>
-          <p:nvPr/>
-        </p:nvSpPr>
-        <p:spPr>
-          <a:xfrm>
-            <a:off x="6812280" y="4425695"/>
-            <a:ext cx="4937760" cy="548640"/>
-          </a:xfrm>
-          <a:prstGeom prst="rect">
-            <a:avLst/>
-          </a:prstGeom>
-          <a:noFill/>
-        </p:spPr>
-        <p:txBody>
-          <a:bodyPr wrap="square" anchor="t">
-            <a:spAutoFit/>
-          </a:bodyPr>
-          <a:lstStyle/>
-          <a:p>
-            <a:pPr algn="l"/>
-            <a:r>
-              <a:rPr sz="1600" b="0">
-                <a:solidFill>
-                  <a:srgbClr val="33302B"/>
-                </a:solidFill>
-                <a:latin typeface="微軟正黑體"/>
-                <a:ea typeface="微軟正黑體"/>
-                <a:cs typeface="微軟正黑體"/>
-              </a:rPr>
-              <a:t>金屬紗網（擋火星）→ HEPA → 活性碳，順序即安全</a:t>
-            </a:r>
-          </a:p>
-        </p:txBody>
-      </p:sp>
-      <p:sp>
-        <p:nvSpPr>
-          <p:cNvPr id="12" name="TextBox 11"/>
-          <p:cNvSpPr txBox="1"/>
-          <p:nvPr/>
-        </p:nvSpPr>
-        <p:spPr>
-          <a:xfrm>
-            <a:off x="6537960" y="5065776"/>
-            <a:ext cx="5120640" cy="502920"/>
-          </a:xfrm>
-          <a:prstGeom prst="rect">
-            <a:avLst/>
-          </a:prstGeom>
-          <a:noFill/>
-        </p:spPr>
-        <p:txBody>
-          <a:bodyPr wrap="square" anchor="t">
-            <a:spAutoFit/>
-          </a:bodyPr>
-          <a:lstStyle/>
-          <a:p>
-            <a:pPr algn="l"/>
-            <a:r>
-              <a:rPr sz="2100" b="1">
-                <a:solidFill>
-                  <a:srgbClr val="9E3B2F"/>
-                </a:solidFill>
-                <a:latin typeface="微軟正黑體"/>
-                <a:ea typeface="微軟正黑體"/>
-                <a:cs typeface="微軟正黑體"/>
-              </a:rPr>
-              <a:t>■ 變頻抽排</a:t>
-            </a:r>
-          </a:p>
-        </p:txBody>
-      </p:sp>
-      <p:sp>
-        <p:nvSpPr>
-          <p:cNvPr id="13" name="TextBox 12"/>
-          <p:cNvSpPr txBox="1"/>
-          <p:nvPr/>
-        </p:nvSpPr>
-        <p:spPr>
-          <a:xfrm>
-            <a:off x="6812280" y="5504688"/>
-            <a:ext cx="4937760" cy="548640"/>
-          </a:xfrm>
-          <a:prstGeom prst="rect">
-            <a:avLst/>
-          </a:prstGeom>
-          <a:noFill/>
-        </p:spPr>
-        <p:txBody>
-          <a:bodyPr wrap="square" anchor="t">
-            <a:spAutoFit/>
-          </a:bodyPr>
-          <a:lstStyle/>
-          <a:p>
-            <a:pPr algn="l"/>
-            <a:r>
-              <a:rPr sz="1600" b="0">
-                <a:solidFill>
-                  <a:srgbClr val="33302B"/>
-                </a:solidFill>
-                <a:latin typeface="微軟正黑體"/>
-                <a:ea typeface="微軟正黑體"/>
-                <a:cs typeface="微軟正黑體"/>
-              </a:rPr>
-              <a:t>隨人流與濃度自動調速——省電、低噪、削尖峰</a:t>
-            </a:r>
-          </a:p>
-        </p:txBody>
-      </p:sp>
-    </p:spTree>
-  </p:cSld>
-  <p:clrMapOvr>
-    <a:masterClrMapping/>
-  </p:clrMapOvr>
-</p:sld>
-</file>
-
-<file path=ppt/slides/slide5.xml><?xml version="1.0" encoding="utf-8"?>
-<p:sld xmlns:a="http://schemas.openxmlformats.org/drawingml/2006/main" xmlns:r="http://schemas.openxmlformats.org/officeDocument/2006/relationships" xmlns:p="http://schemas.openxmlformats.org/presentationml/2006/main">
-  <p:cSld>
-    <p:spTree>
-      <p:nvGrpSpPr>
-        <p:cNvPr id="1" name=""/>
-        <p:cNvGrpSpPr/>
-        <p:nvPr/>
-      </p:nvGrpSpPr>
-      <p:grpSpPr>
-        <a:xfrm>
-          <a:off x="0" y="0"/>
-          <a:ext cx="0" cy="0"/>
-          <a:chOff x="0" y="0"/>
-          <a:chExt cx="0" cy="0"/>
-        </a:xfrm>
-      </p:grpSpPr>
-      <p:sp>
-        <p:nvSpPr>
-          <p:cNvPr id="2" name="Rectangle 1"/>
-          <p:cNvSpPr/>
-          <p:nvPr/>
-        </p:nvSpPr>
-        <p:spPr>
-          <a:xfrm>
-            <a:off x="0" y="0"/>
-            <a:ext cx="164592" cy="6858000"/>
-          </a:xfrm>
-          <a:prstGeom prst="rect">
-            <a:avLst/>
-          </a:prstGeom>
-          <a:solidFill>
-            <a:srgbClr val="9E3B2F"/>
-          </a:solidFill>
-          <a:ln>
-            <a:noFill/>
-          </a:ln>
-          <a:effectLst/>
-        </p:spPr>
-        <p:style>
-          <a:lnRef idx="1">
-            <a:schemeClr val="accent1"/>
-          </a:lnRef>
-          <a:fillRef idx="3">
-            <a:schemeClr val="accent1"/>
-          </a:fillRef>
-          <a:effectRef idx="2">
-            <a:schemeClr val="accent1"/>
-          </a:effectRef>
-          <a:fontRef idx="minor">
-            <a:schemeClr val="lt1"/>
-          </a:fontRef>
-        </p:style>
-        <p:txBody>
-          <a:bodyPr rtlCol="0" anchor="ctr"/>
-          <a:lstStyle/>
-          <a:p>
-            <a:pPr algn="ctr"/>
-            <a:endParaRPr/>
-          </a:p>
-        </p:txBody>
-      </p:sp>
-      <p:sp>
-        <p:nvSpPr>
-          <p:cNvPr id="3" name="TextBox 2"/>
-          <p:cNvSpPr txBox="1"/>
-          <p:nvPr/>
-        </p:nvSpPr>
-        <p:spPr>
-          <a:xfrm>
-            <a:off x="502920" y="292608"/>
-            <a:ext cx="10058400" cy="457200"/>
-          </a:xfrm>
-          <a:prstGeom prst="rect">
-            <a:avLst/>
-          </a:prstGeom>
-          <a:noFill/>
-        </p:spPr>
-        <p:txBody>
-          <a:bodyPr wrap="square" anchor="t">
-            <a:spAutoFit/>
-          </a:bodyPr>
-          <a:lstStyle/>
-          <a:p>
-            <a:pPr algn="l"/>
-            <a:r>
-              <a:rPr sz="1500" b="1">
-                <a:solidFill>
-                  <a:srgbClr val="C9A227"/>
-                </a:solidFill>
-                <a:latin typeface="微軟正黑體"/>
-                <a:ea typeface="微軟正黑體"/>
-                <a:cs typeface="微軟正黑體"/>
-              </a:rPr>
-              <a:t>SYSTEM｜三層閉環</a:t>
-            </a:r>
-          </a:p>
-        </p:txBody>
-      </p:sp>
-      <p:sp>
-        <p:nvSpPr>
-          <p:cNvPr id="4" name="TextBox 3"/>
-          <p:cNvSpPr txBox="1"/>
-          <p:nvPr/>
-        </p:nvSpPr>
-        <p:spPr>
-          <a:xfrm>
-            <a:off x="502920" y="603504"/>
-            <a:ext cx="11155680" cy="914400"/>
-          </a:xfrm>
-          <a:prstGeom prst="rect">
-            <a:avLst/>
-          </a:prstGeom>
-          <a:noFill/>
-        </p:spPr>
-        <p:txBody>
-          <a:bodyPr wrap="square" anchor="t">
-            <a:spAutoFit/>
-          </a:bodyPr>
-          <a:lstStyle/>
-          <a:p>
-            <a:pPr algn="l"/>
-            <a:r>
-              <a:rPr sz="3300" b="1">
-                <a:solidFill>
-                  <a:srgbClr val="33302B"/>
-                </a:solidFill>
-                <a:latin typeface="微軟正黑體"/>
-                <a:ea typeface="微軟正黑體"/>
-                <a:cs typeface="微軟正黑體"/>
-              </a:rPr>
-              <a:t>偵測 → 行動 → 再偵測，每筆決策可重演</a:t>
-            </a:r>
-          </a:p>
-        </p:txBody>
-      </p:sp>
-      <p:pic>
-        <p:nvPicPr>
-          <p:cNvPr id="5" name="Picture 4" descr="image3.png"/>
-          <p:cNvPicPr>
-            <a:picLocks noChangeAspect="1"/>
-          </p:cNvPicPr>
-          <p:nvPr/>
-        </p:nvPicPr>
-        <p:blipFill>
-          <a:blip r:embed="rId3"/>
-          <a:stretch>
-            <a:fillRect/>
-          </a:stretch>
-        </p:blipFill>
-        <p:spPr>
-          <a:xfrm>
-            <a:off x="2365897" y="1600200"/>
-            <a:ext cx="7459901" cy="4983480"/>
-          </a:xfrm>
-          <a:prstGeom prst="rect">
-            <a:avLst/>
-          </a:prstGeom>
-        </p:spPr>
-      </p:pic>
-    </p:spTree>
-  </p:cSld>
-  <p:clrMapOvr>
-    <a:masterClrMapping/>
-  </p:clrMapOvr>
-</p:sld>
-</file>
-
-<file path=ppt/slides/slide6.xml><?xml version="1.0" encoding="utf-8"?>
-<p:sld xmlns:a="http://schemas.openxmlformats.org/drawingml/2006/main" xmlns:r="http://schemas.openxmlformats.org/officeDocument/2006/relationships" xmlns:p="http://schemas.openxmlformats.org/presentationml/2006/main">
-  <p:cSld>
-    <p:spTree>
-      <p:nvGrpSpPr>
-        <p:cNvPr id="1" name=""/>
-        <p:cNvGrpSpPr/>
-        <p:nvPr/>
-      </p:nvGrpSpPr>
-      <p:grpSpPr>
-        <a:xfrm>
-          <a:off x="0" y="0"/>
-          <a:ext cx="0" cy="0"/>
-          <a:chOff x="0" y="0"/>
-          <a:chExt cx="0" cy="0"/>
-        </a:xfrm>
-      </p:grpSpPr>
-      <p:sp>
-        <p:nvSpPr>
-          <p:cNvPr id="2" name="Rectangle 1"/>
-          <p:cNvSpPr/>
-          <p:nvPr/>
-        </p:nvSpPr>
-        <p:spPr>
-          <a:xfrm>
-            <a:off x="0" y="0"/>
-            <a:ext cx="164592" cy="6858000"/>
-          </a:xfrm>
-          <a:prstGeom prst="rect">
-            <a:avLst/>
-          </a:prstGeom>
-          <a:solidFill>
-            <a:srgbClr val="9E3B2F"/>
-          </a:solidFill>
-          <a:ln>
-            <a:noFill/>
-          </a:ln>
-          <a:effectLst/>
-        </p:spPr>
-        <p:style>
-          <a:lnRef idx="1">
-            <a:schemeClr val="accent1"/>
-          </a:lnRef>
-          <a:fillRef idx="3">
-            <a:schemeClr val="accent1"/>
-          </a:fillRef>
-          <a:effectRef idx="2">
-            <a:schemeClr val="accent1"/>
-          </a:effectRef>
-          <a:fontRef idx="minor">
-            <a:schemeClr val="lt1"/>
-          </a:fontRef>
-        </p:style>
-        <p:txBody>
-          <a:bodyPr rtlCol="0" anchor="ctr"/>
-          <a:lstStyle/>
-          <a:p>
-            <a:pPr algn="ctr"/>
-            <a:endParaRPr/>
-          </a:p>
-        </p:txBody>
-      </p:sp>
-      <p:sp>
-        <p:nvSpPr>
-          <p:cNvPr id="3" name="TextBox 2"/>
-          <p:cNvSpPr txBox="1"/>
-          <p:nvPr/>
-        </p:nvSpPr>
-        <p:spPr>
-          <a:xfrm>
-            <a:off x="502920" y="292608"/>
-            <a:ext cx="10058400" cy="457200"/>
-          </a:xfrm>
-          <a:prstGeom prst="rect">
-            <a:avLst/>
-          </a:prstGeom>
-          <a:noFill/>
-        </p:spPr>
-        <p:txBody>
-          <a:bodyPr wrap="square" anchor="t">
-            <a:spAutoFit/>
-          </a:bodyPr>
-          <a:lstStyle/>
-          <a:p>
-            <a:pPr algn="l"/>
-            <a:r>
-              <a:rPr sz="1500" b="1">
-                <a:solidFill>
-                  <a:srgbClr val="C9A227"/>
-                </a:solidFill>
-                <a:latin typeface="微軟正黑體"/>
-                <a:ea typeface="微軟正黑體"/>
-                <a:cs typeface="微軟正黑體"/>
-              </a:rPr>
-              <a:t>INTELLIGENCE｜決策核心</a:t>
-            </a:r>
-          </a:p>
-        </p:txBody>
-      </p:sp>
-      <p:sp>
-        <p:nvSpPr>
-          <p:cNvPr id="4" name="TextBox 3"/>
-          <p:cNvSpPr txBox="1"/>
-          <p:nvPr/>
-        </p:nvSpPr>
-        <p:spPr>
-          <a:xfrm>
-            <a:off x="502920" y="603504"/>
-            <a:ext cx="11155680" cy="914400"/>
-          </a:xfrm>
-          <a:prstGeom prst="rect">
-            <a:avLst/>
-          </a:prstGeom>
-          <a:noFill/>
-        </p:spPr>
-        <p:txBody>
-          <a:bodyPr wrap="square" anchor="t">
-            <a:spAutoFit/>
-          </a:bodyPr>
-          <a:lstStyle/>
-          <a:p>
-            <a:pPr algn="l"/>
-            <a:r>
-              <a:rPr sz="3300" b="1">
-                <a:solidFill>
-                  <a:srgbClr val="33302B"/>
-                </a:solidFill>
-                <a:latin typeface="微軟正黑體"/>
-                <a:ea typeface="微軟正黑體"/>
-                <a:cs typeface="微軟正黑體"/>
-              </a:rPr>
-              <a:t>前饋削峰 ＋ 安全聯鎖優先於一切</a:t>
-            </a:r>
-          </a:p>
-        </p:txBody>
-      </p:sp>
-      <p:pic>
-        <p:nvPicPr>
-          <p:cNvPr id="5" name="Picture 4" descr="image5.png"/>
-          <p:cNvPicPr>
-            <a:picLocks noChangeAspect="1"/>
-          </p:cNvPicPr>
-          <p:nvPr/>
-        </p:nvPicPr>
-        <p:blipFill>
-          <a:blip r:embed="rId3"/>
-          <a:stretch>
-            <a:fillRect/>
-          </a:stretch>
-        </p:blipFill>
-        <p:spPr>
-          <a:xfrm>
-            <a:off x="1112367" y="1828800"/>
-            <a:ext cx="9966960" cy="3986784"/>
-          </a:xfrm>
-          <a:prstGeom prst="rect">
-            <a:avLst/>
-          </a:prstGeom>
-        </p:spPr>
-      </p:pic>
-      <p:sp>
-        <p:nvSpPr>
-          <p:cNvPr id="6" name="TextBox 5"/>
-          <p:cNvSpPr txBox="1"/>
-          <p:nvPr/>
-        </p:nvSpPr>
-        <p:spPr>
-          <a:xfrm>
-            <a:off x="685800" y="5897880"/>
-            <a:ext cx="10972800" cy="822960"/>
-          </a:xfrm>
-          <a:prstGeom prst="rect">
-            <a:avLst/>
-          </a:prstGeom>
-          <a:noFill/>
-        </p:spPr>
-        <p:txBody>
-          <a:bodyPr wrap="square" anchor="t">
-            <a:spAutoFit/>
-          </a:bodyPr>
-          <a:lstStyle/>
-          <a:p>
-            <a:pPr algn="ctr"/>
-            <a:r>
-              <a:rPr sz="1600" b="0">
-                <a:solidFill>
-                  <a:srgbClr val="33302B"/>
-                </a:solidFill>
-                <a:latin typeface="微軟正黑體"/>
-                <a:ea typeface="微軟正黑體"/>
-                <a:cs typeface="微軟正黑體"/>
-              </a:rPr>
-              <a:t>門檻與實機韌體同步：進高峰＝基線+300ppm・遲滯退場＝基線+200・前饋 θ=120 ppm/min</a:t>
-            </a:r>
-          </a:p>
-          <a:p>
-            <a:pPr algn="ctr"/>
-            <a:r>
-              <a:rPr sz="1400" b="0">
-                <a:solidFill>
-                  <a:srgbClr val="8A8377"/>
-                </a:solidFill>
-                <a:latin typeface="微軟正黑體"/>
-                <a:ea typeface="微軟正黑體"/>
-                <a:cs typeface="微軟正黑體"/>
-              </a:rPr>
-              <a:t>悶燒偵測：CO/CO₂ 比＋爐溫特徵 → 60 秒內全速抽排＋告警（設計目標，將實測檢定）</a:t>
-            </a:r>
-          </a:p>
-        </p:txBody>
-      </p:sp>
-    </p:spTree>
-  </p:cSld>
-  <p:clrMapOvr>
-    <a:masterClrMapping/>
-  </p:clrMapOvr>
-</p:sld>
-</file>
-
-<file path=ppt/slides/slide7.xml><?xml version="1.0" encoding="utf-8"?>
-<p:sld xmlns:a="http://schemas.openxmlformats.org/drawingml/2006/main" xmlns:r="http://schemas.openxmlformats.org/officeDocument/2006/relationships" xmlns:p="http://schemas.openxmlformats.org/presentationml/2006/main">
-  <p:cSld>
-    <p:spTree>
-      <p:nvGrpSpPr>
-        <p:cNvPr id="1" name=""/>
-        <p:cNvGrpSpPr/>
-        <p:nvPr/>
-      </p:nvGrpSpPr>
-      <p:grpSpPr>
-        <a:xfrm>
-          <a:off x="0" y="0"/>
-          <a:ext cx="0" cy="0"/>
-          <a:chOff x="0" y="0"/>
-          <a:chExt cx="0" cy="0"/>
-        </a:xfrm>
-      </p:grpSpPr>
-      <p:sp>
-        <p:nvSpPr>
-          <p:cNvPr id="2" name="Rectangle 1"/>
-          <p:cNvSpPr/>
-          <p:nvPr/>
-        </p:nvSpPr>
-        <p:spPr>
-          <a:xfrm>
-            <a:off x="0" y="0"/>
-            <a:ext cx="164592" cy="6858000"/>
-          </a:xfrm>
-          <a:prstGeom prst="rect">
-            <a:avLst/>
-          </a:prstGeom>
-          <a:solidFill>
-            <a:srgbClr val="9E3B2F"/>
-          </a:solidFill>
-          <a:ln>
-            <a:noFill/>
-          </a:ln>
-          <a:effectLst/>
-        </p:spPr>
-        <p:style>
-          <a:lnRef idx="1">
-            <a:schemeClr val="accent1"/>
-          </a:lnRef>
-          <a:fillRef idx="3">
-            <a:schemeClr val="accent1"/>
-          </a:fillRef>
-          <a:effectRef idx="2">
-            <a:schemeClr val="accent1"/>
-          </a:effectRef>
-          <a:fontRef idx="minor">
-            <a:schemeClr val="lt1"/>
-          </a:fontRef>
-        </p:style>
-        <p:txBody>
-          <a:bodyPr rtlCol="0" anchor="ctr"/>
-          <a:lstStyle/>
-          <a:p>
-            <a:pPr algn="ctr"/>
-            <a:endParaRPr/>
-          </a:p>
-        </p:txBody>
-      </p:sp>
-      <p:sp>
-        <p:nvSpPr>
-          <p:cNvPr id="3" name="TextBox 2"/>
-          <p:cNvSpPr txBox="1"/>
-          <p:nvPr/>
-        </p:nvSpPr>
-        <p:spPr>
-          <a:xfrm>
-            <a:off x="502920" y="292608"/>
-            <a:ext cx="10058400" cy="457200"/>
-          </a:xfrm>
-          <a:prstGeom prst="rect">
-            <a:avLst/>
-          </a:prstGeom>
-          <a:noFill/>
-        </p:spPr>
-        <p:txBody>
-          <a:bodyPr wrap="square" anchor="t">
-            <a:spAutoFit/>
-          </a:bodyPr>
-          <a:lstStyle/>
-          <a:p>
-            <a:pPr algn="l"/>
-            <a:r>
-              <a:rPr sz="1500" b="1">
-                <a:solidFill>
-                  <a:srgbClr val="C9A227"/>
-                </a:solidFill>
-                <a:latin typeface="微軟正黑體"/>
-                <a:ea typeface="微軟正黑體"/>
-                <a:cs typeface="微軟正黑體"/>
-              </a:rPr>
-              <a:t>TRACTION｜已經在跑的證據</a:t>
-            </a:r>
-          </a:p>
-        </p:txBody>
-      </p:sp>
-      <p:sp>
-        <p:nvSpPr>
-          <p:cNvPr id="4" name="TextBox 3"/>
-          <p:cNvSpPr txBox="1"/>
-          <p:nvPr/>
-        </p:nvSpPr>
-        <p:spPr>
-          <a:xfrm>
-            <a:off x="502920" y="603504"/>
-            <a:ext cx="11155680" cy="914400"/>
-          </a:xfrm>
-          <a:prstGeom prst="rect">
-            <a:avLst/>
-          </a:prstGeom>
-          <a:noFill/>
-        </p:spPr>
-        <p:txBody>
-          <a:bodyPr wrap="square" anchor="t">
-            <a:spAutoFit/>
-          </a:bodyPr>
-          <a:lstStyle/>
-          <a:p>
-            <a:pPr algn="l"/>
-            <a:r>
-              <a:rPr sz="3300" b="1">
-                <a:solidFill>
-                  <a:srgbClr val="33302B"/>
-                </a:solidFill>
-                <a:latin typeface="微軟正黑體"/>
-                <a:ea typeface="微軟正黑體"/>
-                <a:cs typeface="微軟正黑體"/>
-              </a:rPr>
-              <a:t>不是簡報做得好，是系統真的在跑</a:t>
-            </a:r>
-          </a:p>
-        </p:txBody>
-      </p:sp>
-      <p:sp>
-        <p:nvSpPr>
-          <p:cNvPr id="5" name="Rectangle 4"/>
-          <p:cNvSpPr/>
-          <p:nvPr/>
-        </p:nvSpPr>
-        <p:spPr>
-          <a:xfrm>
-            <a:off x="685800" y="2011680"/>
-            <a:ext cx="3383280" cy="2971800"/>
-          </a:xfrm>
-          <a:prstGeom prst="rect">
-            <a:avLst/>
-          </a:prstGeom>
-          <a:solidFill>
-            <a:srgbClr val="F8F4EC"/>
-          </a:solidFill>
-          <a:ln>
-            <a:noFill/>
-          </a:ln>
-          <a:effectLst/>
-        </p:spPr>
-        <p:style>
-          <a:lnRef idx="1">
-            <a:schemeClr val="accent1"/>
-          </a:lnRef>
-          <a:fillRef idx="3">
-            <a:schemeClr val="accent1"/>
-          </a:fillRef>
-          <a:effectRef idx="2">
-            <a:schemeClr val="accent1"/>
-          </a:effectRef>
-          <a:fontRef idx="minor">
-            <a:schemeClr val="lt1"/>
-          </a:fontRef>
-        </p:style>
-        <p:txBody>
-          <a:bodyPr rtlCol="0" anchor="ctr"/>
-          <a:lstStyle/>
-          <a:p>
-            <a:pPr algn="ctr"/>
-            <a:endParaRPr/>
-          </a:p>
-        </p:txBody>
-      </p:sp>
-      <p:sp>
-        <p:nvSpPr>
-          <p:cNvPr id="6" name="TextBox 5"/>
-          <p:cNvSpPr txBox="1"/>
-          <p:nvPr/>
-        </p:nvSpPr>
-        <p:spPr>
-          <a:xfrm>
-            <a:off x="685800" y="2331720"/>
-            <a:ext cx="3383280" cy="1005840"/>
-          </a:xfrm>
-          <a:prstGeom prst="rect">
-            <a:avLst/>
-          </a:prstGeom>
-          <a:noFill/>
-        </p:spPr>
-        <p:txBody>
-          <a:bodyPr wrap="square" anchor="t">
-            <a:spAutoFit/>
-          </a:bodyPr>
-          <a:lstStyle/>
-          <a:p>
-            <a:pPr algn="ctr"/>
-            <a:r>
-              <a:rPr sz="4200" b="1">
-                <a:solidFill>
-                  <a:srgbClr val="9E3B2F"/>
-                </a:solidFill>
-                <a:latin typeface="微軟正黑體"/>
-                <a:ea typeface="微軟正黑體"/>
-                <a:cs typeface="微軟正黑體"/>
-              </a:rPr>
-              <a:t>2026-08</a:t>
-            </a:r>
-          </a:p>
-        </p:txBody>
-      </p:sp>
-      <p:sp>
-        <p:nvSpPr>
-          <p:cNvPr id="7" name="TextBox 6"/>
-          <p:cNvSpPr txBox="1"/>
-          <p:nvPr/>
-        </p:nvSpPr>
-        <p:spPr>
-          <a:xfrm>
-            <a:off x="914400" y="3520440"/>
-            <a:ext cx="2926080" cy="1371600"/>
-          </a:xfrm>
-          <a:prstGeom prst="rect">
-            <a:avLst/>
-          </a:prstGeom>
-          <a:noFill/>
-        </p:spPr>
-        <p:txBody>
-          <a:bodyPr wrap="square" anchor="t">
-            <a:spAutoFit/>
-          </a:bodyPr>
-          <a:lstStyle/>
-          <a:p>
-            <a:pPr algn="ctr"/>
-            <a:r>
-              <a:rPr sz="1600" b="0">
-                <a:solidFill>
-                  <a:srgbClr val="33302B"/>
-                </a:solidFill>
-                <a:latin typeface="微軟正黑體"/>
-                <a:ea typeface="微軟正黑體"/>
-                <a:cs typeface="微軟正黑體"/>
-              </a:rPr>
-              <a:t>原型實機上線
-熱點自動上雲・斷線補傳
-現場模式演練通過</a:t>
-            </a:r>
-          </a:p>
-        </p:txBody>
-      </p:sp>
-      <p:sp>
-        <p:nvSpPr>
-          <p:cNvPr id="8" name="Rectangle 7"/>
-          <p:cNvSpPr/>
-          <p:nvPr/>
-        </p:nvSpPr>
-        <p:spPr>
-          <a:xfrm>
-            <a:off x="4526280" y="2011680"/>
-            <a:ext cx="3383280" cy="2971800"/>
-          </a:xfrm>
-          <a:prstGeom prst="rect">
-            <a:avLst/>
-          </a:prstGeom>
-          <a:solidFill>
-            <a:srgbClr val="F8F4EC"/>
-          </a:solidFill>
-          <a:ln>
-            <a:noFill/>
-          </a:ln>
-          <a:effectLst/>
-        </p:spPr>
-        <p:style>
-          <a:lnRef idx="1">
-            <a:schemeClr val="accent1"/>
-          </a:lnRef>
-          <a:fillRef idx="3">
-            <a:schemeClr val="accent1"/>
-          </a:fillRef>
-          <a:effectRef idx="2">
-            <a:schemeClr val="accent1"/>
-          </a:effectRef>
-          <a:fontRef idx="minor">
-            <a:schemeClr val="lt1"/>
-          </a:fontRef>
-        </p:style>
-        <p:txBody>
-          <a:bodyPr rtlCol="0" anchor="ctr"/>
-          <a:lstStyle/>
-          <a:p>
-            <a:pPr algn="ctr"/>
-            <a:endParaRPr/>
-          </a:p>
-        </p:txBody>
-      </p:sp>
-      <p:sp>
-        <p:nvSpPr>
-          <p:cNvPr id="9" name="TextBox 8"/>
-          <p:cNvSpPr txBox="1"/>
-          <p:nvPr/>
-        </p:nvSpPr>
-        <p:spPr>
-          <a:xfrm>
-            <a:off x="4526280" y="2331720"/>
-            <a:ext cx="3383280" cy="1005840"/>
-          </a:xfrm>
-          <a:prstGeom prst="rect">
-            <a:avLst/>
-          </a:prstGeom>
-          <a:noFill/>
-        </p:spPr>
-        <p:txBody>
-          <a:bodyPr wrap="square" anchor="t">
-            <a:spAutoFit/>
-          </a:bodyPr>
-          <a:lstStyle/>
-          <a:p>
-            <a:pPr algn="ctr"/>
-            <a:r>
-              <a:rPr sz="4200" b="1">
-                <a:solidFill>
-                  <a:srgbClr val="9E3B2F"/>
-                </a:solidFill>
-                <a:latin typeface="微軟正黑體"/>
-                <a:ea typeface="微軟正黑體"/>
-                <a:cs typeface="微軟正黑體"/>
-              </a:rPr>
-              <a:t>12 項</a:t>
-            </a:r>
-          </a:p>
-        </p:txBody>
-      </p:sp>
-      <p:sp>
-        <p:nvSpPr>
-          <p:cNvPr id="10" name="TextBox 9"/>
-          <p:cNvSpPr txBox="1"/>
-          <p:nvPr/>
-        </p:nvSpPr>
-        <p:spPr>
-          <a:xfrm>
-            <a:off x="4754880" y="3520440"/>
-            <a:ext cx="2926080" cy="1371600"/>
-          </a:xfrm>
-          <a:prstGeom prst="rect">
-            <a:avLst/>
-          </a:prstGeom>
-          <a:noFill/>
-        </p:spPr>
-        <p:txBody>
-          <a:bodyPr wrap="square" anchor="t">
-            <a:spAutoFit/>
-          </a:bodyPr>
-          <a:lstStyle/>
-          <a:p>
-            <a:pPr algn="ctr"/>
-            <a:r>
-              <a:rPr sz="1600" b="0">
-                <a:solidFill>
-                  <a:srgbClr val="33302B"/>
-                </a:solidFill>
-                <a:latin typeface="微軟正黑體"/>
-                <a:ea typeface="微軟正黑體"/>
-                <a:cs typeface="微軟正黑體"/>
-              </a:rPr>
-              <a:t>雲端中心站驗收全過
-免帳密公開儀表板 ×3
-評審隨時可看</a:t>
-            </a:r>
-          </a:p>
-        </p:txBody>
-      </p:sp>
-      <p:sp>
-        <p:nvSpPr>
-          <p:cNvPr id="11" name="Rectangle 10"/>
-          <p:cNvSpPr/>
-          <p:nvPr/>
-        </p:nvSpPr>
-        <p:spPr>
-          <a:xfrm>
-            <a:off x="8366760" y="2011680"/>
-            <a:ext cx="3383280" cy="2971800"/>
-          </a:xfrm>
-          <a:prstGeom prst="rect">
-            <a:avLst/>
-          </a:prstGeom>
-          <a:solidFill>
-            <a:srgbClr val="F8F4EC"/>
-          </a:solidFill>
-          <a:ln>
-            <a:noFill/>
-          </a:ln>
-          <a:effectLst/>
-        </p:spPr>
-        <p:style>
-          <a:lnRef idx="1">
-            <a:schemeClr val="accent1"/>
-          </a:lnRef>
-          <a:fillRef idx="3">
-            <a:schemeClr val="accent1"/>
-          </a:fillRef>
-          <a:effectRef idx="2">
-            <a:schemeClr val="accent1"/>
-          </a:effectRef>
-          <a:fontRef idx="minor">
-            <a:schemeClr val="lt1"/>
-          </a:fontRef>
-        </p:style>
-        <p:txBody>
-          <a:bodyPr rtlCol="0" anchor="ctr"/>
-          <a:lstStyle/>
-          <a:p>
-            <a:pPr algn="ctr"/>
-            <a:endParaRPr/>
-          </a:p>
-        </p:txBody>
-      </p:sp>
-      <p:sp>
-        <p:nvSpPr>
-          <p:cNvPr id="12" name="TextBox 11"/>
-          <p:cNvSpPr txBox="1"/>
-          <p:nvPr/>
-        </p:nvSpPr>
-        <p:spPr>
-          <a:xfrm>
-            <a:off x="8366760" y="2331720"/>
-            <a:ext cx="3383280" cy="1005840"/>
-          </a:xfrm>
-          <a:prstGeom prst="rect">
-            <a:avLst/>
-          </a:prstGeom>
-          <a:noFill/>
-        </p:spPr>
-        <p:txBody>
-          <a:bodyPr wrap="square" anchor="t">
-            <a:spAutoFit/>
-          </a:bodyPr>
-          <a:lstStyle/>
-          <a:p>
-            <a:pPr algn="ctr"/>
-            <a:r>
-              <a:rPr sz="4200" b="1">
-                <a:solidFill>
-                  <a:srgbClr val="9E3B2F"/>
-                </a:solidFill>
-                <a:latin typeface="微軟正黑體"/>
-                <a:ea typeface="微軟正黑體"/>
-                <a:cs typeface="微軟正黑體"/>
-              </a:rPr>
-              <a:t>29 條</a:t>
-            </a:r>
-          </a:p>
-        </p:txBody>
-      </p:sp>
-      <p:sp>
-        <p:nvSpPr>
-          <p:cNvPr id="13" name="TextBox 12"/>
-          <p:cNvSpPr txBox="1"/>
-          <p:nvPr/>
-        </p:nvSpPr>
-        <p:spPr>
-          <a:xfrm>
-            <a:off x="8595360" y="3520440"/>
-            <a:ext cx="2926080" cy="1371600"/>
-          </a:xfrm>
-          <a:prstGeom prst="rect">
-            <a:avLst/>
-          </a:prstGeom>
-          <a:noFill/>
-        </p:spPr>
-        <p:txBody>
-          <a:bodyPr wrap="square" anchor="t">
-            <a:spAutoFit/>
-          </a:bodyPr>
-          <a:lstStyle/>
-          <a:p>
-            <a:pPr algn="ctr"/>
-            <a:r>
-              <a:rPr sz="1600" b="0">
-                <a:solidFill>
-                  <a:srgbClr val="33302B"/>
-                </a:solidFill>
-                <a:latin typeface="微軟正黑體"/>
-                <a:ea typeface="微軟正黑體"/>
-                <a:cs typeface="微軟正黑體"/>
-              </a:rPr>
-              <a:t>自動化設計規則
-機構/電路/韌體/雲端
-跨層自檢・改一處全鏈重驗</a:t>
-            </a:r>
-          </a:p>
-        </p:txBody>
-      </p:sp>
-      <p:pic>
-        <p:nvPicPr>
-          <p:cNvPr id="14" name="Picture 13" descr="qr_fleet.png"/>
-          <p:cNvPicPr>
-            <a:picLocks noChangeAspect="1"/>
-          </p:cNvPicPr>
-          <p:nvPr/>
-        </p:nvPicPr>
-        <p:blipFill>
-          <a:blip r:embed="rId3"/>
-          <a:stretch>
-            <a:fillRect/>
-          </a:stretch>
-        </p:blipFill>
-        <p:spPr>
-          <a:xfrm>
-            <a:off x="868680" y="5230368"/>
-            <a:ext cx="1371600" cy="1371600"/>
-          </a:xfrm>
-          <a:prstGeom prst="rect">
-            <a:avLst/>
-          </a:prstGeom>
-        </p:spPr>
-      </p:pic>
-      <p:sp>
-        <p:nvSpPr>
-          <p:cNvPr id="15" name="TextBox 14"/>
-          <p:cNvSpPr txBox="1"/>
-          <p:nvPr/>
-        </p:nvSpPr>
-        <p:spPr>
-          <a:xfrm>
-            <a:off x="2468880" y="5468112"/>
-            <a:ext cx="9052560" cy="1005840"/>
-          </a:xfrm>
-          <a:prstGeom prst="rect">
-            <a:avLst/>
-          </a:prstGeom>
-          <a:noFill/>
-        </p:spPr>
-        <p:txBody>
-          <a:bodyPr wrap="square" anchor="t">
-            <a:spAutoFit/>
-          </a:bodyPr>
-          <a:lstStyle/>
-          <a:p>
-            <a:pPr algn="l"/>
-            <a:r>
-              <a:rPr sz="2200" b="1">
-                <a:solidFill>
-                  <a:srgbClr val="33302B"/>
-                </a:solidFill>
-                <a:latin typeface="微軟正黑體"/>
-                <a:ea typeface="微軟正黑體"/>
-                <a:cs typeface="微軟正黑體"/>
-              </a:rPr>
-              <a:t>掃碼即看：機隊即時面板（公開唯讀・免帳密）</a:t>
-            </a:r>
-          </a:p>
-          <a:p>
-            <a:pPr algn="l"/>
-            <a:r>
-              <a:rPr sz="1500" b="0">
-                <a:solidFill>
-                  <a:srgbClr val="8A8377"/>
-                </a:solidFill>
-                <a:latin typeface="微軟正黑體"/>
-                <a:ea typeface="微軟正黑體"/>
-                <a:cs typeface="微軟正黑體"/>
-              </a:rPr>
-              <a:t>程式碼與資料集開放，結論可重現——每一項都能當場驗證</a:t>
-            </a:r>
-          </a:p>
-        </p:txBody>
-      </p:sp>
-    </p:spTree>
-  </p:cSld>
-  <p:clrMapOvr>
-    <a:masterClrMapping/>
-  </p:clrMapOvr>
-</p:sld>
-</file>
-
-<file path=ppt/slides/slide8.xml><?xml version="1.0" encoding="utf-8"?>
-<p:sld xmlns:a="http://schemas.openxmlformats.org/drawingml/2006/main" xmlns:r="http://schemas.openxmlformats.org/officeDocument/2006/relationships" xmlns:p="http://schemas.openxmlformats.org/presentationml/2006/main">
-  <p:cSld>
-    <p:spTree>
-      <p:nvGrpSpPr>
-        <p:cNvPr id="1" name=""/>
-        <p:cNvGrpSpPr/>
-        <p:nvPr/>
-      </p:nvGrpSpPr>
-      <p:grpSpPr>
-        <a:xfrm>
-          <a:off x="0" y="0"/>
-          <a:ext cx="0" cy="0"/>
-          <a:chOff x="0" y="0"/>
-          <a:chExt cx="0" cy="0"/>
-        </a:xfrm>
-      </p:grpSpPr>
-      <p:sp>
-        <p:nvSpPr>
-          <p:cNvPr id="2" name="Rectangle 1"/>
-          <p:cNvSpPr/>
-          <p:nvPr/>
-        </p:nvSpPr>
-        <p:spPr>
-          <a:xfrm>
-            <a:off x="0" y="0"/>
-            <a:ext cx="164592" cy="6858000"/>
-          </a:xfrm>
-          <a:prstGeom prst="rect">
-            <a:avLst/>
-          </a:prstGeom>
-          <a:solidFill>
-            <a:srgbClr val="9E3B2F"/>
-          </a:solidFill>
-          <a:ln>
-            <a:noFill/>
-          </a:ln>
-          <a:effectLst/>
-        </p:spPr>
-        <p:style>
-          <a:lnRef idx="1">
-            <a:schemeClr val="accent1"/>
-          </a:lnRef>
-          <a:fillRef idx="3">
-            <a:schemeClr val="accent1"/>
-          </a:fillRef>
-          <a:effectRef idx="2">
-            <a:schemeClr val="accent1"/>
-          </a:effectRef>
-          <a:fontRef idx="minor">
-            <a:schemeClr val="lt1"/>
-          </a:fontRef>
-        </p:style>
-        <p:txBody>
-          <a:bodyPr rtlCol="0" anchor="ctr"/>
-          <a:lstStyle/>
-          <a:p>
-            <a:pPr algn="ctr"/>
-            <a:endParaRPr/>
-          </a:p>
-        </p:txBody>
-      </p:sp>
-      <p:sp>
-        <p:nvSpPr>
-          <p:cNvPr id="3" name="TextBox 2"/>
-          <p:cNvSpPr txBox="1"/>
-          <p:nvPr/>
-        </p:nvSpPr>
-        <p:spPr>
-          <a:xfrm>
-            <a:off x="502920" y="292608"/>
-            <a:ext cx="10058400" cy="457200"/>
-          </a:xfrm>
-          <a:prstGeom prst="rect">
-            <a:avLst/>
-          </a:prstGeom>
-          <a:noFill/>
-        </p:spPr>
-        <p:txBody>
-          <a:bodyPr wrap="square" anchor="t">
-            <a:spAutoFit/>
-          </a:bodyPr>
-          <a:lstStyle/>
-          <a:p>
-            <a:pPr algn="l"/>
-            <a:r>
-              <a:rPr sz="1500" b="1">
-                <a:solidFill>
-                  <a:srgbClr val="C9A227"/>
-                </a:solidFill>
-                <a:latin typeface="微軟正黑體"/>
-                <a:ea typeface="微軟正黑體"/>
-                <a:cs typeface="微軟正黑體"/>
-              </a:rPr>
-              <a:t>ITERATION｜敢刪，才是工程</a:t>
-            </a:r>
-          </a:p>
-        </p:txBody>
-      </p:sp>
-      <p:sp>
-        <p:nvSpPr>
-          <p:cNvPr id="4" name="TextBox 3"/>
-          <p:cNvSpPr txBox="1"/>
-          <p:nvPr/>
-        </p:nvSpPr>
-        <p:spPr>
-          <a:xfrm>
-            <a:off x="502920" y="603504"/>
-            <a:ext cx="11155680" cy="914400"/>
-          </a:xfrm>
-          <a:prstGeom prst="rect">
-            <a:avLst/>
-          </a:prstGeom>
-          <a:noFill/>
-        </p:spPr>
-        <p:txBody>
-          <a:bodyPr wrap="square" anchor="t">
-            <a:spAutoFit/>
-          </a:bodyPr>
-          <a:lstStyle/>
-          <a:p>
-            <a:pPr algn="l"/>
-            <a:r>
-              <a:rPr sz="3300" b="1">
-                <a:solidFill>
-                  <a:srgbClr val="33302B"/>
-                </a:solidFill>
-                <a:latin typeface="微軟正黑體"/>
-                <a:ea typeface="微軟正黑體"/>
-                <a:cs typeface="微軟正黑體"/>
-              </a:rPr>
-              <a:t>兩次關鍵迭代：都是為真實行為讓步</a:t>
-            </a:r>
-          </a:p>
-        </p:txBody>
-      </p:sp>
-      <p:sp>
-        <p:nvSpPr>
-          <p:cNvPr id="5" name="Rectangle 4"/>
-          <p:cNvSpPr/>
-          <p:nvPr/>
-        </p:nvSpPr>
-        <p:spPr>
-          <a:xfrm>
-            <a:off x="685800" y="1920240"/>
-            <a:ext cx="5349240" cy="3931920"/>
-          </a:xfrm>
-          <a:prstGeom prst="rect">
-            <a:avLst/>
-          </a:prstGeom>
-          <a:solidFill>
-            <a:srgbClr val="F8F4EC"/>
-          </a:solidFill>
-          <a:ln>
-            <a:noFill/>
-          </a:ln>
-          <a:effectLst/>
-        </p:spPr>
-        <p:style>
-          <a:lnRef idx="1">
-            <a:schemeClr val="accent1"/>
-          </a:lnRef>
-          <a:fillRef idx="3">
-            <a:schemeClr val="accent1"/>
-          </a:fillRef>
-          <a:effectRef idx="2">
-            <a:schemeClr val="accent1"/>
-          </a:effectRef>
-          <a:fontRef idx="minor">
-            <a:schemeClr val="lt1"/>
-          </a:fontRef>
-        </p:style>
-        <p:txBody>
-          <a:bodyPr rtlCol="0" anchor="ctr"/>
-          <a:lstStyle/>
-          <a:p>
-            <a:pPr algn="ctr"/>
-            <a:endParaRPr/>
-          </a:p>
-        </p:txBody>
-      </p:sp>
-      <p:sp>
-        <p:nvSpPr>
-          <p:cNvPr id="6" name="TextBox 5"/>
-          <p:cNvSpPr txBox="1"/>
-          <p:nvPr/>
-        </p:nvSpPr>
-        <p:spPr>
-          <a:xfrm>
-            <a:off x="960120" y="2194560"/>
-            <a:ext cx="4846320" cy="3383280"/>
-          </a:xfrm>
-          <a:prstGeom prst="rect">
-            <a:avLst/>
-          </a:prstGeom>
-          <a:noFill/>
-        </p:spPr>
-        <p:txBody>
-          <a:bodyPr wrap="square" anchor="t">
-            <a:spAutoFit/>
-          </a:bodyPr>
-          <a:lstStyle/>
-          <a:p>
-            <a:pPr algn="l"/>
-            <a:r>
-              <a:rPr sz="2400" b="1">
-                <a:solidFill>
-                  <a:srgbClr val="9E3B2F"/>
-                </a:solidFill>
-                <a:latin typeface="微軟正黑體"/>
-                <a:ea typeface="微軟正黑體"/>
-                <a:cs typeface="微軟正黑體"/>
-              </a:rPr>
-              <a:t>刪掉：磁力理香機構</a:t>
+              <a:t>改掉：縮口 → 漏斗大口</a:t>
             </a:r>
           </a:p>
           <a:p>
             <a:pPr algn="l"/>
             <a:endParaRPr sz="2400" b="1">
               <a:solidFill>
-                <a:srgbClr val="9E3B2F"/>
+                <a:srgbClr val="C9A227"/>
               </a:solidFill>
               <a:latin typeface="微軟正黑體"/>
               <a:ea typeface="微軟正黑體"/>
@@ -8267,7 +4604,7 @@
                 <a:ea typeface="微軟正黑體"/>
                 <a:cs typeface="微軟正黑體"/>
               </a:rPr>
-              <a:t>投入數週開發＋專利研議，但與信眾「隨手插進香灰」的真實行為不相容。</a:t>
+              <a:t>原罩頂縮口 96mm，插香要對準才進得去。</a:t>
             </a:r>
           </a:p>
           <a:p>
@@ -8292,138 +4629,6 @@
                 <a:ea typeface="微軟正黑體"/>
                 <a:cs typeface="微軟正黑體"/>
               </a:rPr>
-              <a:t>→ 2026-08 整組移除，資源集中在真正有效的抽排治理。</a:t>
-            </a:r>
-          </a:p>
-        </p:txBody>
-      </p:sp>
-      <p:sp>
-        <p:nvSpPr>
-          <p:cNvPr id="7" name="Rectangle 6"/>
-          <p:cNvSpPr/>
-          <p:nvPr/>
-        </p:nvSpPr>
-        <p:spPr>
-          <a:xfrm>
-            <a:off x="6263640" y="1920240"/>
-            <a:ext cx="5349240" cy="3931920"/>
-          </a:xfrm>
-          <a:prstGeom prst="rect">
-            <a:avLst/>
-          </a:prstGeom>
-          <a:solidFill>
-            <a:srgbClr val="F8F4EC"/>
-          </a:solidFill>
-          <a:ln>
-            <a:noFill/>
-          </a:ln>
-          <a:effectLst/>
-        </p:spPr>
-        <p:style>
-          <a:lnRef idx="1">
-            <a:schemeClr val="accent1"/>
-          </a:lnRef>
-          <a:fillRef idx="3">
-            <a:schemeClr val="accent1"/>
-          </a:fillRef>
-          <a:effectRef idx="2">
-            <a:schemeClr val="accent1"/>
-          </a:effectRef>
-          <a:fontRef idx="minor">
-            <a:schemeClr val="lt1"/>
-          </a:fontRef>
-        </p:style>
-        <p:txBody>
-          <a:bodyPr rtlCol="0" anchor="ctr"/>
-          <a:lstStyle/>
-          <a:p>
-            <a:pPr algn="ctr"/>
-            <a:endParaRPr/>
-          </a:p>
-        </p:txBody>
-      </p:sp>
-      <p:sp>
-        <p:nvSpPr>
-          <p:cNvPr id="8" name="TextBox 7"/>
-          <p:cNvSpPr txBox="1"/>
-          <p:nvPr/>
-        </p:nvSpPr>
-        <p:spPr>
-          <a:xfrm>
-            <a:off x="6537960" y="2194560"/>
-            <a:ext cx="4846320" cy="3383280"/>
-          </a:xfrm>
-          <a:prstGeom prst="rect">
-            <a:avLst/>
-          </a:prstGeom>
-          <a:noFill/>
-        </p:spPr>
-        <p:txBody>
-          <a:bodyPr wrap="square" anchor="t">
-            <a:spAutoFit/>
-          </a:bodyPr>
-          <a:lstStyle/>
-          <a:p>
-            <a:pPr algn="l"/>
-            <a:r>
-              <a:rPr sz="2400" b="1">
-                <a:solidFill>
-                  <a:srgbClr val="C9A227"/>
-                </a:solidFill>
-                <a:latin typeface="微軟正黑體"/>
-                <a:ea typeface="微軟正黑體"/>
-                <a:cs typeface="微軟正黑體"/>
-              </a:rPr>
-              <a:t>改掉：縮口 → 漏斗大口</a:t>
-            </a:r>
-          </a:p>
-          <a:p>
-            <a:pPr algn="l"/>
-            <a:endParaRPr sz="2400" b="1">
-              <a:solidFill>
-                <a:srgbClr val="C9A227"/>
-              </a:solidFill>
-              <a:latin typeface="微軟正黑體"/>
-              <a:ea typeface="微軟正黑體"/>
-              <a:cs typeface="微軟正黑體"/>
-            </a:endParaRPr>
-          </a:p>
-          <a:p>
-            <a:pPr algn="l"/>
-            <a:r>
-              <a:rPr sz="1800" b="0">
-                <a:solidFill>
-                  <a:srgbClr val="33302B"/>
-                </a:solidFill>
-                <a:latin typeface="微軟正黑體"/>
-                <a:ea typeface="微軟正黑體"/>
-                <a:cs typeface="微軟正黑體"/>
-              </a:rPr>
-              <a:t>原罩頂縮口 96mm，插香要對準才進得去。</a:t>
-            </a:r>
-          </a:p>
-          <a:p>
-            <a:pPr algn="l"/>
-            <a:endParaRPr sz="1800" b="0">
-              <a:solidFill>
-                <a:srgbClr val="33302B"/>
-              </a:solidFill>
-              <a:latin typeface="微軟正黑體"/>
-              <a:ea typeface="微軟正黑體"/>
-              <a:cs typeface="微軟正黑體"/>
-            </a:endParaRPr>
-          </a:p>
-          <a:p>
-            <a:pPr algn="l"/>
-            <a:r>
-              <a:rPr sz="1800" b="1">
-                <a:solidFill>
-                  <a:srgbClr val="33302B"/>
-                </a:solidFill>
-                <a:latin typeface="微軟正黑體"/>
-                <a:ea typeface="微軟正黑體"/>
-                <a:cs typeface="微軟正黑體"/>
-              </a:rPr>
               <a:t>→ 外擴成 180mm 向上大口：插香零門檻，倒印列印還免支撐。</a:t>
             </a:r>
           </a:p>
@@ -8474,7 +4679,7 @@
 </p:sld>
 </file>
 
-<file path=ppt/slides/slide9.xml><?xml version="1.0" encoding="utf-8"?>
+<file path=ppt/slides/slide11.xml><?xml version="1.0" encoding="utf-8"?>
 <p:sld xmlns:a="http://schemas.openxmlformats.org/drawingml/2006/main" xmlns:r="http://schemas.openxmlformats.org/officeDocument/2006/relationships" xmlns:p="http://schemas.openxmlformats.org/presentationml/2006/main">
   <p:cSld>
     <p:spTree>
@@ -8527,6 +4732,3923 @@
         <p14:creationId xmlns:p14="http://schemas.microsoft.com/office/powerpoint/2010/main" val="2437354475"/>
       </p:ext>
     </p:extLst>
+  </p:cSld>
+  <p:clrMapOvr>
+    <a:masterClrMapping/>
+  </p:clrMapOvr>
+</p:sld>
+</file>
+
+<file path=ppt/slides/slide12.xml><?xml version="1.0" encoding="utf-8"?>
+<p:sld xmlns:a="http://schemas.openxmlformats.org/drawingml/2006/main" xmlns:r="http://schemas.openxmlformats.org/officeDocument/2006/relationships" xmlns:p="http://schemas.openxmlformats.org/presentationml/2006/main">
+  <p:cSld>
+    <p:spTree>
+      <p:nvGrpSpPr>
+        <p:cNvPr id="1" name=""/>
+        <p:cNvGrpSpPr/>
+        <p:nvPr/>
+      </p:nvGrpSpPr>
+      <p:grpSpPr>
+        <a:xfrm>
+          <a:off x="0" y="0"/>
+          <a:ext cx="0" cy="0"/>
+          <a:chOff x="0" y="0"/>
+          <a:chExt cx="0" cy="0"/>
+        </a:xfrm>
+      </p:grpSpPr>
+      <p:sp>
+        <p:nvSpPr>
+          <p:cNvPr id="2" name="Rectangle 1"/>
+          <p:cNvSpPr/>
+          <p:nvPr/>
+        </p:nvSpPr>
+        <p:spPr>
+          <a:xfrm>
+            <a:off x="0" y="0"/>
+            <a:ext cx="164592" cy="6858000"/>
+          </a:xfrm>
+          <a:prstGeom prst="rect">
+            <a:avLst/>
+          </a:prstGeom>
+          <a:solidFill>
+            <a:srgbClr val="9E3B2F"/>
+          </a:solidFill>
+          <a:ln>
+            <a:noFill/>
+          </a:ln>
+          <a:effectLst/>
+        </p:spPr>
+        <p:style>
+          <a:lnRef idx="1">
+            <a:schemeClr val="accent1"/>
+          </a:lnRef>
+          <a:fillRef idx="3">
+            <a:schemeClr val="accent1"/>
+          </a:fillRef>
+          <a:effectRef idx="2">
+            <a:schemeClr val="accent1"/>
+          </a:effectRef>
+          <a:fontRef idx="minor">
+            <a:schemeClr val="lt1"/>
+          </a:fontRef>
+        </p:style>
+        <p:txBody>
+          <a:bodyPr rtlCol="0" anchor="ctr"/>
+          <a:lstStyle/>
+          <a:p>
+            <a:pPr algn="ctr"/>
+            <a:endParaRPr/>
+          </a:p>
+        </p:txBody>
+      </p:sp>
+      <p:sp>
+        <p:nvSpPr>
+          <p:cNvPr id="3" name="TextBox 2"/>
+          <p:cNvSpPr txBox="1"/>
+          <p:nvPr/>
+        </p:nvSpPr>
+        <p:spPr>
+          <a:xfrm>
+            <a:off x="502920" y="292608"/>
+            <a:ext cx="10058400" cy="457200"/>
+          </a:xfrm>
+          <a:prstGeom prst="rect">
+            <a:avLst/>
+          </a:prstGeom>
+          <a:noFill/>
+        </p:spPr>
+        <p:txBody>
+          <a:bodyPr wrap="square" anchor="t">
+            <a:spAutoFit/>
+          </a:bodyPr>
+          <a:lstStyle/>
+          <a:p>
+            <a:pPr algn="l"/>
+            <a:r>
+              <a:rPr sz="1500" b="1">
+                <a:solidFill>
+                  <a:srgbClr val="C9A227"/>
+                </a:solidFill>
+                <a:latin typeface="微軟正黑體"/>
+                <a:ea typeface="微軟正黑體"/>
+                <a:cs typeface="微軟正黑體"/>
+              </a:rPr>
+              <a:t>BUSINESS｜可負擔＋誘因對齊</a:t>
+            </a:r>
+          </a:p>
+        </p:txBody>
+      </p:sp>
+      <p:sp>
+        <p:nvSpPr>
+          <p:cNvPr id="4" name="TextBox 3"/>
+          <p:cNvSpPr txBox="1"/>
+          <p:nvPr/>
+        </p:nvSpPr>
+        <p:spPr>
+          <a:xfrm>
+            <a:off x="502920" y="603504"/>
+            <a:ext cx="11155680" cy="914400"/>
+          </a:xfrm>
+          <a:prstGeom prst="rect">
+            <a:avLst/>
+          </a:prstGeom>
+          <a:noFill/>
+        </p:spPr>
+        <p:txBody>
+          <a:bodyPr wrap="square" anchor="t">
+            <a:spAutoFit/>
+          </a:bodyPr>
+          <a:lstStyle/>
+          <a:p>
+            <a:pPr algn="l"/>
+            <a:r>
+              <a:rPr sz="3300" b="1">
+                <a:solidFill>
+                  <a:srgbClr val="33302B"/>
+                </a:solidFill>
+                <a:latin typeface="微軟正黑體"/>
+                <a:ea typeface="微軟正黑體"/>
+                <a:cs typeface="微軟正黑體"/>
+              </a:rPr>
+              <a:t>十年成本只要金爐的 1/8</a:t>
+            </a:r>
+          </a:p>
+        </p:txBody>
+      </p:sp>
+      <p:pic>
+        <p:nvPicPr>
+          <p:cNvPr id="5" name="Picture 4" descr="image9.png"/>
+          <p:cNvPicPr>
+            <a:picLocks noChangeAspect="1"/>
+          </p:cNvPicPr>
+          <p:nvPr/>
+        </p:nvPicPr>
+        <p:blipFill>
+          <a:blip r:embed="rId3"/>
+          <a:stretch>
+            <a:fillRect/>
+          </a:stretch>
+        </p:blipFill>
+        <p:spPr>
+          <a:xfrm>
+            <a:off x="502920" y="1783080"/>
+            <a:ext cx="7256899" cy="4572000"/>
+          </a:xfrm>
+          <a:prstGeom prst="rect">
+            <a:avLst/>
+          </a:prstGeom>
+        </p:spPr>
+      </p:pic>
+      <p:sp>
+        <p:nvSpPr>
+          <p:cNvPr id="6" name="TextBox 5"/>
+          <p:cNvSpPr txBox="1"/>
+          <p:nvPr/>
+        </p:nvSpPr>
+        <p:spPr>
+          <a:xfrm>
+            <a:off x="8092440" y="2103120"/>
+            <a:ext cx="3657600" cy="1463040"/>
+          </a:xfrm>
+          <a:prstGeom prst="rect">
+            <a:avLst/>
+          </a:prstGeom>
+          <a:noFill/>
+        </p:spPr>
+        <p:txBody>
+          <a:bodyPr wrap="square" anchor="t">
+            <a:spAutoFit/>
+          </a:bodyPr>
+          <a:lstStyle/>
+          <a:p>
+            <a:pPr algn="l"/>
+            <a:r>
+              <a:rPr sz="5800" b="1">
+                <a:solidFill>
+                  <a:srgbClr val="9E3B2F"/>
+                </a:solidFill>
+                <a:latin typeface="微軟正黑體"/>
+                <a:ea typeface="微軟正黑體"/>
+                <a:cs typeface="微軟正黑體"/>
+              </a:rPr>
+              <a:t>−87%</a:t>
+            </a:r>
+          </a:p>
+          <a:p>
+            <a:pPr algn="l"/>
+            <a:r>
+              <a:rPr sz="1700" b="0">
+                <a:solidFill>
+                  <a:srgbClr val="33302B"/>
+                </a:solidFill>
+                <a:latin typeface="微軟正黑體"/>
+                <a:ea typeface="微軟正黑體"/>
+                <a:cs typeface="微軟正黑體"/>
+              </a:rPr>
+              <a:t>十年 TCO vs 碳中和金爐</a:t>
+            </a:r>
+          </a:p>
+        </p:txBody>
+      </p:sp>
+      <p:sp>
+        <p:nvSpPr>
+          <p:cNvPr id="7" name="TextBox 6"/>
+          <p:cNvSpPr txBox="1"/>
+          <p:nvPr/>
+        </p:nvSpPr>
+        <p:spPr>
+          <a:xfrm>
+            <a:off x="8092440" y="3840480"/>
+            <a:ext cx="3657600" cy="2194560"/>
+          </a:xfrm>
+          <a:prstGeom prst="rect">
+            <a:avLst/>
+          </a:prstGeom>
+          <a:noFill/>
+        </p:spPr>
+        <p:txBody>
+          <a:bodyPr wrap="square" anchor="t">
+            <a:spAutoFit/>
+          </a:bodyPr>
+          <a:lstStyle/>
+          <a:p>
+            <a:pPr algn="l"/>
+            <a:r>
+              <a:rPr sz="1900" b="1">
+                <a:solidFill>
+                  <a:srgbClr val="33302B"/>
+                </a:solidFill>
+                <a:latin typeface="微軟正黑體"/>
+                <a:ea typeface="微軟正黑體"/>
+                <a:cs typeface="微軟正黑體"/>
+              </a:rPr>
+              <a:t>■ 設備＋年度訂閱制</a:t>
+            </a:r>
+          </a:p>
+          <a:p>
+            <a:pPr algn="l"/>
+            <a:r>
+              <a:rPr sz="1600" b="0">
+                <a:solidFill>
+                  <a:srgbClr val="33302B"/>
+                </a:solidFill>
+                <a:latin typeface="微軟正黑體"/>
+                <a:ea typeface="微軟正黑體"/>
+                <a:cs typeface="微軟正黑體"/>
+              </a:rPr>
+              <a:t>收入與廟宇空品綁定，誘因完全對齊</a:t>
+            </a:r>
+          </a:p>
+          <a:p>
+            <a:pPr algn="l"/>
+            <a:endParaRPr sz="1600" b="0">
+              <a:solidFill>
+                <a:srgbClr val="33302B"/>
+              </a:solidFill>
+              <a:latin typeface="微軟正黑體"/>
+              <a:ea typeface="微軟正黑體"/>
+              <a:cs typeface="微軟正黑體"/>
+            </a:endParaRPr>
+          </a:p>
+          <a:p>
+            <a:pPr algn="l"/>
+            <a:r>
+              <a:rPr sz="1900" b="1">
+                <a:solidFill>
+                  <a:srgbClr val="33302B"/>
+                </a:solidFill>
+                <a:latin typeface="微軟正黑體"/>
+                <a:ea typeface="微軟正黑體"/>
+                <a:cs typeface="微軟正黑體"/>
+              </a:rPr>
+              <a:t>■ TAM 1.2 萬座寺廟</a:t>
+            </a:r>
+          </a:p>
+          <a:p>
+            <a:pPr algn="l"/>
+            <a:r>
+              <a:rPr sz="1600" b="0">
+                <a:solidFill>
+                  <a:srgbClr val="33302B"/>
+                </a:solidFill>
+                <a:latin typeface="微軟正黑體"/>
+                <a:ea typeface="微軟正黑體"/>
+                <a:cs typeface="微軟正黑體"/>
+              </a:rPr>
+              <a:t>SOM 由聯誼會轄下廟宇由下而上試算</a:t>
+            </a:r>
+          </a:p>
+        </p:txBody>
+      </p:sp>
+    </p:spTree>
+  </p:cSld>
+  <p:clrMapOvr>
+    <a:masterClrMapping/>
+  </p:clrMapOvr>
+</p:sld>
+</file>
+
+<file path=ppt/slides/slide13.xml><?xml version="1.0" encoding="utf-8"?>
+<p:sld xmlns:a="http://schemas.openxmlformats.org/drawingml/2006/main" xmlns:r="http://schemas.openxmlformats.org/officeDocument/2006/relationships" xmlns:p="http://schemas.openxmlformats.org/presentationml/2006/main">
+  <p:cSld>
+    <p:spTree>
+      <p:nvGrpSpPr>
+        <p:cNvPr id="1" name=""/>
+        <p:cNvGrpSpPr/>
+        <p:nvPr/>
+      </p:nvGrpSpPr>
+      <p:grpSpPr>
+        <a:xfrm>
+          <a:off x="0" y="0"/>
+          <a:ext cx="0" cy="0"/>
+          <a:chOff x="0" y="0"/>
+          <a:chExt cx="0" cy="0"/>
+        </a:xfrm>
+      </p:grpSpPr>
+      <p:sp>
+        <p:nvSpPr>
+          <p:cNvPr id="2" name="Rectangle 1"/>
+          <p:cNvSpPr/>
+          <p:nvPr/>
+        </p:nvSpPr>
+        <p:spPr>
+          <a:xfrm>
+            <a:off x="0" y="0"/>
+            <a:ext cx="164592" cy="6858000"/>
+          </a:xfrm>
+          <a:prstGeom prst="rect">
+            <a:avLst/>
+          </a:prstGeom>
+          <a:solidFill>
+            <a:srgbClr val="9E3B2F"/>
+          </a:solidFill>
+          <a:ln>
+            <a:noFill/>
+          </a:ln>
+          <a:effectLst/>
+        </p:spPr>
+        <p:style>
+          <a:lnRef idx="1">
+            <a:schemeClr val="accent1"/>
+          </a:lnRef>
+          <a:fillRef idx="3">
+            <a:schemeClr val="accent1"/>
+          </a:fillRef>
+          <a:effectRef idx="2">
+            <a:schemeClr val="accent1"/>
+          </a:effectRef>
+          <a:fontRef idx="minor">
+            <a:schemeClr val="lt1"/>
+          </a:fontRef>
+        </p:style>
+        <p:txBody>
+          <a:bodyPr rtlCol="0" anchor="ctr"/>
+          <a:lstStyle/>
+          <a:p>
+            <a:pPr algn="ctr"/>
+            <a:endParaRPr/>
+          </a:p>
+        </p:txBody>
+      </p:sp>
+      <p:sp>
+        <p:nvSpPr>
+          <p:cNvPr id="3" name="TextBox 2"/>
+          <p:cNvSpPr txBox="1"/>
+          <p:nvPr/>
+        </p:nvSpPr>
+        <p:spPr>
+          <a:xfrm>
+            <a:off x="502920" y="292608"/>
+            <a:ext cx="10058400" cy="457200"/>
+          </a:xfrm>
+          <a:prstGeom prst="rect">
+            <a:avLst/>
+          </a:prstGeom>
+          <a:noFill/>
+        </p:spPr>
+        <p:txBody>
+          <a:bodyPr wrap="square" anchor="t">
+            <a:spAutoFit/>
+          </a:bodyPr>
+          <a:lstStyle/>
+          <a:p>
+            <a:pPr algn="l"/>
+            <a:r>
+              <a:rPr sz="1500" b="1">
+                <a:solidFill>
+                  <a:srgbClr val="C9A227"/>
+                </a:solidFill>
+                <a:latin typeface="微軟正黑體"/>
+                <a:ea typeface="微軟正黑體"/>
+                <a:cs typeface="微軟正黑體"/>
+              </a:rPr>
+              <a:t>IMPACT &amp; NEXT｜影響與路線</a:t>
+            </a:r>
+          </a:p>
+        </p:txBody>
+      </p:sp>
+      <p:sp>
+        <p:nvSpPr>
+          <p:cNvPr id="4" name="TextBox 3"/>
+          <p:cNvSpPr txBox="1"/>
+          <p:nvPr/>
+        </p:nvSpPr>
+        <p:spPr>
+          <a:xfrm>
+            <a:off x="502920" y="603504"/>
+            <a:ext cx="11155680" cy="914400"/>
+          </a:xfrm>
+          <a:prstGeom prst="rect">
+            <a:avLst/>
+          </a:prstGeom>
+          <a:noFill/>
+        </p:spPr>
+        <p:txBody>
+          <a:bodyPr wrap="square" anchor="t">
+            <a:spAutoFit/>
+          </a:bodyPr>
+          <a:lstStyle/>
+          <a:p>
+            <a:pPr algn="l"/>
+            <a:r>
+              <a:rPr sz="3300" b="1">
+                <a:solidFill>
+                  <a:srgbClr val="33302B"/>
+                </a:solidFill>
+                <a:latin typeface="微軟正黑體"/>
+                <a:ea typeface="微軟正黑體"/>
+                <a:cs typeface="微軟正黑體"/>
+              </a:rPr>
+              <a:t>每項主張配一個可量測指標</a:t>
+            </a:r>
+          </a:p>
+        </p:txBody>
+      </p:sp>
+      <p:pic>
+        <p:nvPicPr>
+          <p:cNvPr id="5" name="Picture 4" descr="image14.png"/>
+          <p:cNvPicPr>
+            <a:picLocks noChangeAspect="1"/>
+          </p:cNvPicPr>
+          <p:nvPr/>
+        </p:nvPicPr>
+        <p:blipFill>
+          <a:blip r:embed="rId3"/>
+          <a:stretch>
+            <a:fillRect/>
+          </a:stretch>
+        </p:blipFill>
+        <p:spPr>
+          <a:xfrm>
+            <a:off x="502920" y="1920240"/>
+            <a:ext cx="6949440" cy="3429593"/>
+          </a:xfrm>
+          <a:prstGeom prst="rect">
+            <a:avLst/>
+          </a:prstGeom>
+        </p:spPr>
+      </p:pic>
+      <p:sp>
+        <p:nvSpPr>
+          <p:cNvPr id="6" name="Rectangle 5"/>
+          <p:cNvSpPr/>
+          <p:nvPr/>
+        </p:nvSpPr>
+        <p:spPr>
+          <a:xfrm>
+            <a:off x="7772400" y="1920240"/>
+            <a:ext cx="3931920" cy="1188720"/>
+          </a:xfrm>
+          <a:prstGeom prst="rect">
+            <a:avLst/>
+          </a:prstGeom>
+          <a:solidFill>
+            <a:srgbClr val="F8F4EC"/>
+          </a:solidFill>
+          <a:ln>
+            <a:noFill/>
+          </a:ln>
+          <a:effectLst/>
+        </p:spPr>
+        <p:style>
+          <a:lnRef idx="1">
+            <a:schemeClr val="accent1"/>
+          </a:lnRef>
+          <a:fillRef idx="3">
+            <a:schemeClr val="accent1"/>
+          </a:fillRef>
+          <a:effectRef idx="2">
+            <a:schemeClr val="accent1"/>
+          </a:effectRef>
+          <a:fontRef idx="minor">
+            <a:schemeClr val="lt1"/>
+          </a:fontRef>
+        </p:style>
+        <p:txBody>
+          <a:bodyPr rtlCol="0" anchor="ctr"/>
+          <a:lstStyle/>
+          <a:p>
+            <a:pPr algn="ctr"/>
+            <a:endParaRPr/>
+          </a:p>
+        </p:txBody>
+      </p:sp>
+      <p:sp>
+        <p:nvSpPr>
+          <p:cNvPr id="7" name="TextBox 6"/>
+          <p:cNvSpPr txBox="1"/>
+          <p:nvPr/>
+        </p:nvSpPr>
+        <p:spPr>
+          <a:xfrm>
+            <a:off x="7955279" y="2084832"/>
+            <a:ext cx="640080" cy="822960"/>
+          </a:xfrm>
+          <a:prstGeom prst="rect">
+            <a:avLst/>
+          </a:prstGeom>
+          <a:noFill/>
+        </p:spPr>
+        <p:txBody>
+          <a:bodyPr wrap="square" anchor="t">
+            <a:spAutoFit/>
+          </a:bodyPr>
+          <a:lstStyle/>
+          <a:p>
+            <a:pPr algn="l"/>
+            <a:r>
+              <a:rPr sz="3000" b="1">
+                <a:solidFill>
+                  <a:srgbClr val="C9A227"/>
+                </a:solidFill>
+                <a:latin typeface="微軟正黑體"/>
+                <a:ea typeface="微軟正黑體"/>
+                <a:cs typeface="微軟正黑體"/>
+              </a:rPr>
+              <a:t>①</a:t>
+            </a:r>
+          </a:p>
+        </p:txBody>
+      </p:sp>
+      <p:sp>
+        <p:nvSpPr>
+          <p:cNvPr id="8" name="TextBox 7"/>
+          <p:cNvSpPr txBox="1"/>
+          <p:nvPr/>
+        </p:nvSpPr>
+        <p:spPr>
+          <a:xfrm>
+            <a:off x="8641080" y="2029968"/>
+            <a:ext cx="3017520" cy="457200"/>
+          </a:xfrm>
+          <a:prstGeom prst="rect">
+            <a:avLst/>
+          </a:prstGeom>
+          <a:noFill/>
+        </p:spPr>
+        <p:txBody>
+          <a:bodyPr wrap="square" anchor="t">
+            <a:spAutoFit/>
+          </a:bodyPr>
+          <a:lstStyle/>
+          <a:p>
+            <a:pPr algn="l"/>
+            <a:r>
+              <a:rPr sz="2000" b="1">
+                <a:solidFill>
+                  <a:srgbClr val="33302B"/>
+                </a:solidFill>
+                <a:latin typeface="微軟正黑體"/>
+                <a:ea typeface="微軟正黑體"/>
+                <a:cs typeface="微軟正黑體"/>
+              </a:rPr>
+              <a:t>示範試點</a:t>
+            </a:r>
+          </a:p>
+        </p:txBody>
+      </p:sp>
+      <p:sp>
+        <p:nvSpPr>
+          <p:cNvPr id="9" name="TextBox 8"/>
+          <p:cNvSpPr txBox="1"/>
+          <p:nvPr/>
+        </p:nvSpPr>
+        <p:spPr>
+          <a:xfrm>
+            <a:off x="8641080" y="2450592"/>
+            <a:ext cx="3017520" cy="640080"/>
+          </a:xfrm>
+          <a:prstGeom prst="rect">
+            <a:avLst/>
+          </a:prstGeom>
+          <a:noFill/>
+        </p:spPr>
+        <p:txBody>
+          <a:bodyPr wrap="square" anchor="t">
+            <a:spAutoFit/>
+          </a:bodyPr>
+          <a:lstStyle/>
+          <a:p>
+            <a:pPr algn="l"/>
+            <a:r>
+              <a:rPr sz="1400" b="0">
+                <a:solidFill>
+                  <a:srgbClr val="8A8377"/>
+                </a:solidFill>
+                <a:latin typeface="微軟正黑體"/>
+                <a:ea typeface="微軟正黑體"/>
+                <a:cs typeface="微軟正黑體"/>
+              </a:rPr>
+              <a:t>一座合作廟宇
+公開實測數據</a:t>
+            </a:r>
+          </a:p>
+        </p:txBody>
+      </p:sp>
+      <p:sp>
+        <p:nvSpPr>
+          <p:cNvPr id="10" name="Rectangle 9"/>
+          <p:cNvSpPr/>
+          <p:nvPr/>
+        </p:nvSpPr>
+        <p:spPr>
+          <a:xfrm>
+            <a:off x="7772400" y="3337560"/>
+            <a:ext cx="3931920" cy="1188720"/>
+          </a:xfrm>
+          <a:prstGeom prst="rect">
+            <a:avLst/>
+          </a:prstGeom>
+          <a:solidFill>
+            <a:srgbClr val="F8F4EC"/>
+          </a:solidFill>
+          <a:ln>
+            <a:noFill/>
+          </a:ln>
+          <a:effectLst/>
+        </p:spPr>
+        <p:style>
+          <a:lnRef idx="1">
+            <a:schemeClr val="accent1"/>
+          </a:lnRef>
+          <a:fillRef idx="3">
+            <a:schemeClr val="accent1"/>
+          </a:fillRef>
+          <a:effectRef idx="2">
+            <a:schemeClr val="accent1"/>
+          </a:effectRef>
+          <a:fontRef idx="minor">
+            <a:schemeClr val="lt1"/>
+          </a:fontRef>
+        </p:style>
+        <p:txBody>
+          <a:bodyPr rtlCol="0" anchor="ctr"/>
+          <a:lstStyle/>
+          <a:p>
+            <a:pPr algn="ctr"/>
+            <a:endParaRPr/>
+          </a:p>
+        </p:txBody>
+      </p:sp>
+      <p:sp>
+        <p:nvSpPr>
+          <p:cNvPr id="11" name="TextBox 10"/>
+          <p:cNvSpPr txBox="1"/>
+          <p:nvPr/>
+        </p:nvSpPr>
+        <p:spPr>
+          <a:xfrm>
+            <a:off x="7955279" y="3502152"/>
+            <a:ext cx="640080" cy="822960"/>
+          </a:xfrm>
+          <a:prstGeom prst="rect">
+            <a:avLst/>
+          </a:prstGeom>
+          <a:noFill/>
+        </p:spPr>
+        <p:txBody>
+          <a:bodyPr wrap="square" anchor="t">
+            <a:spAutoFit/>
+          </a:bodyPr>
+          <a:lstStyle/>
+          <a:p>
+            <a:pPr algn="l"/>
+            <a:r>
+              <a:rPr sz="3000" b="1">
+                <a:solidFill>
+                  <a:srgbClr val="C9A227"/>
+                </a:solidFill>
+                <a:latin typeface="微軟正黑體"/>
+                <a:ea typeface="微軟正黑體"/>
+                <a:cs typeface="微軟正黑體"/>
+              </a:rPr>
+              <a:t>②</a:t>
+            </a:r>
+          </a:p>
+        </p:txBody>
+      </p:sp>
+      <p:sp>
+        <p:nvSpPr>
+          <p:cNvPr id="12" name="TextBox 11"/>
+          <p:cNvSpPr txBox="1"/>
+          <p:nvPr/>
+        </p:nvSpPr>
+        <p:spPr>
+          <a:xfrm>
+            <a:off x="8641080" y="3447288"/>
+            <a:ext cx="3017520" cy="457200"/>
+          </a:xfrm>
+          <a:prstGeom prst="rect">
+            <a:avLst/>
+          </a:prstGeom>
+          <a:noFill/>
+        </p:spPr>
+        <p:txBody>
+          <a:bodyPr wrap="square" anchor="t">
+            <a:spAutoFit/>
+          </a:bodyPr>
+          <a:lstStyle/>
+          <a:p>
+            <a:pPr algn="l"/>
+            <a:r>
+              <a:rPr sz="2000" b="1">
+                <a:solidFill>
+                  <a:srgbClr val="33302B"/>
+                </a:solidFill>
+                <a:latin typeface="微軟正黑體"/>
+                <a:ea typeface="微軟正黑體"/>
+                <a:cs typeface="微軟正黑體"/>
+              </a:rPr>
+              <a:t>口碑擴散</a:t>
+            </a:r>
+          </a:p>
+        </p:txBody>
+      </p:sp>
+      <p:sp>
+        <p:nvSpPr>
+          <p:cNvPr id="13" name="TextBox 12"/>
+          <p:cNvSpPr txBox="1"/>
+          <p:nvPr/>
+        </p:nvSpPr>
+        <p:spPr>
+          <a:xfrm>
+            <a:off x="8641080" y="3867912"/>
+            <a:ext cx="3017520" cy="640080"/>
+          </a:xfrm>
+          <a:prstGeom prst="rect">
+            <a:avLst/>
+          </a:prstGeom>
+          <a:noFill/>
+        </p:spPr>
+        <p:txBody>
+          <a:bodyPr wrap="square" anchor="t">
+            <a:spAutoFit/>
+          </a:bodyPr>
+          <a:lstStyle/>
+          <a:p>
+            <a:pPr algn="l"/>
+            <a:r>
+              <a:rPr sz="1400" b="0">
+                <a:solidFill>
+                  <a:srgbClr val="8A8377"/>
+                </a:solidFill>
+                <a:latin typeface="微軟正黑體"/>
+                <a:ea typeface="微軟正黑體"/>
+                <a:cs typeface="微軟正黑體"/>
+              </a:rPr>
+              <a:t>聯誼會通路
+首批付費導入</a:t>
+            </a:r>
+          </a:p>
+        </p:txBody>
+      </p:sp>
+      <p:sp>
+        <p:nvSpPr>
+          <p:cNvPr id="14" name="Rectangle 13"/>
+          <p:cNvSpPr/>
+          <p:nvPr/>
+        </p:nvSpPr>
+        <p:spPr>
+          <a:xfrm>
+            <a:off x="7772400" y="4754880"/>
+            <a:ext cx="3931920" cy="1188720"/>
+          </a:xfrm>
+          <a:prstGeom prst="rect">
+            <a:avLst/>
+          </a:prstGeom>
+          <a:solidFill>
+            <a:srgbClr val="F8F4EC"/>
+          </a:solidFill>
+          <a:ln>
+            <a:noFill/>
+          </a:ln>
+          <a:effectLst/>
+        </p:spPr>
+        <p:style>
+          <a:lnRef idx="1">
+            <a:schemeClr val="accent1"/>
+          </a:lnRef>
+          <a:fillRef idx="3">
+            <a:schemeClr val="accent1"/>
+          </a:fillRef>
+          <a:effectRef idx="2">
+            <a:schemeClr val="accent1"/>
+          </a:effectRef>
+          <a:fontRef idx="minor">
+            <a:schemeClr val="lt1"/>
+          </a:fontRef>
+        </p:style>
+        <p:txBody>
+          <a:bodyPr rtlCol="0" anchor="ctr"/>
+          <a:lstStyle/>
+          <a:p>
+            <a:pPr algn="ctr"/>
+            <a:endParaRPr/>
+          </a:p>
+        </p:txBody>
+      </p:sp>
+      <p:sp>
+        <p:nvSpPr>
+          <p:cNvPr id="15" name="TextBox 14"/>
+          <p:cNvSpPr txBox="1"/>
+          <p:nvPr/>
+        </p:nvSpPr>
+        <p:spPr>
+          <a:xfrm>
+            <a:off x="7955279" y="4919472"/>
+            <a:ext cx="640080" cy="822960"/>
+          </a:xfrm>
+          <a:prstGeom prst="rect">
+            <a:avLst/>
+          </a:prstGeom>
+          <a:noFill/>
+        </p:spPr>
+        <p:txBody>
+          <a:bodyPr wrap="square" anchor="t">
+            <a:spAutoFit/>
+          </a:bodyPr>
+          <a:lstStyle/>
+          <a:p>
+            <a:pPr algn="l"/>
+            <a:r>
+              <a:rPr sz="3000" b="1">
+                <a:solidFill>
+                  <a:srgbClr val="C9A227"/>
+                </a:solidFill>
+                <a:latin typeface="微軟正黑體"/>
+                <a:ea typeface="微軟正黑體"/>
+                <a:cs typeface="微軟正黑體"/>
+              </a:rPr>
+              <a:t>③</a:t>
+            </a:r>
+          </a:p>
+        </p:txBody>
+      </p:sp>
+      <p:sp>
+        <p:nvSpPr>
+          <p:cNvPr id="16" name="TextBox 15"/>
+          <p:cNvSpPr txBox="1"/>
+          <p:nvPr/>
+        </p:nvSpPr>
+        <p:spPr>
+          <a:xfrm>
+            <a:off x="8641080" y="4864608"/>
+            <a:ext cx="3017520" cy="457200"/>
+          </a:xfrm>
+          <a:prstGeom prst="rect">
+            <a:avLst/>
+          </a:prstGeom>
+          <a:noFill/>
+        </p:spPr>
+        <p:txBody>
+          <a:bodyPr wrap="square" anchor="t">
+            <a:spAutoFit/>
+          </a:bodyPr>
+          <a:lstStyle/>
+          <a:p>
+            <a:pPr algn="l"/>
+            <a:r>
+              <a:rPr sz="2000" b="1">
+                <a:solidFill>
+                  <a:srgbClr val="33302B"/>
+                </a:solidFill>
+                <a:latin typeface="微軟正黑體"/>
+                <a:ea typeface="微軟正黑體"/>
+                <a:cs typeface="微軟正黑體"/>
+              </a:rPr>
+              <a:t>跨域移植</a:t>
+            </a:r>
+          </a:p>
+        </p:txBody>
+      </p:sp>
+      <p:sp>
+        <p:nvSpPr>
+          <p:cNvPr id="17" name="TextBox 16"/>
+          <p:cNvSpPr txBox="1"/>
+          <p:nvPr/>
+        </p:nvSpPr>
+        <p:spPr>
+          <a:xfrm>
+            <a:off x="8641080" y="5285232"/>
+            <a:ext cx="3017520" cy="640080"/>
+          </a:xfrm>
+          <a:prstGeom prst="rect">
+            <a:avLst/>
+          </a:prstGeom>
+          <a:noFill/>
+        </p:spPr>
+        <p:txBody>
+          <a:bodyPr wrap="square" anchor="t">
+            <a:spAutoFit/>
+          </a:bodyPr>
+          <a:lstStyle/>
+          <a:p>
+            <a:pPr algn="l"/>
+            <a:r>
+              <a:rPr sz="1400" b="0">
+                <a:solidFill>
+                  <a:srgbClr val="8A8377"/>
+                </a:solidFill>
+                <a:latin typeface="微軟正黑體"/>
+                <a:ea typeface="微軟正黑體"/>
+                <a:cs typeface="微軟正黑體"/>
+              </a:rPr>
+              <a:t>餐飲油煙・密閉空品
+更大市場</a:t>
+            </a:r>
+          </a:p>
+        </p:txBody>
+      </p:sp>
+    </p:spTree>
+  </p:cSld>
+  <p:clrMapOvr>
+    <a:masterClrMapping/>
+  </p:clrMapOvr>
+</p:sld>
+</file>
+
+<file path=ppt/slides/slide14.xml><?xml version="1.0" encoding="utf-8"?>
+<p:sld xmlns:a="http://schemas.openxmlformats.org/drawingml/2006/main" xmlns:r="http://schemas.openxmlformats.org/officeDocument/2006/relationships" xmlns:p="http://schemas.openxmlformats.org/presentationml/2006/main">
+  <p:cSld>
+    <p:spTree>
+      <p:nvGrpSpPr>
+        <p:cNvPr id="1" name=""/>
+        <p:cNvGrpSpPr/>
+        <p:nvPr/>
+      </p:nvGrpSpPr>
+      <p:grpSpPr>
+        <a:xfrm>
+          <a:off x="0" y="0"/>
+          <a:ext cx="0" cy="0"/>
+          <a:chOff x="0" y="0"/>
+          <a:chExt cx="0" cy="0"/>
+        </a:xfrm>
+      </p:grpSpPr>
+      <p:sp>
+        <p:nvSpPr>
+          <p:cNvPr id="2" name="Rectangle 1"/>
+          <p:cNvSpPr/>
+          <p:nvPr/>
+        </p:nvSpPr>
+        <p:spPr>
+          <a:xfrm>
+            <a:off x="0" y="0"/>
+            <a:ext cx="12191695" cy="6858000"/>
+          </a:xfrm>
+          <a:prstGeom prst="rect">
+            <a:avLst/>
+          </a:prstGeom>
+          <a:solidFill>
+            <a:srgbClr val="2E2A26"/>
+          </a:solidFill>
+          <a:ln>
+            <a:noFill/>
+          </a:ln>
+          <a:effectLst/>
+        </p:spPr>
+        <p:style>
+          <a:lnRef idx="1">
+            <a:schemeClr val="accent1"/>
+          </a:lnRef>
+          <a:fillRef idx="3">
+            <a:schemeClr val="accent1"/>
+          </a:fillRef>
+          <a:effectRef idx="2">
+            <a:schemeClr val="accent1"/>
+          </a:effectRef>
+          <a:fontRef idx="minor">
+            <a:schemeClr val="lt1"/>
+          </a:fontRef>
+        </p:style>
+        <p:txBody>
+          <a:bodyPr rtlCol="0" anchor="ctr"/>
+          <a:lstStyle/>
+          <a:p>
+            <a:pPr algn="ctr"/>
+            <a:endParaRPr/>
+          </a:p>
+        </p:txBody>
+      </p:sp>
+      <p:sp>
+        <p:nvSpPr>
+          <p:cNvPr id="3" name="TextBox 2"/>
+          <p:cNvSpPr txBox="1"/>
+          <p:nvPr/>
+        </p:nvSpPr>
+        <p:spPr>
+          <a:xfrm>
+            <a:off x="914400" y="2148840"/>
+            <a:ext cx="10332720" cy="1737360"/>
+          </a:xfrm>
+          <a:prstGeom prst="rect">
+            <a:avLst/>
+          </a:prstGeom>
+          <a:noFill/>
+        </p:spPr>
+        <p:txBody>
+          <a:bodyPr wrap="square" anchor="t">
+            <a:spAutoFit/>
+          </a:bodyPr>
+          <a:lstStyle/>
+          <a:p>
+            <a:pPr algn="ctr"/>
+            <a:r>
+              <a:rPr sz="4400" b="1">
+                <a:solidFill>
+                  <a:srgbClr val="FFFFFF"/>
+                </a:solidFill>
+                <a:latin typeface="微軟正黑體"/>
+                <a:ea typeface="微軟正黑體"/>
+                <a:cs typeface="微軟正黑體"/>
+              </a:rPr>
+              <a:t>香照燒，神明照拜，煙不見了。</a:t>
+            </a:r>
+          </a:p>
+        </p:txBody>
+      </p:sp>
+      <p:sp>
+        <p:nvSpPr>
+          <p:cNvPr id="4" name="TextBox 3"/>
+          <p:cNvSpPr txBox="1"/>
+          <p:nvPr/>
+        </p:nvSpPr>
+        <p:spPr>
+          <a:xfrm>
+            <a:off x="914400" y="3566160"/>
+            <a:ext cx="10332720" cy="914400"/>
+          </a:xfrm>
+          <a:prstGeom prst="rect">
+            <a:avLst/>
+          </a:prstGeom>
+          <a:noFill/>
+        </p:spPr>
+        <p:txBody>
+          <a:bodyPr wrap="square" anchor="t">
+            <a:spAutoFit/>
+          </a:bodyPr>
+          <a:lstStyle/>
+          <a:p>
+            <a:pPr algn="ctr"/>
+            <a:r>
+              <a:rPr sz="3000" b="0">
+                <a:solidFill>
+                  <a:srgbClr val="E8C86A"/>
+                </a:solidFill>
+                <a:latin typeface="微軟正黑體"/>
+                <a:ea typeface="微軟正黑體"/>
+                <a:cs typeface="微軟正黑體"/>
+              </a:rPr>
+              <a:t>健康跟信仰，不用二選一。</a:t>
+            </a:r>
+          </a:p>
+        </p:txBody>
+      </p:sp>
+      <p:sp>
+        <p:nvSpPr>
+          <p:cNvPr id="5" name="TextBox 4"/>
+          <p:cNvSpPr txBox="1"/>
+          <p:nvPr/>
+        </p:nvSpPr>
+        <p:spPr>
+          <a:xfrm>
+            <a:off x="914400" y="5760720"/>
+            <a:ext cx="10332720" cy="548640"/>
+          </a:xfrm>
+          <a:prstGeom prst="rect">
+            <a:avLst/>
+          </a:prstGeom>
+          <a:noFill/>
+        </p:spPr>
+        <p:txBody>
+          <a:bodyPr wrap="square" anchor="t">
+            <a:spAutoFit/>
+          </a:bodyPr>
+          <a:lstStyle/>
+          <a:p>
+            <a:pPr algn="ctr"/>
+            <a:r>
+              <a:rPr sz="1800" b="0">
+                <a:solidFill>
+                  <a:srgbClr val="AFAFAF"/>
+                </a:solidFill>
+                <a:latin typeface="微軟正黑體"/>
+                <a:ea typeface="微軟正黑體"/>
+                <a:cs typeface="微軟正黑體"/>
+              </a:rPr>
+              <a:t>智慧香爐｜有拜有包庇｜謝謝聆聽</a:t>
+            </a:r>
+          </a:p>
+        </p:txBody>
+      </p:sp>
+    </p:spTree>
+  </p:cSld>
+  <p:clrMapOvr>
+    <a:masterClrMapping/>
+  </p:clrMapOvr>
+</p:sld>
+</file>
+
+<file path=ppt/slides/slide2.xml><?xml version="1.0" encoding="utf-8"?>
+<p:sld xmlns:a="http://schemas.openxmlformats.org/drawingml/2006/main" xmlns:r="http://schemas.openxmlformats.org/officeDocument/2006/relationships" xmlns:p="http://schemas.openxmlformats.org/presentationml/2006/main">
+  <p:cSld>
+    <p:spTree>
+      <p:nvGrpSpPr>
+        <p:cNvPr id="1" name=""/>
+        <p:cNvGrpSpPr/>
+        <p:nvPr/>
+      </p:nvGrpSpPr>
+      <p:grpSpPr>
+        <a:xfrm>
+          <a:off x="0" y="0"/>
+          <a:ext cx="0" cy="0"/>
+          <a:chOff x="0" y="0"/>
+          <a:chExt cx="0" cy="0"/>
+        </a:xfrm>
+      </p:grpSpPr>
+      <p:sp>
+        <p:nvSpPr>
+          <p:cNvPr id="2" name="Rectangle 1"/>
+          <p:cNvSpPr/>
+          <p:nvPr/>
+        </p:nvSpPr>
+        <p:spPr>
+          <a:xfrm>
+            <a:off x="0" y="0"/>
+            <a:ext cx="164592" cy="6858000"/>
+          </a:xfrm>
+          <a:prstGeom prst="rect">
+            <a:avLst/>
+          </a:prstGeom>
+          <a:solidFill>
+            <a:srgbClr val="9E3B2F"/>
+          </a:solidFill>
+          <a:ln>
+            <a:noFill/>
+          </a:ln>
+          <a:effectLst/>
+        </p:spPr>
+        <p:style>
+          <a:lnRef idx="1">
+            <a:schemeClr val="accent1"/>
+          </a:lnRef>
+          <a:fillRef idx="3">
+            <a:schemeClr val="accent1"/>
+          </a:fillRef>
+          <a:effectRef idx="2">
+            <a:schemeClr val="accent1"/>
+          </a:effectRef>
+          <a:fontRef idx="minor">
+            <a:schemeClr val="lt1"/>
+          </a:fontRef>
+        </p:style>
+        <p:txBody>
+          <a:bodyPr rtlCol="0" anchor="ctr"/>
+          <a:lstStyle/>
+          <a:p>
+            <a:pPr algn="ctr"/>
+            <a:endParaRPr/>
+          </a:p>
+        </p:txBody>
+      </p:sp>
+      <p:sp>
+        <p:nvSpPr>
+          <p:cNvPr id="3" name="TextBox 2"/>
+          <p:cNvSpPr txBox="1"/>
+          <p:nvPr/>
+        </p:nvSpPr>
+        <p:spPr>
+          <a:xfrm>
+            <a:off x="502920" y="292608"/>
+            <a:ext cx="10058400" cy="457200"/>
+          </a:xfrm>
+          <a:prstGeom prst="rect">
+            <a:avLst/>
+          </a:prstGeom>
+          <a:noFill/>
+        </p:spPr>
+        <p:txBody>
+          <a:bodyPr wrap="square" anchor="t">
+            <a:spAutoFit/>
+          </a:bodyPr>
+          <a:lstStyle/>
+          <a:p>
+            <a:pPr algn="l"/>
+            <a:r>
+              <a:rPr sz="1500" b="1">
+                <a:solidFill>
+                  <a:srgbClr val="C9A227"/>
+                </a:solidFill>
+                <a:latin typeface="微軟正黑體"/>
+                <a:ea typeface="微軟正黑體"/>
+                <a:cs typeface="微軟正黑體"/>
+              </a:rPr>
+              <a:t>OPENING｜結論先行</a:t>
+            </a:r>
+          </a:p>
+        </p:txBody>
+      </p:sp>
+      <p:sp>
+        <p:nvSpPr>
+          <p:cNvPr id="4" name="TextBox 3"/>
+          <p:cNvSpPr txBox="1"/>
+          <p:nvPr/>
+        </p:nvSpPr>
+        <p:spPr>
+          <a:xfrm>
+            <a:off x="502920" y="603504"/>
+            <a:ext cx="11155680" cy="914400"/>
+          </a:xfrm>
+          <a:prstGeom prst="rect">
+            <a:avLst/>
+          </a:prstGeom>
+          <a:noFill/>
+        </p:spPr>
+        <p:txBody>
+          <a:bodyPr wrap="square" anchor="t">
+            <a:spAutoFit/>
+          </a:bodyPr>
+          <a:lstStyle/>
+          <a:p>
+            <a:pPr algn="l"/>
+            <a:r>
+              <a:rPr sz="3300" b="1">
+                <a:solidFill>
+                  <a:srgbClr val="33302B"/>
+                </a:solidFill>
+                <a:latin typeface="微軟正黑體"/>
+                <a:ea typeface="微軟正黑體"/>
+                <a:cs typeface="微軟正黑體"/>
+              </a:rPr>
+              <a:t>我們讓香繼續燒，但煙不再害人。</a:t>
+            </a:r>
+          </a:p>
+        </p:txBody>
+      </p:sp>
+      <p:sp>
+        <p:nvSpPr>
+          <p:cNvPr id="5" name="Rectangle 4"/>
+          <p:cNvSpPr/>
+          <p:nvPr/>
+        </p:nvSpPr>
+        <p:spPr>
+          <a:xfrm>
+            <a:off x="685800" y="2011680"/>
+            <a:ext cx="3383280" cy="3291840"/>
+          </a:xfrm>
+          <a:prstGeom prst="rect">
+            <a:avLst/>
+          </a:prstGeom>
+          <a:solidFill>
+            <a:srgbClr val="F8F4EC"/>
+          </a:solidFill>
+          <a:ln>
+            <a:noFill/>
+          </a:ln>
+          <a:effectLst/>
+        </p:spPr>
+        <p:style>
+          <a:lnRef idx="1">
+            <a:schemeClr val="accent1"/>
+          </a:lnRef>
+          <a:fillRef idx="3">
+            <a:schemeClr val="accent1"/>
+          </a:fillRef>
+          <a:effectRef idx="2">
+            <a:schemeClr val="accent1"/>
+          </a:effectRef>
+          <a:fontRef idx="minor">
+            <a:schemeClr val="lt1"/>
+          </a:fontRef>
+        </p:style>
+        <p:txBody>
+          <a:bodyPr rtlCol="0" anchor="ctr"/>
+          <a:lstStyle/>
+          <a:p>
+            <a:pPr algn="ctr"/>
+            <a:endParaRPr/>
+          </a:p>
+        </p:txBody>
+      </p:sp>
+      <p:sp>
+        <p:nvSpPr>
+          <p:cNvPr id="6" name="TextBox 5"/>
+          <p:cNvSpPr txBox="1"/>
+          <p:nvPr/>
+        </p:nvSpPr>
+        <p:spPr>
+          <a:xfrm>
+            <a:off x="685800" y="2514600"/>
+            <a:ext cx="3383280" cy="1280160"/>
+          </a:xfrm>
+          <a:prstGeom prst="rect">
+            <a:avLst/>
+          </a:prstGeom>
+          <a:noFill/>
+        </p:spPr>
+        <p:txBody>
+          <a:bodyPr wrap="square" anchor="t">
+            <a:spAutoFit/>
+          </a:bodyPr>
+          <a:lstStyle/>
+          <a:p>
+            <a:pPr algn="ctr"/>
+            <a:r>
+              <a:rPr sz="5400" b="1">
+                <a:solidFill>
+                  <a:srgbClr val="9E3B2F"/>
+                </a:solidFill>
+                <a:latin typeface="微軟正黑體"/>
+                <a:ea typeface="微軟正黑體"/>
+                <a:cs typeface="微軟正黑體"/>
+              </a:rPr>
+              <a:t>50 倍</a:t>
+            </a:r>
+          </a:p>
+        </p:txBody>
+      </p:sp>
+      <p:sp>
+        <p:nvSpPr>
+          <p:cNvPr id="7" name="TextBox 6"/>
+          <p:cNvSpPr txBox="1"/>
+          <p:nvPr/>
+        </p:nvSpPr>
+        <p:spPr>
+          <a:xfrm>
+            <a:off x="685800" y="3886200"/>
+            <a:ext cx="3383280" cy="1280160"/>
+          </a:xfrm>
+          <a:prstGeom prst="rect">
+            <a:avLst/>
+          </a:prstGeom>
+          <a:noFill/>
+        </p:spPr>
+        <p:txBody>
+          <a:bodyPr wrap="square" anchor="t">
+            <a:spAutoFit/>
+          </a:bodyPr>
+          <a:lstStyle/>
+          <a:p>
+            <a:pPr algn="ctr"/>
+            <a:r>
+              <a:rPr sz="1700" b="0">
+                <a:solidFill>
+                  <a:srgbClr val="33302B"/>
+                </a:solidFill>
+                <a:latin typeface="微軟正黑體"/>
+                <a:ea typeface="微軟正黑體"/>
+                <a:cs typeface="微軟正黑體"/>
+              </a:rPr>
+              <a:t>殿內 PM2.5 一度達戶外 50 倍
+（龍山寺實測 1,360 μg/m³）</a:t>
+            </a:r>
+          </a:p>
+        </p:txBody>
+      </p:sp>
+      <p:sp>
+        <p:nvSpPr>
+          <p:cNvPr id="8" name="Rectangle 7"/>
+          <p:cNvSpPr/>
+          <p:nvPr/>
+        </p:nvSpPr>
+        <p:spPr>
+          <a:xfrm>
+            <a:off x="4526280" y="2011680"/>
+            <a:ext cx="3383280" cy="3291840"/>
+          </a:xfrm>
+          <a:prstGeom prst="rect">
+            <a:avLst/>
+          </a:prstGeom>
+          <a:solidFill>
+            <a:srgbClr val="F8F4EC"/>
+          </a:solidFill>
+          <a:ln>
+            <a:noFill/>
+          </a:ln>
+          <a:effectLst/>
+        </p:spPr>
+        <p:style>
+          <a:lnRef idx="1">
+            <a:schemeClr val="accent1"/>
+          </a:lnRef>
+          <a:fillRef idx="3">
+            <a:schemeClr val="accent1"/>
+          </a:fillRef>
+          <a:effectRef idx="2">
+            <a:schemeClr val="accent1"/>
+          </a:effectRef>
+          <a:fontRef idx="minor">
+            <a:schemeClr val="lt1"/>
+          </a:fontRef>
+        </p:style>
+        <p:txBody>
+          <a:bodyPr rtlCol="0" anchor="ctr"/>
+          <a:lstStyle/>
+          <a:p>
+            <a:pPr algn="ctr"/>
+            <a:endParaRPr/>
+          </a:p>
+        </p:txBody>
+      </p:sp>
+      <p:sp>
+        <p:nvSpPr>
+          <p:cNvPr id="9" name="TextBox 8"/>
+          <p:cNvSpPr txBox="1"/>
+          <p:nvPr/>
+        </p:nvSpPr>
+        <p:spPr>
+          <a:xfrm>
+            <a:off x="4526280" y="2514600"/>
+            <a:ext cx="3383280" cy="1280160"/>
+          </a:xfrm>
+          <a:prstGeom prst="rect">
+            <a:avLst/>
+          </a:prstGeom>
+          <a:noFill/>
+        </p:spPr>
+        <p:txBody>
+          <a:bodyPr wrap="square" anchor="t">
+            <a:spAutoFit/>
+          </a:bodyPr>
+          <a:lstStyle/>
+          <a:p>
+            <a:pPr algn="ctr"/>
+            <a:r>
+              <a:rPr sz="5400" b="1">
+                <a:solidFill>
+                  <a:srgbClr val="9E3B2F"/>
+                </a:solidFill>
+                <a:latin typeface="微軟正黑體"/>
+                <a:ea typeface="微軟正黑體"/>
+                <a:cs typeface="微軟正黑體"/>
+              </a:rPr>
+              <a:t>17 億+</a:t>
+            </a:r>
+          </a:p>
+        </p:txBody>
+      </p:sp>
+      <p:sp>
+        <p:nvSpPr>
+          <p:cNvPr id="10" name="TextBox 9"/>
+          <p:cNvSpPr txBox="1"/>
+          <p:nvPr/>
+        </p:nvSpPr>
+        <p:spPr>
+          <a:xfrm>
+            <a:off x="4526280" y="3886200"/>
+            <a:ext cx="3383280" cy="1280160"/>
+          </a:xfrm>
+          <a:prstGeom prst="rect">
+            <a:avLst/>
+          </a:prstGeom>
+          <a:noFill/>
+        </p:spPr>
+        <p:txBody>
+          <a:bodyPr wrap="square" anchor="t">
+            <a:spAutoFit/>
+          </a:bodyPr>
+          <a:lstStyle/>
+          <a:p>
+            <a:pPr algn="ctr"/>
+            <a:r>
+              <a:rPr sz="1700" b="0">
+                <a:solidFill>
+                  <a:srgbClr val="33302B"/>
+                </a:solidFill>
+                <a:latin typeface="微軟正黑體"/>
+                <a:ea typeface="微軟正黑體"/>
+                <a:cs typeface="微軟正黑體"/>
+              </a:rPr>
+              <a:t>印度教＋佛教信仰人口
+道教與民間信仰另計</a:t>
+            </a:r>
+          </a:p>
+        </p:txBody>
+      </p:sp>
+      <p:sp>
+        <p:nvSpPr>
+          <p:cNvPr id="11" name="Rectangle 10"/>
+          <p:cNvSpPr/>
+          <p:nvPr/>
+        </p:nvSpPr>
+        <p:spPr>
+          <a:xfrm>
+            <a:off x="8366760" y="2011680"/>
+            <a:ext cx="3383280" cy="3291840"/>
+          </a:xfrm>
+          <a:prstGeom prst="rect">
+            <a:avLst/>
+          </a:prstGeom>
+          <a:solidFill>
+            <a:srgbClr val="F8F4EC"/>
+          </a:solidFill>
+          <a:ln>
+            <a:noFill/>
+          </a:ln>
+          <a:effectLst/>
+        </p:spPr>
+        <p:style>
+          <a:lnRef idx="1">
+            <a:schemeClr val="accent1"/>
+          </a:lnRef>
+          <a:fillRef idx="3">
+            <a:schemeClr val="accent1"/>
+          </a:fillRef>
+          <a:effectRef idx="2">
+            <a:schemeClr val="accent1"/>
+          </a:effectRef>
+          <a:fontRef idx="minor">
+            <a:schemeClr val="lt1"/>
+          </a:fontRef>
+        </p:style>
+        <p:txBody>
+          <a:bodyPr rtlCol="0" anchor="ctr"/>
+          <a:lstStyle/>
+          <a:p>
+            <a:pPr algn="ctr"/>
+            <a:endParaRPr/>
+          </a:p>
+        </p:txBody>
+      </p:sp>
+      <p:sp>
+        <p:nvSpPr>
+          <p:cNvPr id="12" name="TextBox 11"/>
+          <p:cNvSpPr txBox="1"/>
+          <p:nvPr/>
+        </p:nvSpPr>
+        <p:spPr>
+          <a:xfrm>
+            <a:off x="8366760" y="2514600"/>
+            <a:ext cx="3383280" cy="1280160"/>
+          </a:xfrm>
+          <a:prstGeom prst="rect">
+            <a:avLst/>
+          </a:prstGeom>
+          <a:noFill/>
+        </p:spPr>
+        <p:txBody>
+          <a:bodyPr wrap="square" anchor="t">
+            <a:spAutoFit/>
+          </a:bodyPr>
+          <a:lstStyle/>
+          <a:p>
+            <a:pPr algn="ctr"/>
+            <a:r>
+              <a:rPr sz="5400" b="1">
+                <a:solidFill>
+                  <a:srgbClr val="9E3B2F"/>
+                </a:solidFill>
+                <a:latin typeface="微軟正黑體"/>
+                <a:ea typeface="微軟正黑體"/>
+                <a:cs typeface="微軟正黑體"/>
+              </a:rPr>
+              <a:t>3,000+ 件</a:t>
+            </a:r>
+          </a:p>
+        </p:txBody>
+      </p:sp>
+      <p:sp>
+        <p:nvSpPr>
+          <p:cNvPr id="13" name="TextBox 12"/>
+          <p:cNvSpPr txBox="1"/>
+          <p:nvPr/>
+        </p:nvSpPr>
+        <p:spPr>
+          <a:xfrm>
+            <a:off x="8366760" y="3886200"/>
+            <a:ext cx="3383280" cy="1280160"/>
+          </a:xfrm>
+          <a:prstGeom prst="rect">
+            <a:avLst/>
+          </a:prstGeom>
+          <a:noFill/>
+        </p:spPr>
+        <p:txBody>
+          <a:bodyPr wrap="square" anchor="t">
+            <a:spAutoFit/>
+          </a:bodyPr>
+          <a:lstStyle/>
+          <a:p>
+            <a:pPr algn="ctr"/>
+            <a:r>
+              <a:rPr sz="1700" b="0">
+                <a:solidFill>
+                  <a:srgbClr val="33302B"/>
+                </a:solidFill>
+                <a:latin typeface="微軟正黑體"/>
+                <a:ea typeface="微軟正黑體"/>
+                <a:cs typeface="微軟正黑體"/>
+              </a:rPr>
+              <a:t>環保署每年宮廟
+空污陳情案件</a:t>
+            </a:r>
+          </a:p>
+        </p:txBody>
+      </p:sp>
+      <p:sp>
+        <p:nvSpPr>
+          <p:cNvPr id="14" name="TextBox 13"/>
+          <p:cNvSpPr txBox="1"/>
+          <p:nvPr/>
+        </p:nvSpPr>
+        <p:spPr>
+          <a:xfrm>
+            <a:off x="685800" y="5806440"/>
+            <a:ext cx="10972800" cy="548640"/>
+          </a:xfrm>
+          <a:prstGeom prst="rect">
+            <a:avLst/>
+          </a:prstGeom>
+          <a:noFill/>
+        </p:spPr>
+        <p:txBody>
+          <a:bodyPr wrap="square" anchor="t">
+            <a:spAutoFit/>
+          </a:bodyPr>
+          <a:lstStyle/>
+          <a:p>
+            <a:pPr algn="l"/>
+            <a:r>
+              <a:rPr sz="1300" b="0">
+                <a:solidFill>
+                  <a:srgbClr val="8A8377"/>
+                </a:solidFill>
+                <a:latin typeface="微軟正黑體"/>
+                <a:ea typeface="微軟正黑體"/>
+                <a:cs typeface="微軟正黑體"/>
+              </a:rPr>
+              <a:t>來源：台大公衛實測（公視 2015）、AAQR 2022 同儕審查研究、環保署統計——完整出處見計畫書。</a:t>
+            </a:r>
+          </a:p>
+        </p:txBody>
+      </p:sp>
+    </p:spTree>
+  </p:cSld>
+  <p:clrMapOvr>
+    <a:masterClrMapping/>
+  </p:clrMapOvr>
+</p:sld>
+</file>
+
+<file path=ppt/slides/slide3.xml><?xml version="1.0" encoding="utf-8"?>
+<p:sld xmlns:a="http://schemas.openxmlformats.org/drawingml/2006/main" xmlns:r="http://schemas.openxmlformats.org/officeDocument/2006/relationships" xmlns:p="http://schemas.openxmlformats.org/presentationml/2006/main">
+  <p:cSld>
+    <p:spTree>
+      <p:nvGrpSpPr>
+        <p:cNvPr id="1" name=""/>
+        <p:cNvGrpSpPr/>
+        <p:nvPr/>
+      </p:nvGrpSpPr>
+      <p:grpSpPr>
+        <a:xfrm>
+          <a:off x="0" y="0"/>
+          <a:ext cx="0" cy="0"/>
+          <a:chOff x="0" y="0"/>
+          <a:chExt cx="0" cy="0"/>
+        </a:xfrm>
+      </p:grpSpPr>
+      <p:sp>
+        <p:nvSpPr>
+          <p:cNvPr id="2" name="Rectangle 1"/>
+          <p:cNvSpPr/>
+          <p:nvPr/>
+        </p:nvSpPr>
+        <p:spPr>
+          <a:xfrm>
+            <a:off x="0" y="0"/>
+            <a:ext cx="164592" cy="6858000"/>
+          </a:xfrm>
+          <a:prstGeom prst="rect">
+            <a:avLst/>
+          </a:prstGeom>
+          <a:solidFill>
+            <a:srgbClr val="9E3B2F"/>
+          </a:solidFill>
+          <a:ln>
+            <a:noFill/>
+          </a:ln>
+          <a:effectLst/>
+        </p:spPr>
+        <p:style>
+          <a:lnRef idx="1">
+            <a:schemeClr val="accent1"/>
+          </a:lnRef>
+          <a:fillRef idx="3">
+            <a:schemeClr val="accent1"/>
+          </a:fillRef>
+          <a:effectRef idx="2">
+            <a:schemeClr val="accent1"/>
+          </a:effectRef>
+          <a:fontRef idx="minor">
+            <a:schemeClr val="lt1"/>
+          </a:fontRef>
+        </p:style>
+        <p:txBody>
+          <a:bodyPr rtlCol="0" anchor="ctr"/>
+          <a:lstStyle/>
+          <a:p>
+            <a:pPr algn="ctr"/>
+            <a:endParaRPr/>
+          </a:p>
+        </p:txBody>
+      </p:sp>
+      <p:sp>
+        <p:nvSpPr>
+          <p:cNvPr id="3" name="TextBox 2"/>
+          <p:cNvSpPr txBox="1"/>
+          <p:nvPr/>
+        </p:nvSpPr>
+        <p:spPr>
+          <a:xfrm>
+            <a:off x="502920" y="292608"/>
+            <a:ext cx="10058400" cy="457200"/>
+          </a:xfrm>
+          <a:prstGeom prst="rect">
+            <a:avLst/>
+          </a:prstGeom>
+          <a:noFill/>
+        </p:spPr>
+        <p:txBody>
+          <a:bodyPr wrap="square" anchor="t">
+            <a:spAutoFit/>
+          </a:bodyPr>
+          <a:lstStyle/>
+          <a:p>
+            <a:pPr algn="l"/>
+            <a:r>
+              <a:rPr sz="1500" b="1">
+                <a:solidFill>
+                  <a:srgbClr val="C9A227"/>
+                </a:solidFill>
+                <a:latin typeface="微軟正黑體"/>
+                <a:ea typeface="微軟正黑體"/>
+                <a:cs typeface="微軟正黑體"/>
+              </a:rPr>
+              <a:t>PROBLEM｜為什麼過去都失敗</a:t>
+            </a:r>
+          </a:p>
+        </p:txBody>
+      </p:sp>
+      <p:sp>
+        <p:nvSpPr>
+          <p:cNvPr id="4" name="TextBox 3"/>
+          <p:cNvSpPr txBox="1"/>
+          <p:nvPr/>
+        </p:nvSpPr>
+        <p:spPr>
+          <a:xfrm>
+            <a:off x="502920" y="603504"/>
+            <a:ext cx="11155680" cy="914400"/>
+          </a:xfrm>
+          <a:prstGeom prst="rect">
+            <a:avLst/>
+          </a:prstGeom>
+          <a:noFill/>
+        </p:spPr>
+        <p:txBody>
+          <a:bodyPr wrap="square" anchor="t">
+            <a:spAutoFit/>
+          </a:bodyPr>
+          <a:lstStyle/>
+          <a:p>
+            <a:pPr algn="l"/>
+            <a:r>
+              <a:rPr sz="3300" b="1">
+                <a:solidFill>
+                  <a:srgbClr val="33302B"/>
+                </a:solidFill>
+                <a:latin typeface="微軟正黑體"/>
+                <a:ea typeface="微軟正黑體"/>
+                <a:cs typeface="微軟正黑體"/>
+              </a:rPr>
+              <a:t>既有方案：不是傷信仰，就是買不起</a:t>
+            </a:r>
+          </a:p>
+        </p:txBody>
+      </p:sp>
+      <p:sp>
+        <p:nvSpPr>
+          <p:cNvPr id="5" name="Rectangle 4"/>
+          <p:cNvSpPr/>
+          <p:nvPr/>
+        </p:nvSpPr>
+        <p:spPr>
+          <a:xfrm>
+            <a:off x="685800" y="1965960"/>
+            <a:ext cx="2926080" cy="868680"/>
+          </a:xfrm>
+          <a:prstGeom prst="rect">
+            <a:avLst/>
+          </a:prstGeom>
+          <a:solidFill>
+            <a:srgbClr val="F8F4EC"/>
+          </a:solidFill>
+          <a:ln>
+            <a:noFill/>
+          </a:ln>
+          <a:effectLst/>
+        </p:spPr>
+        <p:style>
+          <a:lnRef idx="1">
+            <a:schemeClr val="accent1"/>
+          </a:lnRef>
+          <a:fillRef idx="3">
+            <a:schemeClr val="accent1"/>
+          </a:fillRef>
+          <a:effectRef idx="2">
+            <a:schemeClr val="accent1"/>
+          </a:effectRef>
+          <a:fontRef idx="minor">
+            <a:schemeClr val="lt1"/>
+          </a:fontRef>
+        </p:style>
+        <p:txBody>
+          <a:bodyPr rtlCol="0" anchor="ctr"/>
+          <a:lstStyle/>
+          <a:p>
+            <a:pPr algn="ctr"/>
+            <a:endParaRPr/>
+          </a:p>
+        </p:txBody>
+      </p:sp>
+      <p:sp>
+        <p:nvSpPr>
+          <p:cNvPr id="6" name="TextBox 5"/>
+          <p:cNvSpPr txBox="1"/>
+          <p:nvPr/>
+        </p:nvSpPr>
+        <p:spPr>
+          <a:xfrm>
+            <a:off x="868680" y="2167128"/>
+            <a:ext cx="2743200" cy="548640"/>
+          </a:xfrm>
+          <a:prstGeom prst="rect">
+            <a:avLst/>
+          </a:prstGeom>
+          <a:noFill/>
+        </p:spPr>
+        <p:txBody>
+          <a:bodyPr wrap="square" anchor="t">
+            <a:spAutoFit/>
+          </a:bodyPr>
+          <a:lstStyle/>
+          <a:p>
+            <a:pPr algn="l"/>
+            <a:r>
+              <a:rPr sz="2100" b="1">
+                <a:solidFill>
+                  <a:srgbClr val="33302B"/>
+                </a:solidFill>
+                <a:latin typeface="微軟正黑體"/>
+                <a:ea typeface="微軟正黑體"/>
+                <a:cs typeface="微軟正黑體"/>
+              </a:rPr>
+              <a:t>封爐・減香</a:t>
+            </a:r>
+          </a:p>
+        </p:txBody>
+      </p:sp>
+      <p:sp>
+        <p:nvSpPr>
+          <p:cNvPr id="7" name="TextBox 6"/>
+          <p:cNvSpPr txBox="1"/>
+          <p:nvPr/>
+        </p:nvSpPr>
+        <p:spPr>
+          <a:xfrm>
+            <a:off x="3886200" y="2167128"/>
+            <a:ext cx="4937760" cy="548640"/>
+          </a:xfrm>
+          <a:prstGeom prst="rect">
+            <a:avLst/>
+          </a:prstGeom>
+          <a:noFill/>
+        </p:spPr>
+        <p:txBody>
+          <a:bodyPr wrap="square" anchor="t">
+            <a:spAutoFit/>
+          </a:bodyPr>
+          <a:lstStyle/>
+          <a:p>
+            <a:pPr algn="l"/>
+            <a:r>
+              <a:rPr sz="1900" b="0">
+                <a:solidFill>
+                  <a:srgbClr val="33302B"/>
+                </a:solidFill>
+                <a:latin typeface="微軟正黑體"/>
+                <a:ea typeface="微軟正黑體"/>
+                <a:cs typeface="微軟正黑體"/>
+              </a:rPr>
+              <a:t>叫人改變信仰 → 2017 年凱道抗爭</a:t>
+            </a:r>
+          </a:p>
+        </p:txBody>
+      </p:sp>
+      <p:sp>
+        <p:nvSpPr>
+          <p:cNvPr id="8" name="TextBox 7"/>
+          <p:cNvSpPr txBox="1"/>
+          <p:nvPr/>
+        </p:nvSpPr>
+        <p:spPr>
+          <a:xfrm>
+            <a:off x="8869680" y="2167128"/>
+            <a:ext cx="2926080" cy="548640"/>
+          </a:xfrm>
+          <a:prstGeom prst="rect">
+            <a:avLst/>
+          </a:prstGeom>
+          <a:noFill/>
+        </p:spPr>
+        <p:txBody>
+          <a:bodyPr wrap="square" anchor="t">
+            <a:spAutoFit/>
+          </a:bodyPr>
+          <a:lstStyle/>
+          <a:p>
+            <a:pPr algn="l"/>
+            <a:r>
+              <a:rPr sz="1900" b="1">
+                <a:solidFill>
+                  <a:srgbClr val="9E3B2F"/>
+                </a:solidFill>
+                <a:latin typeface="微軟正黑體"/>
+                <a:ea typeface="微軟正黑體"/>
+                <a:cs typeface="微軟正黑體"/>
+              </a:rPr>
+              <a:t>儀式被犧牲</a:t>
+            </a:r>
+          </a:p>
+        </p:txBody>
+      </p:sp>
+      <p:sp>
+        <p:nvSpPr>
+          <p:cNvPr id="9" name="Rectangle 8"/>
+          <p:cNvSpPr/>
+          <p:nvPr/>
+        </p:nvSpPr>
+        <p:spPr>
+          <a:xfrm>
+            <a:off x="685800" y="3017520"/>
+            <a:ext cx="2926080" cy="868680"/>
+          </a:xfrm>
+          <a:prstGeom prst="rect">
+            <a:avLst/>
+          </a:prstGeom>
+          <a:solidFill>
+            <a:srgbClr val="F8F4EC"/>
+          </a:solidFill>
+          <a:ln>
+            <a:noFill/>
+          </a:ln>
+          <a:effectLst/>
+        </p:spPr>
+        <p:style>
+          <a:lnRef idx="1">
+            <a:schemeClr val="accent1"/>
+          </a:lnRef>
+          <a:fillRef idx="3">
+            <a:schemeClr val="accent1"/>
+          </a:fillRef>
+          <a:effectRef idx="2">
+            <a:schemeClr val="accent1"/>
+          </a:effectRef>
+          <a:fontRef idx="minor">
+            <a:schemeClr val="lt1"/>
+          </a:fontRef>
+        </p:style>
+        <p:txBody>
+          <a:bodyPr rtlCol="0" anchor="ctr"/>
+          <a:lstStyle/>
+          <a:p>
+            <a:pPr algn="ctr"/>
+            <a:endParaRPr/>
+          </a:p>
+        </p:txBody>
+      </p:sp>
+      <p:sp>
+        <p:nvSpPr>
+          <p:cNvPr id="10" name="TextBox 9"/>
+          <p:cNvSpPr txBox="1"/>
+          <p:nvPr/>
+        </p:nvSpPr>
+        <p:spPr>
+          <a:xfrm>
+            <a:off x="868680" y="3218688"/>
+            <a:ext cx="2743200" cy="548640"/>
+          </a:xfrm>
+          <a:prstGeom prst="rect">
+            <a:avLst/>
+          </a:prstGeom>
+          <a:noFill/>
+        </p:spPr>
+        <p:txBody>
+          <a:bodyPr wrap="square" anchor="t">
+            <a:spAutoFit/>
+          </a:bodyPr>
+          <a:lstStyle/>
+          <a:p>
+            <a:pPr algn="l"/>
+            <a:r>
+              <a:rPr sz="2100" b="1">
+                <a:solidFill>
+                  <a:srgbClr val="33302B"/>
+                </a:solidFill>
+                <a:latin typeface="微軟正黑體"/>
+                <a:ea typeface="微軟正黑體"/>
+                <a:cs typeface="微軟正黑體"/>
+              </a:rPr>
+              <a:t>碳中和金爐</a:t>
+            </a:r>
+          </a:p>
+        </p:txBody>
+      </p:sp>
+      <p:sp>
+        <p:nvSpPr>
+          <p:cNvPr id="11" name="TextBox 10"/>
+          <p:cNvSpPr txBox="1"/>
+          <p:nvPr/>
+        </p:nvSpPr>
+        <p:spPr>
+          <a:xfrm>
+            <a:off x="3886200" y="3218688"/>
+            <a:ext cx="4937760" cy="548640"/>
+          </a:xfrm>
+          <a:prstGeom prst="rect">
+            <a:avLst/>
+          </a:prstGeom>
+          <a:noFill/>
+        </p:spPr>
+        <p:txBody>
+          <a:bodyPr wrap="square" anchor="t">
+            <a:spAutoFit/>
+          </a:bodyPr>
+          <a:lstStyle/>
+          <a:p>
+            <a:pPr algn="l"/>
+            <a:r>
+              <a:rPr sz="1900" b="0">
+                <a:solidFill>
+                  <a:srgbClr val="33302B"/>
+                </a:solidFill>
+                <a:latin typeface="微軟正黑體"/>
+                <a:ea typeface="微軟正黑體"/>
+                <a:cs typeface="微軟正黑體"/>
+              </a:rPr>
+              <a:t>有效，但約 500 萬元</a:t>
+            </a:r>
+          </a:p>
+        </p:txBody>
+      </p:sp>
+      <p:sp>
+        <p:nvSpPr>
+          <p:cNvPr id="12" name="TextBox 11"/>
+          <p:cNvSpPr txBox="1"/>
+          <p:nvPr/>
+        </p:nvSpPr>
+        <p:spPr>
+          <a:xfrm>
+            <a:off x="8869680" y="3218688"/>
+            <a:ext cx="2926080" cy="548640"/>
+          </a:xfrm>
+          <a:prstGeom prst="rect">
+            <a:avLst/>
+          </a:prstGeom>
+          <a:noFill/>
+        </p:spPr>
+        <p:txBody>
+          <a:bodyPr wrap="square" anchor="t">
+            <a:spAutoFit/>
+          </a:bodyPr>
+          <a:lstStyle/>
+          <a:p>
+            <a:pPr algn="l"/>
+            <a:r>
+              <a:rPr sz="1900" b="1">
+                <a:solidFill>
+                  <a:srgbClr val="9E3B2F"/>
+                </a:solidFill>
+                <a:latin typeface="微軟正黑體"/>
+                <a:ea typeface="微軟正黑體"/>
+                <a:cs typeface="微軟正黑體"/>
+              </a:rPr>
+              <a:t>中小廟宇買不起</a:t>
+            </a:r>
+          </a:p>
+        </p:txBody>
+      </p:sp>
+      <p:sp>
+        <p:nvSpPr>
+          <p:cNvPr id="13" name="Rectangle 12"/>
+          <p:cNvSpPr/>
+          <p:nvPr/>
+        </p:nvSpPr>
+        <p:spPr>
+          <a:xfrm>
+            <a:off x="685800" y="4069079"/>
+            <a:ext cx="2926080" cy="868680"/>
+          </a:xfrm>
+          <a:prstGeom prst="rect">
+            <a:avLst/>
+          </a:prstGeom>
+          <a:solidFill>
+            <a:srgbClr val="F8F4EC"/>
+          </a:solidFill>
+          <a:ln>
+            <a:noFill/>
+          </a:ln>
+          <a:effectLst/>
+        </p:spPr>
+        <p:style>
+          <a:lnRef idx="1">
+            <a:schemeClr val="accent1"/>
+          </a:lnRef>
+          <a:fillRef idx="3">
+            <a:schemeClr val="accent1"/>
+          </a:fillRef>
+          <a:effectRef idx="2">
+            <a:schemeClr val="accent1"/>
+          </a:effectRef>
+          <a:fontRef idx="minor">
+            <a:schemeClr val="lt1"/>
+          </a:fontRef>
+        </p:style>
+        <p:txBody>
+          <a:bodyPr rtlCol="0" anchor="ctr"/>
+          <a:lstStyle/>
+          <a:p>
+            <a:pPr algn="ctr"/>
+            <a:endParaRPr/>
+          </a:p>
+        </p:txBody>
+      </p:sp>
+      <p:sp>
+        <p:nvSpPr>
+          <p:cNvPr id="14" name="TextBox 13"/>
+          <p:cNvSpPr txBox="1"/>
+          <p:nvPr/>
+        </p:nvSpPr>
+        <p:spPr>
+          <a:xfrm>
+            <a:off x="868680" y="4270247"/>
+            <a:ext cx="2743200" cy="548640"/>
+          </a:xfrm>
+          <a:prstGeom prst="rect">
+            <a:avLst/>
+          </a:prstGeom>
+          <a:noFill/>
+        </p:spPr>
+        <p:txBody>
+          <a:bodyPr wrap="square" anchor="t">
+            <a:spAutoFit/>
+          </a:bodyPr>
+          <a:lstStyle/>
+          <a:p>
+            <a:pPr algn="l"/>
+            <a:r>
+              <a:rPr sz="2100" b="1">
+                <a:solidFill>
+                  <a:srgbClr val="33302B"/>
+                </a:solidFill>
+                <a:latin typeface="微軟正黑體"/>
+                <a:ea typeface="微軟正黑體"/>
+                <a:cs typeface="微軟正黑體"/>
+              </a:rPr>
+              <a:t>清淨機／IoT 監測</a:t>
+            </a:r>
+          </a:p>
+        </p:txBody>
+      </p:sp>
+      <p:sp>
+        <p:nvSpPr>
+          <p:cNvPr id="15" name="TextBox 14"/>
+          <p:cNvSpPr txBox="1"/>
+          <p:nvPr/>
+        </p:nvSpPr>
+        <p:spPr>
+          <a:xfrm>
+            <a:off x="3886200" y="4270247"/>
+            <a:ext cx="4937760" cy="548640"/>
+          </a:xfrm>
+          <a:prstGeom prst="rect">
+            <a:avLst/>
+          </a:prstGeom>
+          <a:noFill/>
+        </p:spPr>
+        <p:txBody>
+          <a:bodyPr wrap="square" anchor="t">
+            <a:spAutoFit/>
+          </a:bodyPr>
+          <a:lstStyle/>
+          <a:p>
+            <a:pPr algn="l"/>
+            <a:r>
+              <a:rPr sz="1900" b="0">
+                <a:solidFill>
+                  <a:srgbClr val="33302B"/>
+                </a:solidFill>
+                <a:latin typeface="微軟正黑體"/>
+                <a:ea typeface="微軟正黑體"/>
+                <a:cs typeface="微軟正黑體"/>
+              </a:rPr>
+              <a:t>管不到爐口／只量測不治理</a:t>
+            </a:r>
+          </a:p>
+        </p:txBody>
+      </p:sp>
+      <p:sp>
+        <p:nvSpPr>
+          <p:cNvPr id="16" name="TextBox 15"/>
+          <p:cNvSpPr txBox="1"/>
+          <p:nvPr/>
+        </p:nvSpPr>
+        <p:spPr>
+          <a:xfrm>
+            <a:off x="8869680" y="4270247"/>
+            <a:ext cx="2926080" cy="548640"/>
+          </a:xfrm>
+          <a:prstGeom prst="rect">
+            <a:avLst/>
+          </a:prstGeom>
+          <a:noFill/>
+        </p:spPr>
+        <p:txBody>
+          <a:bodyPr wrap="square" anchor="t">
+            <a:spAutoFit/>
+          </a:bodyPr>
+          <a:lstStyle/>
+          <a:p>
+            <a:pPr algn="l"/>
+            <a:r>
+              <a:rPr sz="1900" b="1">
+                <a:solidFill>
+                  <a:srgbClr val="9E3B2F"/>
+                </a:solidFill>
+                <a:latin typeface="微軟正黑體"/>
+                <a:ea typeface="微軟正黑體"/>
+                <a:cs typeface="微軟正黑體"/>
+              </a:rPr>
+              <a:t>治標不治本</a:t>
+            </a:r>
+          </a:p>
+        </p:txBody>
+      </p:sp>
+      <p:sp>
+        <p:nvSpPr>
+          <p:cNvPr id="17" name="Rectangle 16"/>
+          <p:cNvSpPr/>
+          <p:nvPr/>
+        </p:nvSpPr>
+        <p:spPr>
+          <a:xfrm>
+            <a:off x="685800" y="5349240"/>
+            <a:ext cx="10881360" cy="960120"/>
+          </a:xfrm>
+          <a:prstGeom prst="rect">
+            <a:avLst/>
+          </a:prstGeom>
+          <a:solidFill>
+            <a:srgbClr val="9E3B2F"/>
+          </a:solidFill>
+          <a:ln>
+            <a:noFill/>
+          </a:ln>
+          <a:effectLst/>
+        </p:spPr>
+        <p:style>
+          <a:lnRef idx="1">
+            <a:schemeClr val="accent1"/>
+          </a:lnRef>
+          <a:fillRef idx="3">
+            <a:schemeClr val="accent1"/>
+          </a:fillRef>
+          <a:effectRef idx="2">
+            <a:schemeClr val="accent1"/>
+          </a:effectRef>
+          <a:fontRef idx="minor">
+            <a:schemeClr val="lt1"/>
+          </a:fontRef>
+        </p:style>
+        <p:txBody>
+          <a:bodyPr rtlCol="0" anchor="ctr"/>
+          <a:lstStyle/>
+          <a:p>
+            <a:pPr algn="ctr"/>
+            <a:endParaRPr/>
+          </a:p>
+        </p:txBody>
+      </p:sp>
+      <p:sp>
+        <p:nvSpPr>
+          <p:cNvPr id="18" name="TextBox 17"/>
+          <p:cNvSpPr txBox="1"/>
+          <p:nvPr/>
+        </p:nvSpPr>
+        <p:spPr>
+          <a:xfrm>
+            <a:off x="685800" y="5532120"/>
+            <a:ext cx="10881360" cy="640080"/>
+          </a:xfrm>
+          <a:prstGeom prst="rect">
+            <a:avLst/>
+          </a:prstGeom>
+          <a:noFill/>
+        </p:spPr>
+        <p:txBody>
+          <a:bodyPr wrap="square" anchor="t">
+            <a:spAutoFit/>
+          </a:bodyPr>
+          <a:lstStyle/>
+          <a:p>
+            <a:pPr algn="ctr"/>
+            <a:r>
+              <a:rPr sz="2300" b="1">
+                <a:solidFill>
+                  <a:srgbClr val="FFFFFF"/>
+                </a:solidFill>
+                <a:latin typeface="微軟正黑體"/>
+                <a:ea typeface="微軟正黑體"/>
+                <a:cs typeface="微軟正黑體"/>
+              </a:rPr>
+              <a:t>我們的立場：不禁香、不封爐——把治理裝進香爐，而不是把禁令加在信眾身上</a:t>
+            </a:r>
+          </a:p>
+        </p:txBody>
+      </p:sp>
+    </p:spTree>
+  </p:cSld>
+  <p:clrMapOvr>
+    <a:masterClrMapping/>
+  </p:clrMapOvr>
+</p:sld>
+</file>
+
+<file path=ppt/slides/slide4.xml><?xml version="1.0" encoding="utf-8"?>
+<p:sld xmlns:a="http://schemas.openxmlformats.org/drawingml/2006/main" xmlns:r="http://schemas.openxmlformats.org/officeDocument/2006/relationships" xmlns:p="http://schemas.openxmlformats.org/presentationml/2006/main">
+  <p:cSld>
+    <p:spTree>
+      <p:nvGrpSpPr>
+        <p:cNvPr id="1" name=""/>
+        <p:cNvGrpSpPr/>
+        <p:nvPr/>
+      </p:nvGrpSpPr>
+      <p:grpSpPr>
+        <a:xfrm>
+          <a:off x="0" y="0"/>
+          <a:ext cx="0" cy="0"/>
+          <a:chOff x="0" y="0"/>
+          <a:chExt cx="0" cy="0"/>
+        </a:xfrm>
+      </p:grpSpPr>
+      <p:sp>
+        <p:nvSpPr>
+          <p:cNvPr id="2" name="Rectangle 1"/>
+          <p:cNvSpPr/>
+          <p:nvPr/>
+        </p:nvSpPr>
+        <p:spPr>
+          <a:xfrm>
+            <a:off x="0" y="0"/>
+            <a:ext cx="164592" cy="6858000"/>
+          </a:xfrm>
+          <a:prstGeom prst="rect">
+            <a:avLst/>
+          </a:prstGeom>
+          <a:solidFill>
+            <a:srgbClr val="9E3B2F"/>
+          </a:solidFill>
+          <a:ln>
+            <a:noFill/>
+          </a:ln>
+          <a:effectLst/>
+        </p:spPr>
+        <p:style>
+          <a:lnRef idx="1">
+            <a:schemeClr val="accent1"/>
+          </a:lnRef>
+          <a:fillRef idx="3">
+            <a:schemeClr val="accent1"/>
+          </a:fillRef>
+          <a:effectRef idx="2">
+            <a:schemeClr val="accent1"/>
+          </a:effectRef>
+          <a:fontRef idx="minor">
+            <a:schemeClr val="lt1"/>
+          </a:fontRef>
+        </p:style>
+        <p:txBody>
+          <a:bodyPr rtlCol="0" anchor="ctr"/>
+          <a:lstStyle/>
+          <a:p>
+            <a:pPr algn="ctr"/>
+            <a:endParaRPr/>
+          </a:p>
+        </p:txBody>
+      </p:sp>
+      <p:sp>
+        <p:nvSpPr>
+          <p:cNvPr id="3" name="TextBox 2"/>
+          <p:cNvSpPr txBox="1"/>
+          <p:nvPr/>
+        </p:nvSpPr>
+        <p:spPr>
+          <a:xfrm>
+            <a:off x="502920" y="292608"/>
+            <a:ext cx="10058400" cy="457200"/>
+          </a:xfrm>
+          <a:prstGeom prst="rect">
+            <a:avLst/>
+          </a:prstGeom>
+          <a:noFill/>
+        </p:spPr>
+        <p:txBody>
+          <a:bodyPr wrap="square" anchor="t">
+            <a:spAutoFit/>
+          </a:bodyPr>
+          <a:lstStyle/>
+          <a:p>
+            <a:pPr algn="l"/>
+            <a:r>
+              <a:rPr sz="1500" b="1">
+                <a:solidFill>
+                  <a:srgbClr val="C9A227"/>
+                </a:solidFill>
+                <a:latin typeface="微軟正黑體"/>
+                <a:ea typeface="微軟正黑體"/>
+                <a:cs typeface="微軟正黑體"/>
+              </a:rPr>
+              <a:t>SOLUTION｜我們的方案</a:t>
+            </a:r>
+          </a:p>
+        </p:txBody>
+      </p:sp>
+      <p:sp>
+        <p:nvSpPr>
+          <p:cNvPr id="4" name="TextBox 3"/>
+          <p:cNvSpPr txBox="1"/>
+          <p:nvPr/>
+        </p:nvSpPr>
+        <p:spPr>
+          <a:xfrm>
+            <a:off x="502920" y="603504"/>
+            <a:ext cx="11155680" cy="914400"/>
+          </a:xfrm>
+          <a:prstGeom prst="rect">
+            <a:avLst/>
+          </a:prstGeom>
+          <a:noFill/>
+        </p:spPr>
+        <p:txBody>
+          <a:bodyPr wrap="square" anchor="t">
+            <a:spAutoFit/>
+          </a:bodyPr>
+          <a:lstStyle/>
+          <a:p>
+            <a:pPr algn="l"/>
+            <a:r>
+              <a:rPr sz="3300" b="1">
+                <a:solidFill>
+                  <a:srgbClr val="33302B"/>
+                </a:solidFill>
+                <a:latin typeface="微軟正黑體"/>
+                <a:ea typeface="微軟正黑體"/>
+                <a:cs typeface="微軟正黑體"/>
+              </a:rPr>
+              <a:t>加裝在既有香爐上的自主治理模組</a:t>
+            </a:r>
+          </a:p>
+        </p:txBody>
+      </p:sp>
+      <p:pic>
+        <p:nvPicPr>
+          <p:cNvPr id="5" name="Picture 4" descr="_view_組裝.png"/>
+          <p:cNvPicPr>
+            <a:picLocks noChangeAspect="1"/>
+          </p:cNvPicPr>
+          <p:nvPr/>
+        </p:nvPicPr>
+        <p:blipFill>
+          <a:blip r:embed="rId3"/>
+          <a:stretch>
+            <a:fillRect/>
+          </a:stretch>
+        </p:blipFill>
+        <p:spPr>
+          <a:xfrm>
+            <a:off x="502920" y="1691640"/>
+            <a:ext cx="5974080" cy="4480560"/>
+          </a:xfrm>
+          <a:prstGeom prst="rect">
+            <a:avLst/>
+          </a:prstGeom>
+        </p:spPr>
+      </p:pic>
+      <p:sp>
+        <p:nvSpPr>
+          <p:cNvPr id="6" name="TextBox 5"/>
+          <p:cNvSpPr txBox="1"/>
+          <p:nvPr/>
+        </p:nvSpPr>
+        <p:spPr>
+          <a:xfrm>
+            <a:off x="6537960" y="1828800"/>
+            <a:ext cx="5120640" cy="502920"/>
+          </a:xfrm>
+          <a:prstGeom prst="rect">
+            <a:avLst/>
+          </a:prstGeom>
+          <a:noFill/>
+        </p:spPr>
+        <p:txBody>
+          <a:bodyPr wrap="square" anchor="t">
+            <a:spAutoFit/>
+          </a:bodyPr>
+          <a:lstStyle/>
+          <a:p>
+            <a:pPr algn="l"/>
+            <a:r>
+              <a:rPr sz="2100" b="1">
+                <a:solidFill>
+                  <a:srgbClr val="9E3B2F"/>
+                </a:solidFill>
+                <a:latin typeface="微軟正黑體"/>
+                <a:ea typeface="微軟正黑體"/>
+                <a:cs typeface="微軟正黑體"/>
+              </a:rPr>
+              <a:t>■ 不換爐的 retrofit</a:t>
+            </a:r>
+          </a:p>
+        </p:txBody>
+      </p:sp>
+      <p:sp>
+        <p:nvSpPr>
+          <p:cNvPr id="7" name="TextBox 6"/>
+          <p:cNvSpPr txBox="1"/>
+          <p:nvPr/>
+        </p:nvSpPr>
+        <p:spPr>
+          <a:xfrm>
+            <a:off x="6812280" y="2267712"/>
+            <a:ext cx="4937760" cy="548640"/>
+          </a:xfrm>
+          <a:prstGeom prst="rect">
+            <a:avLst/>
+          </a:prstGeom>
+          <a:noFill/>
+        </p:spPr>
+        <p:txBody>
+          <a:bodyPr wrap="square" anchor="t">
+            <a:spAutoFit/>
+          </a:bodyPr>
+          <a:lstStyle/>
+          <a:p>
+            <a:pPr algn="l"/>
+            <a:r>
+              <a:rPr sz="1600" b="0">
+                <a:solidFill>
+                  <a:srgbClr val="33302B"/>
+                </a:solidFill>
+                <a:latin typeface="微軟正黑體"/>
+                <a:ea typeface="微軟正黑體"/>
+                <a:cs typeface="微軟正黑體"/>
+              </a:rPr>
+              <a:t>買方是廟方管委會，導入零儀式衝擊</a:t>
+            </a:r>
+          </a:p>
+        </p:txBody>
+      </p:sp>
+      <p:sp>
+        <p:nvSpPr>
+          <p:cNvPr id="8" name="TextBox 7"/>
+          <p:cNvSpPr txBox="1"/>
+          <p:nvPr/>
+        </p:nvSpPr>
+        <p:spPr>
+          <a:xfrm>
+            <a:off x="6537960" y="2907791"/>
+            <a:ext cx="5120640" cy="502920"/>
+          </a:xfrm>
+          <a:prstGeom prst="rect">
+            <a:avLst/>
+          </a:prstGeom>
+          <a:noFill/>
+        </p:spPr>
+        <p:txBody>
+          <a:bodyPr wrap="square" anchor="t">
+            <a:spAutoFit/>
+          </a:bodyPr>
+          <a:lstStyle/>
+          <a:p>
+            <a:pPr algn="l"/>
+            <a:r>
+              <a:rPr sz="2100" b="1">
+                <a:solidFill>
+                  <a:srgbClr val="9E3B2F"/>
+                </a:solidFill>
+                <a:latin typeface="微軟正黑體"/>
+                <a:ea typeface="微軟正黑體"/>
+                <a:cs typeface="微軟正黑體"/>
+              </a:rPr>
+              <a:t>■ 漏斗大口集煙罩</a:t>
+            </a:r>
+          </a:p>
+        </p:txBody>
+      </p:sp>
+      <p:sp>
+        <p:nvSpPr>
+          <p:cNvPr id="9" name="TextBox 8"/>
+          <p:cNvSpPr txBox="1"/>
+          <p:nvPr/>
+        </p:nvSpPr>
+        <p:spPr>
+          <a:xfrm>
+            <a:off x="6812280" y="3346703"/>
+            <a:ext cx="4937760" cy="548640"/>
+          </a:xfrm>
+          <a:prstGeom prst="rect">
+            <a:avLst/>
+          </a:prstGeom>
+          <a:noFill/>
+        </p:spPr>
+        <p:txBody>
+          <a:bodyPr wrap="square" anchor="t">
+            <a:spAutoFit/>
+          </a:bodyPr>
+          <a:lstStyle/>
+          <a:p>
+            <a:pPr algn="l"/>
+            <a:r>
+              <a:rPr sz="1600" b="0">
+                <a:solidFill>
+                  <a:srgbClr val="33302B"/>
+                </a:solidFill>
+                <a:latin typeface="微軟正黑體"/>
+                <a:ea typeface="微軟正黑體"/>
+                <a:cs typeface="微軟正黑體"/>
+              </a:rPr>
+              <a:t>插香跟原本一樣順手；爐口點源捕集，效率遠超全室換氣</a:t>
+            </a:r>
+          </a:p>
+        </p:txBody>
+      </p:sp>
+      <p:sp>
+        <p:nvSpPr>
+          <p:cNvPr id="10" name="TextBox 9"/>
+          <p:cNvSpPr txBox="1"/>
+          <p:nvPr/>
+        </p:nvSpPr>
+        <p:spPr>
+          <a:xfrm>
+            <a:off x="6537960" y="3986783"/>
+            <a:ext cx="5120640" cy="502920"/>
+          </a:xfrm>
+          <a:prstGeom prst="rect">
+            <a:avLst/>
+          </a:prstGeom>
+          <a:noFill/>
+        </p:spPr>
+        <p:txBody>
+          <a:bodyPr wrap="square" anchor="t">
+            <a:spAutoFit/>
+          </a:bodyPr>
+          <a:lstStyle/>
+          <a:p>
+            <a:pPr algn="l"/>
+            <a:r>
+              <a:rPr sz="2100" b="1">
+                <a:solidFill>
+                  <a:srgbClr val="9E3B2F"/>
+                </a:solidFill>
+                <a:latin typeface="微軟正黑體"/>
+                <a:ea typeface="微軟正黑體"/>
+                <a:cs typeface="微軟正黑體"/>
+              </a:rPr>
+              <a:t>■ 三段過濾鏈</a:t>
+            </a:r>
+          </a:p>
+        </p:txBody>
+      </p:sp>
+      <p:sp>
+        <p:nvSpPr>
+          <p:cNvPr id="11" name="TextBox 10"/>
+          <p:cNvSpPr txBox="1"/>
+          <p:nvPr/>
+        </p:nvSpPr>
+        <p:spPr>
+          <a:xfrm>
+            <a:off x="6812280" y="4425695"/>
+            <a:ext cx="4937760" cy="548640"/>
+          </a:xfrm>
+          <a:prstGeom prst="rect">
+            <a:avLst/>
+          </a:prstGeom>
+          <a:noFill/>
+        </p:spPr>
+        <p:txBody>
+          <a:bodyPr wrap="square" anchor="t">
+            <a:spAutoFit/>
+          </a:bodyPr>
+          <a:lstStyle/>
+          <a:p>
+            <a:pPr algn="l"/>
+            <a:r>
+              <a:rPr sz="1600" b="0">
+                <a:solidFill>
+                  <a:srgbClr val="33302B"/>
+                </a:solidFill>
+                <a:latin typeface="微軟正黑體"/>
+                <a:ea typeface="微軟正黑體"/>
+                <a:cs typeface="微軟正黑體"/>
+              </a:rPr>
+              <a:t>金屬紗網（擋火星）→ HEPA → 活性碳，順序即安全</a:t>
+            </a:r>
+          </a:p>
+        </p:txBody>
+      </p:sp>
+      <p:sp>
+        <p:nvSpPr>
+          <p:cNvPr id="12" name="TextBox 11"/>
+          <p:cNvSpPr txBox="1"/>
+          <p:nvPr/>
+        </p:nvSpPr>
+        <p:spPr>
+          <a:xfrm>
+            <a:off x="6537960" y="5065776"/>
+            <a:ext cx="5120640" cy="502920"/>
+          </a:xfrm>
+          <a:prstGeom prst="rect">
+            <a:avLst/>
+          </a:prstGeom>
+          <a:noFill/>
+        </p:spPr>
+        <p:txBody>
+          <a:bodyPr wrap="square" anchor="t">
+            <a:spAutoFit/>
+          </a:bodyPr>
+          <a:lstStyle/>
+          <a:p>
+            <a:pPr algn="l"/>
+            <a:r>
+              <a:rPr sz="2100" b="1">
+                <a:solidFill>
+                  <a:srgbClr val="9E3B2F"/>
+                </a:solidFill>
+                <a:latin typeface="微軟正黑體"/>
+                <a:ea typeface="微軟正黑體"/>
+                <a:cs typeface="微軟正黑體"/>
+              </a:rPr>
+              <a:t>■ 變頻抽排</a:t>
+            </a:r>
+          </a:p>
+        </p:txBody>
+      </p:sp>
+      <p:sp>
+        <p:nvSpPr>
+          <p:cNvPr id="13" name="TextBox 12"/>
+          <p:cNvSpPr txBox="1"/>
+          <p:nvPr/>
+        </p:nvSpPr>
+        <p:spPr>
+          <a:xfrm>
+            <a:off x="6812280" y="5504688"/>
+            <a:ext cx="4937760" cy="548640"/>
+          </a:xfrm>
+          <a:prstGeom prst="rect">
+            <a:avLst/>
+          </a:prstGeom>
+          <a:noFill/>
+        </p:spPr>
+        <p:txBody>
+          <a:bodyPr wrap="square" anchor="t">
+            <a:spAutoFit/>
+          </a:bodyPr>
+          <a:lstStyle/>
+          <a:p>
+            <a:pPr algn="l"/>
+            <a:r>
+              <a:rPr sz="1600" b="0">
+                <a:solidFill>
+                  <a:srgbClr val="33302B"/>
+                </a:solidFill>
+                <a:latin typeface="微軟正黑體"/>
+                <a:ea typeface="微軟正黑體"/>
+                <a:cs typeface="微軟正黑體"/>
+              </a:rPr>
+              <a:t>隨人流與濃度自動調速——省電、低噪、削尖峰</a:t>
+            </a:r>
+          </a:p>
+        </p:txBody>
+      </p:sp>
+    </p:spTree>
+  </p:cSld>
+  <p:clrMapOvr>
+    <a:masterClrMapping/>
+  </p:clrMapOvr>
+</p:sld>
+</file>
+
+<file path=ppt/slides/slide5.xml><?xml version="1.0" encoding="utf-8"?>
+<p:sld xmlns:a="http://schemas.openxmlformats.org/drawingml/2006/main" xmlns:r="http://schemas.openxmlformats.org/officeDocument/2006/relationships" xmlns:p="http://schemas.openxmlformats.org/presentationml/2006/main">
+  <p:cSld>
+    <p:spTree>
+      <p:nvGrpSpPr>
+        <p:cNvPr id="1" name=""/>
+        <p:cNvGrpSpPr/>
+        <p:nvPr/>
+      </p:nvGrpSpPr>
+      <p:grpSpPr>
+        <a:xfrm>
+          <a:off x="0" y="0"/>
+          <a:ext cx="0" cy="0"/>
+          <a:chOff x="0" y="0"/>
+          <a:chExt cx="0" cy="0"/>
+        </a:xfrm>
+      </p:grpSpPr>
+      <p:sp>
+        <p:nvSpPr>
+          <p:cNvPr id="2" name="Rectangle 1"/>
+          <p:cNvSpPr/>
+          <p:nvPr/>
+        </p:nvSpPr>
+        <p:spPr>
+          <a:xfrm>
+            <a:off x="0" y="0"/>
+            <a:ext cx="164592" cy="6858000"/>
+          </a:xfrm>
+          <a:prstGeom prst="rect">
+            <a:avLst/>
+          </a:prstGeom>
+          <a:solidFill>
+            <a:srgbClr val="9E3B2F"/>
+          </a:solidFill>
+          <a:ln>
+            <a:noFill/>
+          </a:ln>
+          <a:effectLst/>
+        </p:spPr>
+        <p:style>
+          <a:lnRef idx="1">
+            <a:schemeClr val="accent1"/>
+          </a:lnRef>
+          <a:fillRef idx="3">
+            <a:schemeClr val="accent1"/>
+          </a:fillRef>
+          <a:effectRef idx="2">
+            <a:schemeClr val="accent1"/>
+          </a:effectRef>
+          <a:fontRef idx="minor">
+            <a:schemeClr val="lt1"/>
+          </a:fontRef>
+        </p:style>
+        <p:txBody>
+          <a:bodyPr rtlCol="0" anchor="ctr"/>
+          <a:lstStyle/>
+          <a:p>
+            <a:pPr algn="ctr"/>
+            <a:endParaRPr/>
+          </a:p>
+        </p:txBody>
+      </p:sp>
+      <p:sp>
+        <p:nvSpPr>
+          <p:cNvPr id="3" name="TextBox 2"/>
+          <p:cNvSpPr txBox="1"/>
+          <p:nvPr/>
+        </p:nvSpPr>
+        <p:spPr>
+          <a:xfrm>
+            <a:off x="502920" y="292608"/>
+            <a:ext cx="10058400" cy="457200"/>
+          </a:xfrm>
+          <a:prstGeom prst="rect">
+            <a:avLst/>
+          </a:prstGeom>
+          <a:noFill/>
+        </p:spPr>
+        <p:txBody>
+          <a:bodyPr wrap="square" anchor="t">
+            <a:spAutoFit/>
+          </a:bodyPr>
+          <a:lstStyle/>
+          <a:p>
+            <a:pPr algn="l"/>
+            <a:r>
+              <a:rPr sz="1500" b="1">
+                <a:solidFill>
+                  <a:srgbClr val="C9A227"/>
+                </a:solidFill>
+                <a:latin typeface="微軟正黑體"/>
+                <a:ea typeface="微軟正黑體"/>
+                <a:cs typeface="微軟正黑體"/>
+              </a:rPr>
+              <a:t>SYSTEM｜三層閉環</a:t>
+            </a:r>
+          </a:p>
+        </p:txBody>
+      </p:sp>
+      <p:sp>
+        <p:nvSpPr>
+          <p:cNvPr id="4" name="TextBox 3"/>
+          <p:cNvSpPr txBox="1"/>
+          <p:nvPr/>
+        </p:nvSpPr>
+        <p:spPr>
+          <a:xfrm>
+            <a:off x="502920" y="603504"/>
+            <a:ext cx="11155680" cy="914400"/>
+          </a:xfrm>
+          <a:prstGeom prst="rect">
+            <a:avLst/>
+          </a:prstGeom>
+          <a:noFill/>
+        </p:spPr>
+        <p:txBody>
+          <a:bodyPr wrap="square" anchor="t">
+            <a:spAutoFit/>
+          </a:bodyPr>
+          <a:lstStyle/>
+          <a:p>
+            <a:pPr algn="l"/>
+            <a:r>
+              <a:rPr sz="3300" b="1">
+                <a:solidFill>
+                  <a:srgbClr val="33302B"/>
+                </a:solidFill>
+                <a:latin typeface="微軟正黑體"/>
+                <a:ea typeface="微軟正黑體"/>
+                <a:cs typeface="微軟正黑體"/>
+              </a:rPr>
+              <a:t>偵測 → 行動 → 再偵測，每筆決策可重演</a:t>
+            </a:r>
+          </a:p>
+        </p:txBody>
+      </p:sp>
+      <p:pic>
+        <p:nvPicPr>
+          <p:cNvPr id="5" name="Picture 4" descr="image3.png"/>
+          <p:cNvPicPr>
+            <a:picLocks noChangeAspect="1"/>
+          </p:cNvPicPr>
+          <p:nvPr/>
+        </p:nvPicPr>
+        <p:blipFill>
+          <a:blip r:embed="rId3"/>
+          <a:stretch>
+            <a:fillRect/>
+          </a:stretch>
+        </p:blipFill>
+        <p:spPr>
+          <a:xfrm>
+            <a:off x="2365897" y="1600200"/>
+            <a:ext cx="7459901" cy="4983480"/>
+          </a:xfrm>
+          <a:prstGeom prst="rect">
+            <a:avLst/>
+          </a:prstGeom>
+        </p:spPr>
+      </p:pic>
+    </p:spTree>
+  </p:cSld>
+  <p:clrMapOvr>
+    <a:masterClrMapping/>
+  </p:clrMapOvr>
+</p:sld>
+</file>
+
+<file path=ppt/slides/slide6.xml><?xml version="1.0" encoding="utf-8"?>
+<p:sld xmlns:a="http://schemas.openxmlformats.org/drawingml/2006/main" xmlns:r="http://schemas.openxmlformats.org/officeDocument/2006/relationships" xmlns:p="http://schemas.openxmlformats.org/presentationml/2006/main">
+  <p:cSld>
+    <p:spTree>
+      <p:nvGrpSpPr>
+        <p:cNvPr id="1" name=""/>
+        <p:cNvGrpSpPr/>
+        <p:nvPr/>
+      </p:nvGrpSpPr>
+      <p:grpSpPr>
+        <a:xfrm>
+          <a:off x="0" y="0"/>
+          <a:ext cx="0" cy="0"/>
+          <a:chOff x="0" y="0"/>
+          <a:chExt cx="0" cy="0"/>
+        </a:xfrm>
+      </p:grpSpPr>
+      <p:pic>
+        <p:nvPicPr>
+          <p:cNvPr id="3" name="圖片 2">
+            <a:extLst>
+              <a:ext uri="{FF2B5EF4-FFF2-40B4-BE49-F238E27FC236}">
+                <a16:creationId xmlns:a16="http://schemas.microsoft.com/office/drawing/2014/main" id="{F38F1D64-03F2-AB05-3095-5E5D7A691A59}"/>
+              </a:ext>
+            </a:extLst>
+          </p:cNvPr>
+          <p:cNvPicPr>
+            <a:picLocks/>
+          </p:cNvPicPr>
+          <p:nvPr/>
+        </p:nvPicPr>
+        <p:blipFill>
+          <a:blip r:embed="rId2"/>
+          <a:stretch>
+            <a:fillRect/>
+          </a:stretch>
+        </p:blipFill>
+        <p:spPr>
+          <a:xfrm>
+            <a:off x="0" y="0"/>
+            <a:ext cx="12192000" cy="6858000"/>
+          </a:xfrm>
+          <a:prstGeom prst="rect">
+            <a:avLst/>
+          </a:prstGeom>
+        </p:spPr>
+      </p:pic>
+    </p:spTree>
+    <p:extLst>
+      <p:ext uri="{BB962C8B-B14F-4D97-AF65-F5344CB8AC3E}">
+        <p14:creationId xmlns:p14="http://schemas.microsoft.com/office/powerpoint/2010/main" val="3236996145"/>
+      </p:ext>
+    </p:extLst>
+  </p:cSld>
+  <p:clrMapOvr>
+    <a:masterClrMapping/>
+  </p:clrMapOvr>
+</p:sld>
+</file>
+
+<file path=ppt/slides/slide7.xml><?xml version="1.0" encoding="utf-8"?>
+<p:sld xmlns:a="http://schemas.openxmlformats.org/drawingml/2006/main" xmlns:r="http://schemas.openxmlformats.org/officeDocument/2006/relationships" xmlns:p="http://schemas.openxmlformats.org/presentationml/2006/main">
+  <p:cSld>
+    <p:spTree>
+      <p:nvGrpSpPr>
+        <p:cNvPr id="1" name=""/>
+        <p:cNvGrpSpPr/>
+        <p:nvPr/>
+      </p:nvGrpSpPr>
+      <p:grpSpPr>
+        <a:xfrm>
+          <a:off x="0" y="0"/>
+          <a:ext cx="0" cy="0"/>
+          <a:chOff x="0" y="0"/>
+          <a:chExt cx="0" cy="0"/>
+        </a:xfrm>
+      </p:grpSpPr>
+      <p:sp>
+        <p:nvSpPr>
+          <p:cNvPr id="2" name="Rectangle 1"/>
+          <p:cNvSpPr/>
+          <p:nvPr/>
+        </p:nvSpPr>
+        <p:spPr>
+          <a:xfrm>
+            <a:off x="0" y="0"/>
+            <a:ext cx="164592" cy="6858000"/>
+          </a:xfrm>
+          <a:prstGeom prst="rect">
+            <a:avLst/>
+          </a:prstGeom>
+          <a:solidFill>
+            <a:srgbClr val="9E3B2F"/>
+          </a:solidFill>
+          <a:ln>
+            <a:noFill/>
+          </a:ln>
+          <a:effectLst/>
+        </p:spPr>
+        <p:style>
+          <a:lnRef idx="1">
+            <a:schemeClr val="accent1"/>
+          </a:lnRef>
+          <a:fillRef idx="3">
+            <a:schemeClr val="accent1"/>
+          </a:fillRef>
+          <a:effectRef idx="2">
+            <a:schemeClr val="accent1"/>
+          </a:effectRef>
+          <a:fontRef idx="minor">
+            <a:schemeClr val="lt1"/>
+          </a:fontRef>
+        </p:style>
+        <p:txBody>
+          <a:bodyPr rtlCol="0" anchor="ctr"/>
+          <a:lstStyle/>
+          <a:p>
+            <a:pPr algn="ctr"/>
+            <a:endParaRPr/>
+          </a:p>
+        </p:txBody>
+      </p:sp>
+      <p:sp>
+        <p:nvSpPr>
+          <p:cNvPr id="3" name="TextBox 2"/>
+          <p:cNvSpPr txBox="1"/>
+          <p:nvPr/>
+        </p:nvSpPr>
+        <p:spPr>
+          <a:xfrm>
+            <a:off x="502920" y="292608"/>
+            <a:ext cx="10058400" cy="457200"/>
+          </a:xfrm>
+          <a:prstGeom prst="rect">
+            <a:avLst/>
+          </a:prstGeom>
+          <a:noFill/>
+        </p:spPr>
+        <p:txBody>
+          <a:bodyPr wrap="square" anchor="t">
+            <a:spAutoFit/>
+          </a:bodyPr>
+          <a:lstStyle/>
+          <a:p>
+            <a:pPr algn="l"/>
+            <a:r>
+              <a:rPr sz="1500" b="1">
+                <a:solidFill>
+                  <a:srgbClr val="C9A227"/>
+                </a:solidFill>
+                <a:latin typeface="微軟正黑體"/>
+                <a:ea typeface="微軟正黑體"/>
+                <a:cs typeface="微軟正黑體"/>
+              </a:rPr>
+              <a:t>INTELLIGENCE｜決策核心</a:t>
+            </a:r>
+          </a:p>
+        </p:txBody>
+      </p:sp>
+      <p:sp>
+        <p:nvSpPr>
+          <p:cNvPr id="4" name="TextBox 3"/>
+          <p:cNvSpPr txBox="1"/>
+          <p:nvPr/>
+        </p:nvSpPr>
+        <p:spPr>
+          <a:xfrm>
+            <a:off x="502920" y="603504"/>
+            <a:ext cx="11155680" cy="914400"/>
+          </a:xfrm>
+          <a:prstGeom prst="rect">
+            <a:avLst/>
+          </a:prstGeom>
+          <a:noFill/>
+        </p:spPr>
+        <p:txBody>
+          <a:bodyPr wrap="square" anchor="t">
+            <a:spAutoFit/>
+          </a:bodyPr>
+          <a:lstStyle/>
+          <a:p>
+            <a:pPr algn="l"/>
+            <a:r>
+              <a:rPr sz="3300" b="1">
+                <a:solidFill>
+                  <a:srgbClr val="33302B"/>
+                </a:solidFill>
+                <a:latin typeface="微軟正黑體"/>
+                <a:ea typeface="微軟正黑體"/>
+                <a:cs typeface="微軟正黑體"/>
+              </a:rPr>
+              <a:t>前饋削峰 ＋ 安全聯鎖優先於一切</a:t>
+            </a:r>
+          </a:p>
+        </p:txBody>
+      </p:sp>
+      <p:pic>
+        <p:nvPicPr>
+          <p:cNvPr id="5" name="Picture 4" descr="image5.png"/>
+          <p:cNvPicPr>
+            <a:picLocks noChangeAspect="1"/>
+          </p:cNvPicPr>
+          <p:nvPr/>
+        </p:nvPicPr>
+        <p:blipFill>
+          <a:blip r:embed="rId3"/>
+          <a:stretch>
+            <a:fillRect/>
+          </a:stretch>
+        </p:blipFill>
+        <p:spPr>
+          <a:xfrm>
+            <a:off x="1112367" y="1828800"/>
+            <a:ext cx="9966960" cy="3986784"/>
+          </a:xfrm>
+          <a:prstGeom prst="rect">
+            <a:avLst/>
+          </a:prstGeom>
+        </p:spPr>
+      </p:pic>
+      <p:sp>
+        <p:nvSpPr>
+          <p:cNvPr id="6" name="TextBox 5"/>
+          <p:cNvSpPr txBox="1"/>
+          <p:nvPr/>
+        </p:nvSpPr>
+        <p:spPr>
+          <a:xfrm>
+            <a:off x="685800" y="5897880"/>
+            <a:ext cx="10972800" cy="822960"/>
+          </a:xfrm>
+          <a:prstGeom prst="rect">
+            <a:avLst/>
+          </a:prstGeom>
+          <a:noFill/>
+        </p:spPr>
+        <p:txBody>
+          <a:bodyPr wrap="square" anchor="t">
+            <a:spAutoFit/>
+          </a:bodyPr>
+          <a:lstStyle/>
+          <a:p>
+            <a:pPr algn="ctr"/>
+            <a:r>
+              <a:rPr sz="1600" b="0">
+                <a:solidFill>
+                  <a:srgbClr val="33302B"/>
+                </a:solidFill>
+                <a:latin typeface="微軟正黑體"/>
+                <a:ea typeface="微軟正黑體"/>
+                <a:cs typeface="微軟正黑體"/>
+              </a:rPr>
+              <a:t>門檻與實機韌體同步：進高峰＝基線+300ppm・遲滯退場＝基線+200・前饋 θ=120 ppm/min</a:t>
+            </a:r>
+          </a:p>
+          <a:p>
+            <a:pPr algn="ctr"/>
+            <a:r>
+              <a:rPr sz="1400" b="0">
+                <a:solidFill>
+                  <a:srgbClr val="8A8377"/>
+                </a:solidFill>
+                <a:latin typeface="微軟正黑體"/>
+                <a:ea typeface="微軟正黑體"/>
+                <a:cs typeface="微軟正黑體"/>
+              </a:rPr>
+              <a:t>悶燒偵測：CO/CO₂ 比＋爐溫特徵 → 60 秒內全速抽排＋告警（設計目標，將實測檢定）</a:t>
+            </a:r>
+          </a:p>
+        </p:txBody>
+      </p:sp>
+    </p:spTree>
+  </p:cSld>
+  <p:clrMapOvr>
+    <a:masterClrMapping/>
+  </p:clrMapOvr>
+</p:sld>
+</file>
+
+<file path=ppt/slides/slide8.xml><?xml version="1.0" encoding="utf-8"?>
+<p:sld xmlns:a="http://schemas.openxmlformats.org/drawingml/2006/main" xmlns:r="http://schemas.openxmlformats.org/officeDocument/2006/relationships" xmlns:p="http://schemas.openxmlformats.org/presentationml/2006/main">
+  <p:cSld>
+    <p:spTree>
+      <p:nvGrpSpPr>
+        <p:cNvPr id="1" name=""/>
+        <p:cNvGrpSpPr/>
+        <p:nvPr/>
+      </p:nvGrpSpPr>
+      <p:grpSpPr>
+        <a:xfrm>
+          <a:off x="0" y="0"/>
+          <a:ext cx="0" cy="0"/>
+          <a:chOff x="0" y="0"/>
+          <a:chExt cx="0" cy="0"/>
+        </a:xfrm>
+      </p:grpSpPr>
+      <p:pic>
+        <p:nvPicPr>
+          <p:cNvPr id="3" name="圖片 2">
+            <a:extLst>
+              <a:ext uri="{FF2B5EF4-FFF2-40B4-BE49-F238E27FC236}">
+                <a16:creationId xmlns:a16="http://schemas.microsoft.com/office/drawing/2014/main" id="{4E3282F3-9362-E25B-293A-2D1B0B557704}"/>
+              </a:ext>
+            </a:extLst>
+          </p:cNvPr>
+          <p:cNvPicPr>
+            <a:picLocks/>
+          </p:cNvPicPr>
+          <p:nvPr/>
+        </p:nvPicPr>
+        <p:blipFill>
+          <a:blip r:embed="rId2"/>
+          <a:stretch>
+            <a:fillRect/>
+          </a:stretch>
+        </p:blipFill>
+        <p:spPr>
+          <a:xfrm>
+            <a:off x="0" y="0"/>
+            <a:ext cx="12192000" cy="6858000"/>
+          </a:xfrm>
+          <a:prstGeom prst="rect">
+            <a:avLst/>
+          </a:prstGeom>
+        </p:spPr>
+      </p:pic>
+    </p:spTree>
+    <p:extLst>
+      <p:ext uri="{BB962C8B-B14F-4D97-AF65-F5344CB8AC3E}">
+        <p14:creationId xmlns:p14="http://schemas.microsoft.com/office/powerpoint/2010/main" val="3877390508"/>
+      </p:ext>
+    </p:extLst>
+  </p:cSld>
+  <p:clrMapOvr>
+    <a:masterClrMapping/>
+  </p:clrMapOvr>
+</p:sld>
+</file>
+
+<file path=ppt/slides/slide9.xml><?xml version="1.0" encoding="utf-8"?>
+<p:sld xmlns:a="http://schemas.openxmlformats.org/drawingml/2006/main" xmlns:r="http://schemas.openxmlformats.org/officeDocument/2006/relationships" xmlns:p="http://schemas.openxmlformats.org/presentationml/2006/main">
+  <p:cSld>
+    <p:spTree>
+      <p:nvGrpSpPr>
+        <p:cNvPr id="1" name=""/>
+        <p:cNvGrpSpPr/>
+        <p:nvPr/>
+      </p:nvGrpSpPr>
+      <p:grpSpPr>
+        <a:xfrm>
+          <a:off x="0" y="0"/>
+          <a:ext cx="0" cy="0"/>
+          <a:chOff x="0" y="0"/>
+          <a:chExt cx="0" cy="0"/>
+        </a:xfrm>
+      </p:grpSpPr>
+      <p:sp>
+        <p:nvSpPr>
+          <p:cNvPr id="2" name="Rectangle 1"/>
+          <p:cNvSpPr/>
+          <p:nvPr/>
+        </p:nvSpPr>
+        <p:spPr>
+          <a:xfrm>
+            <a:off x="0" y="0"/>
+            <a:ext cx="164592" cy="6858000"/>
+          </a:xfrm>
+          <a:prstGeom prst="rect">
+            <a:avLst/>
+          </a:prstGeom>
+          <a:solidFill>
+            <a:srgbClr val="9E3B2F"/>
+          </a:solidFill>
+          <a:ln>
+            <a:noFill/>
+          </a:ln>
+          <a:effectLst/>
+        </p:spPr>
+        <p:style>
+          <a:lnRef idx="1">
+            <a:schemeClr val="accent1"/>
+          </a:lnRef>
+          <a:fillRef idx="3">
+            <a:schemeClr val="accent1"/>
+          </a:fillRef>
+          <a:effectRef idx="2">
+            <a:schemeClr val="accent1"/>
+          </a:effectRef>
+          <a:fontRef idx="minor">
+            <a:schemeClr val="lt1"/>
+          </a:fontRef>
+        </p:style>
+        <p:txBody>
+          <a:bodyPr rtlCol="0" anchor="ctr"/>
+          <a:lstStyle/>
+          <a:p>
+            <a:pPr algn="ctr"/>
+            <a:endParaRPr/>
+          </a:p>
+        </p:txBody>
+      </p:sp>
+      <p:sp>
+        <p:nvSpPr>
+          <p:cNvPr id="3" name="TextBox 2"/>
+          <p:cNvSpPr txBox="1"/>
+          <p:nvPr/>
+        </p:nvSpPr>
+        <p:spPr>
+          <a:xfrm>
+            <a:off x="502920" y="292608"/>
+            <a:ext cx="10058400" cy="457200"/>
+          </a:xfrm>
+          <a:prstGeom prst="rect">
+            <a:avLst/>
+          </a:prstGeom>
+          <a:noFill/>
+        </p:spPr>
+        <p:txBody>
+          <a:bodyPr wrap="square" anchor="t">
+            <a:spAutoFit/>
+          </a:bodyPr>
+          <a:lstStyle/>
+          <a:p>
+            <a:pPr algn="l"/>
+            <a:r>
+              <a:rPr sz="1500" b="1">
+                <a:solidFill>
+                  <a:srgbClr val="C9A227"/>
+                </a:solidFill>
+                <a:latin typeface="微軟正黑體"/>
+                <a:ea typeface="微軟正黑體"/>
+                <a:cs typeface="微軟正黑體"/>
+              </a:rPr>
+              <a:t>TRACTION｜已經在跑的證據</a:t>
+            </a:r>
+          </a:p>
+        </p:txBody>
+      </p:sp>
+      <p:sp>
+        <p:nvSpPr>
+          <p:cNvPr id="4" name="TextBox 3"/>
+          <p:cNvSpPr txBox="1"/>
+          <p:nvPr/>
+        </p:nvSpPr>
+        <p:spPr>
+          <a:xfrm>
+            <a:off x="502920" y="603504"/>
+            <a:ext cx="11155680" cy="914400"/>
+          </a:xfrm>
+          <a:prstGeom prst="rect">
+            <a:avLst/>
+          </a:prstGeom>
+          <a:noFill/>
+        </p:spPr>
+        <p:txBody>
+          <a:bodyPr wrap="square" anchor="t">
+            <a:spAutoFit/>
+          </a:bodyPr>
+          <a:lstStyle/>
+          <a:p>
+            <a:pPr algn="l"/>
+            <a:r>
+              <a:rPr sz="3300" b="1">
+                <a:solidFill>
+                  <a:srgbClr val="33302B"/>
+                </a:solidFill>
+                <a:latin typeface="微軟正黑體"/>
+                <a:ea typeface="微軟正黑體"/>
+                <a:cs typeface="微軟正黑體"/>
+              </a:rPr>
+              <a:t>不是簡報做得好，是系統真的在跑</a:t>
+            </a:r>
+          </a:p>
+        </p:txBody>
+      </p:sp>
+      <p:sp>
+        <p:nvSpPr>
+          <p:cNvPr id="5" name="Rectangle 4"/>
+          <p:cNvSpPr/>
+          <p:nvPr/>
+        </p:nvSpPr>
+        <p:spPr>
+          <a:xfrm>
+            <a:off x="685800" y="2011680"/>
+            <a:ext cx="3383280" cy="2971800"/>
+          </a:xfrm>
+          <a:prstGeom prst="rect">
+            <a:avLst/>
+          </a:prstGeom>
+          <a:solidFill>
+            <a:srgbClr val="F8F4EC"/>
+          </a:solidFill>
+          <a:ln>
+            <a:noFill/>
+          </a:ln>
+          <a:effectLst/>
+        </p:spPr>
+        <p:style>
+          <a:lnRef idx="1">
+            <a:schemeClr val="accent1"/>
+          </a:lnRef>
+          <a:fillRef idx="3">
+            <a:schemeClr val="accent1"/>
+          </a:fillRef>
+          <a:effectRef idx="2">
+            <a:schemeClr val="accent1"/>
+          </a:effectRef>
+          <a:fontRef idx="minor">
+            <a:schemeClr val="lt1"/>
+          </a:fontRef>
+        </p:style>
+        <p:txBody>
+          <a:bodyPr rtlCol="0" anchor="ctr"/>
+          <a:lstStyle/>
+          <a:p>
+            <a:pPr algn="ctr"/>
+            <a:endParaRPr/>
+          </a:p>
+        </p:txBody>
+      </p:sp>
+      <p:sp>
+        <p:nvSpPr>
+          <p:cNvPr id="6" name="TextBox 5"/>
+          <p:cNvSpPr txBox="1"/>
+          <p:nvPr/>
+        </p:nvSpPr>
+        <p:spPr>
+          <a:xfrm>
+            <a:off x="685800" y="2331720"/>
+            <a:ext cx="3383280" cy="1005840"/>
+          </a:xfrm>
+          <a:prstGeom prst="rect">
+            <a:avLst/>
+          </a:prstGeom>
+          <a:noFill/>
+        </p:spPr>
+        <p:txBody>
+          <a:bodyPr wrap="square" anchor="t">
+            <a:spAutoFit/>
+          </a:bodyPr>
+          <a:lstStyle/>
+          <a:p>
+            <a:pPr algn="ctr"/>
+            <a:r>
+              <a:rPr sz="4200" b="1">
+                <a:solidFill>
+                  <a:srgbClr val="9E3B2F"/>
+                </a:solidFill>
+                <a:latin typeface="微軟正黑體"/>
+                <a:ea typeface="微軟正黑體"/>
+                <a:cs typeface="微軟正黑體"/>
+              </a:rPr>
+              <a:t>2026-08</a:t>
+            </a:r>
+          </a:p>
+        </p:txBody>
+      </p:sp>
+      <p:sp>
+        <p:nvSpPr>
+          <p:cNvPr id="7" name="TextBox 6"/>
+          <p:cNvSpPr txBox="1"/>
+          <p:nvPr/>
+        </p:nvSpPr>
+        <p:spPr>
+          <a:xfrm>
+            <a:off x="914400" y="3520440"/>
+            <a:ext cx="2926080" cy="1371600"/>
+          </a:xfrm>
+          <a:prstGeom prst="rect">
+            <a:avLst/>
+          </a:prstGeom>
+          <a:noFill/>
+        </p:spPr>
+        <p:txBody>
+          <a:bodyPr wrap="square" anchor="t">
+            <a:spAutoFit/>
+          </a:bodyPr>
+          <a:lstStyle/>
+          <a:p>
+            <a:pPr algn="ctr"/>
+            <a:r>
+              <a:rPr sz="1600" b="0">
+                <a:solidFill>
+                  <a:srgbClr val="33302B"/>
+                </a:solidFill>
+                <a:latin typeface="微軟正黑體"/>
+                <a:ea typeface="微軟正黑體"/>
+                <a:cs typeface="微軟正黑體"/>
+              </a:rPr>
+              <a:t>原型實機上線
+熱點自動上雲・斷線補傳
+現場模式演練通過</a:t>
+            </a:r>
+          </a:p>
+        </p:txBody>
+      </p:sp>
+      <p:sp>
+        <p:nvSpPr>
+          <p:cNvPr id="8" name="Rectangle 7"/>
+          <p:cNvSpPr/>
+          <p:nvPr/>
+        </p:nvSpPr>
+        <p:spPr>
+          <a:xfrm>
+            <a:off x="4526280" y="2011680"/>
+            <a:ext cx="3383280" cy="2971800"/>
+          </a:xfrm>
+          <a:prstGeom prst="rect">
+            <a:avLst/>
+          </a:prstGeom>
+          <a:solidFill>
+            <a:srgbClr val="F8F4EC"/>
+          </a:solidFill>
+          <a:ln>
+            <a:noFill/>
+          </a:ln>
+          <a:effectLst/>
+        </p:spPr>
+        <p:style>
+          <a:lnRef idx="1">
+            <a:schemeClr val="accent1"/>
+          </a:lnRef>
+          <a:fillRef idx="3">
+            <a:schemeClr val="accent1"/>
+          </a:fillRef>
+          <a:effectRef idx="2">
+            <a:schemeClr val="accent1"/>
+          </a:effectRef>
+          <a:fontRef idx="minor">
+            <a:schemeClr val="lt1"/>
+          </a:fontRef>
+        </p:style>
+        <p:txBody>
+          <a:bodyPr rtlCol="0" anchor="ctr"/>
+          <a:lstStyle/>
+          <a:p>
+            <a:pPr algn="ctr"/>
+            <a:endParaRPr/>
+          </a:p>
+        </p:txBody>
+      </p:sp>
+      <p:sp>
+        <p:nvSpPr>
+          <p:cNvPr id="9" name="TextBox 8"/>
+          <p:cNvSpPr txBox="1"/>
+          <p:nvPr/>
+        </p:nvSpPr>
+        <p:spPr>
+          <a:xfrm>
+            <a:off x="4526280" y="2331720"/>
+            <a:ext cx="3383280" cy="1005840"/>
+          </a:xfrm>
+          <a:prstGeom prst="rect">
+            <a:avLst/>
+          </a:prstGeom>
+          <a:noFill/>
+        </p:spPr>
+        <p:txBody>
+          <a:bodyPr wrap="square" anchor="t">
+            <a:spAutoFit/>
+          </a:bodyPr>
+          <a:lstStyle/>
+          <a:p>
+            <a:pPr algn="ctr"/>
+            <a:r>
+              <a:rPr sz="4200" b="1">
+                <a:solidFill>
+                  <a:srgbClr val="9E3B2F"/>
+                </a:solidFill>
+                <a:latin typeface="微軟正黑體"/>
+                <a:ea typeface="微軟正黑體"/>
+                <a:cs typeface="微軟正黑體"/>
+              </a:rPr>
+              <a:t>12 項</a:t>
+            </a:r>
+          </a:p>
+        </p:txBody>
+      </p:sp>
+      <p:sp>
+        <p:nvSpPr>
+          <p:cNvPr id="10" name="TextBox 9"/>
+          <p:cNvSpPr txBox="1"/>
+          <p:nvPr/>
+        </p:nvSpPr>
+        <p:spPr>
+          <a:xfrm>
+            <a:off x="4754880" y="3520440"/>
+            <a:ext cx="2926080" cy="1371600"/>
+          </a:xfrm>
+          <a:prstGeom prst="rect">
+            <a:avLst/>
+          </a:prstGeom>
+          <a:noFill/>
+        </p:spPr>
+        <p:txBody>
+          <a:bodyPr wrap="square" anchor="t">
+            <a:spAutoFit/>
+          </a:bodyPr>
+          <a:lstStyle/>
+          <a:p>
+            <a:pPr algn="ctr"/>
+            <a:r>
+              <a:rPr sz="1600" b="0">
+                <a:solidFill>
+                  <a:srgbClr val="33302B"/>
+                </a:solidFill>
+                <a:latin typeface="微軟正黑體"/>
+                <a:ea typeface="微軟正黑體"/>
+                <a:cs typeface="微軟正黑體"/>
+              </a:rPr>
+              <a:t>雲端中心站驗收全過
+免帳密公開儀表板 ×3
+評審隨時可看</a:t>
+            </a:r>
+          </a:p>
+        </p:txBody>
+      </p:sp>
+      <p:sp>
+        <p:nvSpPr>
+          <p:cNvPr id="11" name="Rectangle 10"/>
+          <p:cNvSpPr/>
+          <p:nvPr/>
+        </p:nvSpPr>
+        <p:spPr>
+          <a:xfrm>
+            <a:off x="8366760" y="2011680"/>
+            <a:ext cx="3383280" cy="2971800"/>
+          </a:xfrm>
+          <a:prstGeom prst="rect">
+            <a:avLst/>
+          </a:prstGeom>
+          <a:solidFill>
+            <a:srgbClr val="F8F4EC"/>
+          </a:solidFill>
+          <a:ln>
+            <a:noFill/>
+          </a:ln>
+          <a:effectLst/>
+        </p:spPr>
+        <p:style>
+          <a:lnRef idx="1">
+            <a:schemeClr val="accent1"/>
+          </a:lnRef>
+          <a:fillRef idx="3">
+            <a:schemeClr val="accent1"/>
+          </a:fillRef>
+          <a:effectRef idx="2">
+            <a:schemeClr val="accent1"/>
+          </a:effectRef>
+          <a:fontRef idx="minor">
+            <a:schemeClr val="lt1"/>
+          </a:fontRef>
+        </p:style>
+        <p:txBody>
+          <a:bodyPr rtlCol="0" anchor="ctr"/>
+          <a:lstStyle/>
+          <a:p>
+            <a:pPr algn="ctr"/>
+            <a:endParaRPr/>
+          </a:p>
+        </p:txBody>
+      </p:sp>
+      <p:sp>
+        <p:nvSpPr>
+          <p:cNvPr id="12" name="TextBox 11"/>
+          <p:cNvSpPr txBox="1"/>
+          <p:nvPr/>
+        </p:nvSpPr>
+        <p:spPr>
+          <a:xfrm>
+            <a:off x="8366760" y="2331720"/>
+            <a:ext cx="3383280" cy="1005840"/>
+          </a:xfrm>
+          <a:prstGeom prst="rect">
+            <a:avLst/>
+          </a:prstGeom>
+          <a:noFill/>
+        </p:spPr>
+        <p:txBody>
+          <a:bodyPr wrap="square" anchor="t">
+            <a:spAutoFit/>
+          </a:bodyPr>
+          <a:lstStyle/>
+          <a:p>
+            <a:pPr algn="ctr"/>
+            <a:r>
+              <a:rPr sz="4200" b="1">
+                <a:solidFill>
+                  <a:srgbClr val="9E3B2F"/>
+                </a:solidFill>
+                <a:latin typeface="微軟正黑體"/>
+                <a:ea typeface="微軟正黑體"/>
+                <a:cs typeface="微軟正黑體"/>
+              </a:rPr>
+              <a:t>29 條</a:t>
+            </a:r>
+          </a:p>
+        </p:txBody>
+      </p:sp>
+      <p:sp>
+        <p:nvSpPr>
+          <p:cNvPr id="13" name="TextBox 12"/>
+          <p:cNvSpPr txBox="1"/>
+          <p:nvPr/>
+        </p:nvSpPr>
+        <p:spPr>
+          <a:xfrm>
+            <a:off x="8595360" y="3520440"/>
+            <a:ext cx="2926080" cy="1371600"/>
+          </a:xfrm>
+          <a:prstGeom prst="rect">
+            <a:avLst/>
+          </a:prstGeom>
+          <a:noFill/>
+        </p:spPr>
+        <p:txBody>
+          <a:bodyPr wrap="square" anchor="t">
+            <a:spAutoFit/>
+          </a:bodyPr>
+          <a:lstStyle/>
+          <a:p>
+            <a:pPr algn="ctr"/>
+            <a:r>
+              <a:rPr sz="1600" b="0">
+                <a:solidFill>
+                  <a:srgbClr val="33302B"/>
+                </a:solidFill>
+                <a:latin typeface="微軟正黑體"/>
+                <a:ea typeface="微軟正黑體"/>
+                <a:cs typeface="微軟正黑體"/>
+              </a:rPr>
+              <a:t>自動化設計規則
+機構/電路/韌體/雲端
+跨層自檢・改一處全鏈重驗</a:t>
+            </a:r>
+          </a:p>
+        </p:txBody>
+      </p:sp>
+      <p:pic>
+        <p:nvPicPr>
+          <p:cNvPr id="14" name="Picture 13" descr="qr_fleet.png"/>
+          <p:cNvPicPr>
+            <a:picLocks noChangeAspect="1"/>
+          </p:cNvPicPr>
+          <p:nvPr/>
+        </p:nvPicPr>
+        <p:blipFill>
+          <a:blip r:embed="rId3"/>
+          <a:stretch>
+            <a:fillRect/>
+          </a:stretch>
+        </p:blipFill>
+        <p:spPr>
+          <a:xfrm>
+            <a:off x="868680" y="5230368"/>
+            <a:ext cx="1371600" cy="1371600"/>
+          </a:xfrm>
+          <a:prstGeom prst="rect">
+            <a:avLst/>
+          </a:prstGeom>
+        </p:spPr>
+      </p:pic>
+      <p:sp>
+        <p:nvSpPr>
+          <p:cNvPr id="15" name="TextBox 14"/>
+          <p:cNvSpPr txBox="1"/>
+          <p:nvPr/>
+        </p:nvSpPr>
+        <p:spPr>
+          <a:xfrm>
+            <a:off x="2468880" y="5468112"/>
+            <a:ext cx="9052560" cy="1005840"/>
+          </a:xfrm>
+          <a:prstGeom prst="rect">
+            <a:avLst/>
+          </a:prstGeom>
+          <a:noFill/>
+        </p:spPr>
+        <p:txBody>
+          <a:bodyPr wrap="square" anchor="t">
+            <a:spAutoFit/>
+          </a:bodyPr>
+          <a:lstStyle/>
+          <a:p>
+            <a:pPr algn="l"/>
+            <a:r>
+              <a:rPr sz="2200" b="1">
+                <a:solidFill>
+                  <a:srgbClr val="33302B"/>
+                </a:solidFill>
+                <a:latin typeface="微軟正黑體"/>
+                <a:ea typeface="微軟正黑體"/>
+                <a:cs typeface="微軟正黑體"/>
+              </a:rPr>
+              <a:t>掃碼即看：機隊即時面板（公開唯讀・免帳密）</a:t>
+            </a:r>
+          </a:p>
+          <a:p>
+            <a:pPr algn="l"/>
+            <a:r>
+              <a:rPr sz="1500" b="0">
+                <a:solidFill>
+                  <a:srgbClr val="8A8377"/>
+                </a:solidFill>
+                <a:latin typeface="微軟正黑體"/>
+                <a:ea typeface="微軟正黑體"/>
+                <a:cs typeface="微軟正黑體"/>
+              </a:rPr>
+              <a:t>程式碼與資料集開放，結論可重現——每一項都能當場驗證</a:t>
+            </a:r>
+          </a:p>
+        </p:txBody>
+      </p:sp>
+    </p:spTree>
   </p:cSld>
   <p:clrMapOvr>
     <a:masterClrMapping/>
